--- a/a7/build/out/u4/A7 4.07 Real-World Order of Operations - Slides.pptx
+++ b/a7/build/out/u4/A7 4.07 Real-World Order of Operations - Slides.pptx
@@ -3129,7 +3129,7 @@
         </p:nvSpPr>
         <p:spPr>
           <a:xfrm>
-            <a:off x="777240" y="1691640"/>
+            <a:off x="777240" y="2148840"/>
             <a:ext cx="10607040" cy="347472"/>
           </a:xfrm>
           <a:prstGeom prst="rect">
@@ -3164,7 +3164,7 @@
         </p:nvSpPr>
         <p:spPr>
           <a:xfrm>
-            <a:off x="777240" y="2048256"/>
+            <a:off x="777240" y="2505456"/>
             <a:ext cx="10607040" cy="1005840"/>
           </a:xfrm>
           <a:prstGeom prst="rect">
@@ -3199,7 +3199,7 @@
         </p:nvCxnSpPr>
         <p:spPr>
           <a:xfrm>
-            <a:off x="3291840" y="3255264"/>
+            <a:off x="3291840" y="3712464"/>
             <a:ext cx="5577840" cy="0"/>
           </a:xfrm>
           <a:prstGeom prst="line">
@@ -3234,7 +3234,7 @@
         </p:nvCxnSpPr>
         <p:spPr>
           <a:xfrm>
-            <a:off x="3291840" y="3337560"/>
+            <a:off x="3291840" y="3794760"/>
             <a:ext cx="5577840" cy="0"/>
           </a:xfrm>
           <a:prstGeom prst="line">
@@ -3269,7 +3269,7 @@
         </p:nvSpPr>
         <p:spPr>
           <a:xfrm>
-            <a:off x="777240" y="3502152"/>
+            <a:off x="777240" y="3959352"/>
             <a:ext cx="10607040" cy="310896"/>
           </a:xfrm>
           <a:prstGeom prst="rect">
@@ -3304,7 +3304,7 @@
         </p:nvSpPr>
         <p:spPr>
           <a:xfrm>
-            <a:off x="777240" y="3840480"/>
+            <a:off x="777240" y="4297680"/>
             <a:ext cx="10607040" cy="731520"/>
           </a:xfrm>
           <a:prstGeom prst="rect">
@@ -3327,129 +3327,13 @@
                 <a:latin typeface="Century Schoolbook"/>
               </a:rPr>
               <a:t>I can substitute values into a formula and evaluate it, reading what the situation does rather than hunting for key words.</a:t>
-            </a:r>
-          </a:p>
-        </p:txBody>
-      </p:sp>
-      <p:sp>
-        <p:nvSpPr>
-          <p:cNvPr id="8" name="Rectangle 7"/>
-          <p:cNvSpPr/>
-          <p:nvPr/>
-        </p:nvSpPr>
-        <p:spPr>
-          <a:xfrm>
-            <a:off x="2377440" y="4736592"/>
-            <a:ext cx="7406640" cy="1051560"/>
-          </a:xfrm>
-          <a:prstGeom prst="rect">
-            <a:avLst/>
-          </a:prstGeom>
-          <a:solidFill>
-            <a:srgbClr val="F2F2F0"/>
-          </a:solidFill>
-          <a:ln w="9525">
-            <a:solidFill>
-              <a:srgbClr val="BFBFBF"/>
-            </a:solidFill>
-          </a:ln>
-          <a:effectLst/>
-        </p:spPr>
-        <p:style>
-          <a:lnRef idx="1">
-            <a:schemeClr val="accent1"/>
-          </a:lnRef>
-          <a:fillRef idx="3">
-            <a:schemeClr val="accent1"/>
-          </a:fillRef>
-          <a:effectRef idx="2">
-            <a:schemeClr val="accent1"/>
-          </a:effectRef>
-          <a:fontRef idx="minor">
-            <a:schemeClr val="lt1"/>
-          </a:fontRef>
-        </p:style>
-        <p:txBody>
-          <a:bodyPr rtlCol="0" anchor="ctr"/>
-          <a:lstStyle/>
-          <a:p>
-            <a:pPr algn="ctr"/>
-          </a:p>
-        </p:txBody>
-      </p:sp>
-      <p:sp>
-        <p:nvSpPr>
-          <p:cNvPr id="9" name="TextBox 8"/>
-          <p:cNvSpPr txBox="1"/>
-          <p:nvPr/>
-        </p:nvSpPr>
-        <p:spPr>
-          <a:xfrm>
-            <a:off x="2606040" y="4892040"/>
-            <a:ext cx="6949440" cy="365760"/>
-          </a:xfrm>
-          <a:prstGeom prst="rect">
-            <a:avLst/>
-          </a:prstGeom>
-          <a:noFill/>
-        </p:spPr>
-        <p:txBody>
-          <a:bodyPr wrap="square" lIns="45720" rIns="45720" tIns="18288" bIns="18288" anchor="t">
-            <a:spAutoFit/>
-          </a:bodyPr>
-          <a:lstStyle/>
-          <a:p>
-            <a:pPr algn="ctr"/>
-            <a:r>
-              <a:rPr sz="1700" b="0" i="1">
-                <a:solidFill>
-                  <a:srgbClr val="6B6B6B"/>
-                </a:solidFill>
-                <a:latin typeface="Century Schoolbook"/>
-              </a:rPr>
-              <a:t>Yesterday you read an expression's structure.</a:t>
-            </a:r>
-          </a:p>
-        </p:txBody>
-      </p:sp>
-      <p:sp>
-        <p:nvSpPr>
-          <p:cNvPr id="10" name="TextBox 9"/>
-          <p:cNvSpPr txBox="1"/>
-          <p:nvPr/>
-        </p:nvSpPr>
-        <p:spPr>
-          <a:xfrm>
-            <a:off x="2606040" y="5276088"/>
-            <a:ext cx="6949440" cy="365760"/>
-          </a:xfrm>
-          <a:prstGeom prst="rect">
-            <a:avLst/>
-          </a:prstGeom>
-          <a:noFill/>
-        </p:spPr>
-        <p:txBody>
-          <a:bodyPr wrap="square" lIns="45720" rIns="45720" tIns="18288" bIns="18288" anchor="t">
-            <a:spAutoFit/>
-          </a:bodyPr>
-          <a:lstStyle/>
-          <a:p>
-            <a:pPr algn="ctr"/>
-            <a:r>
-              <a:rPr sz="1700" b="1" i="0">
-                <a:solidFill>
-                  <a:srgbClr val="1A1A1A"/>
-                </a:solidFill>
-                <a:latin typeface="Century Schoolbook"/>
-              </a:rPr>
-              <a:t>Today the expression is in a sentence — not in key words.</a:t>
             </a:r>
           </a:p>
         </p:txBody>
       </p:sp>
       <p:cxnSp>
         <p:nvCxnSpPr>
-          <p:cNvPr id="11" name="Connector 10"/>
+          <p:cNvPr id="8" name="Connector 7"/>
           <p:cNvCxnSpPr/>
           <p:nvPr/>
         </p:nvCxnSpPr>
@@ -3484,7 +3368,7 @@
       </p:cxnSp>
       <p:sp>
         <p:nvSpPr>
-          <p:cNvPr id="12" name="TextBox 11"/>
+          <p:cNvPr id="9" name="TextBox 8"/>
           <p:cNvSpPr txBox="1"/>
           <p:nvPr/>
         </p:nvSpPr>
@@ -3519,7 +3403,7 @@
       </p:sp>
       <p:sp>
         <p:nvSpPr>
-          <p:cNvPr id="13" name="TextBox 12"/>
+          <p:cNvPr id="10" name="TextBox 9"/>
           <p:cNvSpPr txBox="1"/>
           <p:nvPr/>
         </p:nvSpPr>
@@ -3675,44 +3559,9 @@
           </a:fontRef>
         </p:style>
       </p:cxnSp>
-      <p:sp>
-        <p:nvSpPr>
-          <p:cNvPr id="5" name="TextBox 4"/>
-          <p:cNvSpPr txBox="1"/>
-          <p:nvPr/>
-        </p:nvSpPr>
-        <p:spPr>
-          <a:xfrm>
-            <a:off x="777240" y="1261872"/>
-            <a:ext cx="10607040" cy="310896"/>
-          </a:xfrm>
-          <a:prstGeom prst="rect">
-            <a:avLst/>
-          </a:prstGeom>
-          <a:noFill/>
-        </p:spPr>
-        <p:txBody>
-          <a:bodyPr wrap="square" lIns="45720" rIns="45720" tIns="18288" bIns="18288" anchor="t">
-            <a:spAutoFit/>
-          </a:bodyPr>
-          <a:lstStyle/>
-          <a:p>
-            <a:pPr algn="l"/>
-            <a:r>
-              <a:rPr sz="1700" b="0" i="1">
-                <a:solidFill>
-                  <a:srgbClr val="6B6B6B"/>
-                </a:solidFill>
-                <a:latin typeface="Century Schoolbook"/>
-              </a:rPr>
-              <a:t>Answer.</a:t>
-            </a:r>
-          </a:p>
-        </p:txBody>
-      </p:sp>
       <p:cxnSp>
         <p:nvCxnSpPr>
-          <p:cNvPr id="6" name="Connector 5"/>
+          <p:cNvPr id="5" name="Connector 4"/>
           <p:cNvCxnSpPr/>
           <p:nvPr/>
         </p:nvCxnSpPr>
@@ -3747,7 +3596,7 @@
       </p:cxnSp>
       <p:sp>
         <p:nvSpPr>
-          <p:cNvPr id="7" name="TextBox 6"/>
+          <p:cNvPr id="6" name="TextBox 5"/>
           <p:cNvSpPr txBox="1"/>
           <p:nvPr/>
         </p:nvSpPr>
@@ -3782,7 +3631,7 @@
       </p:sp>
       <p:sp>
         <p:nvSpPr>
-          <p:cNvPr id="8" name="TextBox 7"/>
+          <p:cNvPr id="7" name="TextBox 6"/>
           <p:cNvSpPr txBox="1"/>
           <p:nvPr/>
         </p:nvSpPr>
@@ -3817,7 +3666,7 @@
       </p:sp>
       <p:sp>
         <p:nvSpPr>
-          <p:cNvPr id="9" name="TextBox 8"/>
+          <p:cNvPr id="8" name="TextBox 7"/>
           <p:cNvSpPr txBox="1"/>
           <p:nvPr/>
         </p:nvSpPr>
@@ -3852,7 +3701,7 @@
       </p:sp>
       <p:pic>
         <p:nvPicPr>
-          <p:cNvPr id="10" name="Picture 9" descr="ccc487dd163a747b.png"/>
+          <p:cNvPr id="9" name="Picture 8" descr="ccc487dd163a747b.png"/>
           <p:cNvPicPr>
             <a:picLocks noChangeAspect="1"/>
           </p:cNvPicPr>
@@ -3876,7 +3725,7 @@
       </p:pic>
       <p:sp>
         <p:nvSpPr>
-          <p:cNvPr id="11" name="TextBox 10"/>
+          <p:cNvPr id="10" name="TextBox 9"/>
           <p:cNvSpPr txBox="1"/>
           <p:nvPr/>
         </p:nvSpPr>
@@ -3911,7 +3760,7 @@
       </p:sp>
       <p:pic>
         <p:nvPicPr>
-          <p:cNvPr id="12" name="Picture 11" descr="5bea3106422a0737.png"/>
+          <p:cNvPr id="11" name="Picture 10" descr="5bea3106422a0737.png"/>
           <p:cNvPicPr>
             <a:picLocks noChangeAspect="1"/>
           </p:cNvPicPr>
@@ -3935,7 +3784,7 @@
       </p:pic>
       <p:sp>
         <p:nvSpPr>
-          <p:cNvPr id="13" name="TextBox 12"/>
+          <p:cNvPr id="12" name="TextBox 11"/>
           <p:cNvSpPr txBox="1"/>
           <p:nvPr/>
         </p:nvSpPr>
@@ -3970,7 +3819,7 @@
       </p:sp>
       <p:pic>
         <p:nvPicPr>
-          <p:cNvPr id="14" name="Picture 13" descr="412fe3e32d9c1550.png"/>
+          <p:cNvPr id="13" name="Picture 12" descr="412fe3e32d9c1550.png"/>
           <p:cNvPicPr>
             <a:picLocks noChangeAspect="1"/>
           </p:cNvPicPr>
@@ -3994,7 +3843,7 @@
       </p:pic>
       <p:sp>
         <p:nvSpPr>
-          <p:cNvPr id="15" name="TextBox 14"/>
+          <p:cNvPr id="14" name="TextBox 13"/>
           <p:cNvSpPr txBox="1"/>
           <p:nvPr/>
         </p:nvSpPr>
@@ -4029,42 +3878,7 @@
       </p:sp>
       <p:sp>
         <p:nvSpPr>
-          <p:cNvPr id="16" name="TextBox 15"/>
-          <p:cNvSpPr txBox="1"/>
-          <p:nvPr/>
-        </p:nvSpPr>
-        <p:spPr>
-          <a:xfrm>
-            <a:off x="777240" y="3364992"/>
-            <a:ext cx="10607040" cy="429370"/>
-          </a:xfrm>
-          <a:prstGeom prst="rect">
-            <a:avLst/>
-          </a:prstGeom>
-          <a:noFill/>
-        </p:spPr>
-        <p:txBody>
-          <a:bodyPr wrap="square" lIns="45720" rIns="45720" tIns="18288" bIns="18288" anchor="t">
-            <a:spAutoFit/>
-          </a:bodyPr>
-          <a:lstStyle/>
-          <a:p>
-            <a:pPr algn="ctr"/>
-            <a:r>
-              <a:rPr sz="2400" b="0" i="0">
-                <a:solidFill>
-                  <a:srgbClr val="6B6B6B"/>
-                </a:solidFill>
-                <a:latin typeface="Century Schoolbook"/>
-              </a:rPr>
-              <a:t>425 times 144</a:t>
-            </a:r>
-          </a:p>
-        </p:txBody>
-      </p:sp>
-      <p:sp>
-        <p:nvSpPr>
-          <p:cNvPr id="17" name="TextBox 16"/>
+          <p:cNvPr id="15" name="TextBox 14"/>
           <p:cNvSpPr txBox="1"/>
           <p:nvPr/>
         </p:nvSpPr>
@@ -4220,44 +4034,9 @@
           </a:fontRef>
         </p:style>
       </p:cxnSp>
-      <p:sp>
-        <p:nvSpPr>
-          <p:cNvPr id="5" name="TextBox 4"/>
-          <p:cNvSpPr txBox="1"/>
-          <p:nvPr/>
-        </p:nvSpPr>
-        <p:spPr>
-          <a:xfrm>
-            <a:off x="777240" y="1261872"/>
-            <a:ext cx="10607040" cy="310896"/>
-          </a:xfrm>
-          <a:prstGeom prst="rect">
-            <a:avLst/>
-          </a:prstGeom>
-          <a:noFill/>
-        </p:spPr>
-        <p:txBody>
-          <a:bodyPr wrap="square" lIns="45720" rIns="45720" tIns="18288" bIns="18288" anchor="t">
-            <a:spAutoFit/>
-          </a:bodyPr>
-          <a:lstStyle/>
-          <a:p>
-            <a:pPr algn="l"/>
-            <a:r>
-              <a:rPr sz="1700" b="0" i="1">
-                <a:solidFill>
-                  <a:srgbClr val="6B6B6B"/>
-                </a:solidFill>
-                <a:latin typeface="Century Schoolbook"/>
-              </a:rPr>
-              <a:t>A cost with a rate and a flat fee.</a:t>
-            </a:r>
-          </a:p>
-        </p:txBody>
-      </p:sp>
       <p:cxnSp>
         <p:nvCxnSpPr>
-          <p:cNvPr id="6" name="Connector 5"/>
+          <p:cNvPr id="5" name="Connector 4"/>
           <p:cNvCxnSpPr/>
           <p:nvPr/>
         </p:nvCxnSpPr>
@@ -4292,7 +4071,7 @@
       </p:cxnSp>
       <p:sp>
         <p:nvSpPr>
-          <p:cNvPr id="7" name="TextBox 6"/>
+          <p:cNvPr id="6" name="TextBox 5"/>
           <p:cNvSpPr txBox="1"/>
           <p:nvPr/>
         </p:nvSpPr>
@@ -4327,7 +4106,7 @@
       </p:sp>
       <p:sp>
         <p:nvSpPr>
-          <p:cNvPr id="8" name="TextBox 7"/>
+          <p:cNvPr id="7" name="TextBox 6"/>
           <p:cNvSpPr txBox="1"/>
           <p:nvPr/>
         </p:nvSpPr>
@@ -4362,14 +4141,49 @@
       </p:sp>
       <p:sp>
         <p:nvSpPr>
+          <p:cNvPr id="8" name="TextBox 7"/>
+          <p:cNvSpPr txBox="1"/>
+          <p:nvPr/>
+        </p:nvSpPr>
+        <p:spPr>
+          <a:xfrm>
+            <a:off x="777240" y="1737360"/>
+            <a:ext cx="10607040" cy="429370"/>
+          </a:xfrm>
+          <a:prstGeom prst="rect">
+            <a:avLst/>
+          </a:prstGeom>
+          <a:noFill/>
+        </p:spPr>
+        <p:txBody>
+          <a:bodyPr wrap="square" lIns="45720" rIns="45720" tIns="18288" bIns="18288" anchor="t">
+            <a:spAutoFit/>
+          </a:bodyPr>
+          <a:lstStyle/>
+          <a:p>
+            <a:pPr algn="ctr"/>
+            <a:r>
+              <a:rPr sz="2400" b="0" i="0">
+                <a:solidFill>
+                  <a:srgbClr val="1A1A1A"/>
+                </a:solidFill>
+                <a:latin typeface="Century Schoolbook"/>
+              </a:rPr>
+              <a:t>A square floor of side 9 feet is carpeted.</a:t>
+            </a:r>
+          </a:p>
+        </p:txBody>
+      </p:sp>
+      <p:sp>
+        <p:nvSpPr>
           <p:cNvPr id="9" name="TextBox 8"/>
           <p:cNvSpPr txBox="1"/>
           <p:nvPr/>
         </p:nvSpPr>
         <p:spPr>
           <a:xfrm>
-            <a:off x="777240" y="2103120"/>
-            <a:ext cx="10607040" cy="429370"/>
+            <a:off x="777240" y="2276458"/>
+            <a:ext cx="10607040" cy="858740"/>
           </a:xfrm>
           <a:prstGeom prst="rect">
             <a:avLst/>
@@ -4390,7 +4204,7 @@
                 </a:solidFill>
                 <a:latin typeface="Century Schoolbook"/>
               </a:rPr>
-              <a:t>A square floor of side 9 feet is carpeted.</a:t>
+              <a:t>Carpet is 2.89 dollars a square foot and padding is 0.75 dollars a square foot.</a:t>
             </a:r>
           </a:p>
         </p:txBody>
@@ -4403,42 +4217,7 @@
         </p:nvSpPr>
         <p:spPr>
           <a:xfrm>
-            <a:off x="777240" y="2642218"/>
-            <a:ext cx="10607040" cy="858740"/>
-          </a:xfrm>
-          <a:prstGeom prst="rect">
-            <a:avLst/>
-          </a:prstGeom>
-          <a:noFill/>
-        </p:spPr>
-        <p:txBody>
-          <a:bodyPr wrap="square" lIns="45720" rIns="45720" tIns="18288" bIns="18288" anchor="t">
-            <a:spAutoFit/>
-          </a:bodyPr>
-          <a:lstStyle/>
-          <a:p>
-            <a:pPr algn="ctr"/>
-            <a:r>
-              <a:rPr sz="2400" b="0" i="0">
-                <a:solidFill>
-                  <a:srgbClr val="1A1A1A"/>
-                </a:solidFill>
-                <a:latin typeface="Century Schoolbook"/>
-              </a:rPr>
-              <a:t>Carpet is 2.89 dollars a square foot and padding is 0.75 dollars a square foot.</a:t>
-            </a:r>
-          </a:p>
-        </p:txBody>
-      </p:sp>
-      <p:sp>
-        <p:nvSpPr>
-          <p:cNvPr id="11" name="TextBox 10"/>
-          <p:cNvSpPr txBox="1"/>
-          <p:nvPr/>
-        </p:nvSpPr>
-        <p:spPr>
-          <a:xfrm>
-            <a:off x="777240" y="3610687"/>
+            <a:off x="777240" y="3244927"/>
             <a:ext cx="10607040" cy="429370"/>
           </a:xfrm>
           <a:prstGeom prst="rect">
@@ -4588,44 +4367,9 @@
           </a:fontRef>
         </p:style>
       </p:cxnSp>
-      <p:sp>
-        <p:nvSpPr>
-          <p:cNvPr id="5" name="TextBox 4"/>
-          <p:cNvSpPr txBox="1"/>
-          <p:nvPr/>
-        </p:nvSpPr>
-        <p:spPr>
-          <a:xfrm>
-            <a:off x="777240" y="1261872"/>
-            <a:ext cx="10607040" cy="310896"/>
-          </a:xfrm>
-          <a:prstGeom prst="rect">
-            <a:avLst/>
-          </a:prstGeom>
-          <a:noFill/>
-        </p:spPr>
-        <p:txBody>
-          <a:bodyPr wrap="square" lIns="45720" rIns="45720" tIns="18288" bIns="18288" anchor="t">
-            <a:spAutoFit/>
-          </a:bodyPr>
-          <a:lstStyle/>
-          <a:p>
-            <a:pPr algn="l"/>
-            <a:r>
-              <a:rPr sz="1700" b="0" i="1">
-                <a:solidFill>
-                  <a:srgbClr val="6B6B6B"/>
-                </a:solidFill>
-                <a:latin typeface="Century Schoolbook"/>
-              </a:rPr>
-              <a:t>Worked.</a:t>
-            </a:r>
-          </a:p>
-        </p:txBody>
-      </p:sp>
       <p:cxnSp>
         <p:nvCxnSpPr>
-          <p:cNvPr id="6" name="Connector 5"/>
+          <p:cNvPr id="5" name="Connector 4"/>
           <p:cNvCxnSpPr/>
           <p:nvPr/>
         </p:nvCxnSpPr>
@@ -4660,7 +4404,7 @@
       </p:cxnSp>
       <p:sp>
         <p:nvSpPr>
-          <p:cNvPr id="7" name="TextBox 6"/>
+          <p:cNvPr id="6" name="TextBox 5"/>
           <p:cNvSpPr txBox="1"/>
           <p:nvPr/>
         </p:nvSpPr>
@@ -4695,7 +4439,7 @@
       </p:sp>
       <p:sp>
         <p:nvSpPr>
-          <p:cNvPr id="8" name="TextBox 7"/>
+          <p:cNvPr id="7" name="TextBox 6"/>
           <p:cNvSpPr txBox="1"/>
           <p:nvPr/>
         </p:nvSpPr>
@@ -4730,7 +4474,7 @@
       </p:sp>
       <p:pic>
         <p:nvPicPr>
-          <p:cNvPr id="9" name="Picture 8" descr="88a80bd66be46d3a.png"/>
+          <p:cNvPr id="8" name="Picture 7" descr="88a80bd66be46d3a.png"/>
           <p:cNvPicPr>
             <a:picLocks noChangeAspect="1"/>
           </p:cNvPicPr>
@@ -4752,44 +4496,9 @@
           </a:prstGeom>
         </p:spPr>
       </p:pic>
-      <p:sp>
-        <p:nvSpPr>
-          <p:cNvPr id="10" name="TextBox 9"/>
-          <p:cNvSpPr txBox="1"/>
-          <p:nvPr/>
-        </p:nvSpPr>
-        <p:spPr>
-          <a:xfrm>
-            <a:off x="5513831" y="1894332"/>
-            <a:ext cx="5870448" cy="502920"/>
-          </a:xfrm>
-          <a:prstGeom prst="rect">
-            <a:avLst/>
-          </a:prstGeom>
-          <a:noFill/>
-        </p:spPr>
-        <p:txBody>
-          <a:bodyPr wrap="square" lIns="45720" rIns="45720" tIns="18288" bIns="18288" anchor="ctr">
-            <a:spAutoFit/>
-          </a:bodyPr>
-          <a:lstStyle/>
-          <a:p>
-            <a:pPr algn="l"/>
-            <a:r>
-              <a:rPr sz="2100" b="0" i="1">
-                <a:solidFill>
-                  <a:srgbClr val="6B6B6B"/>
-                </a:solidFill>
-                <a:latin typeface="Century Schoolbook"/>
-              </a:rPr>
-              <a:t>area times the per-square-foot prices, then the flat fee</a:t>
-            </a:r>
-          </a:p>
-        </p:txBody>
-      </p:sp>
       <p:pic>
         <p:nvPicPr>
-          <p:cNvPr id="11" name="Picture 10" descr="01bf3bc2e6345cc3.png"/>
+          <p:cNvPr id="9" name="Picture 8" descr="01bf3bc2e6345cc3.png"/>
           <p:cNvPicPr>
             <a:picLocks noChangeAspect="1"/>
           </p:cNvPicPr>
@@ -4811,44 +4520,9 @@
           </a:prstGeom>
         </p:spPr>
       </p:pic>
-      <p:sp>
-        <p:nvSpPr>
-          <p:cNvPr id="12" name="TextBox 11"/>
-          <p:cNvSpPr txBox="1"/>
-          <p:nvPr/>
-        </p:nvSpPr>
-        <p:spPr>
-          <a:xfrm>
-            <a:off x="4770120" y="2546604"/>
-            <a:ext cx="6400800" cy="502920"/>
-          </a:xfrm>
-          <a:prstGeom prst="rect">
-            <a:avLst/>
-          </a:prstGeom>
-          <a:noFill/>
-        </p:spPr>
-        <p:txBody>
-          <a:bodyPr wrap="square" lIns="45720" rIns="45720" tIns="18288" bIns="18288" anchor="ctr">
-            <a:spAutoFit/>
-          </a:bodyPr>
-          <a:lstStyle/>
-          <a:p>
-            <a:pPr algn="l"/>
-            <a:r>
-              <a:rPr sz="2100" b="0" i="1">
-                <a:solidFill>
-                  <a:srgbClr val="6B6B6B"/>
-                </a:solidFill>
-                <a:latin typeface="Century Schoolbook"/>
-              </a:rPr>
-              <a:t>the area and the rate, each finished</a:t>
-            </a:r>
-          </a:p>
-        </p:txBody>
-      </p:sp>
       <p:pic>
         <p:nvPicPr>
-          <p:cNvPr id="13" name="Picture 12" descr="6a57c082688f8b88.png"/>
+          <p:cNvPr id="10" name="Picture 9" descr="6a57c082688f8b88.png"/>
           <p:cNvPicPr>
             <a:picLocks noChangeAspect="1"/>
           </p:cNvPicPr>
@@ -4872,42 +4546,7 @@
       </p:pic>
       <p:sp>
         <p:nvSpPr>
-          <p:cNvPr id="14" name="TextBox 13"/>
-          <p:cNvSpPr txBox="1"/>
-          <p:nvPr/>
-        </p:nvSpPr>
-        <p:spPr>
-          <a:xfrm>
-            <a:off x="6031992" y="3142488"/>
-            <a:ext cx="5352287" cy="502920"/>
-          </a:xfrm>
-          <a:prstGeom prst="rect">
-            <a:avLst/>
-          </a:prstGeom>
-          <a:noFill/>
-        </p:spPr>
-        <p:txBody>
-          <a:bodyPr wrap="square" lIns="45720" rIns="45720" tIns="18288" bIns="18288" anchor="ctr">
-            <a:spAutoFit/>
-          </a:bodyPr>
-          <a:lstStyle/>
-          <a:p>
-            <a:pPr algn="l"/>
-            <a:r>
-              <a:rPr sz="2100" b="0" i="1">
-                <a:solidFill>
-                  <a:srgbClr val="6B6B6B"/>
-                </a:solidFill>
-                <a:latin typeface="Century Schoolbook"/>
-              </a:rPr>
-              <a:t>multiply, then add</a:t>
-            </a:r>
-          </a:p>
-        </p:txBody>
-      </p:sp>
-      <p:sp>
-        <p:nvSpPr>
-          <p:cNvPr id="15" name="TextBox 14"/>
+          <p:cNvPr id="11" name="TextBox 10"/>
           <p:cNvSpPr txBox="1"/>
           <p:nvPr/>
         </p:nvSpPr>
@@ -5063,44 +4702,9 @@
           </a:fontRef>
         </p:style>
       </p:cxnSp>
-      <p:sp>
-        <p:nvSpPr>
-          <p:cNvPr id="5" name="TextBox 4"/>
-          <p:cNvSpPr txBox="1"/>
-          <p:nvPr/>
-        </p:nvSpPr>
-        <p:spPr>
-          <a:xfrm>
-            <a:off x="777240" y="1261872"/>
-            <a:ext cx="10607040" cy="310896"/>
-          </a:xfrm>
-          <a:prstGeom prst="rect">
-            <a:avLst/>
-          </a:prstGeom>
-          <a:noFill/>
-        </p:spPr>
-        <p:txBody>
-          <a:bodyPr wrap="square" lIns="45720" rIns="45720" tIns="18288" bIns="18288" anchor="t">
-            <a:spAutoFit/>
-          </a:bodyPr>
-          <a:lstStyle/>
-          <a:p>
-            <a:pPr algn="l"/>
-            <a:r>
-              <a:rPr sz="1700" b="0" i="1">
-                <a:solidFill>
-                  <a:srgbClr val="6B6B6B"/>
-                </a:solidFill>
-                <a:latin typeface="Century Schoolbook"/>
-              </a:rPr>
-              <a:t>Same steps, your numbers. Boards up when done.</a:t>
-            </a:r>
-          </a:p>
-        </p:txBody>
-      </p:sp>
       <p:cxnSp>
         <p:nvCxnSpPr>
-          <p:cNvPr id="6" name="Connector 5"/>
+          <p:cNvPr id="5" name="Connector 4"/>
           <p:cNvCxnSpPr/>
           <p:nvPr/>
         </p:nvCxnSpPr>
@@ -5135,7 +4739,7 @@
       </p:cxnSp>
       <p:sp>
         <p:nvSpPr>
-          <p:cNvPr id="7" name="TextBox 6"/>
+          <p:cNvPr id="6" name="TextBox 5"/>
           <p:cNvSpPr txBox="1"/>
           <p:nvPr/>
         </p:nvSpPr>
@@ -5170,7 +4774,7 @@
       </p:sp>
       <p:sp>
         <p:nvSpPr>
-          <p:cNvPr id="8" name="TextBox 7"/>
+          <p:cNvPr id="7" name="TextBox 6"/>
           <p:cNvSpPr txBox="1"/>
           <p:nvPr/>
         </p:nvSpPr>
@@ -5205,7 +4809,7 @@
       </p:sp>
       <p:sp>
         <p:nvSpPr>
-          <p:cNvPr id="9" name="TextBox 8"/>
+          <p:cNvPr id="8" name="TextBox 7"/>
           <p:cNvSpPr txBox="1"/>
           <p:nvPr/>
         </p:nvSpPr>
@@ -5240,7 +4844,7 @@
       </p:sp>
       <p:sp>
         <p:nvSpPr>
-          <p:cNvPr id="10" name="TextBox 9"/>
+          <p:cNvPr id="9" name="TextBox 8"/>
           <p:cNvSpPr txBox="1"/>
           <p:nvPr/>
         </p:nvSpPr>
@@ -5275,7 +4879,7 @@
       </p:sp>
       <p:sp>
         <p:nvSpPr>
-          <p:cNvPr id="11" name="TextBox 10"/>
+          <p:cNvPr id="10" name="TextBox 9"/>
           <p:cNvSpPr txBox="1"/>
           <p:nvPr/>
         </p:nvSpPr>
@@ -5431,44 +5035,9 @@
           </a:fontRef>
         </p:style>
       </p:cxnSp>
-      <p:sp>
-        <p:nvSpPr>
-          <p:cNvPr id="5" name="TextBox 4"/>
-          <p:cNvSpPr txBox="1"/>
-          <p:nvPr/>
-        </p:nvSpPr>
-        <p:spPr>
-          <a:xfrm>
-            <a:off x="777240" y="1261872"/>
-            <a:ext cx="10607040" cy="310896"/>
-          </a:xfrm>
-          <a:prstGeom prst="rect">
-            <a:avLst/>
-          </a:prstGeom>
-          <a:noFill/>
-        </p:spPr>
-        <p:txBody>
-          <a:bodyPr wrap="square" lIns="45720" rIns="45720" tIns="18288" bIns="18288" anchor="t">
-            <a:spAutoFit/>
-          </a:bodyPr>
-          <a:lstStyle/>
-          <a:p>
-            <a:pPr algn="l"/>
-            <a:r>
-              <a:rPr sz="1700" b="0" i="1">
-                <a:solidFill>
-                  <a:srgbClr val="6B6B6B"/>
-                </a:solidFill>
-                <a:latin typeface="Century Schoolbook"/>
-              </a:rPr>
-              <a:t>Answer.</a:t>
-            </a:r>
-          </a:p>
-        </p:txBody>
-      </p:sp>
       <p:cxnSp>
         <p:nvCxnSpPr>
-          <p:cNvPr id="6" name="Connector 5"/>
+          <p:cNvPr id="5" name="Connector 4"/>
           <p:cNvCxnSpPr/>
           <p:nvPr/>
         </p:nvCxnSpPr>
@@ -5503,7 +5072,7 @@
       </p:cxnSp>
       <p:sp>
         <p:nvSpPr>
-          <p:cNvPr id="7" name="TextBox 6"/>
+          <p:cNvPr id="6" name="TextBox 5"/>
           <p:cNvSpPr txBox="1"/>
           <p:nvPr/>
         </p:nvSpPr>
@@ -5538,7 +5107,7 @@
       </p:sp>
       <p:sp>
         <p:nvSpPr>
-          <p:cNvPr id="8" name="TextBox 7"/>
+          <p:cNvPr id="7" name="TextBox 6"/>
           <p:cNvSpPr txBox="1"/>
           <p:nvPr/>
         </p:nvSpPr>
@@ -5573,7 +5142,7 @@
       </p:sp>
       <p:sp>
         <p:nvSpPr>
-          <p:cNvPr id="9" name="TextBox 8"/>
+          <p:cNvPr id="8" name="TextBox 7"/>
           <p:cNvSpPr txBox="1"/>
           <p:nvPr/>
         </p:nvSpPr>
@@ -5608,7 +5177,7 @@
       </p:sp>
       <p:sp>
         <p:nvSpPr>
-          <p:cNvPr id="10" name="TextBox 9"/>
+          <p:cNvPr id="9" name="TextBox 8"/>
           <p:cNvSpPr txBox="1"/>
           <p:nvPr/>
         </p:nvSpPr>
@@ -5643,7 +5212,7 @@
       </p:sp>
       <p:sp>
         <p:nvSpPr>
-          <p:cNvPr id="11" name="TextBox 10"/>
+          <p:cNvPr id="10" name="TextBox 9"/>
           <p:cNvSpPr txBox="1"/>
           <p:nvPr/>
         </p:nvSpPr>
@@ -5678,42 +5247,7 @@
       </p:sp>
       <p:sp>
         <p:nvSpPr>
-          <p:cNvPr id="12" name="TextBox 11"/>
-          <p:cNvSpPr txBox="1"/>
-          <p:nvPr/>
-        </p:nvSpPr>
-        <p:spPr>
-          <a:xfrm>
-            <a:off x="777240" y="3811855"/>
-            <a:ext cx="10607040" cy="429370"/>
-          </a:xfrm>
-          <a:prstGeom prst="rect">
-            <a:avLst/>
-          </a:prstGeom>
-          <a:noFill/>
-        </p:spPr>
-        <p:txBody>
-          <a:bodyPr wrap="square" lIns="45720" rIns="45720" tIns="18288" bIns="18288" anchor="t">
-            <a:spAutoFit/>
-          </a:bodyPr>
-          <a:lstStyle/>
-          <a:p>
-            <a:pPr algn="ctr"/>
-            <a:r>
-              <a:rPr sz="2400" b="0" i="0">
-                <a:solidFill>
-                  <a:srgbClr val="6B6B6B"/>
-                </a:solidFill>
-                <a:latin typeface="Century Schoolbook"/>
-              </a:rPr>
-              <a:t>36(4.25) then add</a:t>
-            </a:r>
-          </a:p>
-        </p:txBody>
-      </p:sp>
-      <p:sp>
-        <p:nvSpPr>
-          <p:cNvPr id="13" name="TextBox 12"/>
+          <p:cNvPr id="11" name="TextBox 10"/>
           <p:cNvSpPr txBox="1"/>
           <p:nvPr/>
         </p:nvSpPr>
@@ -5869,44 +5403,9 @@
           </a:fontRef>
         </p:style>
       </p:cxnSp>
-      <p:sp>
-        <p:nvSpPr>
-          <p:cNvPr id="5" name="TextBox 4"/>
-          <p:cNvSpPr txBox="1"/>
-          <p:nvPr/>
-        </p:nvSpPr>
-        <p:spPr>
-          <a:xfrm>
-            <a:off x="777240" y="1261872"/>
-            <a:ext cx="10607040" cy="310896"/>
-          </a:xfrm>
-          <a:prstGeom prst="rect">
-            <a:avLst/>
-          </a:prstGeom>
-          <a:noFill/>
-        </p:spPr>
-        <p:txBody>
-          <a:bodyPr wrap="square" lIns="45720" rIns="45720" tIns="18288" bIns="18288" anchor="t">
-            <a:spAutoFit/>
-          </a:bodyPr>
-          <a:lstStyle/>
-          <a:p>
-            <a:pPr algn="l"/>
-            <a:r>
-              <a:rPr sz="1700" b="0" i="1">
-                <a:solidFill>
-                  <a:srgbClr val="6B6B6B"/>
-                </a:solidFill>
-                <a:latin typeface="Century Schoolbook"/>
-              </a:rPr>
-              <a:t>Boards up on three.</a:t>
-            </a:r>
-          </a:p>
-        </p:txBody>
-      </p:sp>
       <p:cxnSp>
         <p:nvCxnSpPr>
-          <p:cNvPr id="6" name="Connector 5"/>
+          <p:cNvPr id="5" name="Connector 4"/>
           <p:cNvCxnSpPr/>
           <p:nvPr/>
         </p:nvCxnSpPr>
@@ -5941,7 +5440,7 @@
       </p:cxnSp>
       <p:sp>
         <p:nvSpPr>
-          <p:cNvPr id="7" name="TextBox 6"/>
+          <p:cNvPr id="6" name="TextBox 5"/>
           <p:cNvSpPr txBox="1"/>
           <p:nvPr/>
         </p:nvSpPr>
@@ -5976,7 +5475,7 @@
       </p:sp>
       <p:sp>
         <p:nvSpPr>
-          <p:cNvPr id="8" name="TextBox 7"/>
+          <p:cNvPr id="7" name="TextBox 6"/>
           <p:cNvSpPr txBox="1"/>
           <p:nvPr/>
         </p:nvSpPr>
@@ -6011,7 +5510,7 @@
       </p:sp>
       <p:sp>
         <p:nvSpPr>
-          <p:cNvPr id="9" name="TextBox 8"/>
+          <p:cNvPr id="8" name="TextBox 7"/>
           <p:cNvSpPr txBox="1"/>
           <p:nvPr/>
         </p:nvSpPr>
@@ -6046,7 +5545,7 @@
       </p:sp>
       <p:pic>
         <p:nvPicPr>
-          <p:cNvPr id="10" name="Picture 9" descr="8b9f54f367bfb11b.png"/>
+          <p:cNvPr id="9" name="Picture 8" descr="8b9f54f367bfb11b.png"/>
           <p:cNvPicPr>
             <a:picLocks noChangeAspect="1"/>
           </p:cNvPicPr>
@@ -6070,7 +5569,7 @@
       </p:pic>
       <p:sp>
         <p:nvSpPr>
-          <p:cNvPr id="11" name="TextBox 10"/>
+          <p:cNvPr id="10" name="TextBox 9"/>
           <p:cNvSpPr txBox="1"/>
           <p:nvPr/>
         </p:nvSpPr>
@@ -6105,7 +5604,7 @@
       </p:sp>
       <p:pic>
         <p:nvPicPr>
-          <p:cNvPr id="12" name="Picture 11" descr="0c0822ea9a5c4000.png"/>
+          <p:cNvPr id="11" name="Picture 10" descr="0c0822ea9a5c4000.png"/>
           <p:cNvPicPr>
             <a:picLocks noChangeAspect="1"/>
           </p:cNvPicPr>
@@ -6129,7 +5628,7 @@
       </p:pic>
       <p:sp>
         <p:nvSpPr>
-          <p:cNvPr id="13" name="TextBox 12"/>
+          <p:cNvPr id="12" name="TextBox 11"/>
           <p:cNvSpPr txBox="1"/>
           <p:nvPr/>
         </p:nvSpPr>
@@ -6164,7 +5663,7 @@
       </p:sp>
       <p:sp>
         <p:nvSpPr>
-          <p:cNvPr id="14" name="TextBox 13"/>
+          <p:cNvPr id="13" name="TextBox 12"/>
           <p:cNvSpPr txBox="1"/>
           <p:nvPr/>
         </p:nvSpPr>
@@ -6193,41 +5692,6 @@
                 <a:latin typeface="Century Schoolbook"/>
               </a:rPr>
               <a:t>Answer it.</a:t>
-            </a:r>
-          </a:p>
-        </p:txBody>
-      </p:sp>
-      <p:sp>
-        <p:nvSpPr>
-          <p:cNvPr id="15" name="TextBox 14"/>
-          <p:cNvSpPr txBox="1"/>
-          <p:nvPr/>
-        </p:nvSpPr>
-        <p:spPr>
-          <a:xfrm>
-            <a:off x="777240" y="4828032"/>
-            <a:ext cx="10607040" cy="365760"/>
-          </a:xfrm>
-          <a:prstGeom prst="rect">
-            <a:avLst/>
-          </a:prstGeom>
-          <a:noFill/>
-        </p:spPr>
-        <p:txBody>
-          <a:bodyPr wrap="square" lIns="45720" rIns="45720" tIns="18288" bIns="18288" anchor="t">
-            <a:spAutoFit/>
-          </a:bodyPr>
-          <a:lstStyle/>
-          <a:p>
-            <a:pPr algn="ctr"/>
-            <a:r>
-              <a:rPr sz="1900" b="0" i="1">
-                <a:solidFill>
-                  <a:srgbClr val="6B6B6B"/>
-                </a:solidFill>
-                <a:latin typeface="Century Schoolbook"/>
-              </a:rPr>
-              <a:t>Substitute in parentheses.</a:t>
             </a:r>
           </a:p>
         </p:txBody>
@@ -6355,44 +5819,9 @@
           </a:fontRef>
         </p:style>
       </p:cxnSp>
-      <p:sp>
-        <p:nvSpPr>
-          <p:cNvPr id="5" name="TextBox 4"/>
-          <p:cNvSpPr txBox="1"/>
-          <p:nvPr/>
-        </p:nvSpPr>
-        <p:spPr>
-          <a:xfrm>
-            <a:off x="777240" y="1261872"/>
-            <a:ext cx="10607040" cy="310896"/>
-          </a:xfrm>
-          <a:prstGeom prst="rect">
-            <a:avLst/>
-          </a:prstGeom>
-          <a:noFill/>
-        </p:spPr>
-        <p:txBody>
-          <a:bodyPr wrap="square" lIns="45720" rIns="45720" tIns="18288" bIns="18288" anchor="t">
-            <a:spAutoFit/>
-          </a:bodyPr>
-          <a:lstStyle/>
-          <a:p>
-            <a:pPr algn="l"/>
-            <a:r>
-              <a:rPr sz="1700" b="0" i="1">
-                <a:solidFill>
-                  <a:srgbClr val="6B6B6B"/>
-                </a:solidFill>
-                <a:latin typeface="Century Schoolbook"/>
-              </a:rPr>
-              <a:t>Answer.</a:t>
-            </a:r>
-          </a:p>
-        </p:txBody>
-      </p:sp>
       <p:cxnSp>
         <p:nvCxnSpPr>
-          <p:cNvPr id="6" name="Connector 5"/>
+          <p:cNvPr id="5" name="Connector 4"/>
           <p:cNvCxnSpPr/>
           <p:nvPr/>
         </p:nvCxnSpPr>
@@ -6427,7 +5856,7 @@
       </p:cxnSp>
       <p:sp>
         <p:nvSpPr>
-          <p:cNvPr id="7" name="TextBox 6"/>
+          <p:cNvPr id="6" name="TextBox 5"/>
           <p:cNvSpPr txBox="1"/>
           <p:nvPr/>
         </p:nvSpPr>
@@ -6462,7 +5891,7 @@
       </p:sp>
       <p:sp>
         <p:nvSpPr>
-          <p:cNvPr id="8" name="TextBox 7"/>
+          <p:cNvPr id="7" name="TextBox 6"/>
           <p:cNvSpPr txBox="1"/>
           <p:nvPr/>
         </p:nvSpPr>
@@ -6497,7 +5926,7 @@
       </p:sp>
       <p:sp>
         <p:nvSpPr>
-          <p:cNvPr id="9" name="TextBox 8"/>
+          <p:cNvPr id="8" name="TextBox 7"/>
           <p:cNvSpPr txBox="1"/>
           <p:nvPr/>
         </p:nvSpPr>
@@ -6532,7 +5961,7 @@
       </p:sp>
       <p:pic>
         <p:nvPicPr>
-          <p:cNvPr id="10" name="Picture 9" descr="dfb9a8ed903d4273.png"/>
+          <p:cNvPr id="9" name="Picture 8" descr="dfb9a8ed903d4273.png"/>
           <p:cNvPicPr>
             <a:picLocks noChangeAspect="1"/>
           </p:cNvPicPr>
@@ -6556,7 +5985,7 @@
       </p:pic>
       <p:sp>
         <p:nvSpPr>
-          <p:cNvPr id="11" name="TextBox 10"/>
+          <p:cNvPr id="10" name="TextBox 9"/>
           <p:cNvSpPr txBox="1"/>
           <p:nvPr/>
         </p:nvSpPr>
@@ -6591,7 +6020,7 @@
       </p:sp>
       <p:pic>
         <p:nvPicPr>
-          <p:cNvPr id="12" name="Picture 11" descr="2a9ba365712c43c3.png"/>
+          <p:cNvPr id="11" name="Picture 10" descr="2a9ba365712c43c3.png"/>
           <p:cNvPicPr>
             <a:picLocks noChangeAspect="1"/>
           </p:cNvPicPr>
@@ -6615,7 +6044,7 @@
       </p:pic>
       <p:sp>
         <p:nvSpPr>
-          <p:cNvPr id="13" name="TextBox 12"/>
+          <p:cNvPr id="12" name="TextBox 11"/>
           <p:cNvSpPr txBox="1"/>
           <p:nvPr/>
         </p:nvSpPr>
@@ -6650,51 +6079,7 @@
       </p:sp>
       <p:sp>
         <p:nvSpPr>
-          <p:cNvPr id="14" name="TextBox 13"/>
-          <p:cNvSpPr txBox="1"/>
-          <p:nvPr/>
-        </p:nvSpPr>
-        <p:spPr>
-          <a:xfrm>
-            <a:off x="1828800" y="2834639"/>
-            <a:ext cx="8503920" cy="548640"/>
-          </a:xfrm>
-          <a:prstGeom prst="rect">
-            <a:avLst/>
-          </a:prstGeom>
-          <a:noFill/>
-        </p:spPr>
-        <p:txBody>
-          <a:bodyPr wrap="square" lIns="45720" rIns="45720" tIns="18288" bIns="18288" anchor="t">
-            <a:spAutoFit/>
-          </a:bodyPr>
-          <a:lstStyle/>
-          <a:p>
-            <a:pPr algn="ctr"/>
-            <a:r>
-              <a:rPr sz="2400" b="0" i="0">
-                <a:solidFill>
-                  <a:srgbClr val="6B6B6B"/>
-                </a:solidFill>
-                <a:latin typeface="Century Schoolbook"/>
-              </a:rPr>
-              <a:t>3(−2)</a:t>
-            </a:r>
-            <a:r>
-              <a:rPr sz="2400" b="0" i="0" baseline="30000">
-                <a:solidFill>
-                  <a:srgbClr val="6B6B6B"/>
-                </a:solidFill>
-                <a:latin typeface="Century Schoolbook"/>
-              </a:rPr>
-              <a:t>2</a:t>
-            </a:r>
-          </a:p>
-        </p:txBody>
-      </p:sp>
-      <p:sp>
-        <p:nvSpPr>
-          <p:cNvPr id="15" name="TextBox 14"/>
+          <p:cNvPr id="13" name="TextBox 12"/>
           <p:cNvSpPr txBox="1"/>
           <p:nvPr/>
         </p:nvSpPr>
@@ -6850,44 +6235,9 @@
           </a:fontRef>
         </p:style>
       </p:cxnSp>
-      <p:sp>
-        <p:nvSpPr>
-          <p:cNvPr id="5" name="TextBox 4"/>
-          <p:cNvSpPr txBox="1"/>
-          <p:nvPr/>
-        </p:nvSpPr>
-        <p:spPr>
-          <a:xfrm>
-            <a:off x="777240" y="1261872"/>
-            <a:ext cx="10607040" cy="310896"/>
-          </a:xfrm>
-          <a:prstGeom prst="rect">
-            <a:avLst/>
-          </a:prstGeom>
-          <a:noFill/>
-        </p:spPr>
-        <p:txBody>
-          <a:bodyPr wrap="square" lIns="45720" rIns="45720" tIns="18288" bIns="18288" anchor="t">
-            <a:spAutoFit/>
-          </a:bodyPr>
-          <a:lstStyle/>
-          <a:p>
-            <a:pPr algn="l"/>
-            <a:r>
-              <a:rPr sz="1700" b="0" i="1">
-                <a:solidFill>
-                  <a:srgbClr val="6B6B6B"/>
-                </a:solidFill>
-                <a:latin typeface="Century Schoolbook"/>
-              </a:rPr>
-              <a:t>Boards up on three.</a:t>
-            </a:r>
-          </a:p>
-        </p:txBody>
-      </p:sp>
       <p:cxnSp>
         <p:nvCxnSpPr>
-          <p:cNvPr id="6" name="Connector 5"/>
+          <p:cNvPr id="5" name="Connector 4"/>
           <p:cNvCxnSpPr/>
           <p:nvPr/>
         </p:nvCxnSpPr>
@@ -6922,7 +6272,7 @@
       </p:cxnSp>
       <p:sp>
         <p:nvSpPr>
-          <p:cNvPr id="7" name="TextBox 6"/>
+          <p:cNvPr id="6" name="TextBox 5"/>
           <p:cNvSpPr txBox="1"/>
           <p:nvPr/>
         </p:nvSpPr>
@@ -6957,7 +6307,7 @@
       </p:sp>
       <p:sp>
         <p:nvSpPr>
-          <p:cNvPr id="8" name="TextBox 7"/>
+          <p:cNvPr id="7" name="TextBox 6"/>
           <p:cNvSpPr txBox="1"/>
           <p:nvPr/>
         </p:nvSpPr>
@@ -6992,7 +6342,7 @@
       </p:sp>
       <p:sp>
         <p:nvSpPr>
-          <p:cNvPr id="9" name="TextBox 8"/>
+          <p:cNvPr id="8" name="TextBox 7"/>
           <p:cNvSpPr txBox="1"/>
           <p:nvPr/>
         </p:nvSpPr>
@@ -7027,7 +6377,7 @@
       </p:sp>
       <p:sp>
         <p:nvSpPr>
-          <p:cNvPr id="10" name="TextBox 9"/>
+          <p:cNvPr id="9" name="TextBox 8"/>
           <p:cNvSpPr txBox="1"/>
           <p:nvPr/>
         </p:nvSpPr>
@@ -7062,7 +6412,7 @@
       </p:sp>
       <p:sp>
         <p:nvSpPr>
-          <p:cNvPr id="11" name="TextBox 10"/>
+          <p:cNvPr id="10" name="TextBox 9"/>
           <p:cNvSpPr txBox="1"/>
           <p:nvPr/>
         </p:nvSpPr>
@@ -7097,7 +6447,7 @@
       </p:sp>
       <p:pic>
         <p:nvPicPr>
-          <p:cNvPr id="12" name="Picture 11" descr="8419d3078da3665a.png"/>
+          <p:cNvPr id="11" name="Picture 10" descr="8419d3078da3665a.png"/>
           <p:cNvPicPr>
             <a:picLocks noChangeAspect="1"/>
           </p:cNvPicPr>
@@ -7121,7 +6471,7 @@
       </p:pic>
       <p:sp>
         <p:nvSpPr>
-          <p:cNvPr id="13" name="TextBox 12"/>
+          <p:cNvPr id="12" name="TextBox 11"/>
           <p:cNvSpPr txBox="1"/>
           <p:nvPr/>
         </p:nvSpPr>
@@ -7156,7 +6506,7 @@
       </p:sp>
       <p:pic>
         <p:nvPicPr>
-          <p:cNvPr id="14" name="Picture 13" descr="38ea68753f073419.png"/>
+          <p:cNvPr id="13" name="Picture 12" descr="38ea68753f073419.png"/>
           <p:cNvPicPr>
             <a:picLocks noChangeAspect="1"/>
           </p:cNvPicPr>
@@ -7180,7 +6530,7 @@
       </p:pic>
       <p:sp>
         <p:nvSpPr>
-          <p:cNvPr id="15" name="TextBox 14"/>
+          <p:cNvPr id="14" name="TextBox 13"/>
           <p:cNvSpPr txBox="1"/>
           <p:nvPr/>
         </p:nvSpPr>
@@ -7215,7 +6565,7 @@
       </p:sp>
       <p:pic>
         <p:nvPicPr>
-          <p:cNvPr id="16" name="Picture 15" descr="17f1143b444dcfe3.png"/>
+          <p:cNvPr id="15" name="Picture 14" descr="17f1143b444dcfe3.png"/>
           <p:cNvPicPr>
             <a:picLocks noChangeAspect="1"/>
           </p:cNvPicPr>
@@ -7239,7 +6589,7 @@
       </p:pic>
       <p:sp>
         <p:nvSpPr>
-          <p:cNvPr id="17" name="TextBox 16"/>
+          <p:cNvPr id="16" name="TextBox 15"/>
           <p:cNvSpPr txBox="1"/>
           <p:nvPr/>
         </p:nvSpPr>
@@ -7274,7 +6624,7 @@
       </p:sp>
       <p:sp>
         <p:nvSpPr>
-          <p:cNvPr id="18" name="TextBox 17"/>
+          <p:cNvPr id="17" name="TextBox 16"/>
           <p:cNvSpPr txBox="1"/>
           <p:nvPr/>
         </p:nvSpPr>
@@ -7309,7 +6659,7 @@
       </p:sp>
       <p:sp>
         <p:nvSpPr>
-          <p:cNvPr id="19" name="TextBox 18"/>
+          <p:cNvPr id="18" name="TextBox 17"/>
           <p:cNvSpPr txBox="1"/>
           <p:nvPr/>
         </p:nvSpPr>
@@ -7465,44 +6815,9 @@
           </a:fontRef>
         </p:style>
       </p:cxnSp>
-      <p:sp>
-        <p:nvSpPr>
-          <p:cNvPr id="5" name="TextBox 4"/>
-          <p:cNvSpPr txBox="1"/>
-          <p:nvPr/>
-        </p:nvSpPr>
-        <p:spPr>
-          <a:xfrm>
-            <a:off x="777240" y="1261872"/>
-            <a:ext cx="10607040" cy="310896"/>
-          </a:xfrm>
-          <a:prstGeom prst="rect">
-            <a:avLst/>
-          </a:prstGeom>
-          <a:noFill/>
-        </p:spPr>
-        <p:txBody>
-          <a:bodyPr wrap="square" lIns="45720" rIns="45720" tIns="18288" bIns="18288" anchor="t">
-            <a:spAutoFit/>
-          </a:bodyPr>
-          <a:lstStyle/>
-          <a:p>
-            <a:pPr algn="l"/>
-            <a:r>
-              <a:rPr sz="1700" b="0" i="1">
-                <a:solidFill>
-                  <a:srgbClr val="6B6B6B"/>
-                </a:solidFill>
-                <a:latin typeface="Century Schoolbook"/>
-              </a:rPr>
-              <a:t>Answer.</a:t>
-            </a:r>
-          </a:p>
-        </p:txBody>
-      </p:sp>
       <p:cxnSp>
         <p:nvCxnSpPr>
-          <p:cNvPr id="6" name="Connector 5"/>
+          <p:cNvPr id="5" name="Connector 4"/>
           <p:cNvCxnSpPr/>
           <p:nvPr/>
         </p:nvCxnSpPr>
@@ -7537,7 +6852,7 @@
       </p:cxnSp>
       <p:sp>
         <p:nvSpPr>
-          <p:cNvPr id="7" name="TextBox 6"/>
+          <p:cNvPr id="6" name="TextBox 5"/>
           <p:cNvSpPr txBox="1"/>
           <p:nvPr/>
         </p:nvSpPr>
@@ -7572,7 +6887,7 @@
       </p:sp>
       <p:sp>
         <p:nvSpPr>
-          <p:cNvPr id="8" name="TextBox 7"/>
+          <p:cNvPr id="7" name="TextBox 6"/>
           <p:cNvSpPr txBox="1"/>
           <p:nvPr/>
         </p:nvSpPr>
@@ -7607,7 +6922,7 @@
       </p:sp>
       <p:sp>
         <p:nvSpPr>
-          <p:cNvPr id="9" name="TextBox 8"/>
+          <p:cNvPr id="8" name="TextBox 7"/>
           <p:cNvSpPr txBox="1"/>
           <p:nvPr/>
         </p:nvSpPr>
@@ -7642,7 +6957,7 @@
       </p:sp>
       <p:sp>
         <p:nvSpPr>
-          <p:cNvPr id="10" name="TextBox 9"/>
+          <p:cNvPr id="9" name="TextBox 8"/>
           <p:cNvSpPr txBox="1"/>
           <p:nvPr/>
         </p:nvSpPr>
@@ -7677,7 +6992,7 @@
       </p:sp>
       <p:sp>
         <p:nvSpPr>
-          <p:cNvPr id="11" name="TextBox 10"/>
+          <p:cNvPr id="10" name="TextBox 9"/>
           <p:cNvSpPr txBox="1"/>
           <p:nvPr/>
         </p:nvSpPr>
@@ -7712,7 +7027,7 @@
       </p:sp>
       <p:pic>
         <p:nvPicPr>
-          <p:cNvPr id="12" name="Picture 11" descr="2b860bf135a1b088.png"/>
+          <p:cNvPr id="11" name="Picture 10" descr="2b860bf135a1b088.png"/>
           <p:cNvPicPr>
             <a:picLocks noChangeAspect="1"/>
           </p:cNvPicPr>
@@ -7736,7 +7051,7 @@
       </p:pic>
       <p:sp>
         <p:nvSpPr>
-          <p:cNvPr id="13" name="TextBox 12"/>
+          <p:cNvPr id="12" name="TextBox 11"/>
           <p:cNvSpPr txBox="1"/>
           <p:nvPr/>
         </p:nvSpPr>
@@ -7771,7 +7086,7 @@
       </p:sp>
       <p:pic>
         <p:nvPicPr>
-          <p:cNvPr id="14" name="Picture 13" descr="38ea68753f073419.png"/>
+          <p:cNvPr id="13" name="Picture 12" descr="38ea68753f073419.png"/>
           <p:cNvPicPr>
             <a:picLocks noChangeAspect="1"/>
           </p:cNvPicPr>
@@ -7795,7 +7110,7 @@
       </p:pic>
       <p:sp>
         <p:nvSpPr>
-          <p:cNvPr id="15" name="TextBox 14"/>
+          <p:cNvPr id="14" name="TextBox 13"/>
           <p:cNvSpPr txBox="1"/>
           <p:nvPr/>
         </p:nvSpPr>
@@ -7830,7 +7145,7 @@
       </p:sp>
       <p:pic>
         <p:nvPicPr>
-          <p:cNvPr id="16" name="Picture 15" descr="17f1143b444dcfe3.png"/>
+          <p:cNvPr id="15" name="Picture 14" descr="17f1143b444dcfe3.png"/>
           <p:cNvPicPr>
             <a:picLocks noChangeAspect="1"/>
           </p:cNvPicPr>
@@ -7854,7 +7169,7 @@
       </p:pic>
       <p:sp>
         <p:nvSpPr>
-          <p:cNvPr id="17" name="TextBox 16"/>
+          <p:cNvPr id="16" name="TextBox 15"/>
           <p:cNvSpPr txBox="1"/>
           <p:nvPr/>
         </p:nvSpPr>
@@ -7889,7 +7204,7 @@
       </p:sp>
       <p:sp>
         <p:nvSpPr>
-          <p:cNvPr id="18" name="TextBox 17"/>
+          <p:cNvPr id="17" name="TextBox 16"/>
           <p:cNvSpPr txBox="1"/>
           <p:nvPr/>
         </p:nvSpPr>
@@ -7924,48 +7239,13 @@
       </p:sp>
       <p:sp>
         <p:nvSpPr>
-          <p:cNvPr id="19" name="TextBox 18"/>
-          <p:cNvSpPr txBox="1"/>
-          <p:nvPr/>
-        </p:nvSpPr>
-        <p:spPr>
-          <a:xfrm>
-            <a:off x="1828800" y="4765481"/>
-            <a:ext cx="8503920" cy="548640"/>
-          </a:xfrm>
-          <a:prstGeom prst="rect">
-            <a:avLst/>
-          </a:prstGeom>
-          <a:noFill/>
-        </p:spPr>
-        <p:txBody>
-          <a:bodyPr wrap="square" lIns="45720" rIns="45720" tIns="18288" bIns="18288" anchor="t">
-            <a:spAutoFit/>
-          </a:bodyPr>
-          <a:lstStyle/>
-          <a:p>
-            <a:pPr algn="ctr"/>
-            <a:r>
-              <a:rPr sz="2400" b="0" i="0">
-                <a:solidFill>
-                  <a:srgbClr val="6B6B6B"/>
-                </a:solidFill>
-                <a:latin typeface="Century Schoolbook"/>
-              </a:rPr>
-              <a:t>35 times 64</a:t>
-            </a:r>
-          </a:p>
-        </p:txBody>
-      </p:sp>
-      <p:sp>
-        <p:nvSpPr>
-          <p:cNvPr id="20" name="TextBox 19"/>
-          <p:cNvSpPr txBox="1"/>
-          <p:nvPr/>
-        </p:nvSpPr>
-        <p:spPr>
-          <a:xfrm>
-            <a:off x="777240" y="5497001"/>
+          <p:cNvPr id="18" name="TextBox 17"/>
+          <p:cNvSpPr txBox="1"/>
+          <p:nvPr/>
+        </p:nvSpPr>
+        <p:spPr>
+          <a:xfrm>
+            <a:off x="777240" y="4856921"/>
             <a:ext cx="10607040" cy="548640"/>
           </a:xfrm>
           <a:prstGeom prst="rect">
@@ -8115,44 +7395,9 @@
           </a:fontRef>
         </p:style>
       </p:cxnSp>
-      <p:sp>
-        <p:nvSpPr>
-          <p:cNvPr id="5" name="TextBox 4"/>
-          <p:cNvSpPr txBox="1"/>
-          <p:nvPr/>
-        </p:nvSpPr>
-        <p:spPr>
-          <a:xfrm>
-            <a:off x="777240" y="1261872"/>
-            <a:ext cx="10607040" cy="310896"/>
-          </a:xfrm>
-          <a:prstGeom prst="rect">
-            <a:avLst/>
-          </a:prstGeom>
-          <a:noFill/>
-        </p:spPr>
-        <p:txBody>
-          <a:bodyPr wrap="square" lIns="45720" rIns="45720" tIns="18288" bIns="18288" anchor="t">
-            <a:spAutoFit/>
-          </a:bodyPr>
-          <a:lstStyle/>
-          <a:p>
-            <a:pPr algn="l"/>
-            <a:r>
-              <a:rPr sz="1700" b="0" i="1">
-                <a:solidFill>
-                  <a:srgbClr val="6B6B6B"/>
-                </a:solidFill>
-                <a:latin typeface="Century Schoolbook"/>
-              </a:rPr>
-              <a:t>Boards up on three.</a:t>
-            </a:r>
-          </a:p>
-        </p:txBody>
-      </p:sp>
       <p:cxnSp>
         <p:nvCxnSpPr>
-          <p:cNvPr id="6" name="Connector 5"/>
+          <p:cNvPr id="5" name="Connector 4"/>
           <p:cNvCxnSpPr/>
           <p:nvPr/>
         </p:nvCxnSpPr>
@@ -8187,7 +7432,7 @@
       </p:cxnSp>
       <p:sp>
         <p:nvSpPr>
-          <p:cNvPr id="7" name="TextBox 6"/>
+          <p:cNvPr id="6" name="TextBox 5"/>
           <p:cNvSpPr txBox="1"/>
           <p:nvPr/>
         </p:nvSpPr>
@@ -8222,7 +7467,7 @@
       </p:sp>
       <p:sp>
         <p:nvSpPr>
-          <p:cNvPr id="8" name="TextBox 7"/>
+          <p:cNvPr id="7" name="TextBox 6"/>
           <p:cNvSpPr txBox="1"/>
           <p:nvPr/>
         </p:nvSpPr>
@@ -8257,7 +7502,7 @@
       </p:sp>
       <p:sp>
         <p:nvSpPr>
-          <p:cNvPr id="9" name="TextBox 8"/>
+          <p:cNvPr id="8" name="TextBox 7"/>
           <p:cNvSpPr txBox="1"/>
           <p:nvPr/>
         </p:nvSpPr>
@@ -8292,7 +7537,7 @@
       </p:sp>
       <p:sp>
         <p:nvSpPr>
-          <p:cNvPr id="10" name="TextBox 9"/>
+          <p:cNvPr id="9" name="TextBox 8"/>
           <p:cNvSpPr txBox="1"/>
           <p:nvPr/>
         </p:nvSpPr>
@@ -8327,7 +7572,7 @@
       </p:sp>
       <p:sp>
         <p:nvSpPr>
-          <p:cNvPr id="11" name="TextBox 10"/>
+          <p:cNvPr id="10" name="TextBox 9"/>
           <p:cNvSpPr txBox="1"/>
           <p:nvPr/>
         </p:nvSpPr>
@@ -8356,41 +7601,6 @@
                 <a:latin typeface="Century Schoolbook"/>
               </a:rPr>
               <a:t>Answer it.</a:t>
-            </a:r>
-          </a:p>
-        </p:txBody>
-      </p:sp>
-      <p:sp>
-        <p:nvSpPr>
-          <p:cNvPr id="12" name="TextBox 11"/>
-          <p:cNvSpPr txBox="1"/>
-          <p:nvPr/>
-        </p:nvSpPr>
-        <p:spPr>
-          <a:xfrm>
-            <a:off x="777240" y="4828032"/>
-            <a:ext cx="10607040" cy="365760"/>
-          </a:xfrm>
-          <a:prstGeom prst="rect">
-            <a:avLst/>
-          </a:prstGeom>
-          <a:noFill/>
-        </p:spPr>
-        <p:txBody>
-          <a:bodyPr wrap="square" lIns="45720" rIns="45720" tIns="18288" bIns="18288" anchor="t">
-            <a:spAutoFit/>
-          </a:bodyPr>
-          <a:lstStyle/>
-          <a:p>
-            <a:pPr algn="ctr"/>
-            <a:r>
-              <a:rPr sz="1900" b="0" i="1">
-                <a:solidFill>
-                  <a:srgbClr val="6B6B6B"/>
-                </a:solidFill>
-                <a:latin typeface="Century Schoolbook"/>
-              </a:rPr>
-              <a:t>What happens six times?</a:t>
             </a:r>
           </a:p>
         </p:txBody>
@@ -8518,44 +7728,9 @@
           </a:fontRef>
         </p:style>
       </p:cxnSp>
-      <p:sp>
-        <p:nvSpPr>
-          <p:cNvPr id="5" name="TextBox 4"/>
-          <p:cNvSpPr txBox="1"/>
-          <p:nvPr/>
-        </p:nvSpPr>
-        <p:spPr>
-          <a:xfrm>
-            <a:off x="777240" y="1261872"/>
-            <a:ext cx="10607040" cy="310896"/>
-          </a:xfrm>
-          <a:prstGeom prst="rect">
-            <a:avLst/>
-          </a:prstGeom>
-          <a:noFill/>
-        </p:spPr>
-        <p:txBody>
-          <a:bodyPr wrap="square" lIns="45720" rIns="45720" tIns="18288" bIns="18288" anchor="t">
-            <a:spAutoFit/>
-          </a:bodyPr>
-          <a:lstStyle/>
-          <a:p>
-            <a:pPr algn="l"/>
-            <a:r>
-              <a:rPr sz="1700" b="0" i="1">
-                <a:solidFill>
-                  <a:srgbClr val="6B6B6B"/>
-                </a:solidFill>
-                <a:latin typeface="Century Schoolbook"/>
-              </a:rPr>
-              <a:t>On your own. Four minutes. No notes.</a:t>
-            </a:r>
-          </a:p>
-        </p:txBody>
-      </p:sp>
       <p:cxnSp>
         <p:nvCxnSpPr>
-          <p:cNvPr id="6" name="Connector 5"/>
+          <p:cNvPr id="5" name="Connector 4"/>
           <p:cNvCxnSpPr/>
           <p:nvPr/>
         </p:nvCxnSpPr>
@@ -8590,7 +7765,7 @@
       </p:cxnSp>
       <p:sp>
         <p:nvSpPr>
-          <p:cNvPr id="7" name="TextBox 6"/>
+          <p:cNvPr id="6" name="TextBox 5"/>
           <p:cNvSpPr txBox="1"/>
           <p:nvPr/>
         </p:nvSpPr>
@@ -8625,7 +7800,7 @@
       </p:sp>
       <p:sp>
         <p:nvSpPr>
-          <p:cNvPr id="8" name="TextBox 7"/>
+          <p:cNvPr id="7" name="TextBox 6"/>
           <p:cNvSpPr txBox="1"/>
           <p:nvPr/>
         </p:nvSpPr>
@@ -8660,13 +7835,13 @@
       </p:sp>
       <p:sp>
         <p:nvSpPr>
-          <p:cNvPr id="9" name="TextBox 8"/>
-          <p:cNvSpPr txBox="1"/>
-          <p:nvPr/>
-        </p:nvSpPr>
-        <p:spPr>
-          <a:xfrm>
-            <a:off x="1874519" y="1760220"/>
+          <p:cNvPr id="8" name="TextBox 7"/>
+          <p:cNvSpPr txBox="1"/>
+          <p:nvPr/>
+        </p:nvSpPr>
+        <p:spPr>
+          <a:xfrm>
+            <a:off x="1874519" y="1440180"/>
             <a:ext cx="720605" cy="457200"/>
           </a:xfrm>
           <a:prstGeom prst="rect">
@@ -8695,7 +7870,7 @@
       </p:sp>
       <p:pic>
         <p:nvPicPr>
-          <p:cNvPr id="10" name="Picture 9" descr="a3bfe14101224aaf.png"/>
+          <p:cNvPr id="9" name="Picture 8" descr="a3bfe14101224aaf.png"/>
           <p:cNvPicPr>
             <a:picLocks noChangeAspect="1"/>
           </p:cNvPicPr>
@@ -8709,7 +7884,7 @@
         </p:blipFill>
         <p:spPr>
           <a:xfrm>
-            <a:off x="2457965" y="1821180"/>
+            <a:off x="2457965" y="1501140"/>
             <a:ext cx="1554480" cy="335280"/>
           </a:xfrm>
           <a:prstGeom prst="rect">
@@ -8719,13 +7894,13 @@
       </p:pic>
       <p:sp>
         <p:nvSpPr>
-          <p:cNvPr id="11" name="TextBox 10"/>
-          <p:cNvSpPr txBox="1"/>
-          <p:nvPr/>
-        </p:nvSpPr>
-        <p:spPr>
-          <a:xfrm>
-            <a:off x="1874519" y="2372868"/>
+          <p:cNvPr id="10" name="TextBox 9"/>
+          <p:cNvSpPr txBox="1"/>
+          <p:nvPr/>
+        </p:nvSpPr>
+        <p:spPr>
+          <a:xfrm>
+            <a:off x="1874519" y="2052828"/>
             <a:ext cx="726811" cy="457200"/>
           </a:xfrm>
           <a:prstGeom prst="rect">
@@ -8754,7 +7929,7 @@
       </p:sp>
       <p:pic>
         <p:nvPicPr>
-          <p:cNvPr id="12" name="Picture 11" descr="a627cc56d1241098.png"/>
+          <p:cNvPr id="11" name="Picture 10" descr="a627cc56d1241098.png"/>
           <p:cNvPicPr>
             <a:picLocks noChangeAspect="1"/>
           </p:cNvPicPr>
@@ -8768,7 +7943,7 @@
         </p:blipFill>
         <p:spPr>
           <a:xfrm>
-            <a:off x="2464171" y="2397252"/>
+            <a:off x="2464171" y="2077212"/>
             <a:ext cx="1588008" cy="408432"/>
           </a:xfrm>
           <a:prstGeom prst="rect">
@@ -8778,13 +7953,13 @@
       </p:pic>
       <p:sp>
         <p:nvSpPr>
-          <p:cNvPr id="13" name="TextBox 12"/>
-          <p:cNvSpPr txBox="1"/>
-          <p:nvPr/>
-        </p:nvSpPr>
-        <p:spPr>
-          <a:xfrm>
-            <a:off x="1874519" y="3058668"/>
+          <p:cNvPr id="12" name="TextBox 11"/>
+          <p:cNvSpPr txBox="1"/>
+          <p:nvPr/>
+        </p:nvSpPr>
+        <p:spPr>
+          <a:xfrm>
+            <a:off x="1874519" y="2738628"/>
             <a:ext cx="3064939" cy="457200"/>
           </a:xfrm>
           <a:prstGeom prst="rect">
@@ -8813,7 +7988,7 @@
       </p:sp>
       <p:pic>
         <p:nvPicPr>
-          <p:cNvPr id="14" name="Picture 13" descr="ab0a0f8a819bef4a.png"/>
+          <p:cNvPr id="13" name="Picture 12" descr="ab0a0f8a819bef4a.png"/>
           <p:cNvPicPr>
             <a:picLocks noChangeAspect="1"/>
           </p:cNvPicPr>
@@ -8827,7 +8002,7 @@
         </p:blipFill>
         <p:spPr>
           <a:xfrm>
-            <a:off x="4802299" y="3008376"/>
+            <a:off x="4802299" y="2688336"/>
             <a:ext cx="780288" cy="557784"/>
           </a:xfrm>
           <a:prstGeom prst="rect">
@@ -8837,13 +8012,13 @@
       </p:pic>
       <p:sp>
         <p:nvSpPr>
-          <p:cNvPr id="15" name="TextBox 14"/>
-          <p:cNvSpPr txBox="1"/>
-          <p:nvPr/>
-        </p:nvSpPr>
-        <p:spPr>
-          <a:xfrm>
-            <a:off x="1874519" y="3744468"/>
+          <p:cNvPr id="14" name="TextBox 13"/>
+          <p:cNvSpPr txBox="1"/>
+          <p:nvPr/>
+        </p:nvSpPr>
+        <p:spPr>
+          <a:xfrm>
+            <a:off x="1874519" y="3424428"/>
             <a:ext cx="2190435" cy="457200"/>
           </a:xfrm>
           <a:prstGeom prst="rect">
@@ -8872,7 +8047,7 @@
       </p:sp>
       <p:pic>
         <p:nvPicPr>
-          <p:cNvPr id="16" name="Picture 15" descr="0059e34534483f5d.png"/>
+          <p:cNvPr id="15" name="Picture 14" descr="0059e34534483f5d.png"/>
           <p:cNvPicPr>
             <a:picLocks noChangeAspect="1"/>
           </p:cNvPicPr>
@@ -8886,7 +8061,7 @@
         </p:blipFill>
         <p:spPr>
           <a:xfrm>
-            <a:off x="3927795" y="3834384"/>
+            <a:off x="3927795" y="3514344"/>
             <a:ext cx="432816" cy="277368"/>
           </a:xfrm>
           <a:prstGeom prst="rect">
@@ -8896,13 +8071,13 @@
       </p:pic>
       <p:sp>
         <p:nvSpPr>
-          <p:cNvPr id="17" name="TextBox 16"/>
-          <p:cNvSpPr txBox="1"/>
-          <p:nvPr/>
-        </p:nvSpPr>
-        <p:spPr>
-          <a:xfrm>
-            <a:off x="4360611" y="3744468"/>
+          <p:cNvPr id="16" name="TextBox 15"/>
+          <p:cNvSpPr txBox="1"/>
+          <p:nvPr/>
+        </p:nvSpPr>
+        <p:spPr>
+          <a:xfrm>
+            <a:off x="4360611" y="3424428"/>
             <a:ext cx="1328762" cy="457200"/>
           </a:xfrm>
           <a:prstGeom prst="rect">
@@ -8931,7 +8106,7 @@
       </p:sp>
       <p:pic>
         <p:nvPicPr>
-          <p:cNvPr id="18" name="Picture 17" descr="8be73e21dbd6851d.png"/>
+          <p:cNvPr id="17" name="Picture 16" descr="8be73e21dbd6851d.png"/>
           <p:cNvPicPr>
             <a:picLocks noChangeAspect="1"/>
           </p:cNvPicPr>
@@ -8945,7 +8120,7 @@
         </p:blipFill>
         <p:spPr>
           <a:xfrm>
-            <a:off x="5552213" y="3858768"/>
+            <a:off x="5552213" y="3538728"/>
             <a:ext cx="621792" cy="228600"/>
           </a:xfrm>
           <a:prstGeom prst="rect">
@@ -8955,13 +8130,13 @@
       </p:pic>
       <p:sp>
         <p:nvSpPr>
-          <p:cNvPr id="19" name="TextBox 18"/>
-          <p:cNvSpPr txBox="1"/>
-          <p:nvPr/>
-        </p:nvSpPr>
-        <p:spPr>
-          <a:xfrm>
-            <a:off x="6174005" y="3744468"/>
+          <p:cNvPr id="18" name="TextBox 17"/>
+          <p:cNvSpPr txBox="1"/>
+          <p:nvPr/>
+        </p:nvSpPr>
+        <p:spPr>
+          <a:xfrm>
+            <a:off x="6174005" y="3424428"/>
             <a:ext cx="296395" cy="457200"/>
           </a:xfrm>
           <a:prstGeom prst="rect">
@@ -9111,44 +8286,9 @@
           </a:fontRef>
         </p:style>
       </p:cxnSp>
-      <p:sp>
-        <p:nvSpPr>
-          <p:cNvPr id="5" name="TextBox 4"/>
-          <p:cNvSpPr txBox="1"/>
-          <p:nvPr/>
-        </p:nvSpPr>
-        <p:spPr>
-          <a:xfrm>
-            <a:off x="777240" y="1261872"/>
-            <a:ext cx="10607040" cy="310896"/>
-          </a:xfrm>
-          <a:prstGeom prst="rect">
-            <a:avLst/>
-          </a:prstGeom>
-          <a:noFill/>
-        </p:spPr>
-        <p:txBody>
-          <a:bodyPr wrap="square" lIns="45720" rIns="45720" tIns="18288" bIns="18288" anchor="t">
-            <a:spAutoFit/>
-          </a:bodyPr>
-          <a:lstStyle/>
-          <a:p>
-            <a:pPr algn="l"/>
-            <a:r>
-              <a:rPr sz="1700" b="0" i="1">
-                <a:solidFill>
-                  <a:srgbClr val="6B6B6B"/>
-                </a:solidFill>
-                <a:latin typeface="Century Schoolbook"/>
-              </a:rPr>
-              <a:t>Answer.</a:t>
-            </a:r>
-          </a:p>
-        </p:txBody>
-      </p:sp>
       <p:cxnSp>
         <p:nvCxnSpPr>
-          <p:cNvPr id="6" name="Connector 5"/>
+          <p:cNvPr id="5" name="Connector 4"/>
           <p:cNvCxnSpPr/>
           <p:nvPr/>
         </p:nvCxnSpPr>
@@ -9183,7 +8323,7 @@
       </p:cxnSp>
       <p:sp>
         <p:nvSpPr>
-          <p:cNvPr id="7" name="TextBox 6"/>
+          <p:cNvPr id="6" name="TextBox 5"/>
           <p:cNvSpPr txBox="1"/>
           <p:nvPr/>
         </p:nvSpPr>
@@ -9218,7 +8358,7 @@
       </p:sp>
       <p:sp>
         <p:nvSpPr>
-          <p:cNvPr id="8" name="TextBox 7"/>
+          <p:cNvPr id="7" name="TextBox 6"/>
           <p:cNvSpPr txBox="1"/>
           <p:nvPr/>
         </p:nvSpPr>
@@ -9253,7 +8393,7 @@
       </p:sp>
       <p:sp>
         <p:nvSpPr>
-          <p:cNvPr id="9" name="TextBox 8"/>
+          <p:cNvPr id="8" name="TextBox 7"/>
           <p:cNvSpPr txBox="1"/>
           <p:nvPr/>
         </p:nvSpPr>
@@ -9288,7 +8428,7 @@
       </p:sp>
       <p:sp>
         <p:nvSpPr>
-          <p:cNvPr id="10" name="TextBox 9"/>
+          <p:cNvPr id="9" name="TextBox 8"/>
           <p:cNvSpPr txBox="1"/>
           <p:nvPr/>
         </p:nvSpPr>
@@ -9323,42 +8463,7 @@
       </p:sp>
       <p:sp>
         <p:nvSpPr>
-          <p:cNvPr id="11" name="TextBox 10"/>
-          <p:cNvSpPr txBox="1"/>
-          <p:nvPr/>
-        </p:nvSpPr>
-        <p:spPr>
-          <a:xfrm>
-            <a:off x="1828800" y="3298598"/>
-            <a:ext cx="8503920" cy="548640"/>
-          </a:xfrm>
-          <a:prstGeom prst="rect">
-            <a:avLst/>
-          </a:prstGeom>
-          <a:noFill/>
-        </p:spPr>
-        <p:txBody>
-          <a:bodyPr wrap="square" lIns="45720" rIns="45720" tIns="18288" bIns="18288" anchor="t">
-            <a:spAutoFit/>
-          </a:bodyPr>
-          <a:lstStyle/>
-          <a:p>
-            <a:pPr algn="ctr"/>
-            <a:r>
-              <a:rPr sz="2400" b="0" i="0">
-                <a:solidFill>
-                  <a:srgbClr val="6B6B6B"/>
-                </a:solidFill>
-                <a:latin typeface="Century Schoolbook"/>
-              </a:rPr>
-              <a:t>15 + 4(6)</a:t>
-            </a:r>
-          </a:p>
-        </p:txBody>
-      </p:sp>
-      <p:sp>
-        <p:nvSpPr>
-          <p:cNvPr id="12" name="TextBox 11"/>
+          <p:cNvPr id="10" name="TextBox 9"/>
           <p:cNvSpPr txBox="1"/>
           <p:nvPr/>
         </p:nvSpPr>
@@ -9514,44 +8619,9 @@
           </a:fontRef>
         </p:style>
       </p:cxnSp>
-      <p:sp>
-        <p:nvSpPr>
-          <p:cNvPr id="5" name="TextBox 4"/>
-          <p:cNvSpPr txBox="1"/>
-          <p:nvPr/>
-        </p:nvSpPr>
-        <p:spPr>
-          <a:xfrm>
-            <a:off x="777240" y="1261872"/>
-            <a:ext cx="10607040" cy="310896"/>
-          </a:xfrm>
-          <a:prstGeom prst="rect">
-            <a:avLst/>
-          </a:prstGeom>
-          <a:noFill/>
-        </p:spPr>
-        <p:txBody>
-          <a:bodyPr wrap="square" lIns="45720" rIns="45720" tIns="18288" bIns="18288" anchor="t">
-            <a:spAutoFit/>
-          </a:bodyPr>
-          <a:lstStyle/>
-          <a:p>
-            <a:pPr algn="l"/>
-            <a:r>
-              <a:rPr sz="1700" b="0" i="1">
-                <a:solidFill>
-                  <a:srgbClr val="6B6B6B"/>
-                </a:solidFill>
-                <a:latin typeface="Century Schoolbook"/>
-              </a:rPr>
-              <a:t>Boards up on three.</a:t>
-            </a:r>
-          </a:p>
-        </p:txBody>
-      </p:sp>
       <p:cxnSp>
         <p:nvCxnSpPr>
-          <p:cNvPr id="6" name="Connector 5"/>
+          <p:cNvPr id="5" name="Connector 4"/>
           <p:cNvCxnSpPr/>
           <p:nvPr/>
         </p:nvCxnSpPr>
@@ -9586,7 +8656,7 @@
       </p:cxnSp>
       <p:sp>
         <p:nvSpPr>
-          <p:cNvPr id="7" name="TextBox 6"/>
+          <p:cNvPr id="6" name="TextBox 5"/>
           <p:cNvSpPr txBox="1"/>
           <p:nvPr/>
         </p:nvSpPr>
@@ -9621,7 +8691,7 @@
       </p:sp>
       <p:sp>
         <p:nvSpPr>
-          <p:cNvPr id="8" name="TextBox 7"/>
+          <p:cNvPr id="7" name="TextBox 6"/>
           <p:cNvSpPr txBox="1"/>
           <p:nvPr/>
         </p:nvSpPr>
@@ -9656,7 +8726,7 @@
       </p:sp>
       <p:sp>
         <p:nvSpPr>
-          <p:cNvPr id="9" name="TextBox 8"/>
+          <p:cNvPr id="8" name="TextBox 7"/>
           <p:cNvSpPr txBox="1"/>
           <p:nvPr/>
         </p:nvSpPr>
@@ -9691,7 +8761,7 @@
       </p:sp>
       <p:sp>
         <p:nvSpPr>
-          <p:cNvPr id="10" name="TextBox 9"/>
+          <p:cNvPr id="9" name="TextBox 8"/>
           <p:cNvSpPr txBox="1"/>
           <p:nvPr/>
         </p:nvSpPr>
@@ -9726,7 +8796,7 @@
       </p:sp>
       <p:sp>
         <p:nvSpPr>
-          <p:cNvPr id="11" name="TextBox 10"/>
+          <p:cNvPr id="10" name="TextBox 9"/>
           <p:cNvSpPr txBox="1"/>
           <p:nvPr/>
         </p:nvSpPr>
@@ -9761,7 +8831,7 @@
       </p:sp>
       <p:sp>
         <p:nvSpPr>
-          <p:cNvPr id="12" name="TextBox 11"/>
+          <p:cNvPr id="11" name="TextBox 10"/>
           <p:cNvSpPr txBox="1"/>
           <p:nvPr/>
         </p:nvSpPr>
@@ -9790,41 +8860,6 @@
                 <a:latin typeface="Century Schoolbook"/>
               </a:rPr>
               <a:t>Answer it.</a:t>
-            </a:r>
-          </a:p>
-        </p:txBody>
-      </p:sp>
-      <p:sp>
-        <p:nvSpPr>
-          <p:cNvPr id="13" name="TextBox 12"/>
-          <p:cNvSpPr txBox="1"/>
-          <p:nvPr/>
-        </p:nvSpPr>
-        <p:spPr>
-          <a:xfrm>
-            <a:off x="777240" y="4828032"/>
-            <a:ext cx="10607040" cy="365760"/>
-          </a:xfrm>
-          <a:prstGeom prst="rect">
-            <a:avLst/>
-          </a:prstGeom>
-          <a:noFill/>
-        </p:spPr>
-        <p:txBody>
-          <a:bodyPr wrap="square" lIns="45720" rIns="45720" tIns="18288" bIns="18288" anchor="t">
-            <a:spAutoFit/>
-          </a:bodyPr>
-          <a:lstStyle/>
-          <a:p>
-            <a:pPr algn="ctr"/>
-            <a:r>
-              <a:rPr sz="1900" b="0" i="1">
-                <a:solidFill>
-                  <a:srgbClr val="6B6B6B"/>
-                </a:solidFill>
-                <a:latin typeface="Century Schoolbook"/>
-              </a:rPr>
-              <a:t>Which price depends on the area?</a:t>
             </a:r>
           </a:p>
         </p:txBody>
@@ -9952,44 +8987,9 @@
           </a:fontRef>
         </p:style>
       </p:cxnSp>
-      <p:sp>
-        <p:nvSpPr>
-          <p:cNvPr id="5" name="TextBox 4"/>
-          <p:cNvSpPr txBox="1"/>
-          <p:nvPr/>
-        </p:nvSpPr>
-        <p:spPr>
-          <a:xfrm>
-            <a:off x="777240" y="1261872"/>
-            <a:ext cx="10607040" cy="310896"/>
-          </a:xfrm>
-          <a:prstGeom prst="rect">
-            <a:avLst/>
-          </a:prstGeom>
-          <a:noFill/>
-        </p:spPr>
-        <p:txBody>
-          <a:bodyPr wrap="square" lIns="45720" rIns="45720" tIns="18288" bIns="18288" anchor="t">
-            <a:spAutoFit/>
-          </a:bodyPr>
-          <a:lstStyle/>
-          <a:p>
-            <a:pPr algn="l"/>
-            <a:r>
-              <a:rPr sz="1700" b="0" i="1">
-                <a:solidFill>
-                  <a:srgbClr val="6B6B6B"/>
-                </a:solidFill>
-                <a:latin typeface="Century Schoolbook"/>
-              </a:rPr>
-              <a:t>Answer.</a:t>
-            </a:r>
-          </a:p>
-        </p:txBody>
-      </p:sp>
       <p:cxnSp>
         <p:nvCxnSpPr>
-          <p:cNvPr id="6" name="Connector 5"/>
+          <p:cNvPr id="5" name="Connector 4"/>
           <p:cNvCxnSpPr/>
           <p:nvPr/>
         </p:nvCxnSpPr>
@@ -10024,7 +9024,7 @@
       </p:cxnSp>
       <p:sp>
         <p:nvSpPr>
-          <p:cNvPr id="7" name="TextBox 6"/>
+          <p:cNvPr id="6" name="TextBox 5"/>
           <p:cNvSpPr txBox="1"/>
           <p:nvPr/>
         </p:nvSpPr>
@@ -10059,7 +9059,7 @@
       </p:sp>
       <p:sp>
         <p:nvSpPr>
-          <p:cNvPr id="8" name="TextBox 7"/>
+          <p:cNvPr id="7" name="TextBox 6"/>
           <p:cNvSpPr txBox="1"/>
           <p:nvPr/>
         </p:nvSpPr>
@@ -10094,7 +9094,7 @@
       </p:sp>
       <p:sp>
         <p:nvSpPr>
-          <p:cNvPr id="9" name="TextBox 8"/>
+          <p:cNvPr id="8" name="TextBox 7"/>
           <p:cNvSpPr txBox="1"/>
           <p:nvPr/>
         </p:nvSpPr>
@@ -10129,7 +9129,7 @@
       </p:sp>
       <p:sp>
         <p:nvSpPr>
-          <p:cNvPr id="10" name="TextBox 9"/>
+          <p:cNvPr id="9" name="TextBox 8"/>
           <p:cNvSpPr txBox="1"/>
           <p:nvPr/>
         </p:nvSpPr>
@@ -10164,7 +9164,7 @@
       </p:sp>
       <p:sp>
         <p:nvSpPr>
-          <p:cNvPr id="11" name="TextBox 10"/>
+          <p:cNvPr id="10" name="TextBox 9"/>
           <p:cNvSpPr txBox="1"/>
           <p:nvPr/>
         </p:nvSpPr>
@@ -10199,42 +9199,7 @@
       </p:sp>
       <p:sp>
         <p:nvSpPr>
-          <p:cNvPr id="12" name="TextBox 11"/>
-          <p:cNvSpPr txBox="1"/>
-          <p:nvPr/>
-        </p:nvSpPr>
-        <p:spPr>
-          <a:xfrm>
-            <a:off x="1828800" y="3819806"/>
-            <a:ext cx="8503920" cy="548640"/>
-          </a:xfrm>
-          <a:prstGeom prst="rect">
-            <a:avLst/>
-          </a:prstGeom>
-          <a:noFill/>
-        </p:spPr>
-        <p:txBody>
-          <a:bodyPr wrap="square" lIns="45720" rIns="45720" tIns="18288" bIns="18288" anchor="t">
-            <a:spAutoFit/>
-          </a:bodyPr>
-          <a:lstStyle/>
-          <a:p>
-            <a:pPr algn="ctr"/>
-            <a:r>
-              <a:rPr sz="2400" b="0" i="0">
-                <a:solidFill>
-                  <a:srgbClr val="6B6B6B"/>
-                </a:solidFill>
-                <a:latin typeface="Century Schoolbook"/>
-              </a:rPr>
-              <a:t>64(3.50) + 60</a:t>
-            </a:r>
-          </a:p>
-        </p:txBody>
-      </p:sp>
-      <p:sp>
-        <p:nvSpPr>
-          <p:cNvPr id="13" name="TextBox 12"/>
+          <p:cNvPr id="11" name="TextBox 10"/>
           <p:cNvSpPr txBox="1"/>
           <p:nvPr/>
         </p:nvSpPr>
@@ -10390,44 +9355,9 @@
           </a:fontRef>
         </p:style>
       </p:cxnSp>
-      <p:sp>
-        <p:nvSpPr>
-          <p:cNvPr id="5" name="TextBox 4"/>
-          <p:cNvSpPr txBox="1"/>
-          <p:nvPr/>
-        </p:nvSpPr>
-        <p:spPr>
-          <a:xfrm>
-            <a:off x="777240" y="1261872"/>
-            <a:ext cx="10607040" cy="310896"/>
-          </a:xfrm>
-          <a:prstGeom prst="rect">
-            <a:avLst/>
-          </a:prstGeom>
-          <a:noFill/>
-        </p:spPr>
-        <p:txBody>
-          <a:bodyPr wrap="square" lIns="45720" rIns="45720" tIns="18288" bIns="18288" anchor="t">
-            <a:spAutoFit/>
-          </a:bodyPr>
-          <a:lstStyle/>
-          <a:p>
-            <a:pPr algn="l"/>
-            <a:r>
-              <a:rPr sz="1700" b="0" i="1">
-                <a:solidFill>
-                  <a:srgbClr val="6B6B6B"/>
-                </a:solidFill>
-                <a:latin typeface="Century Schoolbook"/>
-              </a:rPr>
-              <a:t>Boards up on three.</a:t>
-            </a:r>
-          </a:p>
-        </p:txBody>
-      </p:sp>
       <p:cxnSp>
         <p:nvCxnSpPr>
-          <p:cNvPr id="6" name="Connector 5"/>
+          <p:cNvPr id="5" name="Connector 4"/>
           <p:cNvCxnSpPr/>
           <p:nvPr/>
         </p:nvCxnSpPr>
@@ -10462,7 +9392,7 @@
       </p:cxnSp>
       <p:sp>
         <p:nvSpPr>
-          <p:cNvPr id="7" name="TextBox 6"/>
+          <p:cNvPr id="6" name="TextBox 5"/>
           <p:cNvSpPr txBox="1"/>
           <p:nvPr/>
         </p:nvSpPr>
@@ -10497,7 +9427,7 @@
       </p:sp>
       <p:sp>
         <p:nvSpPr>
-          <p:cNvPr id="8" name="TextBox 7"/>
+          <p:cNvPr id="7" name="TextBox 6"/>
           <p:cNvSpPr txBox="1"/>
           <p:nvPr/>
         </p:nvSpPr>
@@ -10532,7 +9462,7 @@
       </p:sp>
       <p:sp>
         <p:nvSpPr>
-          <p:cNvPr id="9" name="TextBox 8"/>
+          <p:cNvPr id="8" name="TextBox 7"/>
           <p:cNvSpPr txBox="1"/>
           <p:nvPr/>
         </p:nvSpPr>
@@ -10567,7 +9497,7 @@
       </p:sp>
       <p:pic>
         <p:nvPicPr>
-          <p:cNvPr id="10" name="Picture 9" descr="0c3f0450f52693a1.png"/>
+          <p:cNvPr id="9" name="Picture 8" descr="0c3f0450f52693a1.png"/>
           <p:cNvPicPr>
             <a:picLocks noChangeAspect="1"/>
           </p:cNvPicPr>
@@ -10591,7 +9521,7 @@
       </p:pic>
       <p:sp>
         <p:nvSpPr>
-          <p:cNvPr id="11" name="TextBox 10"/>
+          <p:cNvPr id="10" name="TextBox 9"/>
           <p:cNvSpPr txBox="1"/>
           <p:nvPr/>
         </p:nvSpPr>
@@ -10626,7 +9556,7 @@
       </p:sp>
       <p:pic>
         <p:nvPicPr>
-          <p:cNvPr id="12" name="Picture 11" descr="2effa420194315b0.png"/>
+          <p:cNvPr id="11" name="Picture 10" descr="2effa420194315b0.png"/>
           <p:cNvPicPr>
             <a:picLocks noChangeAspect="1"/>
           </p:cNvPicPr>
@@ -10650,7 +9580,7 @@
       </p:pic>
       <p:sp>
         <p:nvSpPr>
-          <p:cNvPr id="13" name="TextBox 12"/>
+          <p:cNvPr id="12" name="TextBox 11"/>
           <p:cNvSpPr txBox="1"/>
           <p:nvPr/>
         </p:nvSpPr>
@@ -10685,7 +9615,7 @@
       </p:sp>
       <p:pic>
         <p:nvPicPr>
-          <p:cNvPr id="14" name="Picture 13" descr="d8c25bd356e9b5d6.png"/>
+          <p:cNvPr id="13" name="Picture 12" descr="d8c25bd356e9b5d6.png"/>
           <p:cNvPicPr>
             <a:picLocks noChangeAspect="1"/>
           </p:cNvPicPr>
@@ -10709,7 +9639,7 @@
       </p:pic>
       <p:sp>
         <p:nvSpPr>
-          <p:cNvPr id="15" name="TextBox 14"/>
+          <p:cNvPr id="14" name="TextBox 13"/>
           <p:cNvSpPr txBox="1"/>
           <p:nvPr/>
         </p:nvSpPr>
@@ -10744,7 +9674,7 @@
       </p:sp>
       <p:sp>
         <p:nvSpPr>
-          <p:cNvPr id="16" name="TextBox 15"/>
+          <p:cNvPr id="15" name="TextBox 14"/>
           <p:cNvSpPr txBox="1"/>
           <p:nvPr/>
         </p:nvSpPr>
@@ -10779,7 +9709,7 @@
       </p:sp>
       <p:sp>
         <p:nvSpPr>
-          <p:cNvPr id="17" name="TextBox 16"/>
+          <p:cNvPr id="16" name="TextBox 15"/>
           <p:cNvSpPr txBox="1"/>
           <p:nvPr/>
         </p:nvSpPr>
@@ -10823,7 +9753,7 @@
       </p:sp>
       <p:sp>
         <p:nvSpPr>
-          <p:cNvPr id="18" name="TextBox 17"/>
+          <p:cNvPr id="17" name="TextBox 16"/>
           <p:cNvSpPr txBox="1"/>
           <p:nvPr/>
         </p:nvSpPr>
@@ -10867,7 +9797,7 @@
       </p:sp>
       <p:sp>
         <p:nvSpPr>
-          <p:cNvPr id="19" name="TextBox 18"/>
+          <p:cNvPr id="18" name="TextBox 17"/>
           <p:cNvSpPr txBox="1"/>
           <p:nvPr/>
         </p:nvSpPr>
@@ -10911,7 +9841,7 @@
       </p:sp>
       <p:sp>
         <p:nvSpPr>
-          <p:cNvPr id="20" name="TextBox 19"/>
+          <p:cNvPr id="19" name="TextBox 18"/>
           <p:cNvSpPr txBox="1"/>
           <p:nvPr/>
         </p:nvSpPr>
@@ -10955,7 +9885,7 @@
       </p:sp>
       <p:sp>
         <p:nvSpPr>
-          <p:cNvPr id="21" name="TextBox 20"/>
+          <p:cNvPr id="20" name="TextBox 19"/>
           <p:cNvSpPr txBox="1"/>
           <p:nvPr/>
         </p:nvSpPr>
@@ -11111,44 +10041,9 @@
           </a:fontRef>
         </p:style>
       </p:cxnSp>
-      <p:sp>
-        <p:nvSpPr>
-          <p:cNvPr id="5" name="TextBox 4"/>
-          <p:cNvSpPr txBox="1"/>
-          <p:nvPr/>
-        </p:nvSpPr>
-        <p:spPr>
-          <a:xfrm>
-            <a:off x="777240" y="1261872"/>
-            <a:ext cx="10607040" cy="310896"/>
-          </a:xfrm>
-          <a:prstGeom prst="rect">
-            <a:avLst/>
-          </a:prstGeom>
-          <a:noFill/>
-        </p:spPr>
-        <p:txBody>
-          <a:bodyPr wrap="square" lIns="45720" rIns="45720" tIns="18288" bIns="18288" anchor="t">
-            <a:spAutoFit/>
-          </a:bodyPr>
-          <a:lstStyle/>
-          <a:p>
-            <a:pPr algn="l"/>
-            <a:r>
-              <a:rPr sz="1700" b="0" i="1">
-                <a:solidFill>
-                  <a:srgbClr val="6B6B6B"/>
-                </a:solidFill>
-                <a:latin typeface="Century Schoolbook"/>
-              </a:rPr>
-              <a:t>Answer.</a:t>
-            </a:r>
-          </a:p>
-        </p:txBody>
-      </p:sp>
       <p:cxnSp>
         <p:nvCxnSpPr>
-          <p:cNvPr id="6" name="Connector 5"/>
+          <p:cNvPr id="5" name="Connector 4"/>
           <p:cNvCxnSpPr/>
           <p:nvPr/>
         </p:nvCxnSpPr>
@@ -11183,7 +10078,7 @@
       </p:cxnSp>
       <p:sp>
         <p:nvSpPr>
-          <p:cNvPr id="7" name="TextBox 6"/>
+          <p:cNvPr id="6" name="TextBox 5"/>
           <p:cNvSpPr txBox="1"/>
           <p:nvPr/>
         </p:nvSpPr>
@@ -11218,7 +10113,7 @@
       </p:sp>
       <p:sp>
         <p:nvSpPr>
-          <p:cNvPr id="8" name="TextBox 7"/>
+          <p:cNvPr id="7" name="TextBox 6"/>
           <p:cNvSpPr txBox="1"/>
           <p:nvPr/>
         </p:nvSpPr>
@@ -11253,7 +10148,7 @@
       </p:sp>
       <p:sp>
         <p:nvSpPr>
-          <p:cNvPr id="9" name="TextBox 8"/>
+          <p:cNvPr id="8" name="TextBox 7"/>
           <p:cNvSpPr txBox="1"/>
           <p:nvPr/>
         </p:nvSpPr>
@@ -11288,7 +10183,7 @@
       </p:sp>
       <p:pic>
         <p:nvPicPr>
-          <p:cNvPr id="10" name="Picture 9" descr="9a895d34bc456d65.png"/>
+          <p:cNvPr id="9" name="Picture 8" descr="9a895d34bc456d65.png"/>
           <p:cNvPicPr>
             <a:picLocks noChangeAspect="1"/>
           </p:cNvPicPr>
@@ -11312,7 +10207,7 @@
       </p:pic>
       <p:sp>
         <p:nvSpPr>
-          <p:cNvPr id="11" name="TextBox 10"/>
+          <p:cNvPr id="10" name="TextBox 9"/>
           <p:cNvSpPr txBox="1"/>
           <p:nvPr/>
         </p:nvSpPr>
@@ -11347,7 +10242,7 @@
       </p:sp>
       <p:pic>
         <p:nvPicPr>
-          <p:cNvPr id="12" name="Picture 11" descr="2effa420194315b0.png"/>
+          <p:cNvPr id="11" name="Picture 10" descr="2effa420194315b0.png"/>
           <p:cNvPicPr>
             <a:picLocks noChangeAspect="1"/>
           </p:cNvPicPr>
@@ -11371,7 +10266,7 @@
       </p:pic>
       <p:sp>
         <p:nvSpPr>
-          <p:cNvPr id="13" name="TextBox 12"/>
+          <p:cNvPr id="12" name="TextBox 11"/>
           <p:cNvSpPr txBox="1"/>
           <p:nvPr/>
         </p:nvSpPr>
@@ -11406,7 +10301,7 @@
       </p:sp>
       <p:pic>
         <p:nvPicPr>
-          <p:cNvPr id="14" name="Picture 13" descr="d8c25bd356e9b5d6.png"/>
+          <p:cNvPr id="13" name="Picture 12" descr="d8c25bd356e9b5d6.png"/>
           <p:cNvPicPr>
             <a:picLocks noChangeAspect="1"/>
           </p:cNvPicPr>
@@ -11430,7 +10325,7 @@
       </p:pic>
       <p:sp>
         <p:nvSpPr>
-          <p:cNvPr id="15" name="TextBox 14"/>
+          <p:cNvPr id="14" name="TextBox 13"/>
           <p:cNvSpPr txBox="1"/>
           <p:nvPr/>
         </p:nvSpPr>
@@ -11465,7 +10360,7 @@
       </p:sp>
       <p:sp>
         <p:nvSpPr>
-          <p:cNvPr id="16" name="TextBox 15"/>
+          <p:cNvPr id="15" name="TextBox 14"/>
           <p:cNvSpPr txBox="1"/>
           <p:nvPr/>
         </p:nvSpPr>
@@ -11500,7 +10395,7 @@
       </p:sp>
       <p:sp>
         <p:nvSpPr>
-          <p:cNvPr id="17" name="TextBox 16"/>
+          <p:cNvPr id="16" name="TextBox 15"/>
           <p:cNvSpPr txBox="1"/>
           <p:nvPr/>
         </p:nvSpPr>
@@ -11544,7 +10439,7 @@
       </p:sp>
       <p:sp>
         <p:nvSpPr>
-          <p:cNvPr id="18" name="TextBox 17"/>
+          <p:cNvPr id="17" name="TextBox 16"/>
           <p:cNvSpPr txBox="1"/>
           <p:nvPr/>
         </p:nvSpPr>
@@ -11588,7 +10483,7 @@
       </p:sp>
       <p:sp>
         <p:nvSpPr>
-          <p:cNvPr id="19" name="TextBox 18"/>
+          <p:cNvPr id="18" name="TextBox 17"/>
           <p:cNvSpPr txBox="1"/>
           <p:nvPr/>
         </p:nvSpPr>
@@ -11632,7 +10527,7 @@
       </p:sp>
       <p:sp>
         <p:nvSpPr>
-          <p:cNvPr id="20" name="TextBox 19"/>
+          <p:cNvPr id="19" name="TextBox 18"/>
           <p:cNvSpPr txBox="1"/>
           <p:nvPr/>
         </p:nvSpPr>
@@ -11676,7 +10571,7 @@
       </p:sp>
       <p:sp>
         <p:nvSpPr>
-          <p:cNvPr id="21" name="TextBox 20"/>
+          <p:cNvPr id="20" name="TextBox 19"/>
           <p:cNvSpPr txBox="1"/>
           <p:nvPr/>
         </p:nvSpPr>
@@ -11832,44 +10727,9 @@
           </a:fontRef>
         </p:style>
       </p:cxnSp>
-      <p:sp>
-        <p:nvSpPr>
-          <p:cNvPr id="5" name="TextBox 4"/>
-          <p:cNvSpPr txBox="1"/>
-          <p:nvPr/>
-        </p:nvSpPr>
-        <p:spPr>
-          <a:xfrm>
-            <a:off x="777240" y="1261872"/>
-            <a:ext cx="10607040" cy="310896"/>
-          </a:xfrm>
-          <a:prstGeom prst="rect">
-            <a:avLst/>
-          </a:prstGeom>
-          <a:noFill/>
-        </p:spPr>
-        <p:txBody>
-          <a:bodyPr wrap="square" lIns="45720" rIns="45720" tIns="18288" bIns="18288" anchor="t">
-            <a:spAutoFit/>
-          </a:bodyPr>
-          <a:lstStyle/>
-          <a:p>
-            <a:pPr algn="l"/>
-            <a:r>
-              <a:rPr sz="1700" b="0" i="1">
-                <a:solidFill>
-                  <a:srgbClr val="6B6B6B"/>
-                </a:solidFill>
-                <a:latin typeface="Century Schoolbook"/>
-              </a:rPr>
-              <a:t>Boards up on three.</a:t>
-            </a:r>
-          </a:p>
-        </p:txBody>
-      </p:sp>
       <p:cxnSp>
         <p:nvCxnSpPr>
-          <p:cNvPr id="6" name="Connector 5"/>
+          <p:cNvPr id="5" name="Connector 4"/>
           <p:cNvCxnSpPr/>
           <p:nvPr/>
         </p:nvCxnSpPr>
@@ -11904,7 +10764,7 @@
       </p:cxnSp>
       <p:sp>
         <p:nvSpPr>
-          <p:cNvPr id="7" name="TextBox 6"/>
+          <p:cNvPr id="6" name="TextBox 5"/>
           <p:cNvSpPr txBox="1"/>
           <p:nvPr/>
         </p:nvSpPr>
@@ -11939,7 +10799,7 @@
       </p:sp>
       <p:sp>
         <p:nvSpPr>
-          <p:cNvPr id="8" name="TextBox 7"/>
+          <p:cNvPr id="7" name="TextBox 6"/>
           <p:cNvSpPr txBox="1"/>
           <p:nvPr/>
         </p:nvSpPr>
@@ -11974,7 +10834,7 @@
       </p:sp>
       <p:sp>
         <p:nvSpPr>
-          <p:cNvPr id="9" name="TextBox 8"/>
+          <p:cNvPr id="8" name="TextBox 7"/>
           <p:cNvSpPr txBox="1"/>
           <p:nvPr/>
         </p:nvSpPr>
@@ -12009,7 +10869,7 @@
       </p:sp>
       <p:sp>
         <p:nvSpPr>
-          <p:cNvPr id="10" name="TextBox 9"/>
+          <p:cNvPr id="9" name="TextBox 8"/>
           <p:cNvSpPr txBox="1"/>
           <p:nvPr/>
         </p:nvSpPr>
@@ -12044,7 +10904,7 @@
       </p:sp>
       <p:sp>
         <p:nvSpPr>
-          <p:cNvPr id="11" name="TextBox 10"/>
+          <p:cNvPr id="10" name="TextBox 9"/>
           <p:cNvSpPr txBox="1"/>
           <p:nvPr/>
         </p:nvSpPr>
@@ -12079,7 +10939,7 @@
       </p:sp>
       <p:sp>
         <p:nvSpPr>
-          <p:cNvPr id="12" name="TextBox 11"/>
+          <p:cNvPr id="11" name="TextBox 10"/>
           <p:cNvSpPr txBox="1"/>
           <p:nvPr/>
         </p:nvSpPr>
@@ -12123,7 +10983,7 @@
       </p:sp>
       <p:sp>
         <p:nvSpPr>
-          <p:cNvPr id="13" name="TextBox 12"/>
+          <p:cNvPr id="12" name="TextBox 11"/>
           <p:cNvSpPr txBox="1"/>
           <p:nvPr/>
         </p:nvSpPr>
@@ -12185,7 +11045,7 @@
       </p:sp>
       <p:sp>
         <p:nvSpPr>
-          <p:cNvPr id="14" name="TextBox 13"/>
+          <p:cNvPr id="13" name="TextBox 12"/>
           <p:cNvSpPr txBox="1"/>
           <p:nvPr/>
         </p:nvSpPr>
@@ -12247,7 +11107,7 @@
       </p:sp>
       <p:sp>
         <p:nvSpPr>
-          <p:cNvPr id="15" name="TextBox 14"/>
+          <p:cNvPr id="14" name="TextBox 13"/>
           <p:cNvSpPr txBox="1"/>
           <p:nvPr/>
         </p:nvSpPr>
@@ -12309,7 +11169,7 @@
       </p:sp>
       <p:sp>
         <p:nvSpPr>
-          <p:cNvPr id="16" name="TextBox 15"/>
+          <p:cNvPr id="15" name="TextBox 14"/>
           <p:cNvSpPr txBox="1"/>
           <p:nvPr/>
         </p:nvSpPr>
@@ -12465,44 +11325,9 @@
           </a:fontRef>
         </p:style>
       </p:cxnSp>
-      <p:sp>
-        <p:nvSpPr>
-          <p:cNvPr id="5" name="TextBox 4"/>
-          <p:cNvSpPr txBox="1"/>
-          <p:nvPr/>
-        </p:nvSpPr>
-        <p:spPr>
-          <a:xfrm>
-            <a:off x="777240" y="1261872"/>
-            <a:ext cx="10607040" cy="310896"/>
-          </a:xfrm>
-          <a:prstGeom prst="rect">
-            <a:avLst/>
-          </a:prstGeom>
-          <a:noFill/>
-        </p:spPr>
-        <p:txBody>
-          <a:bodyPr wrap="square" lIns="45720" rIns="45720" tIns="18288" bIns="18288" anchor="t">
-            <a:spAutoFit/>
-          </a:bodyPr>
-          <a:lstStyle/>
-          <a:p>
-            <a:pPr algn="l"/>
-            <a:r>
-              <a:rPr sz="1700" b="0" i="1">
-                <a:solidFill>
-                  <a:srgbClr val="6B6B6B"/>
-                </a:solidFill>
-                <a:latin typeface="Century Schoolbook"/>
-              </a:rPr>
-              <a:t>Answer.</a:t>
-            </a:r>
-          </a:p>
-        </p:txBody>
-      </p:sp>
       <p:cxnSp>
         <p:nvCxnSpPr>
-          <p:cNvPr id="6" name="Connector 5"/>
+          <p:cNvPr id="5" name="Connector 4"/>
           <p:cNvCxnSpPr/>
           <p:nvPr/>
         </p:nvCxnSpPr>
@@ -12537,7 +11362,7 @@
       </p:cxnSp>
       <p:sp>
         <p:nvSpPr>
-          <p:cNvPr id="7" name="TextBox 6"/>
+          <p:cNvPr id="6" name="TextBox 5"/>
           <p:cNvSpPr txBox="1"/>
           <p:nvPr/>
         </p:nvSpPr>
@@ -12572,7 +11397,7 @@
       </p:sp>
       <p:sp>
         <p:nvSpPr>
-          <p:cNvPr id="8" name="TextBox 7"/>
+          <p:cNvPr id="7" name="TextBox 6"/>
           <p:cNvSpPr txBox="1"/>
           <p:nvPr/>
         </p:nvSpPr>
@@ -12607,7 +11432,7 @@
       </p:sp>
       <p:sp>
         <p:nvSpPr>
-          <p:cNvPr id="9" name="TextBox 8"/>
+          <p:cNvPr id="8" name="TextBox 7"/>
           <p:cNvSpPr txBox="1"/>
           <p:nvPr/>
         </p:nvSpPr>
@@ -12642,7 +11467,7 @@
       </p:sp>
       <p:sp>
         <p:nvSpPr>
-          <p:cNvPr id="10" name="TextBox 9"/>
+          <p:cNvPr id="9" name="TextBox 8"/>
           <p:cNvSpPr txBox="1"/>
           <p:nvPr/>
         </p:nvSpPr>
@@ -12677,7 +11502,7 @@
       </p:sp>
       <p:sp>
         <p:nvSpPr>
-          <p:cNvPr id="11" name="TextBox 10"/>
+          <p:cNvPr id="10" name="TextBox 9"/>
           <p:cNvSpPr txBox="1"/>
           <p:nvPr/>
         </p:nvSpPr>
@@ -12712,7 +11537,7 @@
       </p:sp>
       <p:sp>
         <p:nvSpPr>
-          <p:cNvPr id="12" name="TextBox 11"/>
+          <p:cNvPr id="11" name="TextBox 10"/>
           <p:cNvSpPr txBox="1"/>
           <p:nvPr/>
         </p:nvSpPr>
@@ -12756,7 +11581,7 @@
       </p:sp>
       <p:sp>
         <p:nvSpPr>
-          <p:cNvPr id="13" name="TextBox 12"/>
+          <p:cNvPr id="12" name="TextBox 11"/>
           <p:cNvSpPr txBox="1"/>
           <p:nvPr/>
         </p:nvSpPr>
@@ -12818,7 +11643,7 @@
       </p:sp>
       <p:sp>
         <p:nvSpPr>
-          <p:cNvPr id="14" name="TextBox 13"/>
+          <p:cNvPr id="13" name="TextBox 12"/>
           <p:cNvSpPr txBox="1"/>
           <p:nvPr/>
         </p:nvSpPr>
@@ -12880,7 +11705,7 @@
       </p:sp>
       <p:sp>
         <p:nvSpPr>
-          <p:cNvPr id="15" name="TextBox 14"/>
+          <p:cNvPr id="14" name="TextBox 13"/>
           <p:cNvSpPr txBox="1"/>
           <p:nvPr/>
         </p:nvSpPr>
@@ -12942,7 +11767,7 @@
       </p:sp>
       <p:sp>
         <p:nvSpPr>
-          <p:cNvPr id="16" name="TextBox 15"/>
+          <p:cNvPr id="15" name="TextBox 14"/>
           <p:cNvSpPr txBox="1"/>
           <p:nvPr/>
         </p:nvSpPr>
@@ -13116,44 +11941,9 @@
           </a:fontRef>
         </p:style>
       </p:cxnSp>
-      <p:sp>
-        <p:nvSpPr>
-          <p:cNvPr id="5" name="TextBox 4"/>
-          <p:cNvSpPr txBox="1"/>
-          <p:nvPr/>
-        </p:nvSpPr>
-        <p:spPr>
-          <a:xfrm>
-            <a:off x="777240" y="1261872"/>
-            <a:ext cx="10607040" cy="310896"/>
-          </a:xfrm>
-          <a:prstGeom prst="rect">
-            <a:avLst/>
-          </a:prstGeom>
-          <a:noFill/>
-        </p:spPr>
-        <p:txBody>
-          <a:bodyPr wrap="square" lIns="45720" rIns="45720" tIns="18288" bIns="18288" anchor="t">
-            <a:spAutoFit/>
-          </a:bodyPr>
-          <a:lstStyle/>
-          <a:p>
-            <a:pPr algn="l"/>
-            <a:r>
-              <a:rPr sz="1700" b="0" i="1">
-                <a:solidFill>
-                  <a:srgbClr val="6B6B6B"/>
-                </a:solidFill>
-                <a:latin typeface="Century Schoolbook"/>
-              </a:rPr>
-              <a:t>Boards up on three.</a:t>
-            </a:r>
-          </a:p>
-        </p:txBody>
-      </p:sp>
       <p:cxnSp>
         <p:nvCxnSpPr>
-          <p:cNvPr id="6" name="Connector 5"/>
+          <p:cNvPr id="5" name="Connector 4"/>
           <p:cNvCxnSpPr/>
           <p:nvPr/>
         </p:nvCxnSpPr>
@@ -13188,7 +11978,7 @@
       </p:cxnSp>
       <p:sp>
         <p:nvSpPr>
-          <p:cNvPr id="7" name="TextBox 6"/>
+          <p:cNvPr id="6" name="TextBox 5"/>
           <p:cNvSpPr txBox="1"/>
           <p:nvPr/>
         </p:nvSpPr>
@@ -13223,7 +12013,7 @@
       </p:sp>
       <p:sp>
         <p:nvSpPr>
-          <p:cNvPr id="8" name="TextBox 7"/>
+          <p:cNvPr id="7" name="TextBox 6"/>
           <p:cNvSpPr txBox="1"/>
           <p:nvPr/>
         </p:nvSpPr>
@@ -13258,7 +12048,7 @@
       </p:sp>
       <p:sp>
         <p:nvSpPr>
-          <p:cNvPr id="9" name="TextBox 8"/>
+          <p:cNvPr id="8" name="TextBox 7"/>
           <p:cNvSpPr txBox="1"/>
           <p:nvPr/>
         </p:nvSpPr>
@@ -13293,7 +12083,7 @@
       </p:sp>
       <p:pic>
         <p:nvPicPr>
-          <p:cNvPr id="10" name="Picture 9" descr="68e9635cc791ae9a.png"/>
+          <p:cNvPr id="9" name="Picture 8" descr="68e9635cc791ae9a.png"/>
           <p:cNvPicPr>
             <a:picLocks noChangeAspect="1"/>
           </p:cNvPicPr>
@@ -13317,7 +12107,7 @@
       </p:pic>
       <p:sp>
         <p:nvSpPr>
-          <p:cNvPr id="11" name="TextBox 10"/>
+          <p:cNvPr id="10" name="TextBox 9"/>
           <p:cNvSpPr txBox="1"/>
           <p:nvPr/>
         </p:nvSpPr>
@@ -13352,7 +12142,7 @@
       </p:sp>
       <p:sp>
         <p:nvSpPr>
-          <p:cNvPr id="12" name="TextBox 11"/>
+          <p:cNvPr id="11" name="TextBox 10"/>
           <p:cNvSpPr txBox="1"/>
           <p:nvPr/>
         </p:nvSpPr>
@@ -13387,7 +12177,7 @@
       </p:sp>
       <p:sp>
         <p:nvSpPr>
-          <p:cNvPr id="13" name="TextBox 12"/>
+          <p:cNvPr id="12" name="TextBox 11"/>
           <p:cNvSpPr txBox="1"/>
           <p:nvPr/>
         </p:nvSpPr>
@@ -13416,41 +12206,6 @@
                 <a:latin typeface="Century Schoolbook"/>
               </a:rPr>
               <a:t>Answer it.</a:t>
-            </a:r>
-          </a:p>
-        </p:txBody>
-      </p:sp>
-      <p:sp>
-        <p:nvSpPr>
-          <p:cNvPr id="14" name="TextBox 13"/>
-          <p:cNvSpPr txBox="1"/>
-          <p:nvPr/>
-        </p:nvSpPr>
-        <p:spPr>
-          <a:xfrm>
-            <a:off x="777240" y="4828032"/>
-            <a:ext cx="10607040" cy="365760"/>
-          </a:xfrm>
-          <a:prstGeom prst="rect">
-            <a:avLst/>
-          </a:prstGeom>
-          <a:noFill/>
-        </p:spPr>
-        <p:txBody>
-          <a:bodyPr wrap="square" lIns="45720" rIns="45720" tIns="18288" bIns="18288" anchor="t">
-            <a:spAutoFit/>
-          </a:bodyPr>
-          <a:lstStyle/>
-          <a:p>
-            <a:pPr algn="ctr"/>
-            <a:r>
-              <a:rPr sz="1900" b="0" i="1">
-                <a:solidFill>
-                  <a:srgbClr val="6B6B6B"/>
-                </a:solidFill>
-                <a:latin typeface="Century Schoolbook"/>
-              </a:rPr>
-              <a:t>Round once, at the end.</a:t>
             </a:r>
           </a:p>
         </p:txBody>
@@ -13578,44 +12333,9 @@
           </a:fontRef>
         </p:style>
       </p:cxnSp>
-      <p:sp>
-        <p:nvSpPr>
-          <p:cNvPr id="5" name="TextBox 4"/>
-          <p:cNvSpPr txBox="1"/>
-          <p:nvPr/>
-        </p:nvSpPr>
-        <p:spPr>
-          <a:xfrm>
-            <a:off x="777240" y="1261872"/>
-            <a:ext cx="10607040" cy="310896"/>
-          </a:xfrm>
-          <a:prstGeom prst="rect">
-            <a:avLst/>
-          </a:prstGeom>
-          <a:noFill/>
-        </p:spPr>
-        <p:txBody>
-          <a:bodyPr wrap="square" lIns="45720" rIns="45720" tIns="18288" bIns="18288" anchor="t">
-            <a:spAutoFit/>
-          </a:bodyPr>
-          <a:lstStyle/>
-          <a:p>
-            <a:pPr algn="l"/>
-            <a:r>
-              <a:rPr sz="1700" b="0" i="1">
-                <a:solidFill>
-                  <a:srgbClr val="6B6B6B"/>
-                </a:solidFill>
-                <a:latin typeface="Century Schoolbook"/>
-              </a:rPr>
-              <a:t>Answer.</a:t>
-            </a:r>
-          </a:p>
-        </p:txBody>
-      </p:sp>
       <p:cxnSp>
         <p:nvCxnSpPr>
-          <p:cNvPr id="6" name="Connector 5"/>
+          <p:cNvPr id="5" name="Connector 4"/>
           <p:cNvCxnSpPr/>
           <p:nvPr/>
         </p:nvCxnSpPr>
@@ -13650,7 +12370,7 @@
       </p:cxnSp>
       <p:sp>
         <p:nvSpPr>
-          <p:cNvPr id="7" name="TextBox 6"/>
+          <p:cNvPr id="6" name="TextBox 5"/>
           <p:cNvSpPr txBox="1"/>
           <p:nvPr/>
         </p:nvSpPr>
@@ -13685,7 +12405,7 @@
       </p:sp>
       <p:sp>
         <p:nvSpPr>
-          <p:cNvPr id="8" name="TextBox 7"/>
+          <p:cNvPr id="7" name="TextBox 6"/>
           <p:cNvSpPr txBox="1"/>
           <p:nvPr/>
         </p:nvSpPr>
@@ -13720,7 +12440,7 @@
       </p:sp>
       <p:sp>
         <p:nvSpPr>
-          <p:cNvPr id="9" name="TextBox 8"/>
+          <p:cNvPr id="8" name="TextBox 7"/>
           <p:cNvSpPr txBox="1"/>
           <p:nvPr/>
         </p:nvSpPr>
@@ -13755,7 +12475,7 @@
       </p:sp>
       <p:pic>
         <p:nvPicPr>
-          <p:cNvPr id="10" name="Picture 9" descr="12e2a7d6e43363b4.png"/>
+          <p:cNvPr id="9" name="Picture 8" descr="12e2a7d6e43363b4.png"/>
           <p:cNvPicPr>
             <a:picLocks noChangeAspect="1"/>
           </p:cNvPicPr>
@@ -13779,7 +12499,7 @@
       </p:pic>
       <p:sp>
         <p:nvSpPr>
-          <p:cNvPr id="11" name="TextBox 10"/>
+          <p:cNvPr id="10" name="TextBox 9"/>
           <p:cNvSpPr txBox="1"/>
           <p:nvPr/>
         </p:nvSpPr>
@@ -13814,7 +12534,7 @@
       </p:sp>
       <p:sp>
         <p:nvSpPr>
-          <p:cNvPr id="12" name="TextBox 11"/>
+          <p:cNvPr id="11" name="TextBox 10"/>
           <p:cNvSpPr txBox="1"/>
           <p:nvPr/>
         </p:nvSpPr>
@@ -13849,42 +12569,7 @@
       </p:sp>
       <p:sp>
         <p:nvSpPr>
-          <p:cNvPr id="13" name="TextBox 12"/>
-          <p:cNvSpPr txBox="1"/>
-          <p:nvPr/>
-        </p:nvSpPr>
-        <p:spPr>
-          <a:xfrm>
-            <a:off x="1828800" y="3500959"/>
-            <a:ext cx="8503920" cy="548640"/>
-          </a:xfrm>
-          <a:prstGeom prst="rect">
-            <a:avLst/>
-          </a:prstGeom>
-          <a:noFill/>
-        </p:spPr>
-        <p:txBody>
-          <a:bodyPr wrap="square" lIns="45720" rIns="45720" tIns="18288" bIns="18288" anchor="t">
-            <a:spAutoFit/>
-          </a:bodyPr>
-          <a:lstStyle/>
-          <a:p>
-            <a:pPr algn="ctr"/>
-            <a:r>
-              <a:rPr sz="2400" b="0" i="0">
-                <a:solidFill>
-                  <a:srgbClr val="6B6B6B"/>
-                </a:solidFill>
-                <a:latin typeface="Century Schoolbook"/>
-              </a:rPr>
-              <a:t>6 × 14.1421…</a:t>
-            </a:r>
-          </a:p>
-        </p:txBody>
-      </p:sp>
-      <p:sp>
-        <p:nvSpPr>
-          <p:cNvPr id="14" name="TextBox 13"/>
+          <p:cNvPr id="12" name="TextBox 11"/>
           <p:cNvSpPr txBox="1"/>
           <p:nvPr/>
         </p:nvSpPr>
@@ -14040,44 +12725,9 @@
           </a:fontRef>
         </p:style>
       </p:cxnSp>
-      <p:sp>
-        <p:nvSpPr>
-          <p:cNvPr id="5" name="TextBox 4"/>
-          <p:cNvSpPr txBox="1"/>
-          <p:nvPr/>
-        </p:nvSpPr>
-        <p:spPr>
-          <a:xfrm>
-            <a:off x="777240" y="1261872"/>
-            <a:ext cx="10607040" cy="310896"/>
-          </a:xfrm>
-          <a:prstGeom prst="rect">
-            <a:avLst/>
-          </a:prstGeom>
-          <a:noFill/>
-        </p:spPr>
-        <p:txBody>
-          <a:bodyPr wrap="square" lIns="45720" rIns="45720" tIns="18288" bIns="18288" anchor="t">
-            <a:spAutoFit/>
-          </a:bodyPr>
-          <a:lstStyle/>
-          <a:p>
-            <a:pPr algn="l"/>
-            <a:r>
-              <a:rPr sz="1700" b="0" i="1">
-                <a:solidFill>
-                  <a:srgbClr val="6B6B6B"/>
-                </a:solidFill>
-                <a:latin typeface="Century Schoolbook"/>
-              </a:rPr>
-              <a:t>Boards up on three.</a:t>
-            </a:r>
-          </a:p>
-        </p:txBody>
-      </p:sp>
       <p:cxnSp>
         <p:nvCxnSpPr>
-          <p:cNvPr id="6" name="Connector 5"/>
+          <p:cNvPr id="5" name="Connector 4"/>
           <p:cNvCxnSpPr/>
           <p:nvPr/>
         </p:nvCxnSpPr>
@@ -14112,7 +12762,7 @@
       </p:cxnSp>
       <p:sp>
         <p:nvSpPr>
-          <p:cNvPr id="7" name="TextBox 6"/>
+          <p:cNvPr id="6" name="TextBox 5"/>
           <p:cNvSpPr txBox="1"/>
           <p:nvPr/>
         </p:nvSpPr>
@@ -14147,7 +12797,7 @@
       </p:sp>
       <p:sp>
         <p:nvSpPr>
-          <p:cNvPr id="8" name="TextBox 7"/>
+          <p:cNvPr id="7" name="TextBox 6"/>
           <p:cNvSpPr txBox="1"/>
           <p:nvPr/>
         </p:nvSpPr>
@@ -14182,7 +12832,7 @@
       </p:sp>
       <p:sp>
         <p:nvSpPr>
-          <p:cNvPr id="9" name="TextBox 8"/>
+          <p:cNvPr id="8" name="TextBox 7"/>
           <p:cNvSpPr txBox="1"/>
           <p:nvPr/>
         </p:nvSpPr>
@@ -14217,7 +12867,7 @@
       </p:sp>
       <p:pic>
         <p:nvPicPr>
-          <p:cNvPr id="10" name="Picture 9" descr="63c59621754cfcaf.png"/>
+          <p:cNvPr id="9" name="Picture 8" descr="63c59621754cfcaf.png"/>
           <p:cNvPicPr>
             <a:picLocks noChangeAspect="1"/>
           </p:cNvPicPr>
@@ -14241,7 +12891,7 @@
       </p:pic>
       <p:sp>
         <p:nvSpPr>
-          <p:cNvPr id="11" name="TextBox 10"/>
+          <p:cNvPr id="10" name="TextBox 9"/>
           <p:cNvSpPr txBox="1"/>
           <p:nvPr/>
         </p:nvSpPr>
@@ -14276,7 +12926,7 @@
       </p:sp>
       <p:pic>
         <p:nvPicPr>
-          <p:cNvPr id="12" name="Picture 11" descr="0fd02e8179cc96ef.png"/>
+          <p:cNvPr id="11" name="Picture 10" descr="0fd02e8179cc96ef.png"/>
           <p:cNvPicPr>
             <a:picLocks noChangeAspect="1"/>
           </p:cNvPicPr>
@@ -14300,7 +12950,7 @@
       </p:pic>
       <p:sp>
         <p:nvSpPr>
-          <p:cNvPr id="13" name="TextBox 12"/>
+          <p:cNvPr id="12" name="TextBox 11"/>
           <p:cNvSpPr txBox="1"/>
           <p:nvPr/>
         </p:nvSpPr>
@@ -14335,7 +12985,7 @@
       </p:sp>
       <p:pic>
         <p:nvPicPr>
-          <p:cNvPr id="14" name="Picture 13" descr="90e8bcce6a738962.png"/>
+          <p:cNvPr id="13" name="Picture 12" descr="90e8bcce6a738962.png"/>
           <p:cNvPicPr>
             <a:picLocks noChangeAspect="1"/>
           </p:cNvPicPr>
@@ -14359,7 +13009,7 @@
       </p:pic>
       <p:sp>
         <p:nvSpPr>
-          <p:cNvPr id="15" name="TextBox 14"/>
+          <p:cNvPr id="14" name="TextBox 13"/>
           <p:cNvSpPr txBox="1"/>
           <p:nvPr/>
         </p:nvSpPr>
@@ -14394,7 +13044,7 @@
       </p:sp>
       <p:pic>
         <p:nvPicPr>
-          <p:cNvPr id="16" name="Picture 15" descr="07fcb1bbd55c697d.png"/>
+          <p:cNvPr id="15" name="Picture 14" descr="07fcb1bbd55c697d.png"/>
           <p:cNvPicPr>
             <a:picLocks noChangeAspect="1"/>
           </p:cNvPicPr>
@@ -14418,7 +13068,7 @@
       </p:pic>
       <p:sp>
         <p:nvSpPr>
-          <p:cNvPr id="17" name="TextBox 16"/>
+          <p:cNvPr id="16" name="TextBox 15"/>
           <p:cNvSpPr txBox="1"/>
           <p:nvPr/>
         </p:nvSpPr>
@@ -14453,7 +13103,7 @@
       </p:sp>
       <p:sp>
         <p:nvSpPr>
-          <p:cNvPr id="18" name="TextBox 17"/>
+          <p:cNvPr id="17" name="TextBox 16"/>
           <p:cNvSpPr txBox="1"/>
           <p:nvPr/>
         </p:nvSpPr>
@@ -14482,41 +13132,6 @@
                 <a:latin typeface="Century Schoolbook"/>
               </a:rPr>
               <a:t>Answer it.</a:t>
-            </a:r>
-          </a:p>
-        </p:txBody>
-      </p:sp>
-      <p:sp>
-        <p:nvSpPr>
-          <p:cNvPr id="19" name="TextBox 18"/>
-          <p:cNvSpPr txBox="1"/>
-          <p:nvPr/>
-        </p:nvSpPr>
-        <p:spPr>
-          <a:xfrm>
-            <a:off x="777240" y="4828032"/>
-            <a:ext cx="10607040" cy="365760"/>
-          </a:xfrm>
-          <a:prstGeom prst="rect">
-            <a:avLst/>
-          </a:prstGeom>
-          <a:noFill/>
-        </p:spPr>
-        <p:txBody>
-          <a:bodyPr wrap="square" lIns="45720" rIns="45720" tIns="18288" bIns="18288" anchor="t">
-            <a:spAutoFit/>
-          </a:bodyPr>
-          <a:lstStyle/>
-          <a:p>
-            <a:pPr algn="ctr"/>
-            <a:r>
-              <a:rPr sz="1900" b="0" i="1">
-                <a:solidFill>
-                  <a:srgbClr val="6B6B6B"/>
-                </a:solidFill>
-                <a:latin typeface="Century Schoolbook"/>
-              </a:rPr>
-              <a:t>Finish the top first.</a:t>
             </a:r>
           </a:p>
         </p:txBody>
@@ -14644,44 +13259,9 @@
           </a:fontRef>
         </p:style>
       </p:cxnSp>
-      <p:sp>
-        <p:nvSpPr>
-          <p:cNvPr id="5" name="TextBox 4"/>
-          <p:cNvSpPr txBox="1"/>
-          <p:nvPr/>
-        </p:nvSpPr>
-        <p:spPr>
-          <a:xfrm>
-            <a:off x="777240" y="1261872"/>
-            <a:ext cx="10607040" cy="310896"/>
-          </a:xfrm>
-          <a:prstGeom prst="rect">
-            <a:avLst/>
-          </a:prstGeom>
-          <a:noFill/>
-        </p:spPr>
-        <p:txBody>
-          <a:bodyPr wrap="square" lIns="45720" rIns="45720" tIns="18288" bIns="18288" anchor="t">
-            <a:spAutoFit/>
-          </a:bodyPr>
-          <a:lstStyle/>
-          <a:p>
-            <a:pPr algn="l"/>
-            <a:r>
-              <a:rPr sz="1700" b="0" i="1">
-                <a:solidFill>
-                  <a:srgbClr val="6B6B6B"/>
-                </a:solidFill>
-                <a:latin typeface="Century Schoolbook"/>
-              </a:rPr>
-              <a:t>Answers.</a:t>
-            </a:r>
-          </a:p>
-        </p:txBody>
-      </p:sp>
       <p:cxnSp>
         <p:nvCxnSpPr>
-          <p:cNvPr id="6" name="Connector 5"/>
+          <p:cNvPr id="5" name="Connector 4"/>
           <p:cNvCxnSpPr/>
           <p:nvPr/>
         </p:nvCxnSpPr>
@@ -14716,7 +13296,7 @@
       </p:cxnSp>
       <p:sp>
         <p:nvSpPr>
-          <p:cNvPr id="7" name="TextBox 6"/>
+          <p:cNvPr id="6" name="TextBox 5"/>
           <p:cNvSpPr txBox="1"/>
           <p:nvPr/>
         </p:nvSpPr>
@@ -14751,7 +13331,7 @@
       </p:sp>
       <p:sp>
         <p:nvSpPr>
-          <p:cNvPr id="8" name="TextBox 7"/>
+          <p:cNvPr id="7" name="TextBox 6"/>
           <p:cNvSpPr txBox="1"/>
           <p:nvPr/>
         </p:nvSpPr>
@@ -14786,13 +13366,13 @@
       </p:sp>
       <p:sp>
         <p:nvSpPr>
-          <p:cNvPr id="9" name="TextBox 8"/>
-          <p:cNvSpPr txBox="1"/>
-          <p:nvPr/>
-        </p:nvSpPr>
-        <p:spPr>
-          <a:xfrm>
-            <a:off x="1874519" y="1760220"/>
+          <p:cNvPr id="8" name="TextBox 7"/>
+          <p:cNvSpPr txBox="1"/>
+          <p:nvPr/>
+        </p:nvSpPr>
+        <p:spPr>
+          <a:xfrm>
+            <a:off x="1874519" y="1440180"/>
             <a:ext cx="720605" cy="457200"/>
           </a:xfrm>
           <a:prstGeom prst="rect">
@@ -14821,7 +13401,7 @@
       </p:sp>
       <p:pic>
         <p:nvPicPr>
-          <p:cNvPr id="10" name="Picture 9" descr="a3bfe14101224aaf.png"/>
+          <p:cNvPr id="9" name="Picture 8" descr="a3bfe14101224aaf.png"/>
           <p:cNvPicPr>
             <a:picLocks noChangeAspect="1"/>
           </p:cNvPicPr>
@@ -14835,7 +13415,7 @@
         </p:blipFill>
         <p:spPr>
           <a:xfrm>
-            <a:off x="2457965" y="1821180"/>
+            <a:off x="2457965" y="1501140"/>
             <a:ext cx="1554480" cy="335280"/>
           </a:xfrm>
           <a:prstGeom prst="rect">
@@ -14845,13 +13425,13 @@
       </p:pic>
       <p:sp>
         <p:nvSpPr>
-          <p:cNvPr id="11" name="TextBox 10"/>
-          <p:cNvSpPr txBox="1"/>
-          <p:nvPr/>
-        </p:nvSpPr>
-        <p:spPr>
-          <a:xfrm>
-            <a:off x="4561085" y="1760220"/>
+          <p:cNvPr id="10" name="TextBox 9"/>
+          <p:cNvSpPr txBox="1"/>
+          <p:nvPr/>
+        </p:nvSpPr>
+        <p:spPr>
+          <a:xfrm>
+            <a:off x="4561085" y="1440180"/>
             <a:ext cx="388052" cy="457200"/>
           </a:xfrm>
           <a:prstGeom prst="rect">
@@ -14880,13 +13460,13 @@
       </p:sp>
       <p:sp>
         <p:nvSpPr>
-          <p:cNvPr id="12" name="TextBox 11"/>
-          <p:cNvSpPr txBox="1"/>
-          <p:nvPr/>
-        </p:nvSpPr>
-        <p:spPr>
-          <a:xfrm>
-            <a:off x="1874519" y="2372868"/>
+          <p:cNvPr id="11" name="TextBox 10"/>
+          <p:cNvSpPr txBox="1"/>
+          <p:nvPr/>
+        </p:nvSpPr>
+        <p:spPr>
+          <a:xfrm>
+            <a:off x="1874519" y="2052828"/>
             <a:ext cx="726811" cy="457200"/>
           </a:xfrm>
           <a:prstGeom prst="rect">
@@ -14915,7 +13495,7 @@
       </p:sp>
       <p:pic>
         <p:nvPicPr>
-          <p:cNvPr id="13" name="Picture 12" descr="a627cc56d1241098.png"/>
+          <p:cNvPr id="12" name="Picture 11" descr="a627cc56d1241098.png"/>
           <p:cNvPicPr>
             <a:picLocks noChangeAspect="1"/>
           </p:cNvPicPr>
@@ -14929,7 +13509,7 @@
         </p:blipFill>
         <p:spPr>
           <a:xfrm>
-            <a:off x="2464171" y="2397252"/>
+            <a:off x="2464171" y="2077212"/>
             <a:ext cx="1588008" cy="408432"/>
           </a:xfrm>
           <a:prstGeom prst="rect">
@@ -14939,13 +13519,13 @@
       </p:pic>
       <p:sp>
         <p:nvSpPr>
-          <p:cNvPr id="14" name="TextBox 13"/>
-          <p:cNvSpPr txBox="1"/>
-          <p:nvPr/>
-        </p:nvSpPr>
-        <p:spPr>
-          <a:xfrm>
-            <a:off x="4600819" y="2372868"/>
+          <p:cNvPr id="13" name="TextBox 12"/>
+          <p:cNvSpPr txBox="1"/>
+          <p:nvPr/>
+        </p:nvSpPr>
+        <p:spPr>
+          <a:xfrm>
+            <a:off x="4600819" y="2052828"/>
             <a:ext cx="829616" cy="457200"/>
           </a:xfrm>
           <a:prstGeom prst="rect">
@@ -14974,13 +13554,13 @@
       </p:sp>
       <p:sp>
         <p:nvSpPr>
-          <p:cNvPr id="15" name="TextBox 14"/>
-          <p:cNvSpPr txBox="1"/>
-          <p:nvPr/>
-        </p:nvSpPr>
-        <p:spPr>
-          <a:xfrm>
-            <a:off x="1874519" y="3058668"/>
+          <p:cNvPr id="14" name="TextBox 13"/>
+          <p:cNvSpPr txBox="1"/>
+          <p:nvPr/>
+        </p:nvSpPr>
+        <p:spPr>
+          <a:xfrm>
+            <a:off x="1874519" y="2738628"/>
             <a:ext cx="3064939" cy="457200"/>
           </a:xfrm>
           <a:prstGeom prst="rect">
@@ -15009,7 +13589,7 @@
       </p:sp>
       <p:pic>
         <p:nvPicPr>
-          <p:cNvPr id="16" name="Picture 15" descr="ab0a0f8a819bef4a.png"/>
+          <p:cNvPr id="15" name="Picture 14" descr="ab0a0f8a819bef4a.png"/>
           <p:cNvPicPr>
             <a:picLocks noChangeAspect="1"/>
           </p:cNvPicPr>
@@ -15023,7 +13603,7 @@
         </p:blipFill>
         <p:spPr>
           <a:xfrm>
-            <a:off x="4802299" y="3008376"/>
+            <a:off x="4802299" y="2688336"/>
             <a:ext cx="780288" cy="557784"/>
           </a:xfrm>
           <a:prstGeom prst="rect">
@@ -15033,13 +13613,13 @@
       </p:pic>
       <p:sp>
         <p:nvSpPr>
-          <p:cNvPr id="17" name="TextBox 16"/>
-          <p:cNvSpPr txBox="1"/>
-          <p:nvPr/>
-        </p:nvSpPr>
-        <p:spPr>
-          <a:xfrm>
-            <a:off x="6131227" y="2985516"/>
+          <p:cNvPr id="16" name="TextBox 15"/>
+          <p:cNvSpPr txBox="1"/>
+          <p:nvPr/>
+        </p:nvSpPr>
+        <p:spPr>
+          <a:xfrm>
+            <a:off x="6131227" y="2665476"/>
             <a:ext cx="651876" cy="457200"/>
           </a:xfrm>
           <a:prstGeom prst="rect">
@@ -15068,13 +13648,13 @@
       </p:sp>
       <p:sp>
         <p:nvSpPr>
-          <p:cNvPr id="18" name="TextBox 17"/>
-          <p:cNvSpPr txBox="1"/>
-          <p:nvPr/>
-        </p:nvSpPr>
-        <p:spPr>
-          <a:xfrm>
-            <a:off x="1874519" y="3744468"/>
+          <p:cNvPr id="17" name="TextBox 16"/>
+          <p:cNvSpPr txBox="1"/>
+          <p:nvPr/>
+        </p:nvSpPr>
+        <p:spPr>
+          <a:xfrm>
+            <a:off x="1874519" y="3424428"/>
             <a:ext cx="2190435" cy="457200"/>
           </a:xfrm>
           <a:prstGeom prst="rect">
@@ -15103,7 +13683,7 @@
       </p:sp>
       <p:pic>
         <p:nvPicPr>
-          <p:cNvPr id="19" name="Picture 18" descr="0059e34534483f5d.png"/>
+          <p:cNvPr id="18" name="Picture 17" descr="0059e34534483f5d.png"/>
           <p:cNvPicPr>
             <a:picLocks noChangeAspect="1"/>
           </p:cNvPicPr>
@@ -15117,7 +13697,7 @@
         </p:blipFill>
         <p:spPr>
           <a:xfrm>
-            <a:off x="3927795" y="3834384"/>
+            <a:off x="3927795" y="3514344"/>
             <a:ext cx="432816" cy="277368"/>
           </a:xfrm>
           <a:prstGeom prst="rect">
@@ -15127,13 +13707,13 @@
       </p:pic>
       <p:sp>
         <p:nvSpPr>
-          <p:cNvPr id="20" name="TextBox 19"/>
-          <p:cNvSpPr txBox="1"/>
-          <p:nvPr/>
-        </p:nvSpPr>
-        <p:spPr>
-          <a:xfrm>
-            <a:off x="4360611" y="3744468"/>
+          <p:cNvPr id="19" name="TextBox 18"/>
+          <p:cNvSpPr txBox="1"/>
+          <p:nvPr/>
+        </p:nvSpPr>
+        <p:spPr>
+          <a:xfrm>
+            <a:off x="4360611" y="3424428"/>
             <a:ext cx="1328762" cy="457200"/>
           </a:xfrm>
           <a:prstGeom prst="rect">
@@ -15162,7 +13742,7 @@
       </p:sp>
       <p:pic>
         <p:nvPicPr>
-          <p:cNvPr id="21" name="Picture 20" descr="8be73e21dbd6851d.png"/>
+          <p:cNvPr id="20" name="Picture 19" descr="8be73e21dbd6851d.png"/>
           <p:cNvPicPr>
             <a:picLocks noChangeAspect="1"/>
           </p:cNvPicPr>
@@ -15176,7 +13756,7 @@
         </p:blipFill>
         <p:spPr>
           <a:xfrm>
-            <a:off x="5552213" y="3858768"/>
+            <a:off x="5552213" y="3538728"/>
             <a:ext cx="621792" cy="228600"/>
           </a:xfrm>
           <a:prstGeom prst="rect">
@@ -15186,13 +13766,13 @@
       </p:pic>
       <p:sp>
         <p:nvSpPr>
-          <p:cNvPr id="22" name="TextBox 21"/>
-          <p:cNvSpPr txBox="1"/>
-          <p:nvPr/>
-        </p:nvSpPr>
-        <p:spPr>
-          <a:xfrm>
-            <a:off x="6174005" y="3744468"/>
+          <p:cNvPr id="21" name="TextBox 20"/>
+          <p:cNvSpPr txBox="1"/>
+          <p:nvPr/>
+        </p:nvSpPr>
+        <p:spPr>
+          <a:xfrm>
+            <a:off x="6174005" y="3424428"/>
             <a:ext cx="296395" cy="457200"/>
           </a:xfrm>
           <a:prstGeom prst="rect">
@@ -15221,13 +13801,13 @@
       </p:sp>
       <p:sp>
         <p:nvSpPr>
-          <p:cNvPr id="23" name="TextBox 22"/>
-          <p:cNvSpPr txBox="1"/>
-          <p:nvPr/>
-        </p:nvSpPr>
-        <p:spPr>
-          <a:xfrm>
-            <a:off x="6881880" y="3744468"/>
+          <p:cNvPr id="22" name="TextBox 21"/>
+          <p:cNvSpPr txBox="1"/>
+          <p:nvPr/>
+        </p:nvSpPr>
+        <p:spPr>
+          <a:xfrm>
+            <a:off x="6881880" y="3424428"/>
             <a:ext cx="565792" cy="457200"/>
           </a:xfrm>
           <a:prstGeom prst="rect">
@@ -15377,44 +13957,9 @@
           </a:fontRef>
         </p:style>
       </p:cxnSp>
-      <p:sp>
-        <p:nvSpPr>
-          <p:cNvPr id="5" name="TextBox 4"/>
-          <p:cNvSpPr txBox="1"/>
-          <p:nvPr/>
-        </p:nvSpPr>
-        <p:spPr>
-          <a:xfrm>
-            <a:off x="777240" y="1261872"/>
-            <a:ext cx="10607040" cy="310896"/>
-          </a:xfrm>
-          <a:prstGeom prst="rect">
-            <a:avLst/>
-          </a:prstGeom>
-          <a:noFill/>
-        </p:spPr>
-        <p:txBody>
-          <a:bodyPr wrap="square" lIns="45720" rIns="45720" tIns="18288" bIns="18288" anchor="t">
-            <a:spAutoFit/>
-          </a:bodyPr>
-          <a:lstStyle/>
-          <a:p>
-            <a:pPr algn="l"/>
-            <a:r>
-              <a:rPr sz="1700" b="0" i="1">
-                <a:solidFill>
-                  <a:srgbClr val="6B6B6B"/>
-                </a:solidFill>
-                <a:latin typeface="Century Schoolbook"/>
-              </a:rPr>
-              <a:t>Answer.</a:t>
-            </a:r>
-          </a:p>
-        </p:txBody>
-      </p:sp>
       <p:cxnSp>
         <p:nvCxnSpPr>
-          <p:cNvPr id="6" name="Connector 5"/>
+          <p:cNvPr id="5" name="Connector 4"/>
           <p:cNvCxnSpPr/>
           <p:nvPr/>
         </p:nvCxnSpPr>
@@ -15449,7 +13994,7 @@
       </p:cxnSp>
       <p:sp>
         <p:nvSpPr>
-          <p:cNvPr id="7" name="TextBox 6"/>
+          <p:cNvPr id="6" name="TextBox 5"/>
           <p:cNvSpPr txBox="1"/>
           <p:nvPr/>
         </p:nvSpPr>
@@ -15484,7 +14029,7 @@
       </p:sp>
       <p:sp>
         <p:nvSpPr>
-          <p:cNvPr id="8" name="TextBox 7"/>
+          <p:cNvPr id="7" name="TextBox 6"/>
           <p:cNvSpPr txBox="1"/>
           <p:nvPr/>
         </p:nvSpPr>
@@ -15519,7 +14064,7 @@
       </p:sp>
       <p:sp>
         <p:nvSpPr>
-          <p:cNvPr id="9" name="TextBox 8"/>
+          <p:cNvPr id="8" name="TextBox 7"/>
           <p:cNvSpPr txBox="1"/>
           <p:nvPr/>
         </p:nvSpPr>
@@ -15554,7 +14099,7 @@
       </p:sp>
       <p:pic>
         <p:nvPicPr>
-          <p:cNvPr id="10" name="Picture 9" descr="e228efb5a3a6a777.png"/>
+          <p:cNvPr id="9" name="Picture 8" descr="e228efb5a3a6a777.png"/>
           <p:cNvPicPr>
             <a:picLocks noChangeAspect="1"/>
           </p:cNvPicPr>
@@ -15578,7 +14123,7 @@
       </p:pic>
       <p:sp>
         <p:nvSpPr>
-          <p:cNvPr id="11" name="TextBox 10"/>
+          <p:cNvPr id="10" name="TextBox 9"/>
           <p:cNvSpPr txBox="1"/>
           <p:nvPr/>
         </p:nvSpPr>
@@ -15613,7 +14158,7 @@
       </p:sp>
       <p:pic>
         <p:nvPicPr>
-          <p:cNvPr id="12" name="Picture 11" descr="9ac445d070005962.png"/>
+          <p:cNvPr id="11" name="Picture 10" descr="9ac445d070005962.png"/>
           <p:cNvPicPr>
             <a:picLocks noChangeAspect="1"/>
           </p:cNvPicPr>
@@ -15637,7 +14182,7 @@
       </p:pic>
       <p:sp>
         <p:nvSpPr>
-          <p:cNvPr id="13" name="TextBox 12"/>
+          <p:cNvPr id="12" name="TextBox 11"/>
           <p:cNvSpPr txBox="1"/>
           <p:nvPr/>
         </p:nvSpPr>
@@ -15672,7 +14217,7 @@
       </p:sp>
       <p:pic>
         <p:nvPicPr>
-          <p:cNvPr id="14" name="Picture 13" descr="d05130d66ecf91cb.png"/>
+          <p:cNvPr id="13" name="Picture 12" descr="d05130d66ecf91cb.png"/>
           <p:cNvPicPr>
             <a:picLocks noChangeAspect="1"/>
           </p:cNvPicPr>
@@ -15696,7 +14241,7 @@
       </p:pic>
       <p:sp>
         <p:nvSpPr>
-          <p:cNvPr id="15" name="TextBox 14"/>
+          <p:cNvPr id="14" name="TextBox 13"/>
           <p:cNvSpPr txBox="1"/>
           <p:nvPr/>
         </p:nvSpPr>
@@ -15731,7 +14276,7 @@
       </p:sp>
       <p:pic>
         <p:nvPicPr>
-          <p:cNvPr id="16" name="Picture 15" descr="23b44b96e089193a.png"/>
+          <p:cNvPr id="15" name="Picture 14" descr="23b44b96e089193a.png"/>
           <p:cNvPicPr>
             <a:picLocks noChangeAspect="1"/>
           </p:cNvPicPr>
@@ -15755,7 +14300,7 @@
       </p:pic>
       <p:sp>
         <p:nvSpPr>
-          <p:cNvPr id="17" name="TextBox 16"/>
+          <p:cNvPr id="16" name="TextBox 15"/>
           <p:cNvSpPr txBox="1"/>
           <p:nvPr/>
         </p:nvSpPr>
@@ -15790,42 +14335,7 @@
       </p:sp>
       <p:sp>
         <p:nvSpPr>
-          <p:cNvPr id="18" name="TextBox 17"/>
-          <p:cNvSpPr txBox="1"/>
-          <p:nvPr/>
-        </p:nvSpPr>
-        <p:spPr>
-          <a:xfrm>
-            <a:off x="1828800" y="3075431"/>
-            <a:ext cx="8503920" cy="548640"/>
-          </a:xfrm>
-          <a:prstGeom prst="rect">
-            <a:avLst/>
-          </a:prstGeom>
-          <a:noFill/>
-        </p:spPr>
-        <p:txBody>
-          <a:bodyPr wrap="square" lIns="45720" rIns="45720" tIns="18288" bIns="18288" anchor="t">
-            <a:spAutoFit/>
-          </a:bodyPr>
-          <a:lstStyle/>
-          <a:p>
-            <a:pPr algn="ctr"/>
-            <a:r>
-              <a:rPr sz="2400" b="0" i="0">
-                <a:solidFill>
-                  <a:srgbClr val="6B6B6B"/>
-                </a:solidFill>
-                <a:latin typeface="Century Schoolbook"/>
-              </a:rPr>
-              <a:t>45 over 5</a:t>
-            </a:r>
-          </a:p>
-        </p:txBody>
-      </p:sp>
-      <p:sp>
-        <p:nvSpPr>
-          <p:cNvPr id="19" name="TextBox 18"/>
+          <p:cNvPr id="17" name="TextBox 16"/>
           <p:cNvSpPr txBox="1"/>
           <p:nvPr/>
         </p:nvSpPr>
@@ -15981,44 +14491,9 @@
           </a:fontRef>
         </p:style>
       </p:cxnSp>
-      <p:sp>
-        <p:nvSpPr>
-          <p:cNvPr id="5" name="TextBox 4"/>
-          <p:cNvSpPr txBox="1"/>
-          <p:nvPr/>
-        </p:nvSpPr>
-        <p:spPr>
-          <a:xfrm>
-            <a:off x="777240" y="1261872"/>
-            <a:ext cx="10607040" cy="310896"/>
-          </a:xfrm>
-          <a:prstGeom prst="rect">
-            <a:avLst/>
-          </a:prstGeom>
-          <a:noFill/>
-        </p:spPr>
-        <p:txBody>
-          <a:bodyPr wrap="square" lIns="45720" rIns="45720" tIns="18288" bIns="18288" anchor="t">
-            <a:spAutoFit/>
-          </a:bodyPr>
-          <a:lstStyle/>
-          <a:p>
-            <a:pPr algn="l"/>
-            <a:r>
-              <a:rPr sz="1700" b="0" i="1">
-                <a:solidFill>
-                  <a:srgbClr val="6B6B6B"/>
-                </a:solidFill>
-                <a:latin typeface="Century Schoolbook"/>
-              </a:rPr>
-              <a:t>Take your time. Boards up when you have written it.</a:t>
-            </a:r>
-          </a:p>
-        </p:txBody>
-      </p:sp>
       <p:cxnSp>
         <p:nvCxnSpPr>
-          <p:cNvPr id="6" name="Connector 5"/>
+          <p:cNvPr id="5" name="Connector 4"/>
           <p:cNvCxnSpPr/>
           <p:nvPr/>
         </p:nvCxnSpPr>
@@ -16053,7 +14528,7 @@
       </p:cxnSp>
       <p:sp>
         <p:nvSpPr>
-          <p:cNvPr id="7" name="TextBox 6"/>
+          <p:cNvPr id="6" name="TextBox 5"/>
           <p:cNvSpPr txBox="1"/>
           <p:nvPr/>
         </p:nvSpPr>
@@ -16088,7 +14563,7 @@
       </p:sp>
       <p:sp>
         <p:nvSpPr>
-          <p:cNvPr id="8" name="TextBox 7"/>
+          <p:cNvPr id="7" name="TextBox 6"/>
           <p:cNvSpPr txBox="1"/>
           <p:nvPr/>
         </p:nvSpPr>
@@ -16123,7 +14598,7 @@
       </p:sp>
       <p:sp>
         <p:nvSpPr>
-          <p:cNvPr id="9" name="TextBox 8"/>
+          <p:cNvPr id="8" name="TextBox 7"/>
           <p:cNvSpPr txBox="1"/>
           <p:nvPr/>
         </p:nvSpPr>
@@ -16158,7 +14633,7 @@
       </p:sp>
       <p:sp>
         <p:nvSpPr>
-          <p:cNvPr id="10" name="TextBox 9"/>
+          <p:cNvPr id="9" name="TextBox 8"/>
           <p:cNvSpPr txBox="1"/>
           <p:nvPr/>
         </p:nvSpPr>
@@ -16193,7 +14668,7 @@
       </p:sp>
       <p:sp>
         <p:nvSpPr>
-          <p:cNvPr id="11" name="TextBox 10"/>
+          <p:cNvPr id="10" name="TextBox 9"/>
           <p:cNvSpPr txBox="1"/>
           <p:nvPr/>
         </p:nvSpPr>
@@ -16228,7 +14703,7 @@
       </p:sp>
       <p:sp>
         <p:nvSpPr>
-          <p:cNvPr id="12" name="TextBox 11"/>
+          <p:cNvPr id="11" name="TextBox 10"/>
           <p:cNvSpPr txBox="1"/>
           <p:nvPr/>
         </p:nvSpPr>
@@ -16257,41 +14732,6 @@
                 <a:latin typeface="Century Schoolbook"/>
               </a:rPr>
               <a:t>Write your answer in sentences.</a:t>
-            </a:r>
-          </a:p>
-        </p:txBody>
-      </p:sp>
-      <p:sp>
-        <p:nvSpPr>
-          <p:cNvPr id="13" name="TextBox 12"/>
-          <p:cNvSpPr txBox="1"/>
-          <p:nvPr/>
-        </p:nvSpPr>
-        <p:spPr>
-          <a:xfrm>
-            <a:off x="777240" y="4828032"/>
-            <a:ext cx="10607040" cy="365760"/>
-          </a:xfrm>
-          <a:prstGeom prst="rect">
-            <a:avLst/>
-          </a:prstGeom>
-          <a:noFill/>
-        </p:spPr>
-        <p:txBody>
-          <a:bodyPr wrap="square" lIns="45720" rIns="45720" tIns="18288" bIns="18288" anchor="t">
-            <a:spAutoFit/>
-          </a:bodyPr>
-          <a:lstStyle/>
-          <a:p>
-            <a:pPr algn="ctr"/>
-            <a:r>
-              <a:rPr sz="1900" b="0" i="1">
-                <a:solidFill>
-                  <a:srgbClr val="6B6B6B"/>
-                </a:solidFill>
-                <a:latin typeface="Century Schoolbook"/>
-              </a:rPr>
-              <a:t>The same three numbers, the same words.</a:t>
             </a:r>
           </a:p>
         </p:txBody>
@@ -16419,44 +14859,9 @@
           </a:fontRef>
         </p:style>
       </p:cxnSp>
-      <p:sp>
-        <p:nvSpPr>
-          <p:cNvPr id="5" name="TextBox 4"/>
-          <p:cNvSpPr txBox="1"/>
-          <p:nvPr/>
-        </p:nvSpPr>
-        <p:spPr>
-          <a:xfrm>
-            <a:off x="777240" y="1261872"/>
-            <a:ext cx="10607040" cy="310896"/>
-          </a:xfrm>
-          <a:prstGeom prst="rect">
-            <a:avLst/>
-          </a:prstGeom>
-          <a:noFill/>
-        </p:spPr>
-        <p:txBody>
-          <a:bodyPr wrap="square" lIns="45720" rIns="45720" tIns="18288" bIns="18288" anchor="t">
-            <a:spAutoFit/>
-          </a:bodyPr>
-          <a:lstStyle/>
-          <a:p>
-            <a:pPr algn="l"/>
-            <a:r>
-              <a:rPr sz="1700" b="0" i="1">
-                <a:solidFill>
-                  <a:srgbClr val="6B6B6B"/>
-                </a:solidFill>
-                <a:latin typeface="Century Schoolbook"/>
-              </a:rPr>
-              <a:t>Answer.</a:t>
-            </a:r>
-          </a:p>
-        </p:txBody>
-      </p:sp>
       <p:cxnSp>
         <p:nvCxnSpPr>
-          <p:cNvPr id="6" name="Connector 5"/>
+          <p:cNvPr id="5" name="Connector 4"/>
           <p:cNvCxnSpPr/>
           <p:nvPr/>
         </p:nvCxnSpPr>
@@ -16491,7 +14896,7 @@
       </p:cxnSp>
       <p:sp>
         <p:nvSpPr>
-          <p:cNvPr id="7" name="TextBox 6"/>
+          <p:cNvPr id="6" name="TextBox 5"/>
           <p:cNvSpPr txBox="1"/>
           <p:nvPr/>
         </p:nvSpPr>
@@ -16526,7 +14931,7 @@
       </p:sp>
       <p:sp>
         <p:nvSpPr>
-          <p:cNvPr id="8" name="TextBox 7"/>
+          <p:cNvPr id="7" name="TextBox 6"/>
           <p:cNvSpPr txBox="1"/>
           <p:nvPr/>
         </p:nvSpPr>
@@ -16561,7 +14966,7 @@
       </p:sp>
       <p:sp>
         <p:nvSpPr>
-          <p:cNvPr id="9" name="TextBox 8"/>
+          <p:cNvPr id="8" name="TextBox 7"/>
           <p:cNvSpPr txBox="1"/>
           <p:nvPr/>
         </p:nvSpPr>
@@ -16596,7 +15001,7 @@
       </p:sp>
       <p:sp>
         <p:nvSpPr>
-          <p:cNvPr id="10" name="TextBox 9"/>
+          <p:cNvPr id="9" name="TextBox 8"/>
           <p:cNvSpPr txBox="1"/>
           <p:nvPr/>
         </p:nvSpPr>
@@ -16631,7 +15036,7 @@
       </p:sp>
       <p:sp>
         <p:nvSpPr>
-          <p:cNvPr id="11" name="TextBox 10"/>
+          <p:cNvPr id="10" name="TextBox 9"/>
           <p:cNvSpPr txBox="1"/>
           <p:nvPr/>
         </p:nvSpPr>
@@ -16666,42 +15071,7 @@
       </p:sp>
       <p:sp>
         <p:nvSpPr>
-          <p:cNvPr id="12" name="TextBox 11"/>
-          <p:cNvSpPr txBox="1"/>
-          <p:nvPr/>
-        </p:nvSpPr>
-        <p:spPr>
-          <a:xfrm>
-            <a:off x="1828800" y="3712464"/>
-            <a:ext cx="8503920" cy="548640"/>
-          </a:xfrm>
-          <a:prstGeom prst="rect">
-            <a:avLst/>
-          </a:prstGeom>
-          <a:noFill/>
-        </p:spPr>
-        <p:txBody>
-          <a:bodyPr wrap="square" lIns="45720" rIns="45720" tIns="18288" bIns="18288" anchor="t">
-            <a:spAutoFit/>
-          </a:bodyPr>
-          <a:lstStyle/>
-          <a:p>
-            <a:pPr algn="ctr"/>
-            <a:r>
-              <a:rPr sz="2400" b="0" i="0">
-                <a:solidFill>
-                  <a:srgbClr val="6B6B6B"/>
-                </a:solidFill>
-                <a:latin typeface="Century Schoolbook"/>
-              </a:rPr>
-              <a:t>39 and 66</a:t>
-            </a:r>
-          </a:p>
-        </p:txBody>
-      </p:sp>
-      <p:sp>
-        <p:nvSpPr>
-          <p:cNvPr id="13" name="TextBox 12"/>
+          <p:cNvPr id="11" name="TextBox 10"/>
           <p:cNvSpPr txBox="1"/>
           <p:nvPr/>
         </p:nvSpPr>
@@ -16857,44 +15227,9 @@
           </a:fontRef>
         </p:style>
       </p:cxnSp>
-      <p:sp>
-        <p:nvSpPr>
-          <p:cNvPr id="5" name="TextBox 4"/>
-          <p:cNvSpPr txBox="1"/>
-          <p:nvPr/>
-        </p:nvSpPr>
-        <p:spPr>
-          <a:xfrm>
-            <a:off x="777240" y="1261872"/>
-            <a:ext cx="10607040" cy="310896"/>
-          </a:xfrm>
-          <a:prstGeom prst="rect">
-            <a:avLst/>
-          </a:prstGeom>
-          <a:noFill/>
-        </p:spPr>
-        <p:txBody>
-          <a:bodyPr wrap="square" lIns="45720" rIns="45720" tIns="18288" bIns="18288" anchor="t">
-            <a:spAutoFit/>
-          </a:bodyPr>
-          <a:lstStyle/>
-          <a:p>
-            <a:pPr algn="l"/>
-            <a:r>
-              <a:rPr sz="1700" b="0" i="1">
-                <a:solidFill>
-                  <a:srgbClr val="6B6B6B"/>
-                </a:solidFill>
-                <a:latin typeface="Century Schoolbook"/>
-              </a:rPr>
-              <a:t>Six questions. On your own, in silence.</a:t>
-            </a:r>
-          </a:p>
-        </p:txBody>
-      </p:sp>
       <p:cxnSp>
         <p:nvCxnSpPr>
-          <p:cNvPr id="6" name="Connector 5"/>
+          <p:cNvPr id="5" name="Connector 4"/>
           <p:cNvCxnSpPr/>
           <p:nvPr/>
         </p:nvCxnSpPr>
@@ -16929,7 +15264,7 @@
       </p:cxnSp>
       <p:sp>
         <p:nvSpPr>
-          <p:cNvPr id="7" name="TextBox 6"/>
+          <p:cNvPr id="6" name="TextBox 5"/>
           <p:cNvSpPr txBox="1"/>
           <p:nvPr/>
         </p:nvSpPr>
@@ -16964,7 +15299,7 @@
       </p:sp>
       <p:sp>
         <p:nvSpPr>
-          <p:cNvPr id="8" name="TextBox 7"/>
+          <p:cNvPr id="7" name="TextBox 6"/>
           <p:cNvSpPr txBox="1"/>
           <p:nvPr/>
         </p:nvSpPr>
@@ -16999,7 +15334,7 @@
       </p:sp>
       <p:sp>
         <p:nvSpPr>
-          <p:cNvPr id="9" name="TextBox 8"/>
+          <p:cNvPr id="8" name="TextBox 7"/>
           <p:cNvSpPr txBox="1"/>
           <p:nvPr/>
         </p:nvSpPr>
@@ -17034,7 +15369,7 @@
       </p:sp>
       <p:sp>
         <p:nvSpPr>
-          <p:cNvPr id="10" name="TextBox 9"/>
+          <p:cNvPr id="9" name="TextBox 8"/>
           <p:cNvSpPr txBox="1"/>
           <p:nvPr/>
         </p:nvSpPr>
@@ -17069,7 +15404,7 @@
       </p:sp>
       <p:sp>
         <p:nvSpPr>
-          <p:cNvPr id="11" name="TextBox 10"/>
+          <p:cNvPr id="10" name="TextBox 9"/>
           <p:cNvSpPr txBox="1"/>
           <p:nvPr/>
         </p:nvSpPr>
@@ -17104,7 +15439,7 @@
       </p:sp>
       <p:sp>
         <p:nvSpPr>
-          <p:cNvPr id="12" name="TextBox 11"/>
+          <p:cNvPr id="11" name="TextBox 10"/>
           <p:cNvSpPr txBox="1"/>
           <p:nvPr/>
         </p:nvSpPr>
@@ -17139,7 +15474,7 @@
       </p:sp>
       <p:sp>
         <p:nvSpPr>
-          <p:cNvPr id="13" name="TextBox 12"/>
+          <p:cNvPr id="12" name="TextBox 11"/>
           <p:cNvSpPr txBox="1"/>
           <p:nvPr/>
         </p:nvSpPr>
@@ -17174,7 +15509,7 @@
       </p:sp>
       <p:sp>
         <p:nvSpPr>
-          <p:cNvPr id="14" name="TextBox 13"/>
+          <p:cNvPr id="13" name="TextBox 12"/>
           <p:cNvSpPr txBox="1"/>
           <p:nvPr/>
         </p:nvSpPr>
@@ -17330,44 +15665,9 @@
           </a:fontRef>
         </p:style>
       </p:cxnSp>
-      <p:sp>
-        <p:nvSpPr>
-          <p:cNvPr id="5" name="TextBox 4"/>
-          <p:cNvSpPr txBox="1"/>
-          <p:nvPr/>
-        </p:nvSpPr>
-        <p:spPr>
-          <a:xfrm>
-            <a:off x="777240" y="1261872"/>
-            <a:ext cx="10607040" cy="310896"/>
-          </a:xfrm>
-          <a:prstGeom prst="rect">
-            <a:avLst/>
-          </a:prstGeom>
-          <a:noFill/>
-        </p:spPr>
-        <p:txBody>
-          <a:bodyPr wrap="square" lIns="45720" rIns="45720" tIns="18288" bIns="18288" anchor="t">
-            <a:spAutoFit/>
-          </a:bodyPr>
-          <a:lstStyle/>
-          <a:p>
-            <a:pPr algn="l"/>
-            <a:r>
-              <a:rPr sz="1700" b="0" i="1">
-                <a:solidFill>
-                  <a:srgbClr val="6B6B6B"/>
-                </a:solidFill>
-                <a:latin typeface="Century Schoolbook"/>
-              </a:rPr>
-              <a:t>Last five minutes.</a:t>
-            </a:r>
-          </a:p>
-        </p:txBody>
-      </p:sp>
       <p:cxnSp>
         <p:nvCxnSpPr>
-          <p:cNvPr id="6" name="Connector 5"/>
+          <p:cNvPr id="5" name="Connector 4"/>
           <p:cNvCxnSpPr/>
           <p:nvPr/>
         </p:nvCxnSpPr>
@@ -17402,7 +15702,7 @@
       </p:cxnSp>
       <p:sp>
         <p:nvSpPr>
-          <p:cNvPr id="7" name="TextBox 6"/>
+          <p:cNvPr id="6" name="TextBox 5"/>
           <p:cNvSpPr txBox="1"/>
           <p:nvPr/>
         </p:nvSpPr>
@@ -17437,7 +15737,7 @@
       </p:sp>
       <p:sp>
         <p:nvSpPr>
-          <p:cNvPr id="8" name="TextBox 7"/>
+          <p:cNvPr id="7" name="TextBox 6"/>
           <p:cNvSpPr txBox="1"/>
           <p:nvPr/>
         </p:nvSpPr>
@@ -17472,7 +15772,7 @@
       </p:sp>
       <p:sp>
         <p:nvSpPr>
-          <p:cNvPr id="9" name="TextBox 8"/>
+          <p:cNvPr id="8" name="TextBox 7"/>
           <p:cNvSpPr txBox="1"/>
           <p:nvPr/>
         </p:nvSpPr>
@@ -17507,7 +15807,7 @@
       </p:sp>
       <p:sp>
         <p:nvSpPr>
-          <p:cNvPr id="10" name="TextBox 9"/>
+          <p:cNvPr id="9" name="TextBox 8"/>
           <p:cNvSpPr txBox="1"/>
           <p:nvPr/>
         </p:nvSpPr>
@@ -17542,7 +15842,7 @@
       </p:sp>
       <p:sp>
         <p:nvSpPr>
-          <p:cNvPr id="11" name="TextBox 10"/>
+          <p:cNvPr id="10" name="TextBox 9"/>
           <p:cNvSpPr txBox="1"/>
           <p:nvPr/>
         </p:nvSpPr>
@@ -17577,7 +15877,7 @@
       </p:sp>
       <p:sp>
         <p:nvSpPr>
-          <p:cNvPr id="12" name="TextBox 11"/>
+          <p:cNvPr id="11" name="TextBox 10"/>
           <p:cNvSpPr txBox="1"/>
           <p:nvPr/>
         </p:nvSpPr>
@@ -17612,7 +15912,7 @@
       </p:sp>
       <p:sp>
         <p:nvSpPr>
-          <p:cNvPr id="13" name="TextBox 12"/>
+          <p:cNvPr id="12" name="TextBox 11"/>
           <p:cNvSpPr txBox="1"/>
           <p:nvPr/>
         </p:nvSpPr>
@@ -17647,7 +15947,7 @@
       </p:sp>
       <p:sp>
         <p:nvSpPr>
-          <p:cNvPr id="14" name="TextBox 13"/>
+          <p:cNvPr id="13" name="TextBox 12"/>
           <p:cNvSpPr txBox="1"/>
           <p:nvPr/>
         </p:nvSpPr>
@@ -17682,7 +15982,7 @@
       </p:sp>
       <p:sp>
         <p:nvSpPr>
-          <p:cNvPr id="15" name="TextBox 14"/>
+          <p:cNvPr id="14" name="TextBox 13"/>
           <p:cNvSpPr txBox="1"/>
           <p:nvPr/>
         </p:nvSpPr>
@@ -17717,7 +16017,7 @@
       </p:sp>
       <p:sp>
         <p:nvSpPr>
-          <p:cNvPr id="16" name="TextBox 15"/>
+          <p:cNvPr id="15" name="TextBox 14"/>
           <p:cNvSpPr txBox="1"/>
           <p:nvPr/>
         </p:nvSpPr>
@@ -17873,44 +16173,9 @@
           </a:fontRef>
         </p:style>
       </p:cxnSp>
-      <p:sp>
-        <p:nvSpPr>
-          <p:cNvPr id="5" name="TextBox 4"/>
-          <p:cNvSpPr txBox="1"/>
-          <p:nvPr/>
-        </p:nvSpPr>
-        <p:spPr>
-          <a:xfrm>
-            <a:off x="777240" y="1261872"/>
-            <a:ext cx="10607040" cy="310896"/>
-          </a:xfrm>
-          <a:prstGeom prst="rect">
-            <a:avLst/>
-          </a:prstGeom>
-          <a:noFill/>
-        </p:spPr>
-        <p:txBody>
-          <a:bodyPr wrap="square" lIns="45720" rIns="45720" tIns="18288" bIns="18288" anchor="t">
-            <a:spAutoFit/>
-          </a:bodyPr>
-          <a:lstStyle/>
-          <a:p>
-            <a:pPr algn="l"/>
-            <a:r>
-              <a:rPr sz="1700" b="0" i="1">
-                <a:solidFill>
-                  <a:srgbClr val="6B6B6B"/>
-                </a:solidFill>
-                <a:latin typeface="Century Schoolbook"/>
-              </a:rPr>
-              <a:t>Copy both lines.</a:t>
-            </a:r>
-          </a:p>
-        </p:txBody>
-      </p:sp>
       <p:cxnSp>
         <p:nvCxnSpPr>
-          <p:cNvPr id="6" name="Connector 5"/>
+          <p:cNvPr id="5" name="Connector 4"/>
           <p:cNvCxnSpPr/>
           <p:nvPr/>
         </p:nvCxnSpPr>
@@ -17945,7 +16210,7 @@
       </p:cxnSp>
       <p:sp>
         <p:nvSpPr>
-          <p:cNvPr id="7" name="TextBox 6"/>
+          <p:cNvPr id="6" name="TextBox 5"/>
           <p:cNvSpPr txBox="1"/>
           <p:nvPr/>
         </p:nvSpPr>
@@ -17980,7 +16245,7 @@
       </p:sp>
       <p:sp>
         <p:nvSpPr>
-          <p:cNvPr id="8" name="TextBox 7"/>
+          <p:cNvPr id="7" name="TextBox 6"/>
           <p:cNvSpPr txBox="1"/>
           <p:nvPr/>
         </p:nvSpPr>
@@ -18015,13 +16280,13 @@
       </p:sp>
       <p:sp>
         <p:nvSpPr>
-          <p:cNvPr id="9" name="TextBox 8"/>
-          <p:cNvSpPr txBox="1"/>
-          <p:nvPr/>
-        </p:nvSpPr>
-        <p:spPr>
-          <a:xfrm>
-            <a:off x="777240" y="1737360"/>
+          <p:cNvPr id="8" name="TextBox 7"/>
+          <p:cNvSpPr txBox="1"/>
+          <p:nvPr/>
+        </p:nvSpPr>
+        <p:spPr>
+          <a:xfrm>
+            <a:off x="777240" y="1389888"/>
             <a:ext cx="10607040" cy="402336"/>
           </a:xfrm>
           <a:prstGeom prst="rect">
@@ -18050,13 +16315,13 @@
       </p:sp>
       <p:cxnSp>
         <p:nvCxnSpPr>
-          <p:cNvPr id="10" name="Connector 9"/>
+          <p:cNvPr id="9" name="Connector 8"/>
           <p:cNvCxnSpPr/>
           <p:nvPr/>
         </p:nvCxnSpPr>
         <p:spPr>
           <a:xfrm>
-            <a:off x="777240" y="2176272"/>
+            <a:off x="777240" y="1828800"/>
             <a:ext cx="10607040" cy="0"/>
           </a:xfrm>
           <a:prstGeom prst="line">
@@ -18085,7 +16350,7 @@
       </p:cxnSp>
       <p:pic>
         <p:nvPicPr>
-          <p:cNvPr id="11" name="Picture 10" descr="0adc02d1493e5ae4.png"/>
+          <p:cNvPr id="10" name="Picture 9" descr="0adc02d1493e5ae4.png"/>
           <p:cNvPicPr>
             <a:picLocks noChangeAspect="1"/>
           </p:cNvPicPr>
@@ -18099,7 +16364,7 @@
         </p:blipFill>
         <p:spPr>
           <a:xfrm>
-            <a:off x="2865665" y="2340864"/>
+            <a:off x="2865665" y="1993392"/>
             <a:ext cx="1557528" cy="673608"/>
           </a:xfrm>
           <a:prstGeom prst="rect">
@@ -18109,13 +16374,13 @@
       </p:pic>
       <p:sp>
         <p:nvSpPr>
-          <p:cNvPr id="12" name="TextBox 11"/>
-          <p:cNvSpPr txBox="1"/>
-          <p:nvPr/>
-        </p:nvSpPr>
-        <p:spPr>
-          <a:xfrm>
-            <a:off x="4423193" y="2449068"/>
+          <p:cNvPr id="11" name="TextBox 10"/>
+          <p:cNvSpPr txBox="1"/>
+          <p:nvPr/>
+        </p:nvSpPr>
+        <p:spPr>
+          <a:xfrm>
+            <a:off x="4423193" y="2101596"/>
             <a:ext cx="1524855" cy="457200"/>
           </a:xfrm>
           <a:prstGeom prst="rect">
@@ -18144,7 +16409,7 @@
       </p:sp>
       <p:pic>
         <p:nvPicPr>
-          <p:cNvPr id="13" name="Picture 12" descr="c5ae5c8435316fdc.png"/>
+          <p:cNvPr id="12" name="Picture 11" descr="c5ae5c8435316fdc.png"/>
           <p:cNvPicPr>
             <a:picLocks noChangeAspect="1"/>
           </p:cNvPicPr>
@@ -18158,7 +16423,7 @@
         </p:blipFill>
         <p:spPr>
           <a:xfrm>
-            <a:off x="5810888" y="2534412"/>
+            <a:off x="5810888" y="2186940"/>
             <a:ext cx="1082040" cy="286512"/>
           </a:xfrm>
           <a:prstGeom prst="rect">
@@ -18168,13 +16433,13 @@
       </p:pic>
       <p:sp>
         <p:nvSpPr>
-          <p:cNvPr id="14" name="TextBox 13"/>
-          <p:cNvSpPr txBox="1"/>
-          <p:nvPr/>
-        </p:nvSpPr>
-        <p:spPr>
-          <a:xfrm>
-            <a:off x="6892928" y="2449068"/>
+          <p:cNvPr id="13" name="TextBox 12"/>
+          <p:cNvSpPr txBox="1"/>
+          <p:nvPr/>
+        </p:nvSpPr>
+        <p:spPr>
+          <a:xfrm>
+            <a:off x="6892928" y="2101596"/>
             <a:ext cx="1403434" cy="457200"/>
           </a:xfrm>
           <a:prstGeom prst="rect">
@@ -18203,7 +16468,7 @@
       </p:sp>
       <p:pic>
         <p:nvPicPr>
-          <p:cNvPr id="15" name="Picture 14" descr="93a35f9de365ddad.png"/>
+          <p:cNvPr id="14" name="Picture 13" descr="93a35f9de365ddad.png"/>
           <p:cNvPicPr>
             <a:picLocks noChangeAspect="1"/>
           </p:cNvPicPr>
@@ -18217,7 +16482,7 @@
         </p:blipFill>
         <p:spPr>
           <a:xfrm>
-            <a:off x="8159202" y="2535936"/>
+            <a:off x="8159202" y="2188464"/>
             <a:ext cx="966216" cy="283464"/>
           </a:xfrm>
           <a:prstGeom prst="rect">
@@ -18227,13 +16492,13 @@
       </p:pic>
       <p:sp>
         <p:nvSpPr>
-          <p:cNvPr id="16" name="TextBox 15"/>
-          <p:cNvSpPr txBox="1"/>
-          <p:nvPr/>
-        </p:nvSpPr>
-        <p:spPr>
-          <a:xfrm>
-            <a:off x="9125418" y="2449068"/>
+          <p:cNvPr id="15" name="TextBox 14"/>
+          <p:cNvSpPr txBox="1"/>
+          <p:nvPr/>
+        </p:nvSpPr>
+        <p:spPr>
+          <a:xfrm>
+            <a:off x="9125418" y="2101596"/>
             <a:ext cx="307595" cy="457200"/>
           </a:xfrm>
           <a:prstGeom prst="rect">
@@ -18262,7 +16527,7 @@
       </p:sp>
       <p:pic>
         <p:nvPicPr>
-          <p:cNvPr id="17" name="Picture 16" descr="d74aec1c3ec8a811.png"/>
+          <p:cNvPr id="16" name="Picture 15" descr="d74aec1c3ec8a811.png"/>
           <p:cNvPicPr>
             <a:picLocks noChangeAspect="1"/>
           </p:cNvPicPr>
@@ -18276,7 +16541,7 @@
         </p:blipFill>
         <p:spPr>
           <a:xfrm>
-            <a:off x="2785734" y="3288792"/>
+            <a:off x="2785734" y="2941320"/>
             <a:ext cx="5285232" cy="673608"/>
           </a:xfrm>
           <a:prstGeom prst="rect">
@@ -18286,13 +16551,13 @@
       </p:pic>
       <p:sp>
         <p:nvSpPr>
-          <p:cNvPr id="18" name="TextBox 17"/>
-          <p:cNvSpPr txBox="1"/>
-          <p:nvPr/>
-        </p:nvSpPr>
-        <p:spPr>
-          <a:xfrm>
-            <a:off x="8070966" y="3396996"/>
+          <p:cNvPr id="17" name="TextBox 16"/>
+          <p:cNvSpPr txBox="1"/>
+          <p:nvPr/>
+        </p:nvSpPr>
+        <p:spPr>
+          <a:xfrm>
+            <a:off x="8070966" y="3049524"/>
             <a:ext cx="1441979" cy="457200"/>
           </a:xfrm>
           <a:prstGeom prst="rect">
@@ -18321,13 +16586,13 @@
       </p:sp>
       <p:sp>
         <p:nvSpPr>
-          <p:cNvPr id="19" name="TextBox 18"/>
-          <p:cNvSpPr txBox="1"/>
-          <p:nvPr/>
-        </p:nvSpPr>
-        <p:spPr>
-          <a:xfrm>
-            <a:off x="1760315" y="4213859"/>
+          <p:cNvPr id="18" name="TextBox 17"/>
+          <p:cNvSpPr txBox="1"/>
+          <p:nvPr/>
+        </p:nvSpPr>
+        <p:spPr>
+          <a:xfrm>
+            <a:off x="1760315" y="3866388"/>
             <a:ext cx="1233003" cy="457200"/>
           </a:xfrm>
           <a:prstGeom prst="rect">
@@ -18356,7 +16621,7 @@
       </p:sp>
       <p:pic>
         <p:nvPicPr>
-          <p:cNvPr id="20" name="Picture 19" descr="470a2cb670592e03.png"/>
+          <p:cNvPr id="19" name="Picture 18" descr="470a2cb670592e03.png"/>
           <p:cNvPicPr>
             <a:picLocks noChangeAspect="1"/>
           </p:cNvPicPr>
@@ -18370,7 +16635,7 @@
         </p:blipFill>
         <p:spPr>
           <a:xfrm>
-            <a:off x="2856159" y="4302251"/>
+            <a:off x="2856159" y="3954780"/>
             <a:ext cx="1063752" cy="280416"/>
           </a:xfrm>
           <a:prstGeom prst="rect">
@@ -18380,13 +16645,13 @@
       </p:pic>
       <p:sp>
         <p:nvSpPr>
-          <p:cNvPr id="21" name="TextBox 20"/>
-          <p:cNvSpPr txBox="1"/>
-          <p:nvPr/>
-        </p:nvSpPr>
-        <p:spPr>
-          <a:xfrm>
-            <a:off x="3919911" y="4213859"/>
+          <p:cNvPr id="20" name="TextBox 19"/>
+          <p:cNvSpPr txBox="1"/>
+          <p:nvPr/>
+        </p:nvSpPr>
+        <p:spPr>
+          <a:xfrm>
+            <a:off x="3919911" y="3866388"/>
             <a:ext cx="696731" cy="457200"/>
           </a:xfrm>
           <a:prstGeom prst="rect">
@@ -18415,7 +16680,7 @@
       </p:sp>
       <p:pic>
         <p:nvPicPr>
-          <p:cNvPr id="22" name="Picture 21" descr="8b91d3b79ed4a5fa.png"/>
+          <p:cNvPr id="21" name="Picture 20" descr="8b91d3b79ed4a5fa.png"/>
           <p:cNvPicPr>
             <a:picLocks noChangeAspect="1"/>
           </p:cNvPicPr>
@@ -18429,7 +16694,7 @@
         </p:blipFill>
         <p:spPr>
           <a:xfrm>
-            <a:off x="4479482" y="4239767"/>
+            <a:off x="4479482" y="3892296"/>
             <a:ext cx="2484120" cy="405384"/>
           </a:xfrm>
           <a:prstGeom prst="rect">
@@ -18439,13 +16704,13 @@
       </p:pic>
       <p:sp>
         <p:nvSpPr>
-          <p:cNvPr id="23" name="TextBox 22"/>
-          <p:cNvSpPr txBox="1"/>
-          <p:nvPr/>
-        </p:nvSpPr>
-        <p:spPr>
-          <a:xfrm>
-            <a:off x="6963602" y="4213859"/>
+          <p:cNvPr id="22" name="TextBox 21"/>
+          <p:cNvSpPr txBox="1"/>
+          <p:nvPr/>
+        </p:nvSpPr>
+        <p:spPr>
+          <a:xfrm>
+            <a:off x="6963602" y="3866388"/>
             <a:ext cx="1880073" cy="457200"/>
           </a:xfrm>
           <a:prstGeom prst="rect">
@@ -18474,7 +16739,7 @@
       </p:sp>
       <p:pic>
         <p:nvPicPr>
-          <p:cNvPr id="24" name="Picture 23" descr="e047b6631084f988.png"/>
+          <p:cNvPr id="23" name="Picture 22" descr="e047b6631084f988.png"/>
           <p:cNvPicPr>
             <a:picLocks noChangeAspect="1"/>
           </p:cNvPicPr>
@@ -18488,7 +16753,7 @@
         </p:blipFill>
         <p:spPr>
           <a:xfrm>
-            <a:off x="8706516" y="4271771"/>
+            <a:off x="8706516" y="3924300"/>
             <a:ext cx="1694688" cy="341376"/>
           </a:xfrm>
           <a:prstGeom prst="rect">
@@ -18498,13 +16763,13 @@
       </p:pic>
       <p:sp>
         <p:nvSpPr>
-          <p:cNvPr id="25" name="TextBox 24"/>
-          <p:cNvSpPr txBox="1"/>
-          <p:nvPr/>
-        </p:nvSpPr>
-        <p:spPr>
-          <a:xfrm>
-            <a:off x="987552" y="4986528"/>
+          <p:cNvPr id="24" name="TextBox 23"/>
+          <p:cNvSpPr txBox="1"/>
+          <p:nvPr/>
+        </p:nvSpPr>
+        <p:spPr>
+          <a:xfrm>
+            <a:off x="987552" y="4639056"/>
             <a:ext cx="10131551" cy="950976"/>
           </a:xfrm>
           <a:prstGeom prst="rect">
@@ -18654,44 +16919,9 @@
           </a:fontRef>
         </p:style>
       </p:cxnSp>
-      <p:sp>
-        <p:nvSpPr>
-          <p:cNvPr id="5" name="TextBox 4"/>
-          <p:cNvSpPr txBox="1"/>
-          <p:nvPr/>
-        </p:nvSpPr>
-        <p:spPr>
-          <a:xfrm>
-            <a:off x="777240" y="1261872"/>
-            <a:ext cx="10607040" cy="310896"/>
-          </a:xfrm>
-          <a:prstGeom prst="rect">
-            <a:avLst/>
-          </a:prstGeom>
-          <a:noFill/>
-        </p:spPr>
-        <p:txBody>
-          <a:bodyPr wrap="square" lIns="45720" rIns="45720" tIns="18288" bIns="18288" anchor="t">
-            <a:spAutoFit/>
-          </a:bodyPr>
-          <a:lstStyle/>
-          <a:p>
-            <a:pPr algn="l"/>
-            <a:r>
-              <a:rPr sz="1700" b="0" i="1">
-                <a:solidFill>
-                  <a:srgbClr val="6B6B6B"/>
-                </a:solidFill>
-                <a:latin typeface="Century Schoolbook"/>
-              </a:rPr>
-              <a:t>Copy both problems.</a:t>
-            </a:r>
-          </a:p>
-        </p:txBody>
-      </p:sp>
       <p:cxnSp>
         <p:nvCxnSpPr>
-          <p:cNvPr id="6" name="Connector 5"/>
+          <p:cNvPr id="5" name="Connector 4"/>
           <p:cNvCxnSpPr/>
           <p:nvPr/>
         </p:nvCxnSpPr>
@@ -18726,7 +16956,7 @@
       </p:cxnSp>
       <p:sp>
         <p:nvSpPr>
-          <p:cNvPr id="7" name="TextBox 6"/>
+          <p:cNvPr id="6" name="TextBox 5"/>
           <p:cNvSpPr txBox="1"/>
           <p:nvPr/>
         </p:nvSpPr>
@@ -18761,7 +16991,7 @@
       </p:sp>
       <p:sp>
         <p:nvSpPr>
-          <p:cNvPr id="8" name="TextBox 7"/>
+          <p:cNvPr id="7" name="TextBox 6"/>
           <p:cNvSpPr txBox="1"/>
           <p:nvPr/>
         </p:nvSpPr>
@@ -18796,13 +17026,13 @@
       </p:sp>
       <p:sp>
         <p:nvSpPr>
-          <p:cNvPr id="9" name="TextBox 8"/>
-          <p:cNvSpPr txBox="1"/>
-          <p:nvPr/>
-        </p:nvSpPr>
-        <p:spPr>
-          <a:xfrm>
-            <a:off x="777240" y="1737360"/>
+          <p:cNvPr id="8" name="TextBox 7"/>
+          <p:cNvSpPr txBox="1"/>
+          <p:nvPr/>
+        </p:nvSpPr>
+        <p:spPr>
+          <a:xfrm>
+            <a:off x="777240" y="1389888"/>
             <a:ext cx="10607040" cy="402336"/>
           </a:xfrm>
           <a:prstGeom prst="rect">
@@ -18831,13 +17061,13 @@
       </p:sp>
       <p:cxnSp>
         <p:nvCxnSpPr>
-          <p:cNvPr id="10" name="Connector 9"/>
+          <p:cNvPr id="9" name="Connector 8"/>
           <p:cNvCxnSpPr/>
           <p:nvPr/>
         </p:nvCxnSpPr>
         <p:spPr>
           <a:xfrm>
-            <a:off x="777240" y="2176272"/>
+            <a:off x="777240" y="1828800"/>
             <a:ext cx="10607040" cy="0"/>
           </a:xfrm>
           <a:prstGeom prst="line">
@@ -18866,13 +17096,13 @@
       </p:cxnSp>
       <p:sp>
         <p:nvSpPr>
-          <p:cNvPr id="11" name="TextBox 10"/>
-          <p:cNvSpPr txBox="1"/>
-          <p:nvPr/>
-        </p:nvSpPr>
-        <p:spPr>
-          <a:xfrm>
-            <a:off x="2219924" y="2318004"/>
+          <p:cNvPr id="10" name="TextBox 9"/>
+          <p:cNvSpPr txBox="1"/>
+          <p:nvPr/>
+        </p:nvSpPr>
+        <p:spPr>
+          <a:xfrm>
+            <a:off x="2219924" y="1970532"/>
             <a:ext cx="7858831" cy="457200"/>
           </a:xfrm>
           <a:prstGeom prst="rect">
@@ -18901,7 +17131,7 @@
       </p:sp>
       <p:pic>
         <p:nvPicPr>
-          <p:cNvPr id="12" name="Picture 11" descr="df4025967bb63d7c.png"/>
+          <p:cNvPr id="11" name="Picture 10" descr="df4025967bb63d7c.png"/>
           <p:cNvPicPr>
             <a:picLocks noChangeAspect="1"/>
           </p:cNvPicPr>
@@ -18915,7 +17145,7 @@
         </p:blipFill>
         <p:spPr>
           <a:xfrm>
-            <a:off x="4969764" y="3057144"/>
+            <a:off x="4969764" y="2709672"/>
             <a:ext cx="2221992" cy="350520"/>
           </a:xfrm>
           <a:prstGeom prst="rect">
@@ -18925,13 +17155,13 @@
       </p:pic>
       <p:sp>
         <p:nvSpPr>
-          <p:cNvPr id="13" name="TextBox 12"/>
-          <p:cNvSpPr txBox="1"/>
-          <p:nvPr/>
-        </p:nvSpPr>
-        <p:spPr>
-          <a:xfrm>
-            <a:off x="2046180" y="3689604"/>
+          <p:cNvPr id="12" name="TextBox 11"/>
+          <p:cNvSpPr txBox="1"/>
+          <p:nvPr/>
+        </p:nvSpPr>
+        <p:spPr>
+          <a:xfrm>
+            <a:off x="2046180" y="3342132"/>
             <a:ext cx="8206319" cy="457200"/>
           </a:xfrm>
           <a:prstGeom prst="rect">
@@ -18960,7 +17190,7 @@
       </p:sp>
       <p:pic>
         <p:nvPicPr>
-          <p:cNvPr id="14" name="Picture 13" descr="d2efbf0da391d0ea.png"/>
+          <p:cNvPr id="13" name="Picture 12" descr="d2efbf0da391d0ea.png"/>
           <p:cNvPicPr>
             <a:picLocks noChangeAspect="1"/>
           </p:cNvPicPr>
@@ -18974,7 +17204,7 @@
         </p:blipFill>
         <p:spPr>
           <a:xfrm>
-            <a:off x="4966716" y="4428744"/>
+            <a:off x="4966716" y="4081271"/>
             <a:ext cx="2228088" cy="350520"/>
           </a:xfrm>
           <a:prstGeom prst="rect">
@@ -18984,13 +17214,13 @@
       </p:pic>
       <p:sp>
         <p:nvSpPr>
-          <p:cNvPr id="15" name="TextBox 14"/>
-          <p:cNvSpPr txBox="1"/>
-          <p:nvPr/>
-        </p:nvSpPr>
-        <p:spPr>
-          <a:xfrm>
-            <a:off x="987552" y="5148072"/>
+          <p:cNvPr id="14" name="TextBox 13"/>
+          <p:cNvSpPr txBox="1"/>
+          <p:nvPr/>
+        </p:nvSpPr>
+        <p:spPr>
+          <a:xfrm>
+            <a:off x="987552" y="4800600"/>
             <a:ext cx="10131551" cy="475488"/>
           </a:xfrm>
           <a:prstGeom prst="rect">
@@ -19253,7 +17483,7 @@
         </p:nvSpPr>
         <p:spPr>
           <a:xfrm>
-            <a:off x="777240" y="1737360"/>
+            <a:off x="777240" y="1389888"/>
             <a:ext cx="10607040" cy="402336"/>
           </a:xfrm>
           <a:prstGeom prst="rect">
@@ -19288,7 +17518,7 @@
         </p:nvCxnSpPr>
         <p:spPr>
           <a:xfrm>
-            <a:off x="777240" y="2176272"/>
+            <a:off x="777240" y="1828800"/>
             <a:ext cx="10607040" cy="0"/>
           </a:xfrm>
           <a:prstGeom prst="line">
@@ -19331,7 +17561,7 @@
         </p:blipFill>
         <p:spPr>
           <a:xfrm>
-            <a:off x="3259339" y="2340864"/>
+            <a:off x="3259339" y="1993392"/>
             <a:ext cx="4690872" cy="502920"/>
           </a:xfrm>
           <a:prstGeom prst="rect">
@@ -19347,7 +17577,7 @@
         </p:nvSpPr>
         <p:spPr>
           <a:xfrm>
-            <a:off x="7950211" y="2363724"/>
+            <a:off x="7950211" y="2016252"/>
             <a:ext cx="1089128" cy="457200"/>
           </a:xfrm>
           <a:prstGeom prst="rect">
@@ -19382,7 +17612,7 @@
         </p:nvSpPr>
         <p:spPr>
           <a:xfrm>
-            <a:off x="2297423" y="3095244"/>
+            <a:off x="2297423" y="2747772"/>
             <a:ext cx="5087657" cy="457200"/>
           </a:xfrm>
           <a:prstGeom prst="rect">
@@ -19425,7 +17655,7 @@
         </p:blipFill>
         <p:spPr>
           <a:xfrm>
-            <a:off x="7247920" y="3148584"/>
+            <a:off x="7247920" y="2801112"/>
             <a:ext cx="1664208" cy="350520"/>
           </a:xfrm>
           <a:prstGeom prst="rect">
@@ -19441,7 +17671,7 @@
         </p:nvSpPr>
         <p:spPr>
           <a:xfrm>
-            <a:off x="8912128" y="3095244"/>
+            <a:off x="8912128" y="2747772"/>
             <a:ext cx="1089128" cy="457200"/>
           </a:xfrm>
           <a:prstGeom prst="rect">
@@ -19476,7 +17706,7 @@
         </p:nvSpPr>
         <p:spPr>
           <a:xfrm>
-            <a:off x="987552" y="3867912"/>
+            <a:off x="987552" y="3520440"/>
             <a:ext cx="10131551" cy="475488"/>
           </a:xfrm>
           <a:prstGeom prst="rect">
@@ -19626,44 +17856,9 @@
           </a:fontRef>
         </p:style>
       </p:cxnSp>
-      <p:sp>
-        <p:nvSpPr>
-          <p:cNvPr id="5" name="TextBox 4"/>
-          <p:cNvSpPr txBox="1"/>
-          <p:nvPr/>
-        </p:nvSpPr>
-        <p:spPr>
-          <a:xfrm>
-            <a:off x="777240" y="1261872"/>
-            <a:ext cx="10607040" cy="310896"/>
-          </a:xfrm>
-          <a:prstGeom prst="rect">
-            <a:avLst/>
-          </a:prstGeom>
-          <a:noFill/>
-        </p:spPr>
-        <p:txBody>
-          <a:bodyPr wrap="square" lIns="45720" rIns="45720" tIns="18288" bIns="18288" anchor="t">
-            <a:spAutoFit/>
-          </a:bodyPr>
-          <a:lstStyle/>
-          <a:p>
-            <a:pPr algn="l"/>
-            <a:r>
-              <a:rPr sz="1700" b="0" i="1">
-                <a:solidFill>
-                  <a:srgbClr val="6B6B6B"/>
-                </a:solidFill>
-                <a:latin typeface="Century Schoolbook"/>
-              </a:rPr>
-              <a:t>A formula with a power in it.</a:t>
-            </a:r>
-          </a:p>
-        </p:txBody>
-      </p:sp>
       <p:cxnSp>
         <p:nvCxnSpPr>
-          <p:cNvPr id="6" name="Connector 5"/>
+          <p:cNvPr id="5" name="Connector 4"/>
           <p:cNvCxnSpPr/>
           <p:nvPr/>
         </p:nvCxnSpPr>
@@ -19698,7 +17893,7 @@
       </p:cxnSp>
       <p:sp>
         <p:nvSpPr>
-          <p:cNvPr id="7" name="TextBox 6"/>
+          <p:cNvPr id="6" name="TextBox 5"/>
           <p:cNvSpPr txBox="1"/>
           <p:nvPr/>
         </p:nvSpPr>
@@ -19733,7 +17928,7 @@
       </p:sp>
       <p:sp>
         <p:nvSpPr>
-          <p:cNvPr id="8" name="TextBox 7"/>
+          <p:cNvPr id="7" name="TextBox 6"/>
           <p:cNvSpPr txBox="1"/>
           <p:nvPr/>
         </p:nvSpPr>
@@ -19768,13 +17963,13 @@
       </p:sp>
       <p:sp>
         <p:nvSpPr>
-          <p:cNvPr id="9" name="TextBox 8"/>
-          <p:cNvSpPr txBox="1"/>
-          <p:nvPr/>
-        </p:nvSpPr>
-        <p:spPr>
-          <a:xfrm>
-            <a:off x="3721151" y="2211323"/>
+          <p:cNvPr id="8" name="TextBox 7"/>
+          <p:cNvSpPr txBox="1"/>
+          <p:nvPr/>
+        </p:nvSpPr>
+        <p:spPr>
+          <a:xfrm>
+            <a:off x="3721151" y="1845563"/>
             <a:ext cx="3131460" cy="457200"/>
           </a:xfrm>
           <a:prstGeom prst="rect">
@@ -19803,7 +17998,7 @@
       </p:sp>
       <p:pic>
         <p:nvPicPr>
-          <p:cNvPr id="10" name="Picture 9" descr="69f338afbe20426e.png"/>
+          <p:cNvPr id="9" name="Picture 8" descr="69f338afbe20426e.png"/>
           <p:cNvPicPr>
             <a:picLocks noChangeAspect="1"/>
           </p:cNvPicPr>
@@ -19817,7 +18012,7 @@
         </p:blipFill>
         <p:spPr>
           <a:xfrm>
-            <a:off x="6715452" y="2103120"/>
+            <a:off x="6715452" y="1737360"/>
             <a:ext cx="1554480" cy="673608"/>
           </a:xfrm>
           <a:prstGeom prst="rect">
@@ -19827,13 +18022,13 @@
       </p:pic>
       <p:sp>
         <p:nvSpPr>
-          <p:cNvPr id="11" name="TextBox 10"/>
-          <p:cNvSpPr txBox="1"/>
-          <p:nvPr/>
-        </p:nvSpPr>
-        <p:spPr>
-          <a:xfrm>
-            <a:off x="8269932" y="2211323"/>
+          <p:cNvPr id="10" name="TextBox 9"/>
+          <p:cNvSpPr txBox="1"/>
+          <p:nvPr/>
+        </p:nvSpPr>
+        <p:spPr>
+          <a:xfrm>
+            <a:off x="8269932" y="1845563"/>
             <a:ext cx="307595" cy="457200"/>
           </a:xfrm>
           <a:prstGeom prst="rect">
@@ -19862,13 +18057,13 @@
       </p:sp>
       <p:sp>
         <p:nvSpPr>
-          <p:cNvPr id="12" name="TextBox 11"/>
-          <p:cNvSpPr txBox="1"/>
-          <p:nvPr/>
-        </p:nvSpPr>
-        <p:spPr>
-          <a:xfrm>
-            <a:off x="1268839" y="3073908"/>
+          <p:cNvPr id="11" name="TextBox 10"/>
+          <p:cNvSpPr txBox="1"/>
+          <p:nvPr/>
+        </p:nvSpPr>
+        <p:spPr>
+          <a:xfrm>
+            <a:off x="1268839" y="2708148"/>
             <a:ext cx="1674725" cy="457200"/>
           </a:xfrm>
           <a:prstGeom prst="rect">
@@ -19897,7 +18092,7 @@
       </p:sp>
       <p:pic>
         <p:nvPicPr>
-          <p:cNvPr id="13" name="Picture 12" descr="24e87f5600a7b684.png"/>
+          <p:cNvPr id="12" name="Picture 11" descr="24e87f5600a7b684.png"/>
           <p:cNvPicPr>
             <a:picLocks noChangeAspect="1"/>
           </p:cNvPicPr>
@@ -19911,7 +18106,7 @@
         </p:blipFill>
         <p:spPr>
           <a:xfrm>
-            <a:off x="2806404" y="3211068"/>
+            <a:off x="2806404" y="2845308"/>
             <a:ext cx="283464" cy="182880"/>
           </a:xfrm>
           <a:prstGeom prst="rect">
@@ -19921,13 +18116,13 @@
       </p:pic>
       <p:sp>
         <p:nvSpPr>
-          <p:cNvPr id="14" name="TextBox 13"/>
-          <p:cNvSpPr txBox="1"/>
-          <p:nvPr/>
-        </p:nvSpPr>
-        <p:spPr>
-          <a:xfrm>
-            <a:off x="3089868" y="3073908"/>
+          <p:cNvPr id="13" name="TextBox 12"/>
+          <p:cNvSpPr txBox="1"/>
+          <p:nvPr/>
+        </p:nvSpPr>
+        <p:spPr>
+          <a:xfrm>
+            <a:off x="3089868" y="2708148"/>
             <a:ext cx="4165510" cy="457200"/>
           </a:xfrm>
           <a:prstGeom prst="rect">
@@ -19956,7 +18151,7 @@
       </p:sp>
       <p:pic>
         <p:nvPicPr>
-          <p:cNvPr id="15" name="Picture 14" descr="fcb4fcf2c8052fbb.png"/>
+          <p:cNvPr id="14" name="Picture 13" descr="fcb4fcf2c8052fbb.png"/>
           <p:cNvPicPr>
             <a:picLocks noChangeAspect="1"/>
           </p:cNvPicPr>
@@ -19970,7 +18165,7 @@
         </p:blipFill>
         <p:spPr>
           <a:xfrm>
-            <a:off x="7118219" y="3208020"/>
+            <a:off x="7118219" y="2842260"/>
             <a:ext cx="167640" cy="188976"/>
           </a:xfrm>
           <a:prstGeom prst="rect">
@@ -19980,13 +18175,13 @@
       </p:pic>
       <p:sp>
         <p:nvSpPr>
-          <p:cNvPr id="16" name="TextBox 15"/>
-          <p:cNvSpPr txBox="1"/>
-          <p:nvPr/>
-        </p:nvSpPr>
-        <p:spPr>
-          <a:xfrm>
-            <a:off x="7285859" y="3073908"/>
+          <p:cNvPr id="15" name="TextBox 14"/>
+          <p:cNvSpPr txBox="1"/>
+          <p:nvPr/>
+        </p:nvSpPr>
+        <p:spPr>
+          <a:xfrm>
+            <a:off x="7285859" y="2708148"/>
             <a:ext cx="3743981" cy="457200"/>
           </a:xfrm>
           <a:prstGeom prst="rect">
@@ -20015,13 +18210,13 @@
       </p:sp>
       <p:sp>
         <p:nvSpPr>
-          <p:cNvPr id="17" name="TextBox 16"/>
-          <p:cNvSpPr txBox="1"/>
-          <p:nvPr/>
-        </p:nvSpPr>
-        <p:spPr>
-          <a:xfrm>
-            <a:off x="1659688" y="3805427"/>
+          <p:cNvPr id="16" name="TextBox 15"/>
+          <p:cNvSpPr txBox="1"/>
+          <p:nvPr/>
+        </p:nvSpPr>
+        <p:spPr>
+          <a:xfrm>
+            <a:off x="1659688" y="3439668"/>
             <a:ext cx="1066148" cy="457200"/>
           </a:xfrm>
           <a:prstGeom prst="rect">
@@ -20050,7 +18245,7 @@
       </p:sp>
       <p:pic>
         <p:nvPicPr>
-          <p:cNvPr id="18" name="Picture 17" descr="c3de325f2afb27e7.png"/>
+          <p:cNvPr id="17" name="Picture 16" descr="c3de325f2afb27e7.png"/>
           <p:cNvPicPr>
             <a:picLocks noChangeAspect="1"/>
           </p:cNvPicPr>
@@ -20064,7 +18259,7 @@
         </p:blipFill>
         <p:spPr>
           <a:xfrm>
-            <a:off x="2588676" y="3899915"/>
+            <a:off x="2588676" y="3534156"/>
             <a:ext cx="295656" cy="268224"/>
           </a:xfrm>
           <a:prstGeom prst="rect">
@@ -20074,13 +18269,13 @@
       </p:pic>
       <p:sp>
         <p:nvSpPr>
-          <p:cNvPr id="19" name="TextBox 18"/>
-          <p:cNvSpPr txBox="1"/>
-          <p:nvPr/>
-        </p:nvSpPr>
-        <p:spPr>
-          <a:xfrm>
-            <a:off x="2884332" y="3805427"/>
+          <p:cNvPr id="18" name="TextBox 17"/>
+          <p:cNvSpPr txBox="1"/>
+          <p:nvPr/>
+        </p:nvSpPr>
+        <p:spPr>
+          <a:xfrm>
+            <a:off x="2884332" y="3439668"/>
             <a:ext cx="7754658" cy="457200"/>
           </a:xfrm>
           <a:prstGeom prst="rect">
@@ -20109,13 +18304,13 @@
       </p:sp>
       <p:sp>
         <p:nvSpPr>
-          <p:cNvPr id="20" name="TextBox 19"/>
-          <p:cNvSpPr txBox="1"/>
-          <p:nvPr/>
-        </p:nvSpPr>
-        <p:spPr>
-          <a:xfrm>
-            <a:off x="777240" y="4742688"/>
+          <p:cNvPr id="19" name="TextBox 18"/>
+          <p:cNvSpPr txBox="1"/>
+          <p:nvPr/>
+        </p:nvSpPr>
+        <p:spPr>
+          <a:xfrm>
+            <a:off x="777240" y="4376928"/>
             <a:ext cx="10607040" cy="429370"/>
           </a:xfrm>
           <a:prstGeom prst="rect">
@@ -20265,44 +18460,9 @@
           </a:fontRef>
         </p:style>
       </p:cxnSp>
-      <p:sp>
-        <p:nvSpPr>
-          <p:cNvPr id="5" name="TextBox 4"/>
-          <p:cNvSpPr txBox="1"/>
-          <p:nvPr/>
-        </p:nvSpPr>
-        <p:spPr>
-          <a:xfrm>
-            <a:off x="777240" y="1261872"/>
-            <a:ext cx="10607040" cy="310896"/>
-          </a:xfrm>
-          <a:prstGeom prst="rect">
-            <a:avLst/>
-          </a:prstGeom>
-          <a:noFill/>
-        </p:spPr>
-        <p:txBody>
-          <a:bodyPr wrap="square" lIns="45720" rIns="45720" tIns="18288" bIns="18288" anchor="t">
-            <a:spAutoFit/>
-          </a:bodyPr>
-          <a:lstStyle/>
-          <a:p>
-            <a:pPr algn="l"/>
-            <a:r>
-              <a:rPr sz="1700" b="0" i="1">
-                <a:solidFill>
-                  <a:srgbClr val="6B6B6B"/>
-                </a:solidFill>
-                <a:latin typeface="Century Schoolbook"/>
-              </a:rPr>
-              <a:t>Worked.</a:t>
-            </a:r>
-          </a:p>
-        </p:txBody>
-      </p:sp>
       <p:cxnSp>
         <p:nvCxnSpPr>
-          <p:cNvPr id="6" name="Connector 5"/>
+          <p:cNvPr id="5" name="Connector 4"/>
           <p:cNvCxnSpPr/>
           <p:nvPr/>
         </p:nvCxnSpPr>
@@ -20337,7 +18497,7 @@
       </p:cxnSp>
       <p:sp>
         <p:nvSpPr>
-          <p:cNvPr id="7" name="TextBox 6"/>
+          <p:cNvPr id="6" name="TextBox 5"/>
           <p:cNvSpPr txBox="1"/>
           <p:nvPr/>
         </p:nvSpPr>
@@ -20372,7 +18532,7 @@
       </p:sp>
       <p:sp>
         <p:nvSpPr>
-          <p:cNvPr id="8" name="TextBox 7"/>
+          <p:cNvPr id="7" name="TextBox 6"/>
           <p:cNvSpPr txBox="1"/>
           <p:nvPr/>
         </p:nvSpPr>
@@ -20407,7 +18567,7 @@
       </p:sp>
       <p:pic>
         <p:nvPicPr>
-          <p:cNvPr id="9" name="Picture 8" descr="d75f9c90e035e1e1.png"/>
+          <p:cNvPr id="8" name="Picture 7" descr="d75f9c90e035e1e1.png"/>
           <p:cNvPicPr>
             <a:picLocks noChangeAspect="1"/>
           </p:cNvPicPr>
@@ -20429,44 +18589,9 @@
           </a:prstGeom>
         </p:spPr>
       </p:pic>
-      <p:sp>
-        <p:nvSpPr>
-          <p:cNvPr id="10" name="TextBox 9"/>
-          <p:cNvSpPr txBox="1"/>
-          <p:nvPr/>
-        </p:nvSpPr>
-        <p:spPr>
-          <a:xfrm>
-            <a:off x="5212080" y="2028444"/>
-            <a:ext cx="6172199" cy="502920"/>
-          </a:xfrm>
-          <a:prstGeom prst="rect">
-            <a:avLst/>
-          </a:prstGeom>
-          <a:noFill/>
-        </p:spPr>
-        <p:txBody>
-          <a:bodyPr wrap="square" lIns="45720" rIns="45720" tIns="18288" bIns="18288" anchor="ctr">
-            <a:spAutoFit/>
-          </a:bodyPr>
-          <a:lstStyle/>
-          <a:p>
-            <a:pPr algn="l"/>
-            <a:r>
-              <a:rPr sz="2100" b="0" i="1">
-                <a:solidFill>
-                  <a:srgbClr val="6B6B6B"/>
-                </a:solidFill>
-                <a:latin typeface="Century Schoolbook"/>
-              </a:rPr>
-              <a:t>substitute, each value in parentheses</a:t>
-            </a:r>
-          </a:p>
-        </p:txBody>
-      </p:sp>
       <p:pic>
         <p:nvPicPr>
-          <p:cNvPr id="11" name="Picture 10" descr="97f8b90e9d71c570.png"/>
+          <p:cNvPr id="9" name="Picture 8" descr="97f8b90e9d71c570.png"/>
           <p:cNvPicPr>
             <a:picLocks noChangeAspect="1"/>
           </p:cNvPicPr>
@@ -20488,44 +18613,9 @@
           </a:prstGeom>
         </p:spPr>
       </p:pic>
-      <p:sp>
-        <p:nvSpPr>
-          <p:cNvPr id="12" name="TextBox 11"/>
-          <p:cNvSpPr txBox="1"/>
-          <p:nvPr/>
-        </p:nvSpPr>
-        <p:spPr>
-          <a:xfrm>
-            <a:off x="4904232" y="2976372"/>
-            <a:ext cx="6400800" cy="502920"/>
-          </a:xfrm>
-          <a:prstGeom prst="rect">
-            <a:avLst/>
-          </a:prstGeom>
-          <a:noFill/>
-        </p:spPr>
-        <p:txBody>
-          <a:bodyPr wrap="square" lIns="45720" rIns="45720" tIns="18288" bIns="18288" anchor="ctr">
-            <a:spAutoFit/>
-          </a:bodyPr>
-          <a:lstStyle/>
-          <a:p>
-            <a:pPr algn="l"/>
-            <a:r>
-              <a:rPr sz="2100" b="0" i="1">
-                <a:solidFill>
-                  <a:srgbClr val="6B6B6B"/>
-                </a:solidFill>
-                <a:latin typeface="Century Schoolbook"/>
-              </a:rPr>
-              <a:t>the power first — it belongs to the 15 alone</a:t>
-            </a:r>
-          </a:p>
-        </p:txBody>
-      </p:sp>
       <p:pic>
         <p:nvPicPr>
-          <p:cNvPr id="13" name="Picture 12" descr="a0f52d5d0e25fc41.png"/>
+          <p:cNvPr id="10" name="Picture 9" descr="a0f52d5d0e25fc41.png"/>
           <p:cNvPicPr>
             <a:picLocks noChangeAspect="1"/>
           </p:cNvPicPr>
@@ -20549,42 +18639,7 @@
       </p:pic>
       <p:sp>
         <p:nvSpPr>
-          <p:cNvPr id="14" name="TextBox 13"/>
-          <p:cNvSpPr txBox="1"/>
-          <p:nvPr/>
-        </p:nvSpPr>
-        <p:spPr>
-          <a:xfrm>
-            <a:off x="5803392" y="3762756"/>
-            <a:ext cx="5580887" cy="502920"/>
-          </a:xfrm>
-          <a:prstGeom prst="rect">
-            <a:avLst/>
-          </a:prstGeom>
-          <a:noFill/>
-        </p:spPr>
-        <p:txBody>
-          <a:bodyPr wrap="square" lIns="45720" rIns="45720" tIns="18288" bIns="18288" anchor="ctr">
-            <a:spAutoFit/>
-          </a:bodyPr>
-          <a:lstStyle/>
-          <a:p>
-            <a:pPr algn="l"/>
-            <a:r>
-              <a:rPr sz="2100" b="0" i="1">
-                <a:solidFill>
-                  <a:srgbClr val="6B6B6B"/>
-                </a:solidFill>
-                <a:latin typeface="Century Schoolbook"/>
-              </a:rPr>
-              <a:t>then the products</a:t>
-            </a:r>
-          </a:p>
-        </p:txBody>
-      </p:sp>
-      <p:sp>
-        <p:nvSpPr>
-          <p:cNvPr id="15" name="TextBox 14"/>
+          <p:cNvPr id="11" name="TextBox 10"/>
           <p:cNvSpPr txBox="1"/>
           <p:nvPr/>
         </p:nvSpPr>
@@ -20740,44 +18795,9 @@
           </a:fontRef>
         </p:style>
       </p:cxnSp>
-      <p:sp>
-        <p:nvSpPr>
-          <p:cNvPr id="5" name="TextBox 4"/>
-          <p:cNvSpPr txBox="1"/>
-          <p:nvPr/>
-        </p:nvSpPr>
-        <p:spPr>
-          <a:xfrm>
-            <a:off x="777240" y="1261872"/>
-            <a:ext cx="10607040" cy="310896"/>
-          </a:xfrm>
-          <a:prstGeom prst="rect">
-            <a:avLst/>
-          </a:prstGeom>
-          <a:noFill/>
-        </p:spPr>
-        <p:txBody>
-          <a:bodyPr wrap="square" lIns="45720" rIns="45720" tIns="18288" bIns="18288" anchor="t">
-            <a:spAutoFit/>
-          </a:bodyPr>
-          <a:lstStyle/>
-          <a:p>
-            <a:pPr algn="l"/>
-            <a:r>
-              <a:rPr sz="1700" b="0" i="1">
-                <a:solidFill>
-                  <a:srgbClr val="6B6B6B"/>
-                </a:solidFill>
-                <a:latin typeface="Century Schoolbook"/>
-              </a:rPr>
-              <a:t>Same steps, your numbers. Boards up when done.</a:t>
-            </a:r>
-          </a:p>
-        </p:txBody>
-      </p:sp>
       <p:cxnSp>
         <p:nvCxnSpPr>
-          <p:cNvPr id="6" name="Connector 5"/>
+          <p:cNvPr id="5" name="Connector 4"/>
           <p:cNvCxnSpPr/>
           <p:nvPr/>
         </p:nvCxnSpPr>
@@ -20812,7 +18832,7 @@
       </p:cxnSp>
       <p:sp>
         <p:nvSpPr>
-          <p:cNvPr id="7" name="TextBox 6"/>
+          <p:cNvPr id="6" name="TextBox 5"/>
           <p:cNvSpPr txBox="1"/>
           <p:nvPr/>
         </p:nvSpPr>
@@ -20847,7 +18867,7 @@
       </p:sp>
       <p:sp>
         <p:nvSpPr>
-          <p:cNvPr id="8" name="TextBox 7"/>
+          <p:cNvPr id="7" name="TextBox 6"/>
           <p:cNvSpPr txBox="1"/>
           <p:nvPr/>
         </p:nvSpPr>
@@ -20882,7 +18902,7 @@
       </p:sp>
       <p:sp>
         <p:nvSpPr>
-          <p:cNvPr id="9" name="TextBox 8"/>
+          <p:cNvPr id="8" name="TextBox 7"/>
           <p:cNvSpPr txBox="1"/>
           <p:nvPr/>
         </p:nvSpPr>
@@ -20917,7 +18937,7 @@
       </p:sp>
       <p:pic>
         <p:nvPicPr>
-          <p:cNvPr id="10" name="Picture 9" descr="87c9946de92fdd9d.png"/>
+          <p:cNvPr id="9" name="Picture 8" descr="87c9946de92fdd9d.png"/>
           <p:cNvPicPr>
             <a:picLocks noChangeAspect="1"/>
           </p:cNvPicPr>
@@ -20941,7 +18961,7 @@
       </p:pic>
       <p:sp>
         <p:nvSpPr>
-          <p:cNvPr id="11" name="TextBox 10"/>
+          <p:cNvPr id="10" name="TextBox 9"/>
           <p:cNvSpPr txBox="1"/>
           <p:nvPr/>
         </p:nvSpPr>
@@ -20976,7 +18996,7 @@
       </p:sp>
       <p:pic>
         <p:nvPicPr>
-          <p:cNvPr id="12" name="Picture 11" descr="2af650365bdc2ce9.png"/>
+          <p:cNvPr id="11" name="Picture 10" descr="2af650365bdc2ce9.png"/>
           <p:cNvPicPr>
             <a:picLocks noChangeAspect="1"/>
           </p:cNvPicPr>
@@ -21000,7 +19020,7 @@
       </p:pic>
       <p:sp>
         <p:nvSpPr>
-          <p:cNvPr id="13" name="TextBox 12"/>
+          <p:cNvPr id="12" name="TextBox 11"/>
           <p:cNvSpPr txBox="1"/>
           <p:nvPr/>
         </p:nvSpPr>
@@ -21035,7 +19055,7 @@
       </p:sp>
       <p:pic>
         <p:nvPicPr>
-          <p:cNvPr id="14" name="Picture 13" descr="363ced5d02a26947.png"/>
+          <p:cNvPr id="13" name="Picture 12" descr="363ced5d02a26947.png"/>
           <p:cNvPicPr>
             <a:picLocks noChangeAspect="1"/>
           </p:cNvPicPr>
@@ -21059,7 +19079,7 @@
       </p:pic>
       <p:sp>
         <p:nvSpPr>
-          <p:cNvPr id="15" name="TextBox 14"/>
+          <p:cNvPr id="14" name="TextBox 13"/>
           <p:cNvSpPr txBox="1"/>
           <p:nvPr/>
         </p:nvSpPr>

--- a/a7/build/out/u4/A7 4.07 Real-World Order of Operations - Slides.pptx
+++ b/a7/build/out/u4/A7 4.07 Real-World Order of Operations - Slides.pptx
@@ -15340,23 +15340,23 @@
         </p:nvSpPr>
         <p:spPr>
           <a:xfrm>
-            <a:off x="960120" y="2011680"/>
-            <a:ext cx="548640" cy="356616"/>
-          </a:xfrm>
-          <a:prstGeom prst="rect">
-            <a:avLst/>
-          </a:prstGeom>
-          <a:noFill/>
-        </p:spPr>
-        <p:txBody>
-          <a:bodyPr wrap="square" lIns="45720" rIns="45720" tIns="18288" bIns="18288" anchor="t">
+            <a:off x="960120" y="1495043"/>
+            <a:ext cx="548640" cy="457200"/>
+          </a:xfrm>
+          <a:prstGeom prst="rect">
+            <a:avLst/>
+          </a:prstGeom>
+          <a:noFill/>
+        </p:spPr>
+        <p:txBody>
+          <a:bodyPr wrap="square" lIns="45720" rIns="45720" tIns="18288" bIns="18288" anchor="ctr">
             <a:spAutoFit/>
           </a:bodyPr>
           <a:lstStyle/>
           <a:p>
             <a:pPr algn="l"/>
             <a:r>
-              <a:rPr sz="2100" b="1" i="0">
+              <a:rPr sz="2300" b="1" i="0">
                 <a:solidFill>
                   <a:srgbClr val="0B5394"/>
                 </a:solidFill>
@@ -15367,66 +15367,114 @@
           </a:p>
         </p:txBody>
       </p:sp>
-      <p:sp>
-        <p:nvSpPr>
-          <p:cNvPr id="9" name="TextBox 8"/>
-          <p:cNvSpPr txBox="1"/>
-          <p:nvPr/>
-        </p:nvSpPr>
-        <p:spPr>
-          <a:xfrm>
-            <a:off x="1554480" y="2011680"/>
-            <a:ext cx="9829800" cy="411480"/>
-          </a:xfrm>
-          <a:prstGeom prst="rect">
-            <a:avLst/>
-          </a:prstGeom>
-          <a:noFill/>
-        </p:spPr>
-        <p:txBody>
-          <a:bodyPr wrap="square" lIns="45720" rIns="45720" tIns="18288" bIns="18288" anchor="t">
-            <a:spAutoFit/>
+      <p:pic>
+        <p:nvPicPr>
+          <p:cNvPr id="9" name="Picture 8" descr="2b8d4582f14f0858.png"/>
+          <p:cNvPicPr>
+            <a:picLocks noChangeAspect="1"/>
+          </p:cNvPicPr>
+          <p:nvPr/>
+        </p:nvPicPr>
+        <p:blipFill>
+          <a:blip r:embed="rId2"/>
+          <a:stretch>
+            <a:fillRect/>
+          </a:stretch>
+        </p:blipFill>
+        <p:spPr>
+          <a:xfrm>
+            <a:off x="1627632" y="1583436"/>
+            <a:ext cx="432816" cy="280416"/>
+          </a:xfrm>
+          <a:prstGeom prst="rect">
+            <a:avLst/>
+          </a:prstGeom>
+        </p:spPr>
+      </p:pic>
+      <p:sp>
+        <p:nvSpPr>
+          <p:cNvPr id="10" name="TextBox 9"/>
+          <p:cNvSpPr txBox="1"/>
+          <p:nvPr/>
+        </p:nvSpPr>
+        <p:spPr>
+          <a:xfrm>
+            <a:off x="2060448" y="1495044"/>
+            <a:ext cx="1328762" cy="457200"/>
+          </a:xfrm>
+          <a:prstGeom prst="rect">
+            <a:avLst/>
+          </a:prstGeom>
+          <a:noFill/>
+        </p:spPr>
+        <p:txBody>
+          <a:bodyPr wrap="none" lIns="45720" rIns="45720" tIns="18288" bIns="18288" anchor="ctr">
+            <a:noAutofit/>
           </a:bodyPr>
           <a:lstStyle/>
           <a:p>
             <a:pPr algn="l"/>
             <a:r>
-              <a:rPr sz="2100" b="0" i="0">
-                <a:solidFill>
-                  <a:srgbClr val="1A1A1A"/>
-                </a:solidFill>
-                <a:latin typeface="Century Schoolbook"/>
-              </a:rPr>
-              <a:t>Six questions. Work down the page.</a:t>
-            </a:r>
-          </a:p>
-        </p:txBody>
-      </p:sp>
-      <p:sp>
-        <p:nvSpPr>
-          <p:cNvPr id="10" name="TextBox 9"/>
-          <p:cNvSpPr txBox="1"/>
-          <p:nvPr/>
-        </p:nvSpPr>
-        <p:spPr>
-          <a:xfrm>
-            <a:off x="960120" y="2551176"/>
-            <a:ext cx="548640" cy="356616"/>
-          </a:xfrm>
-          <a:prstGeom prst="rect">
-            <a:avLst/>
-          </a:prstGeom>
-          <a:noFill/>
-        </p:spPr>
-        <p:txBody>
-          <a:bodyPr wrap="square" lIns="45720" rIns="45720" tIns="18288" bIns="18288" anchor="t">
+              <a:rPr sz="2300" b="0" i="0">
+                <a:solidFill>
+                  <a:srgbClr val="1A1A1A"/>
+                </a:solidFill>
+                <a:latin typeface="Century Schoolbook"/>
+              </a:rPr>
+              <a:t>  when  </a:t>
+            </a:r>
+          </a:p>
+        </p:txBody>
+      </p:sp>
+      <p:pic>
+        <p:nvPicPr>
+          <p:cNvPr id="11" name="Picture 10" descr="98bdfca2783561f2.png"/>
+          <p:cNvPicPr>
+            <a:picLocks noChangeAspect="1"/>
+          </p:cNvPicPr>
+          <p:nvPr/>
+        </p:nvPicPr>
+        <p:blipFill>
+          <a:blip r:embed="rId3"/>
+          <a:stretch>
+            <a:fillRect/>
+          </a:stretch>
+        </p:blipFill>
+        <p:spPr>
+          <a:xfrm>
+            <a:off x="3252050" y="1610867"/>
+            <a:ext cx="862584" cy="225552"/>
+          </a:xfrm>
+          <a:prstGeom prst="rect">
+            <a:avLst/>
+          </a:prstGeom>
+        </p:spPr>
+      </p:pic>
+      <p:sp>
+        <p:nvSpPr>
+          <p:cNvPr id="12" name="TextBox 11"/>
+          <p:cNvSpPr txBox="1"/>
+          <p:nvPr/>
+        </p:nvSpPr>
+        <p:spPr>
+          <a:xfrm>
+            <a:off x="960120" y="2157983"/>
+            <a:ext cx="548640" cy="457200"/>
+          </a:xfrm>
+          <a:prstGeom prst="rect">
+            <a:avLst/>
+          </a:prstGeom>
+          <a:noFill/>
+        </p:spPr>
+        <p:txBody>
+          <a:bodyPr wrap="square" lIns="45720" rIns="45720" tIns="18288" bIns="18288" anchor="ctr">
             <a:spAutoFit/>
           </a:bodyPr>
           <a:lstStyle/>
           <a:p>
             <a:pPr algn="l"/>
             <a:r>
-              <a:rPr sz="2100" b="1" i="0">
+              <a:rPr sz="2300" b="1" i="0">
                 <a:solidFill>
                   <a:srgbClr val="0B5394"/>
                 </a:solidFill>
@@ -15437,66 +15485,173 @@
           </a:p>
         </p:txBody>
       </p:sp>
-      <p:sp>
-        <p:nvSpPr>
-          <p:cNvPr id="11" name="TextBox 10"/>
-          <p:cNvSpPr txBox="1"/>
-          <p:nvPr/>
-        </p:nvSpPr>
-        <p:spPr>
-          <a:xfrm>
-            <a:off x="1554480" y="2551176"/>
-            <a:ext cx="9829800" cy="411480"/>
-          </a:xfrm>
-          <a:prstGeom prst="rect">
-            <a:avLst/>
-          </a:prstGeom>
-          <a:noFill/>
-        </p:spPr>
-        <p:txBody>
-          <a:bodyPr wrap="square" lIns="45720" rIns="45720" tIns="18288" bIns="18288" anchor="t">
-            <a:spAutoFit/>
+      <p:pic>
+        <p:nvPicPr>
+          <p:cNvPr id="13" name="Picture 12" descr="3518a776f6043365.png"/>
+          <p:cNvPicPr>
+            <a:picLocks noChangeAspect="1"/>
+          </p:cNvPicPr>
+          <p:nvPr/>
+        </p:nvPicPr>
+        <p:blipFill>
+          <a:blip r:embed="rId4"/>
+          <a:stretch>
+            <a:fillRect/>
+          </a:stretch>
+        </p:blipFill>
+        <p:spPr>
+          <a:xfrm>
+            <a:off x="1627632" y="2112263"/>
+            <a:ext cx="719328" cy="548640"/>
+          </a:xfrm>
+          <a:prstGeom prst="rect">
+            <a:avLst/>
+          </a:prstGeom>
+        </p:spPr>
+      </p:pic>
+      <p:sp>
+        <p:nvSpPr>
+          <p:cNvPr id="14" name="TextBox 13"/>
+          <p:cNvSpPr txBox="1"/>
+          <p:nvPr/>
+        </p:nvSpPr>
+        <p:spPr>
+          <a:xfrm>
+            <a:off x="2346960" y="2157983"/>
+            <a:ext cx="1328762" cy="457200"/>
+          </a:xfrm>
+          <a:prstGeom prst="rect">
+            <a:avLst/>
+          </a:prstGeom>
+          <a:noFill/>
+        </p:spPr>
+        <p:txBody>
+          <a:bodyPr wrap="none" lIns="45720" rIns="45720" tIns="18288" bIns="18288" anchor="ctr">
+            <a:noAutofit/>
           </a:bodyPr>
           <a:lstStyle/>
           <a:p>
             <a:pPr algn="l"/>
             <a:r>
-              <a:rPr sz="2100" b="0" i="0">
-                <a:solidFill>
-                  <a:srgbClr val="1A1A1A"/>
-                </a:solidFill>
-                <a:latin typeface="Century Schoolbook"/>
-              </a:rPr>
-              <a:t>Show the step that does the work, not just the answer.</a:t>
-            </a:r>
-          </a:p>
-        </p:txBody>
-      </p:sp>
-      <p:sp>
-        <p:nvSpPr>
-          <p:cNvPr id="12" name="TextBox 11"/>
-          <p:cNvSpPr txBox="1"/>
-          <p:nvPr/>
-        </p:nvSpPr>
-        <p:spPr>
-          <a:xfrm>
-            <a:off x="960120" y="3090672"/>
-            <a:ext cx="548640" cy="356616"/>
-          </a:xfrm>
-          <a:prstGeom prst="rect">
-            <a:avLst/>
-          </a:prstGeom>
-          <a:noFill/>
-        </p:spPr>
-        <p:txBody>
-          <a:bodyPr wrap="square" lIns="45720" rIns="45720" tIns="18288" bIns="18288" anchor="t">
-            <a:spAutoFit/>
+              <a:rPr sz="2300" b="0" i="0">
+                <a:solidFill>
+                  <a:srgbClr val="1A1A1A"/>
+                </a:solidFill>
+                <a:latin typeface="Century Schoolbook"/>
+              </a:rPr>
+              <a:t>  when  </a:t>
+            </a:r>
+          </a:p>
+        </p:txBody>
+      </p:sp>
+      <p:pic>
+        <p:nvPicPr>
+          <p:cNvPr id="15" name="Picture 14" descr="7597cef5a07f6eb3.png"/>
+          <p:cNvPicPr>
+            <a:picLocks noChangeAspect="1"/>
+          </p:cNvPicPr>
+          <p:nvPr/>
+        </p:nvPicPr>
+        <p:blipFill>
+          <a:blip r:embed="rId5"/>
+          <a:stretch>
+            <a:fillRect/>
+          </a:stretch>
+        </p:blipFill>
+        <p:spPr>
+          <a:xfrm>
+            <a:off x="3538562" y="2270759"/>
+            <a:ext cx="877824" cy="231648"/>
+          </a:xfrm>
+          <a:prstGeom prst="rect">
+            <a:avLst/>
+          </a:prstGeom>
+        </p:spPr>
+      </p:pic>
+      <p:sp>
+        <p:nvSpPr>
+          <p:cNvPr id="16" name="TextBox 15"/>
+          <p:cNvSpPr txBox="1"/>
+          <p:nvPr/>
+        </p:nvSpPr>
+        <p:spPr>
+          <a:xfrm>
+            <a:off x="4416386" y="2157983"/>
+            <a:ext cx="1093755" cy="457200"/>
+          </a:xfrm>
+          <a:prstGeom prst="rect">
+            <a:avLst/>
+          </a:prstGeom>
+          <a:noFill/>
+        </p:spPr>
+        <p:txBody>
+          <a:bodyPr wrap="none" lIns="45720" rIns="45720" tIns="18288" bIns="18288" anchor="ctr">
+            <a:noAutofit/>
           </a:bodyPr>
           <a:lstStyle/>
           <a:p>
             <a:pPr algn="l"/>
             <a:r>
-              <a:rPr sz="2100" b="1" i="0">
+              <a:rPr sz="2300" b="0" i="0">
+                <a:solidFill>
+                  <a:srgbClr val="1A1A1A"/>
+                </a:solidFill>
+                <a:latin typeface="Century Schoolbook"/>
+              </a:rPr>
+              <a:t>  and  </a:t>
+            </a:r>
+          </a:p>
+        </p:txBody>
+      </p:sp>
+      <p:pic>
+        <p:nvPicPr>
+          <p:cNvPr id="17" name="Picture 16" descr="93534435d911b664.png"/>
+          <p:cNvPicPr>
+            <a:picLocks noChangeAspect="1"/>
+          </p:cNvPicPr>
+          <p:nvPr/>
+        </p:nvPicPr>
+        <p:blipFill>
+          <a:blip r:embed="rId6"/>
+          <a:stretch>
+            <a:fillRect/>
+          </a:stretch>
+        </p:blipFill>
+        <p:spPr>
+          <a:xfrm>
+            <a:off x="5372982" y="2270759"/>
+            <a:ext cx="618744" cy="231648"/>
+          </a:xfrm>
+          <a:prstGeom prst="rect">
+            <a:avLst/>
+          </a:prstGeom>
+        </p:spPr>
+      </p:pic>
+      <p:sp>
+        <p:nvSpPr>
+          <p:cNvPr id="18" name="TextBox 17"/>
+          <p:cNvSpPr txBox="1"/>
+          <p:nvPr/>
+        </p:nvSpPr>
+        <p:spPr>
+          <a:xfrm>
+            <a:off x="960120" y="2880359"/>
+            <a:ext cx="548640" cy="457200"/>
+          </a:xfrm>
+          <a:prstGeom prst="rect">
+            <a:avLst/>
+          </a:prstGeom>
+          <a:noFill/>
+        </p:spPr>
+        <p:txBody>
+          <a:bodyPr wrap="square" lIns="45720" rIns="45720" tIns="18288" bIns="18288" anchor="ctr">
+            <a:spAutoFit/>
+          </a:bodyPr>
+          <a:lstStyle/>
+          <a:p>
+            <a:pPr algn="l"/>
+            <a:r>
+              <a:rPr sz="2300" b="1" i="0">
                 <a:solidFill>
                   <a:srgbClr val="0B5394"/>
                 </a:solidFill>
@@ -15507,37 +15662,590 @@
           </a:p>
         </p:txBody>
       </p:sp>
-      <p:sp>
-        <p:nvSpPr>
-          <p:cNvPr id="13" name="TextBox 12"/>
-          <p:cNvSpPr txBox="1"/>
-          <p:nvPr/>
-        </p:nvSpPr>
-        <p:spPr>
-          <a:xfrm>
-            <a:off x="1554480" y="3090672"/>
-            <a:ext cx="9829800" cy="411480"/>
-          </a:xfrm>
-          <a:prstGeom prst="rect">
-            <a:avLst/>
-          </a:prstGeom>
-          <a:noFill/>
-        </p:spPr>
-        <p:txBody>
-          <a:bodyPr wrap="square" lIns="45720" rIns="45720" tIns="18288" bIns="18288" anchor="t">
-            <a:spAutoFit/>
+      <p:pic>
+        <p:nvPicPr>
+          <p:cNvPr id="19" name="Picture 18" descr="d49f647ceaea2119.png"/>
+          <p:cNvPicPr>
+            <a:picLocks noChangeAspect="1"/>
+          </p:cNvPicPr>
+          <p:nvPr/>
+        </p:nvPicPr>
+        <p:blipFill>
+          <a:blip r:embed="rId7"/>
+          <a:stretch>
+            <a:fillRect/>
+          </a:stretch>
+        </p:blipFill>
+        <p:spPr>
+          <a:xfrm>
+            <a:off x="1627632" y="2843783"/>
+            <a:ext cx="807720" cy="530352"/>
+          </a:xfrm>
+          <a:prstGeom prst="rect">
+            <a:avLst/>
+          </a:prstGeom>
+        </p:spPr>
+      </p:pic>
+      <p:sp>
+        <p:nvSpPr>
+          <p:cNvPr id="20" name="TextBox 19"/>
+          <p:cNvSpPr txBox="1"/>
+          <p:nvPr/>
+        </p:nvSpPr>
+        <p:spPr>
+          <a:xfrm>
+            <a:off x="2435352" y="2880359"/>
+            <a:ext cx="1328762" cy="457200"/>
+          </a:xfrm>
+          <a:prstGeom prst="rect">
+            <a:avLst/>
+          </a:prstGeom>
+          <a:noFill/>
+        </p:spPr>
+        <p:txBody>
+          <a:bodyPr wrap="none" lIns="45720" rIns="45720" tIns="18288" bIns="18288" anchor="ctr">
+            <a:noAutofit/>
           </a:bodyPr>
           <a:lstStyle/>
           <a:p>
             <a:pPr algn="l"/>
             <a:r>
-              <a:rPr sz="2100" b="0" i="0">
-                <a:solidFill>
-                  <a:srgbClr val="1A1A1A"/>
-                </a:solidFill>
-                <a:latin typeface="Century Schoolbook"/>
-              </a:rPr>
-              <a:t>Silence until the six minutes are up.</a:t>
+              <a:rPr sz="2300" b="0" i="0">
+                <a:solidFill>
+                  <a:srgbClr val="1A1A1A"/>
+                </a:solidFill>
+                <a:latin typeface="Century Schoolbook"/>
+              </a:rPr>
+              <a:t>  when  </a:t>
+            </a:r>
+          </a:p>
+        </p:txBody>
+      </p:sp>
+      <p:pic>
+        <p:nvPicPr>
+          <p:cNvPr id="21" name="Picture 20" descr="a5e7f61095a4b877.png"/>
+          <p:cNvPicPr>
+            <a:picLocks noChangeAspect="1"/>
+          </p:cNvPicPr>
+          <p:nvPr/>
+        </p:nvPicPr>
+        <p:blipFill>
+          <a:blip r:embed="rId8"/>
+          <a:stretch>
+            <a:fillRect/>
+          </a:stretch>
+        </p:blipFill>
+        <p:spPr>
+          <a:xfrm>
+            <a:off x="3626954" y="2993135"/>
+            <a:ext cx="633984" cy="231648"/>
+          </a:xfrm>
+          <a:prstGeom prst="rect">
+            <a:avLst/>
+          </a:prstGeom>
+        </p:spPr>
+      </p:pic>
+      <p:sp>
+        <p:nvSpPr>
+          <p:cNvPr id="22" name="TextBox 21"/>
+          <p:cNvSpPr txBox="1"/>
+          <p:nvPr/>
+        </p:nvSpPr>
+        <p:spPr>
+          <a:xfrm>
+            <a:off x="4260938" y="2880359"/>
+            <a:ext cx="468561" cy="457200"/>
+          </a:xfrm>
+          <a:prstGeom prst="rect">
+            <a:avLst/>
+          </a:prstGeom>
+          <a:noFill/>
+        </p:spPr>
+        <p:txBody>
+          <a:bodyPr wrap="none" lIns="45720" rIns="45720" tIns="18288" bIns="18288" anchor="ctr">
+            <a:noAutofit/>
+          </a:bodyPr>
+          <a:lstStyle/>
+          <a:p>
+            <a:pPr algn="l"/>
+            <a:r>
+              <a:rPr sz="2300" b="0" i="0">
+                <a:solidFill>
+                  <a:srgbClr val="1A1A1A"/>
+                </a:solidFill>
+                <a:latin typeface="Century Schoolbook"/>
+              </a:rPr>
+              <a:t>,  </a:t>
+            </a:r>
+          </a:p>
+        </p:txBody>
+      </p:sp>
+      <p:pic>
+        <p:nvPicPr>
+          <p:cNvPr id="23" name="Picture 22" descr="cb41e881dfc7457b.png"/>
+          <p:cNvPicPr>
+            <a:picLocks noChangeAspect="1"/>
+          </p:cNvPicPr>
+          <p:nvPr/>
+        </p:nvPicPr>
+        <p:blipFill>
+          <a:blip r:embed="rId9"/>
+          <a:stretch>
+            <a:fillRect/>
+          </a:stretch>
+        </p:blipFill>
+        <p:spPr>
+          <a:xfrm>
+            <a:off x="4592339" y="2991611"/>
+            <a:ext cx="633984" cy="234696"/>
+          </a:xfrm>
+          <a:prstGeom prst="rect">
+            <a:avLst/>
+          </a:prstGeom>
+        </p:spPr>
+      </p:pic>
+      <p:sp>
+        <p:nvSpPr>
+          <p:cNvPr id="24" name="TextBox 23"/>
+          <p:cNvSpPr txBox="1"/>
+          <p:nvPr/>
+        </p:nvSpPr>
+        <p:spPr>
+          <a:xfrm>
+            <a:off x="5226323" y="2880359"/>
+            <a:ext cx="468561" cy="457200"/>
+          </a:xfrm>
+          <a:prstGeom prst="rect">
+            <a:avLst/>
+          </a:prstGeom>
+          <a:noFill/>
+        </p:spPr>
+        <p:txBody>
+          <a:bodyPr wrap="none" lIns="45720" rIns="45720" tIns="18288" bIns="18288" anchor="ctr">
+            <a:noAutofit/>
+          </a:bodyPr>
+          <a:lstStyle/>
+          <a:p>
+            <a:pPr algn="l"/>
+            <a:r>
+              <a:rPr sz="2300" b="0" i="0">
+                <a:solidFill>
+                  <a:srgbClr val="1A1A1A"/>
+                </a:solidFill>
+                <a:latin typeface="Century Schoolbook"/>
+              </a:rPr>
+              <a:t>,  </a:t>
+            </a:r>
+          </a:p>
+        </p:txBody>
+      </p:sp>
+      <p:pic>
+        <p:nvPicPr>
+          <p:cNvPr id="25" name="Picture 24" descr="e8d487b1e3f985f0.png"/>
+          <p:cNvPicPr>
+            <a:picLocks noChangeAspect="1"/>
+          </p:cNvPicPr>
+          <p:nvPr/>
+        </p:nvPicPr>
+        <p:blipFill>
+          <a:blip r:embed="rId10"/>
+          <a:stretch>
+            <a:fillRect/>
+          </a:stretch>
+        </p:blipFill>
+        <p:spPr>
+          <a:xfrm>
+            <a:off x="5557725" y="2991611"/>
+            <a:ext cx="603504" cy="234696"/>
+          </a:xfrm>
+          <a:prstGeom prst="rect">
+            <a:avLst/>
+          </a:prstGeom>
+        </p:spPr>
+      </p:pic>
+      <p:sp>
+        <p:nvSpPr>
+          <p:cNvPr id="26" name="TextBox 25"/>
+          <p:cNvSpPr txBox="1"/>
+          <p:nvPr/>
+        </p:nvSpPr>
+        <p:spPr>
+          <a:xfrm>
+            <a:off x="960120" y="3534156"/>
+            <a:ext cx="548640" cy="457200"/>
+          </a:xfrm>
+          <a:prstGeom prst="rect">
+            <a:avLst/>
+          </a:prstGeom>
+          <a:noFill/>
+        </p:spPr>
+        <p:txBody>
+          <a:bodyPr wrap="square" lIns="45720" rIns="45720" tIns="18288" bIns="18288" anchor="ctr">
+            <a:spAutoFit/>
+          </a:bodyPr>
+          <a:lstStyle/>
+          <a:p>
+            <a:pPr algn="l"/>
+            <a:r>
+              <a:rPr sz="2300" b="1" i="0">
+                <a:solidFill>
+                  <a:srgbClr val="0B5394"/>
+                </a:solidFill>
+                <a:latin typeface="Century Schoolbook"/>
+              </a:rPr>
+              <a:t>4.</a:t>
+            </a:r>
+          </a:p>
+        </p:txBody>
+      </p:sp>
+      <p:sp>
+        <p:nvSpPr>
+          <p:cNvPr id="27" name="TextBox 26"/>
+          <p:cNvSpPr txBox="1"/>
+          <p:nvPr/>
+        </p:nvSpPr>
+        <p:spPr>
+          <a:xfrm>
+            <a:off x="1554480" y="3534156"/>
+            <a:ext cx="9509819" cy="457200"/>
+          </a:xfrm>
+          <a:prstGeom prst="rect">
+            <a:avLst/>
+          </a:prstGeom>
+          <a:noFill/>
+        </p:spPr>
+        <p:txBody>
+          <a:bodyPr wrap="none" lIns="45720" rIns="45720" tIns="18288" bIns="18288" anchor="ctr">
+            <a:noAutofit/>
+          </a:bodyPr>
+          <a:lstStyle/>
+          <a:p>
+            <a:pPr algn="l"/>
+            <a:r>
+              <a:rPr sz="2300" b="0" i="0">
+                <a:solidFill>
+                  <a:srgbClr val="1A1A1A"/>
+                </a:solidFill>
+                <a:latin typeface="Century Schoolbook"/>
+              </a:rPr>
+              <a:t>A square room of side 10 feet is carpeted at 2.65 dollars a square </a:t>
+            </a:r>
+          </a:p>
+        </p:txBody>
+      </p:sp>
+      <p:sp>
+        <p:nvSpPr>
+          <p:cNvPr id="28" name="TextBox 27"/>
+          <p:cNvSpPr txBox="1"/>
+          <p:nvPr/>
+        </p:nvSpPr>
+        <p:spPr>
+          <a:xfrm>
+            <a:off x="1554480" y="3973067"/>
+            <a:ext cx="8183023" cy="457200"/>
+          </a:xfrm>
+          <a:prstGeom prst="rect">
+            <a:avLst/>
+          </a:prstGeom>
+          <a:noFill/>
+        </p:spPr>
+        <p:txBody>
+          <a:bodyPr wrap="none" lIns="45720" rIns="45720" tIns="18288" bIns="18288" anchor="ctr">
+            <a:noAutofit/>
+          </a:bodyPr>
+          <a:lstStyle/>
+          <a:p>
+            <a:pPr algn="l"/>
+            <a:r>
+              <a:rPr sz="2300" b="0" i="0">
+                <a:solidFill>
+                  <a:srgbClr val="1A1A1A"/>
+                </a:solidFill>
+                <a:latin typeface="Century Schoolbook"/>
+              </a:rPr>
+              <a:t>foot, with a flat 55 dollars for fitting. Find the total cost.</a:t>
+            </a:r>
+          </a:p>
+        </p:txBody>
+      </p:sp>
+      <p:sp>
+        <p:nvSpPr>
+          <p:cNvPr id="29" name="TextBox 28"/>
+          <p:cNvSpPr txBox="1"/>
+          <p:nvPr/>
+        </p:nvSpPr>
+        <p:spPr>
+          <a:xfrm>
+            <a:off x="960120" y="4567427"/>
+            <a:ext cx="548640" cy="457200"/>
+          </a:xfrm>
+          <a:prstGeom prst="rect">
+            <a:avLst/>
+          </a:prstGeom>
+          <a:noFill/>
+        </p:spPr>
+        <p:txBody>
+          <a:bodyPr wrap="square" lIns="45720" rIns="45720" tIns="18288" bIns="18288" anchor="ctr">
+            <a:spAutoFit/>
+          </a:bodyPr>
+          <a:lstStyle/>
+          <a:p>
+            <a:pPr algn="l"/>
+            <a:r>
+              <a:rPr sz="2300" b="1" i="0">
+                <a:solidFill>
+                  <a:srgbClr val="0B5394"/>
+                </a:solidFill>
+                <a:latin typeface="Century Schoolbook"/>
+              </a:rPr>
+              <a:t>5.</a:t>
+            </a:r>
+          </a:p>
+        </p:txBody>
+      </p:sp>
+      <p:pic>
+        <p:nvPicPr>
+          <p:cNvPr id="30" name="Picture 29" descr="191a9ee55d79324d.png"/>
+          <p:cNvPicPr>
+            <a:picLocks noChangeAspect="1"/>
+          </p:cNvPicPr>
+          <p:nvPr/>
+        </p:nvPicPr>
+        <p:blipFill>
+          <a:blip r:embed="rId11"/>
+          <a:stretch>
+            <a:fillRect/>
+          </a:stretch>
+        </p:blipFill>
+        <p:spPr>
+          <a:xfrm>
+            <a:off x="1627632" y="4625339"/>
+            <a:ext cx="1591056" cy="341376"/>
+          </a:xfrm>
+          <a:prstGeom prst="rect">
+            <a:avLst/>
+          </a:prstGeom>
+        </p:spPr>
+      </p:pic>
+      <p:sp>
+        <p:nvSpPr>
+          <p:cNvPr id="31" name="TextBox 30"/>
+          <p:cNvSpPr txBox="1"/>
+          <p:nvPr/>
+        </p:nvSpPr>
+        <p:spPr>
+          <a:xfrm>
+            <a:off x="3218688" y="4567427"/>
+            <a:ext cx="1328762" cy="457200"/>
+          </a:xfrm>
+          <a:prstGeom prst="rect">
+            <a:avLst/>
+          </a:prstGeom>
+          <a:noFill/>
+        </p:spPr>
+        <p:txBody>
+          <a:bodyPr wrap="none" lIns="45720" rIns="45720" tIns="18288" bIns="18288" anchor="ctr">
+            <a:noAutofit/>
+          </a:bodyPr>
+          <a:lstStyle/>
+          <a:p>
+            <a:pPr algn="l"/>
+            <a:r>
+              <a:rPr sz="2300" b="0" i="0">
+                <a:solidFill>
+                  <a:srgbClr val="1A1A1A"/>
+                </a:solidFill>
+                <a:latin typeface="Century Schoolbook"/>
+              </a:rPr>
+              <a:t>  when  </a:t>
+            </a:r>
+          </a:p>
+        </p:txBody>
+      </p:sp>
+      <p:pic>
+        <p:nvPicPr>
+          <p:cNvPr id="32" name="Picture 31" descr="4d3d644cd96c16e2.png"/>
+          <p:cNvPicPr>
+            <a:picLocks noChangeAspect="1"/>
+          </p:cNvPicPr>
+          <p:nvPr/>
+        </p:nvPicPr>
+        <p:blipFill>
+          <a:blip r:embed="rId12"/>
+          <a:stretch>
+            <a:fillRect/>
+          </a:stretch>
+        </p:blipFill>
+        <p:spPr>
+          <a:xfrm>
+            <a:off x="4410290" y="4681727"/>
+            <a:ext cx="637032" cy="228600"/>
+          </a:xfrm>
+          <a:prstGeom prst="rect">
+            <a:avLst/>
+          </a:prstGeom>
+        </p:spPr>
+      </p:pic>
+      <p:sp>
+        <p:nvSpPr>
+          <p:cNvPr id="33" name="TextBox 32"/>
+          <p:cNvSpPr txBox="1"/>
+          <p:nvPr/>
+        </p:nvSpPr>
+        <p:spPr>
+          <a:xfrm>
+            <a:off x="5047322" y="4567427"/>
+            <a:ext cx="1093755" cy="457200"/>
+          </a:xfrm>
+          <a:prstGeom prst="rect">
+            <a:avLst/>
+          </a:prstGeom>
+          <a:noFill/>
+        </p:spPr>
+        <p:txBody>
+          <a:bodyPr wrap="none" lIns="45720" rIns="45720" tIns="18288" bIns="18288" anchor="ctr">
+            <a:noAutofit/>
+          </a:bodyPr>
+          <a:lstStyle/>
+          <a:p>
+            <a:pPr algn="l"/>
+            <a:r>
+              <a:rPr sz="2300" b="0" i="0">
+                <a:solidFill>
+                  <a:srgbClr val="1A1A1A"/>
+                </a:solidFill>
+                <a:latin typeface="Century Schoolbook"/>
+              </a:rPr>
+              <a:t>  and  </a:t>
+            </a:r>
+          </a:p>
+        </p:txBody>
+      </p:sp>
+      <p:pic>
+        <p:nvPicPr>
+          <p:cNvPr id="34" name="Picture 33" descr="4298e77953559286.png"/>
+          <p:cNvPicPr>
+            <a:picLocks noChangeAspect="1"/>
+          </p:cNvPicPr>
+          <p:nvPr/>
+        </p:nvPicPr>
+        <p:blipFill>
+          <a:blip r:embed="rId13"/>
+          <a:stretch>
+            <a:fillRect/>
+          </a:stretch>
+        </p:blipFill>
+        <p:spPr>
+          <a:xfrm>
+            <a:off x="6003918" y="4649724"/>
+            <a:ext cx="609600" cy="292608"/>
+          </a:xfrm>
+          <a:prstGeom prst="rect">
+            <a:avLst/>
+          </a:prstGeom>
+        </p:spPr>
+      </p:pic>
+      <p:sp>
+        <p:nvSpPr>
+          <p:cNvPr id="35" name="TextBox 34"/>
+          <p:cNvSpPr txBox="1"/>
+          <p:nvPr/>
+        </p:nvSpPr>
+        <p:spPr>
+          <a:xfrm>
+            <a:off x="960120" y="5161788"/>
+            <a:ext cx="548640" cy="457200"/>
+          </a:xfrm>
+          <a:prstGeom prst="rect">
+            <a:avLst/>
+          </a:prstGeom>
+          <a:noFill/>
+        </p:spPr>
+        <p:txBody>
+          <a:bodyPr wrap="square" lIns="45720" rIns="45720" tIns="18288" bIns="18288" anchor="ctr">
+            <a:spAutoFit/>
+          </a:bodyPr>
+          <a:lstStyle/>
+          <a:p>
+            <a:pPr algn="l"/>
+            <a:r>
+              <a:rPr sz="2300" b="1" i="0">
+                <a:solidFill>
+                  <a:srgbClr val="0B5394"/>
+                </a:solidFill>
+                <a:latin typeface="Century Schoolbook"/>
+              </a:rPr>
+              <a:t>6.</a:t>
+            </a:r>
+          </a:p>
+        </p:txBody>
+      </p:sp>
+      <p:sp>
+        <p:nvSpPr>
+          <p:cNvPr id="36" name="TextBox 35"/>
+          <p:cNvSpPr txBox="1"/>
+          <p:nvPr/>
+        </p:nvSpPr>
+        <p:spPr>
+          <a:xfrm>
+            <a:off x="1554480" y="5161788"/>
+            <a:ext cx="9867929" cy="457200"/>
+          </a:xfrm>
+          <a:prstGeom prst="rect">
+            <a:avLst/>
+          </a:prstGeom>
+          <a:noFill/>
+        </p:spPr>
+        <p:txBody>
+          <a:bodyPr wrap="none" lIns="45720" rIns="45720" tIns="18288" bIns="18288" anchor="ctr">
+            <a:noAutofit/>
+          </a:bodyPr>
+          <a:lstStyle/>
+          <a:p>
+            <a:pPr algn="l"/>
+            <a:r>
+              <a:rPr sz="2300" b="0" i="0">
+                <a:solidFill>
+                  <a:srgbClr val="1A1A1A"/>
+                </a:solidFill>
+                <a:latin typeface="Century Schoolbook"/>
+              </a:rPr>
+              <a:t>A gym charges 25 dollars to join plus 8 dollars for each of 6 classes. </a:t>
+            </a:r>
+          </a:p>
+        </p:txBody>
+      </p:sp>
+      <p:sp>
+        <p:nvSpPr>
+          <p:cNvPr id="37" name="TextBox 36"/>
+          <p:cNvSpPr txBox="1"/>
+          <p:nvPr/>
+        </p:nvSpPr>
+        <p:spPr>
+          <a:xfrm>
+            <a:off x="1554480" y="5600700"/>
+            <a:ext cx="2903711" cy="457200"/>
+          </a:xfrm>
+          <a:prstGeom prst="rect">
+            <a:avLst/>
+          </a:prstGeom>
+          <a:noFill/>
+        </p:spPr>
+        <p:txBody>
+          <a:bodyPr wrap="none" lIns="45720" rIns="45720" tIns="18288" bIns="18288" anchor="ctr">
+            <a:noAutofit/>
+          </a:bodyPr>
+          <a:lstStyle/>
+          <a:p>
+            <a:pPr algn="l"/>
+            <a:r>
+              <a:rPr sz="2300" b="0" i="0">
+                <a:solidFill>
+                  <a:srgbClr val="1A1A1A"/>
+                </a:solidFill>
+                <a:latin typeface="Century Schoolbook"/>
+              </a:rPr>
+              <a:t>Find the total cost.</a:t>
             </a:r>
           </a:p>
         </p:txBody>

--- a/a7/build/out/u4/A7 4.07 Real-World Order of Operations - Slides.pptx
+++ b/a7/build/out/u4/A7 4.07 Real-World Order of Operations - Slides.pptx
@@ -3145,11 +3145,11 @@
           <a:p>
             <a:pPr algn="ctr"/>
             <a:r>
-              <a:rPr sz="1500" b="0" i="0">
+              <a:rPr sz="1420" b="0" i="0">
                 <a:solidFill>
                   <a:srgbClr val="6B6B6B"/>
                 </a:solidFill>
-                <a:latin typeface="Century Schoolbook"/>
+                <a:latin typeface="Lexend"/>
               </a:rPr>
               <a:t>GRADE 7 ACCELERATED  ·  UNIT 4  ·  LESSONS 7–8</a:t>
             </a:r>
@@ -3180,11 +3180,11 @@
           <a:p>
             <a:pPr algn="ctr"/>
             <a:r>
-              <a:rPr sz="3400" b="1" i="0">
-                <a:solidFill>
-                  <a:srgbClr val="1A1A1A"/>
-                </a:solidFill>
-                <a:latin typeface="Century Schoolbook"/>
+              <a:rPr sz="3229" b="1" i="0">
+                <a:solidFill>
+                  <a:srgbClr val="1A1A1A"/>
+                </a:solidFill>
+                <a:latin typeface="Lexend"/>
               </a:rPr>
               <a:t>Real-World Order of Operations</a:t>
             </a:r>
@@ -3285,11 +3285,11 @@
           <a:p>
             <a:pPr algn="ctr"/>
             <a:r>
-              <a:rPr sz="1600" b="1" i="0">
-                <a:solidFill>
-                  <a:srgbClr val="1A1A1A"/>
-                </a:solidFill>
-                <a:latin typeface="Century Schoolbook"/>
+              <a:rPr sz="1520" b="1" i="0">
+                <a:solidFill>
+                  <a:srgbClr val="1A1A1A"/>
+                </a:solidFill>
+                <a:latin typeface="Lexend"/>
               </a:rPr>
               <a:t>MA.8.NSO.1.7</a:t>
             </a:r>
@@ -3320,11 +3320,11 @@
           <a:p>
             <a:pPr algn="ctr"/>
             <a:r>
-              <a:rPr sz="1900" b="0" i="1">
-                <a:solidFill>
-                  <a:srgbClr val="1A1A1A"/>
-                </a:solidFill>
-                <a:latin typeface="Century Schoolbook"/>
+              <a:rPr sz="1810" b="0" i="0">
+                <a:solidFill>
+                  <a:srgbClr val="1A1A1A"/>
+                </a:solidFill>
+                <a:latin typeface="Lexend"/>
               </a:rPr>
               <a:t>I can substitute values into a formula and evaluate it, reading what the situation does rather than hunting for key words.</a:t>
             </a:r>
@@ -3390,11 +3390,11 @@
           <a:p>
             <a:pPr algn="l"/>
             <a:r>
-              <a:rPr sz="1100" b="0" i="1">
+              <a:rPr sz="1040" b="0" i="0">
                 <a:solidFill>
                   <a:srgbClr val="6B6B6B"/>
                 </a:solidFill>
-                <a:latin typeface="Century Schoolbook"/>
+                <a:latin typeface="Lexend"/>
               </a:rPr>
               <a:t>Grade 7 Accelerated · Unit 4 · Lessons 7–8 — Real-World Order of Operations</a:t>
             </a:r>
@@ -3425,11 +3425,11 @@
           <a:p>
             <a:pPr algn="r"/>
             <a:r>
-              <a:rPr sz="1100" b="0" i="0">
+              <a:rPr sz="1040" b="0" i="0">
                 <a:solidFill>
                   <a:srgbClr val="6B6B6B"/>
                 </a:solidFill>
-                <a:latin typeface="Century Schoolbook"/>
+                <a:latin typeface="Lexend"/>
               </a:rPr>
               <a:t>1</a:t>
             </a:r>
@@ -3478,11 +3478,11 @@
           <a:p>
             <a:pPr algn="l"/>
             <a:r>
-              <a:rPr sz="3600" b="1" i="0">
-                <a:solidFill>
-                  <a:srgbClr val="1A1A1A"/>
-                </a:solidFill>
-                <a:latin typeface="Century Schoolbook"/>
+              <a:rPr sz="3420" b="1" i="0">
+                <a:solidFill>
+                  <a:srgbClr val="1A1A1A"/>
+                </a:solidFill>
+                <a:latin typeface="Lexend"/>
               </a:rPr>
               <a:t>Your Turn</a:t>
             </a:r>
@@ -3618,11 +3618,11 @@
           <a:p>
             <a:pPr algn="l"/>
             <a:r>
-              <a:rPr sz="1100" b="0" i="1">
+              <a:rPr sz="1040" b="0" i="0">
                 <a:solidFill>
                   <a:srgbClr val="6B6B6B"/>
                 </a:solidFill>
-                <a:latin typeface="Century Schoolbook"/>
+                <a:latin typeface="Lexend"/>
               </a:rPr>
               <a:t>Grade 7 Accelerated · Unit 4 · Lessons 7–8 — Real-World Order of Operations</a:t>
             </a:r>
@@ -3653,11 +3653,11 @@
           <a:p>
             <a:pPr algn="r"/>
             <a:r>
-              <a:rPr sz="1100" b="0" i="0">
+              <a:rPr sz="1040" b="0" i="0">
                 <a:solidFill>
                   <a:srgbClr val="6B6B6B"/>
                 </a:solidFill>
-                <a:latin typeface="Century Schoolbook"/>
+                <a:latin typeface="Lexend"/>
               </a:rPr>
               <a:t>10</a:t>
             </a:r>
@@ -3672,8 +3672,8 @@
         </p:nvSpPr>
         <p:spPr>
           <a:xfrm>
-            <a:off x="1535324" y="2391156"/>
-            <a:ext cx="1066148" cy="457200"/>
+            <a:off x="1477955" y="1790700"/>
+            <a:ext cx="1004672" cy="457200"/>
           </a:xfrm>
           <a:prstGeom prst="rect">
             <a:avLst/>
@@ -3688,11 +3688,11 @@
           <a:p>
             <a:pPr algn="l"/>
             <a:r>
-              <a:rPr sz="2600" b="0" i="0">
-                <a:solidFill>
-                  <a:srgbClr val="1A1A1A"/>
-                </a:solidFill>
-                <a:latin typeface="Century Schoolbook"/>
+              <a:rPr sz="2470" b="0" i="0">
+                <a:solidFill>
+                  <a:srgbClr val="1A1A1A"/>
+                </a:solidFill>
+                <a:latin typeface="Lexend"/>
               </a:rPr>
               <a:t>Find </a:t>
             </a:r>
@@ -3701,7 +3701,7 @@
       </p:sp>
       <p:pic>
         <p:nvPicPr>
-          <p:cNvPr id="9" name="Picture 8" descr="ccc487dd163a747b.png"/>
+          <p:cNvPr id="9" name="Picture 8" descr="b636794ba0bbf4a9.png"/>
           <p:cNvPicPr>
             <a:picLocks noChangeAspect="1"/>
           </p:cNvPicPr>
@@ -3715,8 +3715,8 @@
         </p:blipFill>
         <p:spPr>
           <a:xfrm>
-            <a:off x="2464312" y="2194560"/>
-            <a:ext cx="1944623" cy="850392"/>
+            <a:off x="2345467" y="1600200"/>
+            <a:ext cx="1999487" cy="838200"/>
           </a:xfrm>
           <a:prstGeom prst="rect">
             <a:avLst/>
@@ -3731,8 +3731,8 @@
         </p:nvSpPr>
         <p:spPr>
           <a:xfrm>
-            <a:off x="4408936" y="2391156"/>
-            <a:ext cx="942097" cy="457200"/>
+            <a:off x="4344955" y="1790700"/>
+            <a:ext cx="952168" cy="457200"/>
           </a:xfrm>
           <a:prstGeom prst="rect">
             <a:avLst/>
@@ -3747,11 +3747,11 @@
           <a:p>
             <a:pPr algn="l"/>
             <a:r>
-              <a:rPr sz="2600" b="0" i="0">
-                <a:solidFill>
-                  <a:srgbClr val="1A1A1A"/>
-                </a:solidFill>
-                <a:latin typeface="Century Schoolbook"/>
+              <a:rPr sz="2470" b="0" i="0">
+                <a:solidFill>
+                  <a:srgbClr val="1A1A1A"/>
+                </a:solidFill>
+                <a:latin typeface="Lexend"/>
               </a:rPr>
               <a:t> for  </a:t>
             </a:r>
@@ -3760,7 +3760,7 @@
       </p:sp>
       <p:pic>
         <p:nvPicPr>
-          <p:cNvPr id="11" name="Picture 10" descr="5bea3106422a0737.png"/>
+          <p:cNvPr id="11" name="Picture 10" descr="28ac43e86d9ee64a.png"/>
           <p:cNvPicPr>
             <a:picLocks noChangeAspect="1"/>
           </p:cNvPicPr>
@@ -3774,8 +3774,8 @@
         </p:blipFill>
         <p:spPr>
           <a:xfrm>
-            <a:off x="5213874" y="2439924"/>
-            <a:ext cx="1606296" cy="359664"/>
+            <a:off x="5159963" y="1845564"/>
+            <a:ext cx="1688592" cy="347472"/>
           </a:xfrm>
           <a:prstGeom prst="rect">
             <a:avLst/>
@@ -3790,8 +3790,8 @@
         </p:nvSpPr>
         <p:spPr>
           <a:xfrm>
-            <a:off x="6820170" y="2391156"/>
-            <a:ext cx="1800668" cy="457200"/>
+            <a:off x="6848555" y="1790700"/>
+            <a:ext cx="1786194" cy="457200"/>
           </a:xfrm>
           <a:prstGeom prst="rect">
             <a:avLst/>
@@ -3806,11 +3806,11 @@
           <a:p>
             <a:pPr algn="l"/>
             <a:r>
-              <a:rPr sz="2600" b="0" i="0">
-                <a:solidFill>
-                  <a:srgbClr val="1A1A1A"/>
-                </a:solidFill>
-                <a:latin typeface="Century Schoolbook"/>
+              <a:rPr sz="2470" b="0" i="0">
+                <a:solidFill>
+                  <a:srgbClr val="1A1A1A"/>
+                </a:solidFill>
+                <a:latin typeface="Lexend"/>
               </a:rPr>
               <a:t>  kg  and  </a:t>
             </a:r>
@@ -3819,7 +3819,7 @@
       </p:sp>
       <p:pic>
         <p:nvPicPr>
-          <p:cNvPr id="13" name="Picture 12" descr="412fe3e32d9c1550.png"/>
+          <p:cNvPr id="13" name="Picture 12" descr="e1facf4e099fdd16.png"/>
           <p:cNvPicPr>
             <a:picLocks noChangeAspect="1"/>
           </p:cNvPicPr>
@@ -3833,8 +3833,8 @@
         </p:blipFill>
         <p:spPr>
           <a:xfrm>
-            <a:off x="8483678" y="2441448"/>
-            <a:ext cx="1207008" cy="356616"/>
+            <a:off x="8497590" y="1847088"/>
+            <a:ext cx="1210056" cy="344424"/>
           </a:xfrm>
           <a:prstGeom prst="rect">
             <a:avLst/>
@@ -3849,8 +3849,8 @@
         </p:nvSpPr>
         <p:spPr>
           <a:xfrm>
-            <a:off x="9690686" y="2391156"/>
-            <a:ext cx="1072668" cy="457200"/>
+            <a:off x="9707646" y="1790700"/>
+            <a:ext cx="1113078" cy="457200"/>
           </a:xfrm>
           <a:prstGeom prst="rect">
             <a:avLst/>
@@ -3865,20 +3865,68 @@
           <a:p>
             <a:pPr algn="l"/>
             <a:r>
-              <a:rPr sz="2600" b="0" i="0">
-                <a:solidFill>
-                  <a:srgbClr val="1A1A1A"/>
-                </a:solidFill>
-                <a:latin typeface="Century Schoolbook"/>
+              <a:rPr sz="2470" b="0" i="0">
+                <a:solidFill>
+                  <a:srgbClr val="1A1A1A"/>
+                </a:solidFill>
+                <a:latin typeface="Lexend"/>
               </a:rPr>
               <a:t>  m/s.</a:t>
             </a:r>
           </a:p>
         </p:txBody>
       </p:sp>
-      <p:sp>
-        <p:nvSpPr>
-          <p:cNvPr id="15" name="TextBox 14"/>
+      <p:pic>
+        <p:nvPicPr>
+          <p:cNvPr id="15" name="Picture 14" descr="3762f247991bf7e3.png"/>
+          <p:cNvPicPr>
+            <a:picLocks noChangeAspect="1"/>
+          </p:cNvPicPr>
+          <p:nvPr/>
+        </p:nvPicPr>
+        <p:blipFill>
+          <a:blip r:embed="rId5"/>
+          <a:stretch>
+            <a:fillRect/>
+          </a:stretch>
+        </p:blipFill>
+        <p:spPr>
+          <a:xfrm>
+            <a:off x="3218688" y="2886456"/>
+            <a:ext cx="2112264" cy="301752"/>
+          </a:xfrm>
+          <a:prstGeom prst="rect">
+            <a:avLst/>
+          </a:prstGeom>
+        </p:spPr>
+      </p:pic>
+      <p:pic>
+        <p:nvPicPr>
+          <p:cNvPr id="16" name="Picture 15" descr="ca71fa474550c765.png"/>
+          <p:cNvPicPr>
+            <a:picLocks noChangeAspect="1"/>
+          </p:cNvPicPr>
+          <p:nvPr/>
+        </p:nvPicPr>
+        <p:blipFill>
+          <a:blip r:embed="rId6"/>
+          <a:stretch>
+            <a:fillRect/>
+          </a:stretch>
+        </p:blipFill>
+        <p:spPr>
+          <a:xfrm>
+            <a:off x="3218688" y="3371088"/>
+            <a:ext cx="5836920" cy="606552"/>
+          </a:xfrm>
+          <a:prstGeom prst="rect">
+            <a:avLst/>
+          </a:prstGeom>
+        </p:spPr>
+      </p:pic>
+      <p:sp>
+        <p:nvSpPr>
+          <p:cNvPr id="17" name="TextBox 16"/>
           <p:cNvSpPr txBox="1"/>
           <p:nvPr/>
         </p:nvSpPr>
@@ -3900,11 +3948,11 @@
           <a:p>
             <a:pPr algn="ctr"/>
             <a:r>
-              <a:rPr sz="3200" b="1" i="0">
+              <a:rPr sz="3040" b="1" i="0">
                 <a:solidFill>
                   <a:srgbClr val="9E1B32"/>
                 </a:solidFill>
-                <a:latin typeface="Century Schoolbook"/>
+                <a:latin typeface="Lexend"/>
               </a:rPr>
               <a:t>Answer:   61,200 joules</a:t>
             </a:r>
@@ -3953,11 +4001,11 @@
           <a:p>
             <a:pPr algn="l"/>
             <a:r>
-              <a:rPr sz="3600" b="1" i="0">
-                <a:solidFill>
-                  <a:srgbClr val="1A1A1A"/>
-                </a:solidFill>
-                <a:latin typeface="Century Schoolbook"/>
+              <a:rPr sz="3420" b="1" i="0">
+                <a:solidFill>
+                  <a:srgbClr val="1A1A1A"/>
+                </a:solidFill>
+                <a:latin typeface="Lexend"/>
               </a:rPr>
               <a:t>Example 2</a:t>
             </a:r>
@@ -4093,11 +4141,11 @@
           <a:p>
             <a:pPr algn="l"/>
             <a:r>
-              <a:rPr sz="1100" b="0" i="1">
+              <a:rPr sz="1040" b="0" i="0">
                 <a:solidFill>
                   <a:srgbClr val="6B6B6B"/>
                 </a:solidFill>
-                <a:latin typeface="Century Schoolbook"/>
+                <a:latin typeface="Lexend"/>
               </a:rPr>
               <a:t>Grade 7 Accelerated · Unit 4 · Lessons 7–8 — Real-World Order of Operations</a:t>
             </a:r>
@@ -4128,11 +4176,11 @@
           <a:p>
             <a:pPr algn="r"/>
             <a:r>
-              <a:rPr sz="1100" b="0" i="0">
+              <a:rPr sz="1040" b="0" i="0">
                 <a:solidFill>
                   <a:srgbClr val="6B6B6B"/>
                 </a:solidFill>
-                <a:latin typeface="Century Schoolbook"/>
+                <a:latin typeface="Lexend"/>
               </a:rPr>
               <a:t>11</a:t>
             </a:r>
@@ -4163,11 +4211,11 @@
           <a:p>
             <a:pPr algn="ctr"/>
             <a:r>
-              <a:rPr sz="2400" b="0" i="0">
-                <a:solidFill>
-                  <a:srgbClr val="1A1A1A"/>
-                </a:solidFill>
-                <a:latin typeface="Century Schoolbook"/>
+              <a:rPr sz="2280" b="0" i="0">
+                <a:solidFill>
+                  <a:srgbClr val="1A1A1A"/>
+                </a:solidFill>
+                <a:latin typeface="Lexend"/>
               </a:rPr>
               <a:t>A square floor of side 9 feet is carpeted.</a:t>
             </a:r>
@@ -4198,11 +4246,11 @@
           <a:p>
             <a:pPr algn="ctr"/>
             <a:r>
-              <a:rPr sz="2400" b="0" i="0">
-                <a:solidFill>
-                  <a:srgbClr val="1A1A1A"/>
-                </a:solidFill>
-                <a:latin typeface="Century Schoolbook"/>
+              <a:rPr sz="2280" b="0" i="0">
+                <a:solidFill>
+                  <a:srgbClr val="1A1A1A"/>
+                </a:solidFill>
+                <a:latin typeface="Lexend"/>
               </a:rPr>
               <a:t>Carpet is 2.89 dollars a square foot and padding is 0.75 dollars a square foot.</a:t>
             </a:r>
@@ -4233,11 +4281,11 @@
           <a:p>
             <a:pPr algn="ctr"/>
             <a:r>
-              <a:rPr sz="2400" b="0" i="0">
-                <a:solidFill>
-                  <a:srgbClr val="1A1A1A"/>
-                </a:solidFill>
-                <a:latin typeface="Century Schoolbook"/>
+              <a:rPr sz="2280" b="0" i="0">
+                <a:solidFill>
+                  <a:srgbClr val="1A1A1A"/>
+                </a:solidFill>
+                <a:latin typeface="Lexend"/>
               </a:rPr>
               <a:t>Installation is a flat 95 dollars. Find the total cost.</a:t>
             </a:r>
@@ -4286,11 +4334,11 @@
           <a:p>
             <a:pPr algn="l"/>
             <a:r>
-              <a:rPr sz="3600" b="1" i="0">
-                <a:solidFill>
-                  <a:srgbClr val="1A1A1A"/>
-                </a:solidFill>
-                <a:latin typeface="Century Schoolbook"/>
+              <a:rPr sz="3420" b="1" i="0">
+                <a:solidFill>
+                  <a:srgbClr val="1A1A1A"/>
+                </a:solidFill>
+                <a:latin typeface="Lexend"/>
               </a:rPr>
               <a:t>Example 2</a:t>
             </a:r>
@@ -4426,11 +4474,11 @@
           <a:p>
             <a:pPr algn="l"/>
             <a:r>
-              <a:rPr sz="1100" b="0" i="1">
+              <a:rPr sz="1040" b="0" i="0">
                 <a:solidFill>
                   <a:srgbClr val="6B6B6B"/>
                 </a:solidFill>
-                <a:latin typeface="Century Schoolbook"/>
+                <a:latin typeface="Lexend"/>
               </a:rPr>
               <a:t>Grade 7 Accelerated · Unit 4 · Lessons 7–8 — Real-World Order of Operations</a:t>
             </a:r>
@@ -4461,11 +4509,11 @@
           <a:p>
             <a:pPr algn="r"/>
             <a:r>
-              <a:rPr sz="1100" b="0" i="0">
+              <a:rPr sz="1040" b="0" i="0">
                 <a:solidFill>
                   <a:srgbClr val="6B6B6B"/>
                 </a:solidFill>
-                <a:latin typeface="Century Schoolbook"/>
+                <a:latin typeface="Lexend"/>
               </a:rPr>
               <a:t>12</a:t>
             </a:r>
@@ -4474,7 +4522,7 @@
       </p:sp>
       <p:pic>
         <p:nvPicPr>
-          <p:cNvPr id="8" name="Picture 7" descr="88a80bd66be46d3a.png"/>
+          <p:cNvPr id="8" name="Picture 7" descr="f0ec63a4d8a0e1e3.png"/>
           <p:cNvPicPr>
             <a:picLocks noChangeAspect="1"/>
           </p:cNvPicPr>
@@ -4489,7 +4537,7 @@
         <p:spPr>
           <a:xfrm>
             <a:off x="1828800" y="1920240"/>
-            <a:ext cx="3227832" cy="405384"/>
+            <a:ext cx="3285744" cy="411480"/>
           </a:xfrm>
           <a:prstGeom prst="rect">
             <a:avLst/>
@@ -4498,7 +4546,7 @@
       </p:pic>
       <p:pic>
         <p:nvPicPr>
-          <p:cNvPr id="9" name="Picture 8" descr="01bf3bc2e6345cc3.png"/>
+          <p:cNvPr id="9" name="Picture 8" descr="704c60e1909449bd.png"/>
           <p:cNvPicPr>
             <a:picLocks noChangeAspect="1"/>
           </p:cNvPicPr>
@@ -4512,8 +4560,8 @@
         </p:blipFill>
         <p:spPr>
           <a:xfrm>
-            <a:off x="1828800" y="2599944"/>
-            <a:ext cx="2484120" cy="350520"/>
+            <a:off x="1828800" y="2606040"/>
+            <a:ext cx="2499360" cy="353568"/>
           </a:xfrm>
           <a:prstGeom prst="rect">
             <a:avLst/>
@@ -4522,7 +4570,7 @@
       </p:pic>
       <p:pic>
         <p:nvPicPr>
-          <p:cNvPr id="10" name="Picture 9" descr="6a57c082688f8b88.png"/>
+          <p:cNvPr id="10" name="Picture 9" descr="12efb6d72685203b.png"/>
           <p:cNvPicPr>
             <a:picLocks noChangeAspect="1"/>
           </p:cNvPicPr>
@@ -4536,8 +4584,8 @@
         </p:blipFill>
         <p:spPr>
           <a:xfrm>
-            <a:off x="1828800" y="3224783"/>
-            <a:ext cx="3745992" cy="292608"/>
+            <a:off x="1828800" y="3233928"/>
+            <a:ext cx="3825240" cy="280416"/>
           </a:xfrm>
           <a:prstGeom prst="rect">
             <a:avLst/>
@@ -4568,11 +4616,11 @@
           <a:p>
             <a:pPr algn="ctr"/>
             <a:r>
-              <a:rPr sz="3200" b="1" i="0">
+              <a:rPr sz="3040" b="1" i="0">
                 <a:solidFill>
                   <a:srgbClr val="9E1B32"/>
                 </a:solidFill>
-                <a:latin typeface="Century Schoolbook"/>
+                <a:latin typeface="Lexend"/>
               </a:rPr>
               <a:t>Answer:   389.84 dollars</a:t>
             </a:r>
@@ -4621,11 +4669,11 @@
           <a:p>
             <a:pPr algn="l"/>
             <a:r>
-              <a:rPr sz="3600" b="1" i="0">
-                <a:solidFill>
-                  <a:srgbClr val="1A1A1A"/>
-                </a:solidFill>
-                <a:latin typeface="Century Schoolbook"/>
+              <a:rPr sz="3420" b="1" i="0">
+                <a:solidFill>
+                  <a:srgbClr val="1A1A1A"/>
+                </a:solidFill>
+                <a:latin typeface="Lexend"/>
               </a:rPr>
               <a:t>Your Turn</a:t>
             </a:r>
@@ -4761,11 +4809,11 @@
           <a:p>
             <a:pPr algn="l"/>
             <a:r>
-              <a:rPr sz="1100" b="0" i="1">
+              <a:rPr sz="1040" b="0" i="0">
                 <a:solidFill>
                   <a:srgbClr val="6B6B6B"/>
                 </a:solidFill>
-                <a:latin typeface="Century Schoolbook"/>
+                <a:latin typeface="Lexend"/>
               </a:rPr>
               <a:t>Grade 7 Accelerated · Unit 4 · Lessons 7–8 — Real-World Order of Operations</a:t>
             </a:r>
@@ -4796,11 +4844,11 @@
           <a:p>
             <a:pPr algn="r"/>
             <a:r>
-              <a:rPr sz="1100" b="0" i="0">
+              <a:rPr sz="1040" b="0" i="0">
                 <a:solidFill>
                   <a:srgbClr val="6B6B6B"/>
                 </a:solidFill>
-                <a:latin typeface="Century Schoolbook"/>
+                <a:latin typeface="Lexend"/>
               </a:rPr>
               <a:t>13</a:t>
             </a:r>
@@ -4815,7 +4863,7 @@
         </p:nvSpPr>
         <p:spPr>
           <a:xfrm>
-            <a:off x="777240" y="2194560"/>
+            <a:off x="777240" y="1600200"/>
             <a:ext cx="10607040" cy="429370"/>
           </a:xfrm>
           <a:prstGeom prst="rect">
@@ -4831,11 +4879,11 @@
           <a:p>
             <a:pPr algn="ctr"/>
             <a:r>
-              <a:rPr sz="2400" b="0" i="0">
-                <a:solidFill>
-                  <a:srgbClr val="1A1A1A"/>
-                </a:solidFill>
-                <a:latin typeface="Century Schoolbook"/>
+              <a:rPr sz="2280" b="0" i="0">
+                <a:solidFill>
+                  <a:srgbClr val="1A1A1A"/>
+                </a:solidFill>
+                <a:latin typeface="Lexend"/>
               </a:rPr>
               <a:t>A square bathroom floor of side 6 feet is tiled.</a:t>
             </a:r>
@@ -4850,7 +4898,7 @@
         </p:nvSpPr>
         <p:spPr>
           <a:xfrm>
-            <a:off x="777240" y="2733658"/>
+            <a:off x="777240" y="2139298"/>
             <a:ext cx="10607040" cy="429370"/>
           </a:xfrm>
           <a:prstGeom prst="rect">
@@ -4866,11 +4914,11 @@
           <a:p>
             <a:pPr algn="ctr"/>
             <a:r>
-              <a:rPr sz="2400" b="0" i="0">
-                <a:solidFill>
-                  <a:srgbClr val="1A1A1A"/>
-                </a:solidFill>
-                <a:latin typeface="Century Schoolbook"/>
+              <a:rPr sz="2280" b="0" i="0">
+                <a:solidFill>
+                  <a:srgbClr val="1A1A1A"/>
+                </a:solidFill>
+                <a:latin typeface="Lexend"/>
               </a:rPr>
               <a:t>Tile is 4.25 dollars a square foot and grout is a flat 13.48 dollars.</a:t>
             </a:r>
@@ -4885,7 +4933,7 @@
         </p:nvSpPr>
         <p:spPr>
           <a:xfrm>
-            <a:off x="777240" y="3272756"/>
+            <a:off x="777240" y="2678396"/>
             <a:ext cx="10607040" cy="429370"/>
           </a:xfrm>
           <a:prstGeom prst="rect">
@@ -4901,11 +4949,11 @@
           <a:p>
             <a:pPr algn="ctr"/>
             <a:r>
-              <a:rPr sz="2400" b="0" i="0">
-                <a:solidFill>
-                  <a:srgbClr val="1A1A1A"/>
-                </a:solidFill>
-                <a:latin typeface="Century Schoolbook"/>
+              <a:rPr sz="2280" b="0" i="0">
+                <a:solidFill>
+                  <a:srgbClr val="1A1A1A"/>
+                </a:solidFill>
+                <a:latin typeface="Lexend"/>
               </a:rPr>
               <a:t>Find the total cost.</a:t>
             </a:r>
@@ -4954,11 +5002,11 @@
           <a:p>
             <a:pPr algn="l"/>
             <a:r>
-              <a:rPr sz="3600" b="1" i="0">
-                <a:solidFill>
-                  <a:srgbClr val="1A1A1A"/>
-                </a:solidFill>
-                <a:latin typeface="Century Schoolbook"/>
+              <a:rPr sz="3420" b="1" i="0">
+                <a:solidFill>
+                  <a:srgbClr val="1A1A1A"/>
+                </a:solidFill>
+                <a:latin typeface="Lexend"/>
               </a:rPr>
               <a:t>Your Turn</a:t>
             </a:r>
@@ -5094,11 +5142,11 @@
           <a:p>
             <a:pPr algn="l"/>
             <a:r>
-              <a:rPr sz="1100" b="0" i="1">
+              <a:rPr sz="1040" b="0" i="0">
                 <a:solidFill>
                   <a:srgbClr val="6B6B6B"/>
                 </a:solidFill>
-                <a:latin typeface="Century Schoolbook"/>
+                <a:latin typeface="Lexend"/>
               </a:rPr>
               <a:t>Grade 7 Accelerated · Unit 4 · Lessons 7–8 — Real-World Order of Operations</a:t>
             </a:r>
@@ -5129,11 +5177,11 @@
           <a:p>
             <a:pPr algn="r"/>
             <a:r>
-              <a:rPr sz="1100" b="0" i="0">
+              <a:rPr sz="1040" b="0" i="0">
                 <a:solidFill>
                   <a:srgbClr val="6B6B6B"/>
                 </a:solidFill>
-                <a:latin typeface="Century Schoolbook"/>
+                <a:latin typeface="Lexend"/>
               </a:rPr>
               <a:t>14</a:t>
             </a:r>
@@ -5148,7 +5196,7 @@
         </p:nvSpPr>
         <p:spPr>
           <a:xfrm>
-            <a:off x="777240" y="2194560"/>
+            <a:off x="777240" y="1600200"/>
             <a:ext cx="10607040" cy="429370"/>
           </a:xfrm>
           <a:prstGeom prst="rect">
@@ -5164,11 +5212,11 @@
           <a:p>
             <a:pPr algn="ctr"/>
             <a:r>
-              <a:rPr sz="2400" b="0" i="0">
-                <a:solidFill>
-                  <a:srgbClr val="1A1A1A"/>
-                </a:solidFill>
-                <a:latin typeface="Century Schoolbook"/>
+              <a:rPr sz="2280" b="0" i="0">
+                <a:solidFill>
+                  <a:srgbClr val="1A1A1A"/>
+                </a:solidFill>
+                <a:latin typeface="Lexend"/>
               </a:rPr>
               <a:t>A square bathroom floor of side 6 feet is tiled.</a:t>
             </a:r>
@@ -5183,7 +5231,7 @@
         </p:nvSpPr>
         <p:spPr>
           <a:xfrm>
-            <a:off x="777240" y="2733658"/>
+            <a:off x="777240" y="2139298"/>
             <a:ext cx="10607040" cy="429370"/>
           </a:xfrm>
           <a:prstGeom prst="rect">
@@ -5199,11 +5247,11 @@
           <a:p>
             <a:pPr algn="ctr"/>
             <a:r>
-              <a:rPr sz="2400" b="0" i="0">
-                <a:solidFill>
-                  <a:srgbClr val="1A1A1A"/>
-                </a:solidFill>
-                <a:latin typeface="Century Schoolbook"/>
+              <a:rPr sz="2280" b="0" i="0">
+                <a:solidFill>
+                  <a:srgbClr val="1A1A1A"/>
+                </a:solidFill>
+                <a:latin typeface="Lexend"/>
               </a:rPr>
               <a:t>Tile is 4.25 dollars a square foot and grout is a flat 13.48 dollars.</a:t>
             </a:r>
@@ -5218,7 +5266,7 @@
         </p:nvSpPr>
         <p:spPr>
           <a:xfrm>
-            <a:off x="777240" y="3272756"/>
+            <a:off x="777240" y="2678396"/>
             <a:ext cx="10607040" cy="429370"/>
           </a:xfrm>
           <a:prstGeom prst="rect">
@@ -5234,11 +5282,11 @@
           <a:p>
             <a:pPr algn="ctr"/>
             <a:r>
-              <a:rPr sz="2400" b="0" i="0">
-                <a:solidFill>
-                  <a:srgbClr val="1A1A1A"/>
-                </a:solidFill>
-                <a:latin typeface="Century Schoolbook"/>
+              <a:rPr sz="2280" b="0" i="0">
+                <a:solidFill>
+                  <a:srgbClr val="1A1A1A"/>
+                </a:solidFill>
+                <a:latin typeface="Lexend"/>
               </a:rPr>
               <a:t>Find the total cost.</a:t>
             </a:r>
@@ -5253,7 +5301,184 @@
         </p:nvSpPr>
         <p:spPr>
           <a:xfrm>
-            <a:off x="777240" y="4572000"/>
+            <a:off x="4244369" y="3267787"/>
+            <a:ext cx="1177822" cy="457200"/>
+          </a:xfrm>
+          <a:prstGeom prst="rect">
+            <a:avLst/>
+          </a:prstGeom>
+          <a:noFill/>
+        </p:spPr>
+        <p:txBody>
+          <a:bodyPr wrap="none" lIns="45720" rIns="45720" tIns="18288" bIns="18288" anchor="ctr">
+            <a:noAutofit/>
+          </a:bodyPr>
+          <a:lstStyle/>
+          <a:p>
+            <a:pPr algn="l"/>
+            <a:r>
+              <a:rPr sz="2330" b="0" i="0">
+                <a:solidFill>
+                  <a:srgbClr val="1A1A1A"/>
+                </a:solidFill>
+                <a:latin typeface="Lexend"/>
+              </a:rPr>
+              <a:t>Area:  </a:t>
+            </a:r>
+          </a:p>
+        </p:txBody>
+      </p:sp>
+      <p:pic>
+        <p:nvPicPr>
+          <p:cNvPr id="12" name="Picture 11" descr="80d9c9c061edf5c5.png"/>
+          <p:cNvPicPr>
+            <a:picLocks noChangeAspect="1"/>
+          </p:cNvPicPr>
+          <p:nvPr/>
+        </p:nvPicPr>
+        <p:blipFill>
+          <a:blip r:embed="rId2"/>
+          <a:stretch>
+            <a:fillRect/>
+          </a:stretch>
+        </p:blipFill>
+        <p:spPr>
+          <a:xfrm>
+            <a:off x="5285031" y="3365323"/>
+            <a:ext cx="868680" cy="262128"/>
+          </a:xfrm>
+          <a:prstGeom prst="rect">
+            <a:avLst/>
+          </a:prstGeom>
+        </p:spPr>
+      </p:pic>
+      <p:sp>
+        <p:nvSpPr>
+          <p:cNvPr id="13" name="TextBox 12"/>
+          <p:cNvSpPr txBox="1"/>
+          <p:nvPr/>
+        </p:nvSpPr>
+        <p:spPr>
+          <a:xfrm>
+            <a:off x="4244369" y="3770707"/>
+            <a:ext cx="983890" cy="457200"/>
+          </a:xfrm>
+          <a:prstGeom prst="rect">
+            <a:avLst/>
+          </a:prstGeom>
+          <a:noFill/>
+        </p:spPr>
+        <p:txBody>
+          <a:bodyPr wrap="none" lIns="45720" rIns="45720" tIns="18288" bIns="18288" anchor="ctr">
+            <a:noAutofit/>
+          </a:bodyPr>
+          <a:lstStyle/>
+          <a:p>
+            <a:pPr algn="l"/>
+            <a:r>
+              <a:rPr sz="2330" b="0" i="0">
+                <a:solidFill>
+                  <a:srgbClr val="1A1A1A"/>
+                </a:solidFill>
+                <a:latin typeface="Lexend"/>
+              </a:rPr>
+              <a:t>Tile:  </a:t>
+            </a:r>
+          </a:p>
+        </p:txBody>
+      </p:sp>
+      <p:pic>
+        <p:nvPicPr>
+          <p:cNvPr id="14" name="Picture 13" descr="bdbfbcd24be2c881.png"/>
+          <p:cNvPicPr>
+            <a:picLocks noChangeAspect="1"/>
+          </p:cNvPicPr>
+          <p:nvPr/>
+        </p:nvPicPr>
+        <p:blipFill>
+          <a:blip r:embed="rId3"/>
+          <a:stretch>
+            <a:fillRect/>
+          </a:stretch>
+        </p:blipFill>
+        <p:spPr>
+          <a:xfrm>
+            <a:off x="5091099" y="3892627"/>
+            <a:ext cx="1886712" cy="213360"/>
+          </a:xfrm>
+          <a:prstGeom prst="rect">
+            <a:avLst/>
+          </a:prstGeom>
+        </p:spPr>
+      </p:pic>
+      <p:sp>
+        <p:nvSpPr>
+          <p:cNvPr id="15" name="TextBox 14"/>
+          <p:cNvSpPr txBox="1"/>
+          <p:nvPr/>
+        </p:nvSpPr>
+        <p:spPr>
+          <a:xfrm>
+            <a:off x="4244369" y="4273627"/>
+            <a:ext cx="1194757" cy="457200"/>
+          </a:xfrm>
+          <a:prstGeom prst="rect">
+            <a:avLst/>
+          </a:prstGeom>
+          <a:noFill/>
+        </p:spPr>
+        <p:txBody>
+          <a:bodyPr wrap="none" lIns="45720" rIns="45720" tIns="18288" bIns="18288" anchor="ctr">
+            <a:noAutofit/>
+          </a:bodyPr>
+          <a:lstStyle/>
+          <a:p>
+            <a:pPr algn="l"/>
+            <a:r>
+              <a:rPr sz="2330" b="0" i="0">
+                <a:solidFill>
+                  <a:srgbClr val="1A1A1A"/>
+                </a:solidFill>
+                <a:latin typeface="Lexend"/>
+              </a:rPr>
+              <a:t>Total:  </a:t>
+            </a:r>
+          </a:p>
+        </p:txBody>
+      </p:sp>
+      <p:pic>
+        <p:nvPicPr>
+          <p:cNvPr id="16" name="Picture 15" descr="a731fe54239e13b8.png"/>
+          <p:cNvPicPr>
+            <a:picLocks noChangeAspect="1"/>
+          </p:cNvPicPr>
+          <p:nvPr/>
+        </p:nvPicPr>
+        <p:blipFill>
+          <a:blip r:embed="rId4"/>
+          <a:stretch>
+            <a:fillRect/>
+          </a:stretch>
+        </p:blipFill>
+        <p:spPr>
+          <a:xfrm>
+            <a:off x="5301966" y="4395547"/>
+            <a:ext cx="2618232" cy="213360"/>
+          </a:xfrm>
+          <a:prstGeom prst="rect">
+            <a:avLst/>
+          </a:prstGeom>
+        </p:spPr>
+      </p:pic>
+      <p:sp>
+        <p:nvSpPr>
+          <p:cNvPr id="17" name="TextBox 16"/>
+          <p:cNvSpPr txBox="1"/>
+          <p:nvPr/>
+        </p:nvSpPr>
+        <p:spPr>
+          <a:xfrm>
+            <a:off x="777240" y="4845127"/>
             <a:ext cx="10607040" cy="548640"/>
           </a:xfrm>
           <a:prstGeom prst="rect">
@@ -5269,11 +5494,11 @@
           <a:p>
             <a:pPr algn="ctr"/>
             <a:r>
-              <a:rPr sz="3200" b="1" i="0">
+              <a:rPr sz="3040" b="1" i="0">
                 <a:solidFill>
                   <a:srgbClr val="9E1B32"/>
                 </a:solidFill>
-                <a:latin typeface="Century Schoolbook"/>
+                <a:latin typeface="Lexend"/>
               </a:rPr>
               <a:t>Answer:   166.48 dollars</a:t>
             </a:r>
@@ -5322,11 +5547,11 @@
           <a:p>
             <a:pPr algn="l"/>
             <a:r>
-              <a:rPr sz="3400" b="1" i="0">
-                <a:solidFill>
-                  <a:srgbClr val="1A1A1A"/>
-                </a:solidFill>
-                <a:latin typeface="Century Schoolbook"/>
+              <a:rPr sz="3229" b="1" i="0">
+                <a:solidFill>
+                  <a:srgbClr val="1A1A1A"/>
+                </a:solidFill>
+                <a:latin typeface="Lexend"/>
               </a:rPr>
               <a:t>Whiteboards   ·   Question 1 of 9</a:t>
             </a:r>
@@ -5462,11 +5687,11 @@
           <a:p>
             <a:pPr algn="l"/>
             <a:r>
-              <a:rPr sz="1100" b="0" i="1">
+              <a:rPr sz="1040" b="0" i="0">
                 <a:solidFill>
                   <a:srgbClr val="6B6B6B"/>
                 </a:solidFill>
-                <a:latin typeface="Century Schoolbook"/>
+                <a:latin typeface="Lexend"/>
               </a:rPr>
               <a:t>Grade 7 Accelerated · Unit 4 · Lessons 7–8 — Real-World Order of Operations</a:t>
             </a:r>
@@ -5497,11 +5722,11 @@
           <a:p>
             <a:pPr algn="r"/>
             <a:r>
-              <a:rPr sz="1100" b="0" i="0">
+              <a:rPr sz="1040" b="0" i="0">
                 <a:solidFill>
                   <a:srgbClr val="6B6B6B"/>
                 </a:solidFill>
-                <a:latin typeface="Century Schoolbook"/>
+                <a:latin typeface="Lexend"/>
               </a:rPr>
               <a:t>15</a:t>
             </a:r>
@@ -5516,8 +5741,8 @@
         </p:nvSpPr>
         <p:spPr>
           <a:xfrm>
-            <a:off x="3665999" y="2171700"/>
-            <a:ext cx="1864823" cy="457200"/>
+            <a:off x="3737404" y="2171700"/>
+            <a:ext cx="1806076" cy="457200"/>
           </a:xfrm>
           <a:prstGeom prst="rect">
             <a:avLst/>
@@ -5532,11 +5757,11 @@
           <a:p>
             <a:pPr algn="l"/>
             <a:r>
-              <a:rPr sz="2600" b="0" i="0">
-                <a:solidFill>
-                  <a:srgbClr val="1A1A1A"/>
-                </a:solidFill>
-                <a:latin typeface="Century Schoolbook"/>
+              <a:rPr sz="2470" b="0" i="0">
+                <a:solidFill>
+                  <a:srgbClr val="1A1A1A"/>
+                </a:solidFill>
+                <a:latin typeface="Lexend"/>
               </a:rPr>
               <a:t>Evaluate  </a:t>
             </a:r>
@@ -5545,7 +5770,7 @@
       </p:sp>
       <p:pic>
         <p:nvPicPr>
-          <p:cNvPr id="9" name="Picture 8" descr="8b9f54f367bfb11b.png"/>
+          <p:cNvPr id="9" name="Picture 8" descr="011b5debc6280b66.png"/>
           <p:cNvPicPr>
             <a:picLocks noChangeAspect="1"/>
           </p:cNvPicPr>
@@ -5559,8 +5784,8 @@
         </p:blipFill>
         <p:spPr>
           <a:xfrm>
-            <a:off x="5393662" y="2229612"/>
-            <a:ext cx="530352" cy="341376"/>
+            <a:off x="5406321" y="2229612"/>
+            <a:ext cx="569976" cy="341376"/>
           </a:xfrm>
           <a:prstGeom prst="rect">
             <a:avLst/>
@@ -5575,8 +5800,8 @@
         </p:nvSpPr>
         <p:spPr>
           <a:xfrm>
-            <a:off x="5924014" y="2171700"/>
-            <a:ext cx="1474477" cy="457200"/>
+            <a:off x="5976297" y="2171700"/>
+            <a:ext cx="1439295" cy="457200"/>
           </a:xfrm>
           <a:prstGeom prst="rect">
             <a:avLst/>
@@ -5591,11 +5816,11 @@
           <a:p>
             <a:pPr algn="l"/>
             <a:r>
-              <a:rPr sz="2600" b="0" i="0">
-                <a:solidFill>
-                  <a:srgbClr val="1A1A1A"/>
-                </a:solidFill>
-                <a:latin typeface="Century Schoolbook"/>
+              <a:rPr sz="2470" b="0" i="0">
+                <a:solidFill>
+                  <a:srgbClr val="1A1A1A"/>
+                </a:solidFill>
+                <a:latin typeface="Lexend"/>
               </a:rPr>
               <a:t>  when  </a:t>
             </a:r>
@@ -5604,7 +5829,7 @@
       </p:sp>
       <p:pic>
         <p:nvPicPr>
-          <p:cNvPr id="11" name="Picture 10" descr="0c0822ea9a5c4000.png"/>
+          <p:cNvPr id="11" name="Picture 10" descr="808745f769ad1093.png"/>
           <p:cNvPicPr>
             <a:picLocks noChangeAspect="1"/>
           </p:cNvPicPr>
@@ -5618,8 +5843,8 @@
         </p:blipFill>
         <p:spPr>
           <a:xfrm>
-            <a:off x="7261332" y="2260092"/>
-            <a:ext cx="1063752" cy="280416"/>
+            <a:off x="7278433" y="2263140"/>
+            <a:ext cx="996696" cy="274320"/>
           </a:xfrm>
           <a:prstGeom prst="rect">
             <a:avLst/>
@@ -5634,8 +5859,8 @@
         </p:nvSpPr>
         <p:spPr>
           <a:xfrm>
-            <a:off x="8325084" y="2171700"/>
-            <a:ext cx="307595" cy="457200"/>
+            <a:off x="8275129" y="2171700"/>
+            <a:ext cx="286146" cy="457200"/>
           </a:xfrm>
           <a:prstGeom prst="rect">
             <a:avLst/>
@@ -5650,11 +5875,11 @@
           <a:p>
             <a:pPr algn="l"/>
             <a:r>
-              <a:rPr sz="2600" b="0" i="0">
-                <a:solidFill>
-                  <a:srgbClr val="1A1A1A"/>
-                </a:solidFill>
-                <a:latin typeface="Century Schoolbook"/>
+              <a:rPr sz="2470" b="0" i="0">
+                <a:solidFill>
+                  <a:srgbClr val="1A1A1A"/>
+                </a:solidFill>
+                <a:latin typeface="Lexend"/>
               </a:rPr>
               <a:t>.</a:t>
             </a:r>
@@ -5685,11 +5910,11 @@
           <a:p>
             <a:pPr algn="ctr"/>
             <a:r>
-              <a:rPr sz="2600" b="1" i="0">
-                <a:solidFill>
-                  <a:srgbClr val="1A1A1A"/>
-                </a:solidFill>
-                <a:latin typeface="Century Schoolbook"/>
+              <a:rPr sz="2470" b="1" i="0">
+                <a:solidFill>
+                  <a:srgbClr val="1A1A1A"/>
+                </a:solidFill>
+                <a:latin typeface="Lexend"/>
               </a:rPr>
               <a:t>Answer it.</a:t>
             </a:r>
@@ -5738,11 +5963,11 @@
           <a:p>
             <a:pPr algn="l"/>
             <a:r>
-              <a:rPr sz="3400" b="1" i="0">
-                <a:solidFill>
-                  <a:srgbClr val="1A1A1A"/>
-                </a:solidFill>
-                <a:latin typeface="Century Schoolbook"/>
+              <a:rPr sz="3229" b="1" i="0">
+                <a:solidFill>
+                  <a:srgbClr val="1A1A1A"/>
+                </a:solidFill>
+                <a:latin typeface="Lexend"/>
               </a:rPr>
               <a:t>Whiteboards   ·   Question 1 of 9</a:t>
             </a:r>
@@ -5878,11 +6103,11 @@
           <a:p>
             <a:pPr algn="l"/>
             <a:r>
-              <a:rPr sz="1100" b="0" i="1">
+              <a:rPr sz="1040" b="0" i="0">
                 <a:solidFill>
                   <a:srgbClr val="6B6B6B"/>
                 </a:solidFill>
-                <a:latin typeface="Century Schoolbook"/>
+                <a:latin typeface="Lexend"/>
               </a:rPr>
               <a:t>Grade 7 Accelerated · Unit 4 · Lessons 7–8 — Real-World Order of Operations</a:t>
             </a:r>
@@ -5913,11 +6138,11 @@
           <a:p>
             <a:pPr algn="r"/>
             <a:r>
-              <a:rPr sz="1100" b="0" i="0">
+              <a:rPr sz="1040" b="0" i="0">
                 <a:solidFill>
                   <a:srgbClr val="6B6B6B"/>
                 </a:solidFill>
-                <a:latin typeface="Century Schoolbook"/>
+                <a:latin typeface="Lexend"/>
               </a:rPr>
               <a:t>16</a:t>
             </a:r>
@@ -5932,8 +6157,8 @@
         </p:nvSpPr>
         <p:spPr>
           <a:xfrm>
-            <a:off x="3664475" y="2080260"/>
-            <a:ext cx="1864823" cy="457200"/>
+            <a:off x="3735880" y="2080260"/>
+            <a:ext cx="1806076" cy="457200"/>
           </a:xfrm>
           <a:prstGeom prst="rect">
             <a:avLst/>
@@ -5948,11 +6173,11 @@
           <a:p>
             <a:pPr algn="l"/>
             <a:r>
-              <a:rPr sz="2600" b="0" i="0">
-                <a:solidFill>
-                  <a:srgbClr val="1A1A1A"/>
-                </a:solidFill>
-                <a:latin typeface="Century Schoolbook"/>
+              <a:rPr sz="2470" b="0" i="0">
+                <a:solidFill>
+                  <a:srgbClr val="1A1A1A"/>
+                </a:solidFill>
+                <a:latin typeface="Lexend"/>
               </a:rPr>
               <a:t>Evaluate  </a:t>
             </a:r>
@@ -5961,7 +6186,7 @@
       </p:sp>
       <p:pic>
         <p:nvPicPr>
-          <p:cNvPr id="9" name="Picture 8" descr="dfb9a8ed903d4273.png"/>
+          <p:cNvPr id="9" name="Picture 8" descr="1f66cf6f8dfc2bd0.png"/>
           <p:cNvPicPr>
             <a:picLocks noChangeAspect="1"/>
           </p:cNvPicPr>
@@ -5975,8 +6200,8 @@
         </p:blipFill>
         <p:spPr>
           <a:xfrm>
-            <a:off x="5392138" y="2138171"/>
-            <a:ext cx="533400" cy="341376"/>
+            <a:off x="5404797" y="2138171"/>
+            <a:ext cx="573024" cy="341376"/>
           </a:xfrm>
           <a:prstGeom prst="rect">
             <a:avLst/>
@@ -5991,8 +6216,8 @@
         </p:nvSpPr>
         <p:spPr>
           <a:xfrm>
-            <a:off x="5925538" y="2080260"/>
-            <a:ext cx="1474477" cy="457200"/>
+            <a:off x="5977821" y="2080260"/>
+            <a:ext cx="1439295" cy="457200"/>
           </a:xfrm>
           <a:prstGeom prst="rect">
             <a:avLst/>
@@ -6007,11 +6232,11 @@
           <a:p>
             <a:pPr algn="l"/>
             <a:r>
-              <a:rPr sz="2600" b="0" i="0">
-                <a:solidFill>
-                  <a:srgbClr val="1A1A1A"/>
-                </a:solidFill>
-                <a:latin typeface="Century Schoolbook"/>
+              <a:rPr sz="2470" b="0" i="0">
+                <a:solidFill>
+                  <a:srgbClr val="1A1A1A"/>
+                </a:solidFill>
+                <a:latin typeface="Lexend"/>
               </a:rPr>
               <a:t>  when  </a:t>
             </a:r>
@@ -6020,7 +6245,7 @@
       </p:sp>
       <p:pic>
         <p:nvPicPr>
-          <p:cNvPr id="11" name="Picture 10" descr="2a9ba365712c43c3.png"/>
+          <p:cNvPr id="11" name="Picture 10" descr="808745f769ad1093.png"/>
           <p:cNvPicPr>
             <a:picLocks noChangeAspect="1"/>
           </p:cNvPicPr>
@@ -6034,8 +6259,8 @@
         </p:blipFill>
         <p:spPr>
           <a:xfrm>
-            <a:off x="7262856" y="2168652"/>
-            <a:ext cx="1063752" cy="280416"/>
+            <a:off x="7279957" y="2171700"/>
+            <a:ext cx="996696" cy="274320"/>
           </a:xfrm>
           <a:prstGeom prst="rect">
             <a:avLst/>
@@ -6050,8 +6275,8 @@
         </p:nvSpPr>
         <p:spPr>
           <a:xfrm>
-            <a:off x="8326608" y="2080260"/>
-            <a:ext cx="307595" cy="457200"/>
+            <a:off x="8276653" y="2080260"/>
+            <a:ext cx="286146" cy="457200"/>
           </a:xfrm>
           <a:prstGeom prst="rect">
             <a:avLst/>
@@ -6066,20 +6291,92 @@
           <a:p>
             <a:pPr algn="l"/>
             <a:r>
-              <a:rPr sz="2600" b="0" i="0">
-                <a:solidFill>
-                  <a:srgbClr val="1A1A1A"/>
-                </a:solidFill>
-                <a:latin typeface="Century Schoolbook"/>
+              <a:rPr sz="2470" b="0" i="0">
+                <a:solidFill>
+                  <a:srgbClr val="1A1A1A"/>
+                </a:solidFill>
+                <a:latin typeface="Lexend"/>
               </a:rPr>
               <a:t>.</a:t>
             </a:r>
           </a:p>
         </p:txBody>
       </p:sp>
-      <p:sp>
-        <p:nvSpPr>
-          <p:cNvPr id="13" name="TextBox 12"/>
+      <p:pic>
+        <p:nvPicPr>
+          <p:cNvPr id="13" name="Picture 12" descr="f32b4b5eddd91236.png"/>
+          <p:cNvPicPr>
+            <a:picLocks noChangeAspect="1"/>
+          </p:cNvPicPr>
+          <p:nvPr/>
+        </p:nvPicPr>
+        <p:blipFill>
+          <a:blip r:embed="rId4"/>
+          <a:stretch>
+            <a:fillRect/>
+          </a:stretch>
+        </p:blipFill>
+        <p:spPr>
+          <a:xfrm>
+            <a:off x="5364479" y="2910840"/>
+            <a:ext cx="1539240" cy="313944"/>
+          </a:xfrm>
+          <a:prstGeom prst="rect">
+            <a:avLst/>
+          </a:prstGeom>
+        </p:spPr>
+      </p:pic>
+      <p:pic>
+        <p:nvPicPr>
+          <p:cNvPr id="14" name="Picture 13" descr="a8317bc2e11e2fea.png"/>
+          <p:cNvPicPr>
+            <a:picLocks noChangeAspect="1"/>
+          </p:cNvPicPr>
+          <p:nvPr/>
+        </p:nvPicPr>
+        <p:blipFill>
+          <a:blip r:embed="rId5"/>
+          <a:stretch>
+            <a:fillRect/>
+          </a:stretch>
+        </p:blipFill>
+        <p:spPr>
+          <a:xfrm>
+            <a:off x="5364479" y="3413759"/>
+            <a:ext cx="1115568" cy="313944"/>
+          </a:xfrm>
+          <a:prstGeom prst="rect">
+            <a:avLst/>
+          </a:prstGeom>
+        </p:spPr>
+      </p:pic>
+      <p:pic>
+        <p:nvPicPr>
+          <p:cNvPr id="15" name="Picture 14" descr="946a1754962a1d8b.png"/>
+          <p:cNvPicPr>
+            <a:picLocks noChangeAspect="1"/>
+          </p:cNvPicPr>
+          <p:nvPr/>
+        </p:nvPicPr>
+        <p:blipFill>
+          <a:blip r:embed="rId6"/>
+          <a:stretch>
+            <a:fillRect/>
+          </a:stretch>
+        </p:blipFill>
+        <p:spPr>
+          <a:xfrm>
+            <a:off x="5364479" y="3966971"/>
+            <a:ext cx="1161288" cy="213360"/>
+          </a:xfrm>
+          <a:prstGeom prst="rect">
+            <a:avLst/>
+          </a:prstGeom>
+        </p:spPr>
+      </p:pic>
+      <p:sp>
+        <p:nvSpPr>
+          <p:cNvPr id="16" name="TextBox 15"/>
           <p:cNvSpPr txBox="1"/>
           <p:nvPr/>
         </p:nvSpPr>
@@ -6101,11 +6398,11 @@
           <a:p>
             <a:pPr algn="ctr"/>
             <a:r>
-              <a:rPr sz="3200" b="1" i="0">
+              <a:rPr sz="3040" b="1" i="0">
                 <a:solidFill>
                   <a:srgbClr val="9E1B32"/>
                 </a:solidFill>
-                <a:latin typeface="Century Schoolbook"/>
+                <a:latin typeface="Lexend"/>
               </a:rPr>
               <a:t>Answer:   12</a:t>
             </a:r>
@@ -6154,11 +6451,11 @@
           <a:p>
             <a:pPr algn="l"/>
             <a:r>
-              <a:rPr sz="3400" b="1" i="0">
-                <a:solidFill>
-                  <a:srgbClr val="1A1A1A"/>
-                </a:solidFill>
-                <a:latin typeface="Century Schoolbook"/>
+              <a:rPr sz="3229" b="1" i="0">
+                <a:solidFill>
+                  <a:srgbClr val="1A1A1A"/>
+                </a:solidFill>
+                <a:latin typeface="Lexend"/>
               </a:rPr>
               <a:t>Whiteboards   ·   Question 2 of 9</a:t>
             </a:r>
@@ -6294,11 +6591,11 @@
           <a:p>
             <a:pPr algn="l"/>
             <a:r>
-              <a:rPr sz="1100" b="0" i="1">
+              <a:rPr sz="1040" b="0" i="0">
                 <a:solidFill>
                   <a:srgbClr val="6B6B6B"/>
                 </a:solidFill>
-                <a:latin typeface="Century Schoolbook"/>
+                <a:latin typeface="Lexend"/>
               </a:rPr>
               <a:t>Grade 7 Accelerated · Unit 4 · Lessons 7–8 — Real-World Order of Operations</a:t>
             </a:r>
@@ -6329,11 +6626,11 @@
           <a:p>
             <a:pPr algn="r"/>
             <a:r>
-              <a:rPr sz="1100" b="0" i="0">
+              <a:rPr sz="1040" b="0" i="0">
                 <a:solidFill>
                   <a:srgbClr val="6B6B6B"/>
                 </a:solidFill>
-                <a:latin typeface="Century Schoolbook"/>
+                <a:latin typeface="Lexend"/>
               </a:rPr>
               <a:t>17</a:t>
             </a:r>
@@ -6364,11 +6661,11 @@
           <a:p>
             <a:pPr algn="l"/>
             <a:r>
-              <a:rPr sz="2400" b="0" i="0">
-                <a:solidFill>
-                  <a:srgbClr val="1A1A1A"/>
-                </a:solidFill>
-                <a:latin typeface="Century Schoolbook"/>
+              <a:rPr sz="2280" b="0" i="0">
+                <a:solidFill>
+                  <a:srgbClr val="1A1A1A"/>
+                </a:solidFill>
+                <a:latin typeface="Lexend"/>
               </a:rPr>
               <a:t>A cyclist has a mass of 70 kilograms and rides at 8 meters per second.</a:t>
             </a:r>
@@ -6399,11 +6696,11 @@
           <a:p>
             <a:pPr algn="l"/>
             <a:r>
-              <a:rPr sz="2400" b="0" i="0">
-                <a:solidFill>
-                  <a:srgbClr val="1A1A1A"/>
-                </a:solidFill>
-                <a:latin typeface="Century Schoolbook"/>
+              <a:rPr sz="2280" b="0" i="0">
+                <a:solidFill>
+                  <a:srgbClr val="1A1A1A"/>
+                </a:solidFill>
+                <a:latin typeface="Lexend"/>
               </a:rPr>
               <a:t>Her bicycle cost 480 dollars.</a:t>
             </a:r>
@@ -6418,8 +6715,8 @@
         </p:nvSpPr>
         <p:spPr>
           <a:xfrm>
-            <a:off x="1234440" y="3427807"/>
-            <a:ext cx="2906708" cy="457200"/>
+            <a:off x="1234440" y="3424759"/>
+            <a:ext cx="2865157" cy="457200"/>
           </a:xfrm>
           <a:prstGeom prst="rect">
             <a:avLst/>
@@ -6434,11 +6731,11 @@
           <a:p>
             <a:pPr algn="l"/>
             <a:r>
-              <a:rPr sz="2400" b="0" i="0">
-                <a:solidFill>
-                  <a:srgbClr val="1A1A1A"/>
-                </a:solidFill>
-                <a:latin typeface="Century Schoolbook"/>
+              <a:rPr sz="2280" b="0" i="0">
+                <a:solidFill>
+                  <a:srgbClr val="1A1A1A"/>
+                </a:solidFill>
+                <a:latin typeface="Lexend"/>
               </a:rPr>
               <a:t>Kinetic energy is  </a:t>
             </a:r>
@@ -6447,7 +6744,7 @@
       </p:sp>
       <p:pic>
         <p:nvPicPr>
-          <p:cNvPr id="11" name="Picture 10" descr="8419d3078da3665a.png"/>
+          <p:cNvPr id="11" name="Picture 10" descr="0bcb023825e8ebc6.png"/>
           <p:cNvPicPr>
             <a:picLocks noChangeAspect="1"/>
           </p:cNvPicPr>
@@ -6461,8 +6758,8 @@
         </p:blipFill>
         <p:spPr>
           <a:xfrm>
-            <a:off x="4003988" y="3382087"/>
-            <a:ext cx="1261872" cy="548640"/>
+            <a:off x="3962437" y="3382087"/>
+            <a:ext cx="1298448" cy="542544"/>
           </a:xfrm>
           <a:prstGeom prst="rect">
             <a:avLst/>
@@ -6477,8 +6774,8 @@
         </p:nvSpPr>
         <p:spPr>
           <a:xfrm>
-            <a:off x="5265860" y="3427807"/>
-            <a:ext cx="2190856" cy="457200"/>
+            <a:off x="5260885" y="3424759"/>
+            <a:ext cx="2200084" cy="457200"/>
           </a:xfrm>
           <a:prstGeom prst="rect">
             <a:avLst/>
@@ -6493,11 +6790,11 @@
           <a:p>
             <a:pPr algn="l"/>
             <a:r>
-              <a:rPr sz="2400" b="0" i="0">
-                <a:solidFill>
-                  <a:srgbClr val="1A1A1A"/>
-                </a:solidFill>
-                <a:latin typeface="Century Schoolbook"/>
+              <a:rPr sz="2280" b="0" i="0">
+                <a:solidFill>
+                  <a:srgbClr val="1A1A1A"/>
+                </a:solidFill>
+                <a:latin typeface="Lexend"/>
               </a:rPr>
               <a:t>,  for a mass  </a:t>
             </a:r>
@@ -6506,7 +6803,7 @@
       </p:sp>
       <p:pic>
         <p:nvPicPr>
-          <p:cNvPr id="13" name="Picture 12" descr="38ea68753f073419.png"/>
+          <p:cNvPr id="13" name="Picture 12" descr="f4653c4bb82321a9.png"/>
           <p:cNvPicPr>
             <a:picLocks noChangeAspect="1"/>
           </p:cNvPicPr>
@@ -6520,8 +6817,8 @@
         </p:blipFill>
         <p:spPr>
           <a:xfrm>
-            <a:off x="7319556" y="3581731"/>
-            <a:ext cx="231648" cy="149352"/>
+            <a:off x="7323810" y="3569539"/>
+            <a:ext cx="246888" cy="167640"/>
           </a:xfrm>
           <a:prstGeom prst="rect">
             <a:avLst/>
@@ -6536,8 +6833,8 @@
         </p:nvSpPr>
         <p:spPr>
           <a:xfrm>
-            <a:off x="7551204" y="3427807"/>
-            <a:ext cx="2334994" cy="457200"/>
+            <a:off x="7570698" y="3424759"/>
+            <a:ext cx="2386623" cy="457200"/>
           </a:xfrm>
           <a:prstGeom prst="rect">
             <a:avLst/>
@@ -6552,11 +6849,11 @@
           <a:p>
             <a:pPr algn="l"/>
             <a:r>
-              <a:rPr sz="2400" b="0" i="0">
-                <a:solidFill>
-                  <a:srgbClr val="1A1A1A"/>
-                </a:solidFill>
-                <a:latin typeface="Century Schoolbook"/>
+              <a:rPr sz="2280" b="0" i="0">
+                <a:solidFill>
+                  <a:srgbClr val="1A1A1A"/>
+                </a:solidFill>
+                <a:latin typeface="Lexend"/>
               </a:rPr>
               <a:t>  and a speed  </a:t>
             </a:r>
@@ -6565,7 +6862,7 @@
       </p:sp>
       <p:pic>
         <p:nvPicPr>
-          <p:cNvPr id="15" name="Picture 14" descr="17f1143b444dcfe3.png"/>
+          <p:cNvPr id="15" name="Picture 14" descr="f5a2a14a06f9d731.png"/>
           <p:cNvPicPr>
             <a:picLocks noChangeAspect="1"/>
           </p:cNvPicPr>
@@ -6579,8 +6876,8 @@
         </p:blipFill>
         <p:spPr>
           <a:xfrm>
-            <a:off x="9749038" y="3580207"/>
-            <a:ext cx="137160" cy="152400"/>
+            <a:off x="9820161" y="3571063"/>
+            <a:ext cx="167640" cy="164592"/>
           </a:xfrm>
           <a:prstGeom prst="rect">
             <a:avLst/>
@@ -6595,8 +6892,8 @@
         </p:nvSpPr>
         <p:spPr>
           <a:xfrm>
-            <a:off x="9886198" y="3427807"/>
-            <a:ext cx="300128" cy="457200"/>
+            <a:off x="9987801" y="3424759"/>
+            <a:ext cx="280301" cy="457200"/>
           </a:xfrm>
           <a:prstGeom prst="rect">
             <a:avLst/>
@@ -6611,11 +6908,11 @@
           <a:p>
             <a:pPr algn="l"/>
             <a:r>
-              <a:rPr sz="2400" b="0" i="0">
-                <a:solidFill>
-                  <a:srgbClr val="1A1A1A"/>
-                </a:solidFill>
-                <a:latin typeface="Century Schoolbook"/>
+              <a:rPr sz="2280" b="0" i="0">
+                <a:solidFill>
+                  <a:srgbClr val="1A1A1A"/>
+                </a:solidFill>
+                <a:latin typeface="Lexend"/>
               </a:rPr>
               <a:t>.</a:t>
             </a:r>
@@ -6630,7 +6927,7 @@
         </p:nvSpPr>
         <p:spPr>
           <a:xfrm>
-            <a:off x="1234440" y="4131895"/>
+            <a:off x="1234440" y="4125799"/>
             <a:ext cx="10058400" cy="429370"/>
           </a:xfrm>
           <a:prstGeom prst="rect">
@@ -6646,11 +6943,11 @@
           <a:p>
             <a:pPr algn="l"/>
             <a:r>
-              <a:rPr sz="2400" b="1" i="0">
-                <a:solidFill>
-                  <a:srgbClr val="1A1A1A"/>
-                </a:solidFill>
-                <a:latin typeface="Century Schoolbook"/>
+              <a:rPr sz="2280" b="1" i="0">
+                <a:solidFill>
+                  <a:srgbClr val="1A1A1A"/>
+                </a:solidFill>
+                <a:latin typeface="Lexend"/>
               </a:rPr>
               <a:t>Find her kinetic energy.</a:t>
             </a:r>
@@ -6665,7 +6962,7 @@
         </p:nvSpPr>
         <p:spPr>
           <a:xfrm>
-            <a:off x="777240" y="4853873"/>
+            <a:off x="777240" y="4847777"/>
             <a:ext cx="10607040" cy="457200"/>
           </a:xfrm>
           <a:prstGeom prst="rect">
@@ -6681,11 +6978,11 @@
           <a:p>
             <a:pPr algn="ctr"/>
             <a:r>
-              <a:rPr sz="2600" b="1" i="0">
-                <a:solidFill>
-                  <a:srgbClr val="1A1A1A"/>
-                </a:solidFill>
-                <a:latin typeface="Century Schoolbook"/>
+              <a:rPr sz="2470" b="1" i="0">
+                <a:solidFill>
+                  <a:srgbClr val="1A1A1A"/>
+                </a:solidFill>
+                <a:latin typeface="Lexend"/>
               </a:rPr>
               <a:t>Answer it.</a:t>
             </a:r>
@@ -6734,11 +7031,11 @@
           <a:p>
             <a:pPr algn="l"/>
             <a:r>
-              <a:rPr sz="3400" b="1" i="0">
-                <a:solidFill>
-                  <a:srgbClr val="1A1A1A"/>
-                </a:solidFill>
-                <a:latin typeface="Century Schoolbook"/>
+              <a:rPr sz="3229" b="1" i="0">
+                <a:solidFill>
+                  <a:srgbClr val="1A1A1A"/>
+                </a:solidFill>
+                <a:latin typeface="Lexend"/>
               </a:rPr>
               <a:t>Whiteboards   ·   Question 2 of 9</a:t>
             </a:r>
@@ -6874,11 +7171,11 @@
           <a:p>
             <a:pPr algn="l"/>
             <a:r>
-              <a:rPr sz="1100" b="0" i="1">
+              <a:rPr sz="1040" b="0" i="0">
                 <a:solidFill>
                   <a:srgbClr val="6B6B6B"/>
                 </a:solidFill>
-                <a:latin typeface="Century Schoolbook"/>
+                <a:latin typeface="Lexend"/>
               </a:rPr>
               <a:t>Grade 7 Accelerated · Unit 4 · Lessons 7–8 — Real-World Order of Operations</a:t>
             </a:r>
@@ -6909,11 +7206,11 @@
           <a:p>
             <a:pPr algn="r"/>
             <a:r>
-              <a:rPr sz="1100" b="0" i="0">
+              <a:rPr sz="1040" b="0" i="0">
                 <a:solidFill>
                   <a:srgbClr val="6B6B6B"/>
                 </a:solidFill>
-                <a:latin typeface="Century Schoolbook"/>
+                <a:latin typeface="Lexend"/>
               </a:rPr>
               <a:t>18</a:t>
             </a:r>
@@ -6944,11 +7241,11 @@
           <a:p>
             <a:pPr algn="l"/>
             <a:r>
-              <a:rPr sz="2400" b="0" i="0">
-                <a:solidFill>
-                  <a:srgbClr val="1A1A1A"/>
-                </a:solidFill>
-                <a:latin typeface="Century Schoolbook"/>
+              <a:rPr sz="2280" b="0" i="0">
+                <a:solidFill>
+                  <a:srgbClr val="1A1A1A"/>
+                </a:solidFill>
+                <a:latin typeface="Lexend"/>
               </a:rPr>
               <a:t>A cyclist has a mass of 70 kilograms and rides at 8 meters per second.</a:t>
             </a:r>
@@ -6979,11 +7276,11 @@
           <a:p>
             <a:pPr algn="l"/>
             <a:r>
-              <a:rPr sz="2400" b="0" i="0">
-                <a:solidFill>
-                  <a:srgbClr val="1A1A1A"/>
-                </a:solidFill>
-                <a:latin typeface="Century Schoolbook"/>
+              <a:rPr sz="2280" b="0" i="0">
+                <a:solidFill>
+                  <a:srgbClr val="1A1A1A"/>
+                </a:solidFill>
+                <a:latin typeface="Lexend"/>
               </a:rPr>
               <a:t>Her bicycle cost 480 dollars.</a:t>
             </a:r>
@@ -6998,8 +7295,8 @@
         </p:nvSpPr>
         <p:spPr>
           <a:xfrm>
-            <a:off x="1234440" y="3429331"/>
-            <a:ext cx="2906708" cy="457200"/>
+            <a:off x="1234440" y="3424759"/>
+            <a:ext cx="2865157" cy="457200"/>
           </a:xfrm>
           <a:prstGeom prst="rect">
             <a:avLst/>
@@ -7014,11 +7311,11 @@
           <a:p>
             <a:pPr algn="l"/>
             <a:r>
-              <a:rPr sz="2400" b="0" i="0">
-                <a:solidFill>
-                  <a:srgbClr val="1A1A1A"/>
-                </a:solidFill>
-                <a:latin typeface="Century Schoolbook"/>
+              <a:rPr sz="2280" b="0" i="0">
+                <a:solidFill>
+                  <a:srgbClr val="1A1A1A"/>
+                </a:solidFill>
+                <a:latin typeface="Lexend"/>
               </a:rPr>
               <a:t>Kinetic energy is  </a:t>
             </a:r>
@@ -7027,7 +7324,7 @@
       </p:sp>
       <p:pic>
         <p:nvPicPr>
-          <p:cNvPr id="11" name="Picture 10" descr="2b860bf135a1b088.png"/>
+          <p:cNvPr id="11" name="Picture 10" descr="94474fdbb34e34e1.png"/>
           <p:cNvPicPr>
             <a:picLocks noChangeAspect="1"/>
           </p:cNvPicPr>
@@ -7041,8 +7338,8 @@
         </p:blipFill>
         <p:spPr>
           <a:xfrm>
-            <a:off x="4003988" y="3382087"/>
-            <a:ext cx="1261872" cy="551688"/>
+            <a:off x="3962437" y="3382087"/>
+            <a:ext cx="1304544" cy="542544"/>
           </a:xfrm>
           <a:prstGeom prst="rect">
             <a:avLst/>
@@ -7057,8 +7354,8 @@
         </p:nvSpPr>
         <p:spPr>
           <a:xfrm>
-            <a:off x="5265860" y="3429331"/>
-            <a:ext cx="2190856" cy="457200"/>
+            <a:off x="5266981" y="3424759"/>
+            <a:ext cx="2200084" cy="457200"/>
           </a:xfrm>
           <a:prstGeom prst="rect">
             <a:avLst/>
@@ -7073,11 +7370,11 @@
           <a:p>
             <a:pPr algn="l"/>
             <a:r>
-              <a:rPr sz="2400" b="0" i="0">
-                <a:solidFill>
-                  <a:srgbClr val="1A1A1A"/>
-                </a:solidFill>
-                <a:latin typeface="Century Schoolbook"/>
+              <a:rPr sz="2280" b="0" i="0">
+                <a:solidFill>
+                  <a:srgbClr val="1A1A1A"/>
+                </a:solidFill>
+                <a:latin typeface="Lexend"/>
               </a:rPr>
               <a:t>,  for a mass  </a:t>
             </a:r>
@@ -7086,7 +7383,7 @@
       </p:sp>
       <p:pic>
         <p:nvPicPr>
-          <p:cNvPr id="13" name="Picture 12" descr="38ea68753f073419.png"/>
+          <p:cNvPr id="13" name="Picture 12" descr="f4653c4bb82321a9.png"/>
           <p:cNvPicPr>
             <a:picLocks noChangeAspect="1"/>
           </p:cNvPicPr>
@@ -7100,8 +7397,8 @@
         </p:blipFill>
         <p:spPr>
           <a:xfrm>
-            <a:off x="7319556" y="3583255"/>
-            <a:ext cx="231648" cy="149352"/>
+            <a:off x="7329906" y="3569539"/>
+            <a:ext cx="246888" cy="167640"/>
           </a:xfrm>
           <a:prstGeom prst="rect">
             <a:avLst/>
@@ -7116,8 +7413,8 @@
         </p:nvSpPr>
         <p:spPr>
           <a:xfrm>
-            <a:off x="7551204" y="3429331"/>
-            <a:ext cx="2334994" cy="457200"/>
+            <a:off x="7576794" y="3424759"/>
+            <a:ext cx="2386623" cy="457200"/>
           </a:xfrm>
           <a:prstGeom prst="rect">
             <a:avLst/>
@@ -7132,11 +7429,11 @@
           <a:p>
             <a:pPr algn="l"/>
             <a:r>
-              <a:rPr sz="2400" b="0" i="0">
-                <a:solidFill>
-                  <a:srgbClr val="1A1A1A"/>
-                </a:solidFill>
-                <a:latin typeface="Century Schoolbook"/>
+              <a:rPr sz="2280" b="0" i="0">
+                <a:solidFill>
+                  <a:srgbClr val="1A1A1A"/>
+                </a:solidFill>
+                <a:latin typeface="Lexend"/>
               </a:rPr>
               <a:t>  and a speed  </a:t>
             </a:r>
@@ -7145,7 +7442,7 @@
       </p:sp>
       <p:pic>
         <p:nvPicPr>
-          <p:cNvPr id="15" name="Picture 14" descr="17f1143b444dcfe3.png"/>
+          <p:cNvPr id="15" name="Picture 14" descr="f5a2a14a06f9d731.png"/>
           <p:cNvPicPr>
             <a:picLocks noChangeAspect="1"/>
           </p:cNvPicPr>
@@ -7159,8 +7456,8 @@
         </p:blipFill>
         <p:spPr>
           <a:xfrm>
-            <a:off x="9749038" y="3581731"/>
-            <a:ext cx="137160" cy="152400"/>
+            <a:off x="9826257" y="3571063"/>
+            <a:ext cx="167640" cy="164592"/>
           </a:xfrm>
           <a:prstGeom prst="rect">
             <a:avLst/>
@@ -7175,8 +7472,8 @@
         </p:nvSpPr>
         <p:spPr>
           <a:xfrm>
-            <a:off x="9886198" y="3429331"/>
-            <a:ext cx="300128" cy="457200"/>
+            <a:off x="9993897" y="3424759"/>
+            <a:ext cx="280301" cy="457200"/>
           </a:xfrm>
           <a:prstGeom prst="rect">
             <a:avLst/>
@@ -7191,11 +7488,11 @@
           <a:p>
             <a:pPr algn="l"/>
             <a:r>
-              <a:rPr sz="2400" b="0" i="0">
-                <a:solidFill>
-                  <a:srgbClr val="1A1A1A"/>
-                </a:solidFill>
-                <a:latin typeface="Century Schoolbook"/>
+              <a:rPr sz="2280" b="0" i="0">
+                <a:solidFill>
+                  <a:srgbClr val="1A1A1A"/>
+                </a:solidFill>
+                <a:latin typeface="Lexend"/>
               </a:rPr>
               <a:t>.</a:t>
             </a:r>
@@ -7210,7 +7507,7 @@
         </p:nvSpPr>
         <p:spPr>
           <a:xfrm>
-            <a:off x="1234440" y="4134943"/>
+            <a:off x="1234440" y="4125799"/>
             <a:ext cx="10058400" cy="429370"/>
           </a:xfrm>
           <a:prstGeom prst="rect">
@@ -7226,26 +7523,50 @@
           <a:p>
             <a:pPr algn="l"/>
             <a:r>
-              <a:rPr sz="2400" b="1" i="0">
-                <a:solidFill>
-                  <a:srgbClr val="1A1A1A"/>
-                </a:solidFill>
-                <a:latin typeface="Century Schoolbook"/>
+              <a:rPr sz="2280" b="1" i="0">
+                <a:solidFill>
+                  <a:srgbClr val="1A1A1A"/>
+                </a:solidFill>
+                <a:latin typeface="Lexend"/>
               </a:rPr>
               <a:t>Find her kinetic energy.</a:t>
             </a:r>
           </a:p>
         </p:txBody>
       </p:sp>
-      <p:sp>
-        <p:nvSpPr>
-          <p:cNvPr id="18" name="TextBox 17"/>
-          <p:cNvSpPr txBox="1"/>
-          <p:nvPr/>
-        </p:nvSpPr>
-        <p:spPr>
-          <a:xfrm>
-            <a:off x="777240" y="4856921"/>
+      <p:pic>
+        <p:nvPicPr>
+          <p:cNvPr id="18" name="Picture 17" descr="39c59a038134af7c.png"/>
+          <p:cNvPicPr>
+            <a:picLocks noChangeAspect="1"/>
+          </p:cNvPicPr>
+          <p:nvPr/>
+        </p:nvPicPr>
+        <p:blipFill>
+          <a:blip r:embed="rId5"/>
+          <a:stretch>
+            <a:fillRect/>
+          </a:stretch>
+        </p:blipFill>
+        <p:spPr>
+          <a:xfrm>
+            <a:off x="3750563" y="4783769"/>
+            <a:ext cx="4770120" cy="606552"/>
+          </a:xfrm>
+          <a:prstGeom prst="rect">
+            <a:avLst/>
+          </a:prstGeom>
+        </p:spPr>
+      </p:pic>
+      <p:sp>
+        <p:nvSpPr>
+          <p:cNvPr id="19" name="TextBox 18"/>
+          <p:cNvSpPr txBox="1"/>
+          <p:nvPr/>
+        </p:nvSpPr>
+        <p:spPr>
+          <a:xfrm>
+            <a:off x="777240" y="5527481"/>
             <a:ext cx="10607040" cy="548640"/>
           </a:xfrm>
           <a:prstGeom prst="rect">
@@ -7261,11 +7582,11 @@
           <a:p>
             <a:pPr algn="ctr"/>
             <a:r>
-              <a:rPr sz="3200" b="1" i="0">
+              <a:rPr sz="3040" b="1" i="0">
                 <a:solidFill>
                   <a:srgbClr val="9E1B32"/>
                 </a:solidFill>
-                <a:latin typeface="Century Schoolbook"/>
+                <a:latin typeface="Lexend"/>
               </a:rPr>
               <a:t>Answer:   2,240 joules</a:t>
             </a:r>
@@ -7314,11 +7635,11 @@
           <a:p>
             <a:pPr algn="l"/>
             <a:r>
-              <a:rPr sz="3400" b="1" i="0">
-                <a:solidFill>
-                  <a:srgbClr val="1A1A1A"/>
-                </a:solidFill>
-                <a:latin typeface="Century Schoolbook"/>
+              <a:rPr sz="3229" b="1" i="0">
+                <a:solidFill>
+                  <a:srgbClr val="1A1A1A"/>
+                </a:solidFill>
+                <a:latin typeface="Lexend"/>
               </a:rPr>
               <a:t>Whiteboards   ·   Question 3 of 9</a:t>
             </a:r>
@@ -7454,11 +7775,11 @@
           <a:p>
             <a:pPr algn="l"/>
             <a:r>
-              <a:rPr sz="1100" b="0" i="1">
+              <a:rPr sz="1040" b="0" i="0">
                 <a:solidFill>
                   <a:srgbClr val="6B6B6B"/>
                 </a:solidFill>
-                <a:latin typeface="Century Schoolbook"/>
+                <a:latin typeface="Lexend"/>
               </a:rPr>
               <a:t>Grade 7 Accelerated · Unit 4 · Lessons 7–8 — Real-World Order of Operations</a:t>
             </a:r>
@@ -7489,11 +7810,11 @@
           <a:p>
             <a:pPr algn="r"/>
             <a:r>
-              <a:rPr sz="1100" b="0" i="0">
+              <a:rPr sz="1040" b="0" i="0">
                 <a:solidFill>
                   <a:srgbClr val="6B6B6B"/>
                 </a:solidFill>
-                <a:latin typeface="Century Schoolbook"/>
+                <a:latin typeface="Lexend"/>
               </a:rPr>
               <a:t>19</a:t>
             </a:r>
@@ -7524,11 +7845,11 @@
           <a:p>
             <a:pPr algn="ctr"/>
             <a:r>
-              <a:rPr sz="2600" b="0" i="0">
-                <a:solidFill>
-                  <a:srgbClr val="1A1A1A"/>
-                </a:solidFill>
-                <a:latin typeface="Century Schoolbook"/>
+              <a:rPr sz="2470" b="0" i="0">
+                <a:solidFill>
+                  <a:srgbClr val="1A1A1A"/>
+                </a:solidFill>
+                <a:latin typeface="Lexend"/>
               </a:rPr>
               <a:t>A plan costs 15 dollars plus 4 dollars for each gigabyte.</a:t>
             </a:r>
@@ -7559,11 +7880,11 @@
           <a:p>
             <a:pPr algn="ctr"/>
             <a:r>
-              <a:rPr sz="2600" b="0" i="0">
-                <a:solidFill>
-                  <a:srgbClr val="1A1A1A"/>
-                </a:solidFill>
-                <a:latin typeface="Century Schoolbook"/>
+              <a:rPr sz="2470" b="0" i="0">
+                <a:solidFill>
+                  <a:srgbClr val="1A1A1A"/>
+                </a:solidFill>
+                <a:latin typeface="Lexend"/>
               </a:rPr>
               <a:t>Find the cost of 6 gigabytes.</a:t>
             </a:r>
@@ -7594,11 +7915,11 @@
           <a:p>
             <a:pPr algn="ctr"/>
             <a:r>
-              <a:rPr sz="2600" b="1" i="0">
-                <a:solidFill>
-                  <a:srgbClr val="1A1A1A"/>
-                </a:solidFill>
-                <a:latin typeface="Century Schoolbook"/>
+              <a:rPr sz="2470" b="1" i="0">
+                <a:solidFill>
+                  <a:srgbClr val="1A1A1A"/>
+                </a:solidFill>
+                <a:latin typeface="Lexend"/>
               </a:rPr>
               <a:t>Answer it.</a:t>
             </a:r>
@@ -7647,11 +7968,11 @@
           <a:p>
             <a:pPr algn="l"/>
             <a:r>
-              <a:rPr sz="3600" b="1" i="0">
-                <a:solidFill>
-                  <a:srgbClr val="1A1A1A"/>
-                </a:solidFill>
-                <a:latin typeface="Century Schoolbook"/>
+              <a:rPr sz="3420" b="1" i="0">
+                <a:solidFill>
+                  <a:srgbClr val="1A1A1A"/>
+                </a:solidFill>
+                <a:latin typeface="Lexend"/>
               </a:rPr>
               <a:t>Warm-Up</a:t>
             </a:r>
@@ -7787,11 +8108,11 @@
           <a:p>
             <a:pPr algn="l"/>
             <a:r>
-              <a:rPr sz="1100" b="0" i="1">
+              <a:rPr sz="1040" b="0" i="0">
                 <a:solidFill>
                   <a:srgbClr val="6B6B6B"/>
                 </a:solidFill>
-                <a:latin typeface="Century Schoolbook"/>
+                <a:latin typeface="Lexend"/>
               </a:rPr>
               <a:t>Grade 7 Accelerated · Unit 4 · Lessons 7–8 — Real-World Order of Operations</a:t>
             </a:r>
@@ -7822,11 +8143,11 @@
           <a:p>
             <a:pPr algn="r"/>
             <a:r>
-              <a:rPr sz="1100" b="0" i="0">
+              <a:rPr sz="1040" b="0" i="0">
                 <a:solidFill>
                   <a:srgbClr val="6B6B6B"/>
                 </a:solidFill>
-                <a:latin typeface="Century Schoolbook"/>
+                <a:latin typeface="Lexend"/>
               </a:rPr>
               <a:t>2</a:t>
             </a:r>
@@ -7842,7 +8163,7 @@
         <p:spPr>
           <a:xfrm>
             <a:off x="1874519" y="1440180"/>
-            <a:ext cx="720605" cy="457200"/>
+            <a:ext cx="671561" cy="457200"/>
           </a:xfrm>
           <a:prstGeom prst="rect">
             <a:avLst/>
@@ -7857,11 +8178,11 @@
           <a:p>
             <a:pPr algn="l"/>
             <a:r>
-              <a:rPr sz="2300" b="0" i="0">
-                <a:solidFill>
-                  <a:srgbClr val="1A1A1A"/>
-                </a:solidFill>
-                <a:latin typeface="Century Schoolbook"/>
+              <a:rPr sz="2180" b="0" i="0">
+                <a:solidFill>
+                  <a:srgbClr val="1A1A1A"/>
+                </a:solidFill>
+                <a:latin typeface="Lexend"/>
               </a:rPr>
               <a:t>1.   </a:t>
             </a:r>
@@ -7870,7 +8191,7 @@
       </p:sp>
       <p:pic>
         <p:nvPicPr>
-          <p:cNvPr id="9" name="Picture 8" descr="a3bfe14101224aaf.png"/>
+          <p:cNvPr id="9" name="Picture 8" descr="a7bbd4c851f1e1af.png"/>
           <p:cNvPicPr>
             <a:picLocks noChangeAspect="1"/>
           </p:cNvPicPr>
@@ -7884,8 +8205,8 @@
         </p:blipFill>
         <p:spPr>
           <a:xfrm>
-            <a:off x="2457965" y="1501140"/>
-            <a:ext cx="1554480" cy="335280"/>
+            <a:off x="2408921" y="1501140"/>
+            <a:ext cx="1484376" cy="335280"/>
           </a:xfrm>
           <a:prstGeom prst="rect">
             <a:avLst/>
@@ -7901,7 +8222,7 @@
         <p:spPr>
           <a:xfrm>
             <a:off x="1874519" y="2052828"/>
-            <a:ext cx="726811" cy="457200"/>
+            <a:ext cx="685699" cy="457200"/>
           </a:xfrm>
           <a:prstGeom prst="rect">
             <a:avLst/>
@@ -7916,11 +8237,11 @@
           <a:p>
             <a:pPr algn="l"/>
             <a:r>
-              <a:rPr sz="2300" b="0" i="0">
-                <a:solidFill>
-                  <a:srgbClr val="1A1A1A"/>
-                </a:solidFill>
-                <a:latin typeface="Century Schoolbook"/>
+              <a:rPr sz="2180" b="0" i="0">
+                <a:solidFill>
+                  <a:srgbClr val="1A1A1A"/>
+                </a:solidFill>
+                <a:latin typeface="Lexend"/>
               </a:rPr>
               <a:t>2.   </a:t>
             </a:r>
@@ -7929,7 +8250,7 @@
       </p:sp>
       <p:pic>
         <p:nvPicPr>
-          <p:cNvPr id="11" name="Picture 10" descr="a627cc56d1241098.png"/>
+          <p:cNvPr id="11" name="Picture 10" descr="f84234db65bcdb13.png"/>
           <p:cNvPicPr>
             <a:picLocks noChangeAspect="1"/>
           </p:cNvPicPr>
@@ -7943,8 +8264,8 @@
         </p:blipFill>
         <p:spPr>
           <a:xfrm>
-            <a:off x="2464171" y="2077212"/>
-            <a:ext cx="1588008" cy="408432"/>
+            <a:off x="2423059" y="2086356"/>
+            <a:ext cx="1578864" cy="390144"/>
           </a:xfrm>
           <a:prstGeom prst="rect">
             <a:avLst/>
@@ -7959,8 +8280,8 @@
         </p:nvSpPr>
         <p:spPr>
           <a:xfrm>
-            <a:off x="1874519" y="2738628"/>
-            <a:ext cx="3064939" cy="457200"/>
+            <a:off x="1874519" y="2729484"/>
+            <a:ext cx="2930351" cy="457200"/>
           </a:xfrm>
           <a:prstGeom prst="rect">
             <a:avLst/>
@@ -7975,11 +8296,11 @@
           <a:p>
             <a:pPr algn="l"/>
             <a:r>
-              <a:rPr sz="2300" b="0" i="0">
-                <a:solidFill>
-                  <a:srgbClr val="1A1A1A"/>
-                </a:solidFill>
-                <a:latin typeface="Century Schoolbook"/>
+              <a:rPr sz="2180" b="0" i="0">
+                <a:solidFill>
+                  <a:srgbClr val="1A1A1A"/>
+                </a:solidFill>
+                <a:latin typeface="Lexend"/>
               </a:rPr>
               <a:t>3.   Find the value:  </a:t>
             </a:r>
@@ -7988,7 +8309,7 @@
       </p:sp>
       <p:pic>
         <p:nvPicPr>
-          <p:cNvPr id="13" name="Picture 12" descr="ab0a0f8a819bef4a.png"/>
+          <p:cNvPr id="13" name="Picture 12" descr="6d6fe08af9312c1c.png"/>
           <p:cNvPicPr>
             <a:picLocks noChangeAspect="1"/>
           </p:cNvPicPr>
@@ -8002,8 +8323,8 @@
         </p:blipFill>
         <p:spPr>
           <a:xfrm>
-            <a:off x="4802299" y="2688336"/>
-            <a:ext cx="780288" cy="557784"/>
+            <a:off x="4667711" y="2688336"/>
+            <a:ext cx="768096" cy="539496"/>
           </a:xfrm>
           <a:prstGeom prst="rect">
             <a:avLst/>
@@ -8018,8 +8339,8 @@
         </p:nvSpPr>
         <p:spPr>
           <a:xfrm>
-            <a:off x="1874519" y="3424428"/>
-            <a:ext cx="2190435" cy="457200"/>
+            <a:off x="1874519" y="3406140"/>
+            <a:ext cx="2118555" cy="457200"/>
           </a:xfrm>
           <a:prstGeom prst="rect">
             <a:avLst/>
@@ -8034,11 +8355,11 @@
           <a:p>
             <a:pPr algn="l"/>
             <a:r>
-              <a:rPr sz="2300" b="0" i="0">
-                <a:solidFill>
-                  <a:srgbClr val="1A1A1A"/>
-                </a:solidFill>
-                <a:latin typeface="Century Schoolbook"/>
+              <a:rPr sz="2180" b="0" i="0">
+                <a:solidFill>
+                  <a:srgbClr val="1A1A1A"/>
+                </a:solidFill>
+                <a:latin typeface="Lexend"/>
               </a:rPr>
               <a:t>4.   Evaluate  </a:t>
             </a:r>
@@ -8047,7 +8368,7 @@
       </p:sp>
       <p:pic>
         <p:nvPicPr>
-          <p:cNvPr id="15" name="Picture 14" descr="0059e34534483f5d.png"/>
+          <p:cNvPr id="15" name="Picture 14" descr="236959ea5354d8ca.png"/>
           <p:cNvPicPr>
             <a:picLocks noChangeAspect="1"/>
           </p:cNvPicPr>
@@ -8061,8 +8382,8 @@
         </p:blipFill>
         <p:spPr>
           <a:xfrm>
-            <a:off x="3927795" y="3514344"/>
-            <a:ext cx="432816" cy="277368"/>
+            <a:off x="3855915" y="3497580"/>
+            <a:ext cx="460247" cy="274320"/>
           </a:xfrm>
           <a:prstGeom prst="rect">
             <a:avLst/>
@@ -8077,8 +8398,8 @@
         </p:nvSpPr>
         <p:spPr>
           <a:xfrm>
-            <a:off x="4360611" y="3424428"/>
-            <a:ext cx="1328762" cy="457200"/>
+            <a:off x="4316163" y="3406140"/>
+            <a:ext cx="1297468" cy="457200"/>
           </a:xfrm>
           <a:prstGeom prst="rect">
             <a:avLst/>
@@ -8093,11 +8414,11 @@
           <a:p>
             <a:pPr algn="l"/>
             <a:r>
-              <a:rPr sz="2300" b="0" i="0">
-                <a:solidFill>
-                  <a:srgbClr val="1A1A1A"/>
-                </a:solidFill>
-                <a:latin typeface="Century Schoolbook"/>
+              <a:rPr sz="2180" b="0" i="0">
+                <a:solidFill>
+                  <a:srgbClr val="1A1A1A"/>
+                </a:solidFill>
+                <a:latin typeface="Lexend"/>
               </a:rPr>
               <a:t>  when  </a:t>
             </a:r>
@@ -8106,7 +8427,7 @@
       </p:sp>
       <p:pic>
         <p:nvPicPr>
-          <p:cNvPr id="17" name="Picture 16" descr="8be73e21dbd6851d.png"/>
+          <p:cNvPr id="17" name="Picture 16" descr="78a344566654b4bb.png"/>
           <p:cNvPicPr>
             <a:picLocks noChangeAspect="1"/>
           </p:cNvPicPr>
@@ -8120,8 +8441,8 @@
         </p:blipFill>
         <p:spPr>
           <a:xfrm>
-            <a:off x="5552213" y="3538728"/>
-            <a:ext cx="621792" cy="228600"/>
+            <a:off x="5476472" y="3523488"/>
+            <a:ext cx="618744" cy="222504"/>
           </a:xfrm>
           <a:prstGeom prst="rect">
             <a:avLst/>
@@ -8136,8 +8457,8 @@
         </p:nvSpPr>
         <p:spPr>
           <a:xfrm>
-            <a:off x="6174005" y="3424428"/>
-            <a:ext cx="296395" cy="457200"/>
+            <a:off x="6095216" y="3406140"/>
+            <a:ext cx="277353" cy="457200"/>
           </a:xfrm>
           <a:prstGeom prst="rect">
             <a:avLst/>
@@ -8152,11 +8473,11 @@
           <a:p>
             <a:pPr algn="l"/>
             <a:r>
-              <a:rPr sz="2300" b="0" i="0">
-                <a:solidFill>
-                  <a:srgbClr val="1A1A1A"/>
-                </a:solidFill>
-                <a:latin typeface="Century Schoolbook"/>
+              <a:rPr sz="2180" b="0" i="0">
+                <a:solidFill>
+                  <a:srgbClr val="1A1A1A"/>
+                </a:solidFill>
+                <a:latin typeface="Lexend"/>
               </a:rPr>
               <a:t>.</a:t>
             </a:r>
@@ -8205,11 +8526,11 @@
           <a:p>
             <a:pPr algn="l"/>
             <a:r>
-              <a:rPr sz="3400" b="1" i="0">
-                <a:solidFill>
-                  <a:srgbClr val="1A1A1A"/>
-                </a:solidFill>
-                <a:latin typeface="Century Schoolbook"/>
+              <a:rPr sz="3229" b="1" i="0">
+                <a:solidFill>
+                  <a:srgbClr val="1A1A1A"/>
+                </a:solidFill>
+                <a:latin typeface="Lexend"/>
               </a:rPr>
               <a:t>Whiteboards   ·   Question 3 of 9</a:t>
             </a:r>
@@ -8345,11 +8666,11 @@
           <a:p>
             <a:pPr algn="l"/>
             <a:r>
-              <a:rPr sz="1100" b="0" i="1">
+              <a:rPr sz="1040" b="0" i="0">
                 <a:solidFill>
                   <a:srgbClr val="6B6B6B"/>
                 </a:solidFill>
-                <a:latin typeface="Century Schoolbook"/>
+                <a:latin typeface="Lexend"/>
               </a:rPr>
               <a:t>Grade 7 Accelerated · Unit 4 · Lessons 7–8 — Real-World Order of Operations</a:t>
             </a:r>
@@ -8380,11 +8701,11 @@
           <a:p>
             <a:pPr algn="r"/>
             <a:r>
-              <a:rPr sz="1100" b="0" i="0">
+              <a:rPr sz="1040" b="0" i="0">
                 <a:solidFill>
                   <a:srgbClr val="6B6B6B"/>
                 </a:solidFill>
-                <a:latin typeface="Century Schoolbook"/>
+                <a:latin typeface="Lexend"/>
               </a:rPr>
               <a:t>20</a:t>
             </a:r>
@@ -8415,11 +8736,11 @@
           <a:p>
             <a:pPr algn="ctr"/>
             <a:r>
-              <a:rPr sz="2600" b="0" i="0">
-                <a:solidFill>
-                  <a:srgbClr val="1A1A1A"/>
-                </a:solidFill>
-                <a:latin typeface="Century Schoolbook"/>
+              <a:rPr sz="2470" b="0" i="0">
+                <a:solidFill>
+                  <a:srgbClr val="1A1A1A"/>
+                </a:solidFill>
+                <a:latin typeface="Lexend"/>
               </a:rPr>
               <a:t>A plan costs 15 dollars plus 4 dollars for each gigabyte.</a:t>
             </a:r>
@@ -8450,20 +8771,68 @@
           <a:p>
             <a:pPr algn="ctr"/>
             <a:r>
-              <a:rPr sz="2600" b="0" i="0">
-                <a:solidFill>
-                  <a:srgbClr val="1A1A1A"/>
-                </a:solidFill>
-                <a:latin typeface="Century Schoolbook"/>
+              <a:rPr sz="2470" b="0" i="0">
+                <a:solidFill>
+                  <a:srgbClr val="1A1A1A"/>
+                </a:solidFill>
+                <a:latin typeface="Lexend"/>
               </a:rPr>
               <a:t>Find the cost of 6 gigabytes.</a:t>
             </a:r>
           </a:p>
         </p:txBody>
       </p:sp>
-      <p:sp>
-        <p:nvSpPr>
-          <p:cNvPr id="10" name="TextBox 9"/>
+      <p:pic>
+        <p:nvPicPr>
+          <p:cNvPr id="10" name="Picture 9" descr="d6367224d1a034a2.png"/>
+          <p:cNvPicPr>
+            <a:picLocks noChangeAspect="1"/>
+          </p:cNvPicPr>
+          <p:nvPr/>
+        </p:nvPicPr>
+        <p:blipFill>
+          <a:blip r:embed="rId2"/>
+          <a:stretch>
+            <a:fillRect/>
+          </a:stretch>
+        </p:blipFill>
+        <p:spPr>
+          <a:xfrm>
+            <a:off x="5244083" y="3405278"/>
+            <a:ext cx="1423416" cy="252984"/>
+          </a:xfrm>
+          <a:prstGeom prst="rect">
+            <a:avLst/>
+          </a:prstGeom>
+        </p:spPr>
+      </p:pic>
+      <p:pic>
+        <p:nvPicPr>
+          <p:cNvPr id="11" name="Picture 10" descr="83ec447ebad373fb.png"/>
+          <p:cNvPicPr>
+            <a:picLocks noChangeAspect="1"/>
+          </p:cNvPicPr>
+          <p:nvPr/>
+        </p:nvPicPr>
+        <p:blipFill>
+          <a:blip r:embed="rId3"/>
+          <a:stretch>
+            <a:fillRect/>
+          </a:stretch>
+        </p:blipFill>
+        <p:spPr>
+          <a:xfrm>
+            <a:off x="5244083" y="3944774"/>
+            <a:ext cx="1783080" cy="252984"/>
+          </a:xfrm>
+          <a:prstGeom prst="rect">
+            <a:avLst/>
+          </a:prstGeom>
+        </p:spPr>
+      </p:pic>
+      <p:sp>
+        <p:nvSpPr>
+          <p:cNvPr id="12" name="TextBox 11"/>
           <p:cNvSpPr txBox="1"/>
           <p:nvPr/>
         </p:nvSpPr>
@@ -8485,11 +8854,11 @@
           <a:p>
             <a:pPr algn="ctr"/>
             <a:r>
-              <a:rPr sz="3200" b="1" i="0">
+              <a:rPr sz="3040" b="1" i="0">
                 <a:solidFill>
                   <a:srgbClr val="9E1B32"/>
                 </a:solidFill>
-                <a:latin typeface="Century Schoolbook"/>
+                <a:latin typeface="Lexend"/>
               </a:rPr>
               <a:t>Answer:   39 dollars</a:t>
             </a:r>
@@ -8538,11 +8907,11 @@
           <a:p>
             <a:pPr algn="l"/>
             <a:r>
-              <a:rPr sz="3400" b="1" i="0">
-                <a:solidFill>
-                  <a:srgbClr val="1A1A1A"/>
-                </a:solidFill>
-                <a:latin typeface="Century Schoolbook"/>
+              <a:rPr sz="3229" b="1" i="0">
+                <a:solidFill>
+                  <a:srgbClr val="1A1A1A"/>
+                </a:solidFill>
+                <a:latin typeface="Lexend"/>
               </a:rPr>
               <a:t>Whiteboards   ·   Question 4 of 9</a:t>
             </a:r>
@@ -8678,11 +9047,11 @@
           <a:p>
             <a:pPr algn="l"/>
             <a:r>
-              <a:rPr sz="1100" b="0" i="1">
+              <a:rPr sz="1040" b="0" i="0">
                 <a:solidFill>
                   <a:srgbClr val="6B6B6B"/>
                 </a:solidFill>
-                <a:latin typeface="Century Schoolbook"/>
+                <a:latin typeface="Lexend"/>
               </a:rPr>
               <a:t>Grade 7 Accelerated · Unit 4 · Lessons 7–8 — Real-World Order of Operations</a:t>
             </a:r>
@@ -8713,11 +9082,11 @@
           <a:p>
             <a:pPr algn="r"/>
             <a:r>
-              <a:rPr sz="1100" b="0" i="0">
+              <a:rPr sz="1040" b="0" i="0">
                 <a:solidFill>
                   <a:srgbClr val="6B6B6B"/>
                 </a:solidFill>
-                <a:latin typeface="Century Schoolbook"/>
+                <a:latin typeface="Lexend"/>
               </a:rPr>
               <a:t>21</a:t>
             </a:r>
@@ -8748,11 +9117,11 @@
           <a:p>
             <a:pPr algn="ctr"/>
             <a:r>
-              <a:rPr sz="2300" b="0" i="0">
-                <a:solidFill>
-                  <a:srgbClr val="1A1A1A"/>
-                </a:solidFill>
-                <a:latin typeface="Century Schoolbook"/>
+              <a:rPr sz="2180" b="0" i="0">
+                <a:solidFill>
+                  <a:srgbClr val="1A1A1A"/>
+                </a:solidFill>
+                <a:latin typeface="Lexend"/>
               </a:rPr>
               <a:t>A square floor of side 8 feet is tiled at 3.50 dollars a square foot.</a:t>
             </a:r>
@@ -8783,11 +9152,11 @@
           <a:p>
             <a:pPr algn="ctr"/>
             <a:r>
-              <a:rPr sz="2600" b="0" i="0">
-                <a:solidFill>
-                  <a:srgbClr val="1A1A1A"/>
-                </a:solidFill>
-                <a:latin typeface="Century Schoolbook"/>
+              <a:rPr sz="2470" b="0" i="0">
+                <a:solidFill>
+                  <a:srgbClr val="1A1A1A"/>
+                </a:solidFill>
+                <a:latin typeface="Lexend"/>
               </a:rPr>
               <a:t>Installation is a flat 60 dollars.</a:t>
             </a:r>
@@ -8818,11 +9187,11 @@
           <a:p>
             <a:pPr algn="ctr"/>
             <a:r>
-              <a:rPr sz="2600" b="0" i="0">
-                <a:solidFill>
-                  <a:srgbClr val="1A1A1A"/>
-                </a:solidFill>
-                <a:latin typeface="Century Schoolbook"/>
+              <a:rPr sz="2470" b="0" i="0">
+                <a:solidFill>
+                  <a:srgbClr val="1A1A1A"/>
+                </a:solidFill>
+                <a:latin typeface="Lexend"/>
               </a:rPr>
               <a:t>Find the total cost.</a:t>
             </a:r>
@@ -8853,11 +9222,11 @@
           <a:p>
             <a:pPr algn="ctr"/>
             <a:r>
-              <a:rPr sz="2600" b="1" i="0">
-                <a:solidFill>
-                  <a:srgbClr val="1A1A1A"/>
-                </a:solidFill>
-                <a:latin typeface="Century Schoolbook"/>
+              <a:rPr sz="2470" b="1" i="0">
+                <a:solidFill>
+                  <a:srgbClr val="1A1A1A"/>
+                </a:solidFill>
+                <a:latin typeface="Lexend"/>
               </a:rPr>
               <a:t>Answer it.</a:t>
             </a:r>
@@ -8906,11 +9275,11 @@
           <a:p>
             <a:pPr algn="l"/>
             <a:r>
-              <a:rPr sz="3400" b="1" i="0">
-                <a:solidFill>
-                  <a:srgbClr val="1A1A1A"/>
-                </a:solidFill>
-                <a:latin typeface="Century Schoolbook"/>
+              <a:rPr sz="3229" b="1" i="0">
+                <a:solidFill>
+                  <a:srgbClr val="1A1A1A"/>
+                </a:solidFill>
+                <a:latin typeface="Lexend"/>
               </a:rPr>
               <a:t>Whiteboards   ·   Question 4 of 9</a:t>
             </a:r>
@@ -9046,11 +9415,11 @@
           <a:p>
             <a:pPr algn="l"/>
             <a:r>
-              <a:rPr sz="1100" b="0" i="1">
+              <a:rPr sz="1040" b="0" i="0">
                 <a:solidFill>
                   <a:srgbClr val="6B6B6B"/>
                 </a:solidFill>
-                <a:latin typeface="Century Schoolbook"/>
+                <a:latin typeface="Lexend"/>
               </a:rPr>
               <a:t>Grade 7 Accelerated · Unit 4 · Lessons 7–8 — Real-World Order of Operations</a:t>
             </a:r>
@@ -9081,11 +9450,11 @@
           <a:p>
             <a:pPr algn="r"/>
             <a:r>
-              <a:rPr sz="1100" b="0" i="0">
+              <a:rPr sz="1040" b="0" i="0">
                 <a:solidFill>
                   <a:srgbClr val="6B6B6B"/>
                 </a:solidFill>
-                <a:latin typeface="Century Schoolbook"/>
+                <a:latin typeface="Lexend"/>
               </a:rPr>
               <a:t>22</a:t>
             </a:r>
@@ -9116,11 +9485,11 @@
           <a:p>
             <a:pPr algn="ctr"/>
             <a:r>
-              <a:rPr sz="2300" b="0" i="0">
-                <a:solidFill>
-                  <a:srgbClr val="1A1A1A"/>
-                </a:solidFill>
-                <a:latin typeface="Century Schoolbook"/>
+              <a:rPr sz="2180" b="0" i="0">
+                <a:solidFill>
+                  <a:srgbClr val="1A1A1A"/>
+                </a:solidFill>
+                <a:latin typeface="Lexend"/>
               </a:rPr>
               <a:t>A square floor of side 8 feet is tiled at 3.50 dollars a square foot.</a:t>
             </a:r>
@@ -9151,11 +9520,11 @@
           <a:p>
             <a:pPr algn="ctr"/>
             <a:r>
-              <a:rPr sz="2600" b="0" i="0">
-                <a:solidFill>
-                  <a:srgbClr val="1A1A1A"/>
-                </a:solidFill>
-                <a:latin typeface="Century Schoolbook"/>
+              <a:rPr sz="2470" b="0" i="0">
+                <a:solidFill>
+                  <a:srgbClr val="1A1A1A"/>
+                </a:solidFill>
+                <a:latin typeface="Lexend"/>
               </a:rPr>
               <a:t>Installation is a flat 60 dollars.</a:t>
             </a:r>
@@ -9186,11 +9555,11 @@
           <a:p>
             <a:pPr algn="ctr"/>
             <a:r>
-              <a:rPr sz="2600" b="0" i="0">
-                <a:solidFill>
-                  <a:srgbClr val="1A1A1A"/>
-                </a:solidFill>
-                <a:latin typeface="Century Schoolbook"/>
+              <a:rPr sz="2470" b="0" i="0">
+                <a:solidFill>
+                  <a:srgbClr val="1A1A1A"/>
+                </a:solidFill>
+                <a:latin typeface="Lexend"/>
               </a:rPr>
               <a:t>Find the total cost.</a:t>
             </a:r>
@@ -9205,7 +9574,184 @@
         </p:nvSpPr>
         <p:spPr>
           <a:xfrm>
-            <a:off x="777240" y="4663440"/>
+            <a:off x="4599461" y="3824378"/>
+            <a:ext cx="1177822" cy="457200"/>
+          </a:xfrm>
+          <a:prstGeom prst="rect">
+            <a:avLst/>
+          </a:prstGeom>
+          <a:noFill/>
+        </p:spPr>
+        <p:txBody>
+          <a:bodyPr wrap="none" lIns="45720" rIns="45720" tIns="18288" bIns="18288" anchor="ctr">
+            <a:noAutofit/>
+          </a:bodyPr>
+          <a:lstStyle/>
+          <a:p>
+            <a:pPr algn="l"/>
+            <a:r>
+              <a:rPr sz="2330" b="0" i="0">
+                <a:solidFill>
+                  <a:srgbClr val="1A1A1A"/>
+                </a:solidFill>
+                <a:latin typeface="Lexend"/>
+              </a:rPr>
+              <a:t>Area:  </a:t>
+            </a:r>
+          </a:p>
+        </p:txBody>
+      </p:sp>
+      <p:pic>
+        <p:nvPicPr>
+          <p:cNvPr id="12" name="Picture 11" descr="db60fa38d81bcb29.png"/>
+          <p:cNvPicPr>
+            <a:picLocks noChangeAspect="1"/>
+          </p:cNvPicPr>
+          <p:nvPr/>
+        </p:nvPicPr>
+        <p:blipFill>
+          <a:blip r:embed="rId2"/>
+          <a:stretch>
+            <a:fillRect/>
+          </a:stretch>
+        </p:blipFill>
+        <p:spPr>
+          <a:xfrm>
+            <a:off x="5640123" y="3923438"/>
+            <a:ext cx="896112" cy="259080"/>
+          </a:xfrm>
+          <a:prstGeom prst="rect">
+            <a:avLst/>
+          </a:prstGeom>
+        </p:spPr>
+      </p:pic>
+      <p:sp>
+        <p:nvSpPr>
+          <p:cNvPr id="13" name="TextBox 12"/>
+          <p:cNvSpPr txBox="1"/>
+          <p:nvPr/>
+        </p:nvSpPr>
+        <p:spPr>
+          <a:xfrm>
+            <a:off x="4599461" y="4327298"/>
+            <a:ext cx="983890" cy="457200"/>
+          </a:xfrm>
+          <a:prstGeom prst="rect">
+            <a:avLst/>
+          </a:prstGeom>
+          <a:noFill/>
+        </p:spPr>
+        <p:txBody>
+          <a:bodyPr wrap="none" lIns="45720" rIns="45720" tIns="18288" bIns="18288" anchor="ctr">
+            <a:noAutofit/>
+          </a:bodyPr>
+          <a:lstStyle/>
+          <a:p>
+            <a:pPr algn="l"/>
+            <a:r>
+              <a:rPr sz="2330" b="0" i="0">
+                <a:solidFill>
+                  <a:srgbClr val="1A1A1A"/>
+                </a:solidFill>
+                <a:latin typeface="Lexend"/>
+              </a:rPr>
+              <a:t>Tile:  </a:t>
+            </a:r>
+          </a:p>
+        </p:txBody>
+      </p:sp>
+      <p:pic>
+        <p:nvPicPr>
+          <p:cNvPr id="14" name="Picture 13" descr="dad7cd7587acd822.png"/>
+          <p:cNvPicPr>
+            <a:picLocks noChangeAspect="1"/>
+          </p:cNvPicPr>
+          <p:nvPr/>
+        </p:nvPicPr>
+        <p:blipFill>
+          <a:blip r:embed="rId3"/>
+          <a:stretch>
+            <a:fillRect/>
+          </a:stretch>
+        </p:blipFill>
+        <p:spPr>
+          <a:xfrm>
+            <a:off x="5446191" y="4449218"/>
+            <a:ext cx="1935480" cy="213360"/>
+          </a:xfrm>
+          <a:prstGeom prst="rect">
+            <a:avLst/>
+          </a:prstGeom>
+        </p:spPr>
+      </p:pic>
+      <p:sp>
+        <p:nvSpPr>
+          <p:cNvPr id="15" name="TextBox 14"/>
+          <p:cNvSpPr txBox="1"/>
+          <p:nvPr/>
+        </p:nvSpPr>
+        <p:spPr>
+          <a:xfrm>
+            <a:off x="4599461" y="4830218"/>
+            <a:ext cx="1194757" cy="457200"/>
+          </a:xfrm>
+          <a:prstGeom prst="rect">
+            <a:avLst/>
+          </a:prstGeom>
+          <a:noFill/>
+        </p:spPr>
+        <p:txBody>
+          <a:bodyPr wrap="none" lIns="45720" rIns="45720" tIns="18288" bIns="18288" anchor="ctr">
+            <a:noAutofit/>
+          </a:bodyPr>
+          <a:lstStyle/>
+          <a:p>
+            <a:pPr algn="l"/>
+            <a:r>
+              <a:rPr sz="2330" b="0" i="0">
+                <a:solidFill>
+                  <a:srgbClr val="1A1A1A"/>
+                </a:solidFill>
+                <a:latin typeface="Lexend"/>
+              </a:rPr>
+              <a:t>Total:  </a:t>
+            </a:r>
+          </a:p>
+        </p:txBody>
+      </p:sp>
+      <p:pic>
+        <p:nvPicPr>
+          <p:cNvPr id="16" name="Picture 15" descr="2554c3d382c475f1.png"/>
+          <p:cNvPicPr>
+            <a:picLocks noChangeAspect="1"/>
+          </p:cNvPicPr>
+          <p:nvPr/>
+        </p:nvPicPr>
+        <p:blipFill>
+          <a:blip r:embed="rId4"/>
+          <a:stretch>
+            <a:fillRect/>
+          </a:stretch>
+        </p:blipFill>
+        <p:spPr>
+          <a:xfrm>
+            <a:off x="5657058" y="4952138"/>
+            <a:ext cx="1905000" cy="213360"/>
+          </a:xfrm>
+          <a:prstGeom prst="rect">
+            <a:avLst/>
+          </a:prstGeom>
+        </p:spPr>
+      </p:pic>
+      <p:sp>
+        <p:nvSpPr>
+          <p:cNvPr id="17" name="TextBox 16"/>
+          <p:cNvSpPr txBox="1"/>
+          <p:nvPr/>
+        </p:nvSpPr>
+        <p:spPr>
+          <a:xfrm>
+            <a:off x="777240" y="5401718"/>
             <a:ext cx="10607040" cy="548640"/>
           </a:xfrm>
           <a:prstGeom prst="rect">
@@ -9221,11 +9767,11 @@
           <a:p>
             <a:pPr algn="ctr"/>
             <a:r>
-              <a:rPr sz="3200" b="1" i="0">
+              <a:rPr sz="3040" b="1" i="0">
                 <a:solidFill>
                   <a:srgbClr val="9E1B32"/>
                 </a:solidFill>
-                <a:latin typeface="Century Schoolbook"/>
+                <a:latin typeface="Lexend"/>
               </a:rPr>
               <a:t>Answer:   284 dollars</a:t>
             </a:r>
@@ -9274,11 +9820,11 @@
           <a:p>
             <a:pPr algn="l"/>
             <a:r>
-              <a:rPr sz="3400" b="1" i="0">
-                <a:solidFill>
-                  <a:srgbClr val="1A1A1A"/>
-                </a:solidFill>
-                <a:latin typeface="Century Schoolbook"/>
+              <a:rPr sz="3229" b="1" i="0">
+                <a:solidFill>
+                  <a:srgbClr val="1A1A1A"/>
+                </a:solidFill>
+                <a:latin typeface="Lexend"/>
               </a:rPr>
               <a:t>Whiteboards   ·   Question 5 of 9</a:t>
             </a:r>
@@ -9414,11 +9960,11 @@
           <a:p>
             <a:pPr algn="l"/>
             <a:r>
-              <a:rPr sz="1100" b="0" i="1">
+              <a:rPr sz="1040" b="0" i="0">
                 <a:solidFill>
                   <a:srgbClr val="6B6B6B"/>
                 </a:solidFill>
-                <a:latin typeface="Century Schoolbook"/>
+                <a:latin typeface="Lexend"/>
               </a:rPr>
               <a:t>Grade 7 Accelerated · Unit 4 · Lessons 7–8 — Real-World Order of Operations</a:t>
             </a:r>
@@ -9449,11 +9995,11 @@
           <a:p>
             <a:pPr algn="r"/>
             <a:r>
-              <a:rPr sz="1100" b="0" i="0">
+              <a:rPr sz="1040" b="0" i="0">
                 <a:solidFill>
                   <a:srgbClr val="6B6B6B"/>
                 </a:solidFill>
-                <a:latin typeface="Century Schoolbook"/>
+                <a:latin typeface="Lexend"/>
               </a:rPr>
               <a:t>23</a:t>
             </a:r>
@@ -9468,8 +10014,8 @@
         </p:nvSpPr>
         <p:spPr>
           <a:xfrm>
-            <a:off x="2567790" y="2302764"/>
-            <a:ext cx="1864823" cy="457200"/>
+            <a:off x="2535998" y="2299715"/>
+            <a:ext cx="1806076" cy="457200"/>
           </a:xfrm>
           <a:prstGeom prst="rect">
             <a:avLst/>
@@ -9484,11 +10030,11 @@
           <a:p>
             <a:pPr algn="l"/>
             <a:r>
-              <a:rPr sz="2600" b="0" i="0">
-                <a:solidFill>
-                  <a:srgbClr val="1A1A1A"/>
-                </a:solidFill>
-                <a:latin typeface="Century Schoolbook"/>
+              <a:rPr sz="2470" b="0" i="0">
+                <a:solidFill>
+                  <a:srgbClr val="1A1A1A"/>
+                </a:solidFill>
+                <a:latin typeface="Lexend"/>
               </a:rPr>
               <a:t>Evaluate  </a:t>
             </a:r>
@@ -9497,7 +10043,7 @@
       </p:sp>
       <p:pic>
         <p:nvPicPr>
-          <p:cNvPr id="9" name="Picture 8" descr="0c3f0450f52693a1.png"/>
+          <p:cNvPr id="9" name="Picture 8" descr="afdff26349098bc3.png"/>
           <p:cNvPicPr>
             <a:picLocks noChangeAspect="1"/>
           </p:cNvPicPr>
@@ -9511,8 +10057,8 @@
         </p:blipFill>
         <p:spPr>
           <a:xfrm>
-            <a:off x="4295453" y="2194560"/>
-            <a:ext cx="890016" cy="673608"/>
+            <a:off x="4204915" y="2194560"/>
+            <a:ext cx="990599" cy="667512"/>
           </a:xfrm>
           <a:prstGeom prst="rect">
             <a:avLst/>
@@ -9527,8 +10073,8 @@
         </p:nvSpPr>
         <p:spPr>
           <a:xfrm>
-            <a:off x="5185469" y="2302764"/>
-            <a:ext cx="1474477" cy="457200"/>
+            <a:off x="5195515" y="2299715"/>
+            <a:ext cx="1439295" cy="457200"/>
           </a:xfrm>
           <a:prstGeom prst="rect">
             <a:avLst/>
@@ -9543,11 +10089,11 @@
           <a:p>
             <a:pPr algn="l"/>
             <a:r>
-              <a:rPr sz="2600" b="0" i="0">
-                <a:solidFill>
-                  <a:srgbClr val="1A1A1A"/>
-                </a:solidFill>
-                <a:latin typeface="Century Schoolbook"/>
+              <a:rPr sz="2470" b="0" i="0">
+                <a:solidFill>
+                  <a:srgbClr val="1A1A1A"/>
+                </a:solidFill>
+                <a:latin typeface="Lexend"/>
               </a:rPr>
               <a:t>  when  </a:t>
             </a:r>
@@ -9556,7 +10102,7 @@
       </p:sp>
       <p:pic>
         <p:nvPicPr>
-          <p:cNvPr id="11" name="Picture 10" descr="2effa420194315b0.png"/>
+          <p:cNvPr id="11" name="Picture 10" descr="938dd359498bb540.png"/>
           <p:cNvPicPr>
             <a:picLocks noChangeAspect="1"/>
           </p:cNvPicPr>
@@ -9570,8 +10116,8 @@
         </p:blipFill>
         <p:spPr>
           <a:xfrm>
-            <a:off x="6522787" y="2391156"/>
-            <a:ext cx="1082040" cy="280416"/>
+            <a:off x="6497650" y="2389632"/>
+            <a:ext cx="1149096" cy="277368"/>
           </a:xfrm>
           <a:prstGeom prst="rect">
             <a:avLst/>
@@ -9586,8 +10132,8 @@
         </p:nvSpPr>
         <p:spPr>
           <a:xfrm>
-            <a:off x="7604827" y="2302764"/>
-            <a:ext cx="1208866" cy="457200"/>
+            <a:off x="7646746" y="2299715"/>
+            <a:ext cx="1201901" cy="457200"/>
           </a:xfrm>
           <a:prstGeom prst="rect">
             <a:avLst/>
@@ -9602,11 +10148,11 @@
           <a:p>
             <a:pPr algn="l"/>
             <a:r>
-              <a:rPr sz="2600" b="0" i="0">
-                <a:solidFill>
-                  <a:srgbClr val="1A1A1A"/>
-                </a:solidFill>
-                <a:latin typeface="Century Schoolbook"/>
+              <a:rPr sz="2470" b="0" i="0">
+                <a:solidFill>
+                  <a:srgbClr val="1A1A1A"/>
+                </a:solidFill>
+                <a:latin typeface="Lexend"/>
               </a:rPr>
               <a:t>  and  </a:t>
             </a:r>
@@ -9615,7 +10161,7 @@
       </p:sp>
       <p:pic>
         <p:nvPicPr>
-          <p:cNvPr id="13" name="Picture 12" descr="d8c25bd356e9b5d6.png"/>
+          <p:cNvPr id="13" name="Picture 12" descr="f632c3e74aa9099d.png"/>
           <p:cNvPicPr>
             <a:picLocks noChangeAspect="1"/>
           </p:cNvPicPr>
@@ -9629,8 +10175,8 @@
         </p:blipFill>
         <p:spPr>
           <a:xfrm>
-            <a:off x="8676533" y="2391156"/>
-            <a:ext cx="746760" cy="280416"/>
+            <a:off x="8711487" y="2391156"/>
+            <a:ext cx="765048" cy="274320"/>
           </a:xfrm>
           <a:prstGeom prst="rect">
             <a:avLst/>
@@ -9645,8 +10191,8 @@
         </p:nvSpPr>
         <p:spPr>
           <a:xfrm>
-            <a:off x="9423293" y="2302764"/>
-            <a:ext cx="307595" cy="457200"/>
+            <a:off x="9476535" y="2299715"/>
+            <a:ext cx="286146" cy="457200"/>
           </a:xfrm>
           <a:prstGeom prst="rect">
             <a:avLst/>
@@ -9661,11 +10207,11 @@
           <a:p>
             <a:pPr algn="l"/>
             <a:r>
-              <a:rPr sz="2600" b="0" i="0">
-                <a:solidFill>
-                  <a:srgbClr val="1A1A1A"/>
-                </a:solidFill>
-                <a:latin typeface="Century Schoolbook"/>
+              <a:rPr sz="2470" b="0" i="0">
+                <a:solidFill>
+                  <a:srgbClr val="1A1A1A"/>
+                </a:solidFill>
+                <a:latin typeface="Lexend"/>
               </a:rPr>
               <a:t>.</a:t>
             </a:r>
@@ -9680,7 +10226,7 @@
         </p:nvSpPr>
         <p:spPr>
           <a:xfrm>
-            <a:off x="777240" y="3142488"/>
+            <a:off x="777240" y="3136391"/>
             <a:ext cx="10607040" cy="465151"/>
           </a:xfrm>
           <a:prstGeom prst="rect">
@@ -9696,11 +10242,11 @@
           <a:p>
             <a:pPr algn="ctr"/>
             <a:r>
-              <a:rPr sz="2600" b="0" i="0">
-                <a:solidFill>
-                  <a:srgbClr val="1A1A1A"/>
-                </a:solidFill>
-                <a:latin typeface="Century Schoolbook"/>
+              <a:rPr sz="2470" b="0" i="0">
+                <a:solidFill>
+                  <a:srgbClr val="1A1A1A"/>
+                </a:solidFill>
+                <a:latin typeface="Lexend"/>
               </a:rPr>
               <a:t>Which is the value?</a:t>
             </a:r>
@@ -9715,7 +10261,7 @@
         </p:nvSpPr>
         <p:spPr>
           <a:xfrm>
-            <a:off x="1874519" y="3808807"/>
+            <a:off x="1874519" y="3802711"/>
             <a:ext cx="4572000" cy="548640"/>
           </a:xfrm>
           <a:prstGeom prst="rect">
@@ -9731,20 +10277,20 @@
           <a:p>
             <a:pPr algn="l"/>
             <a:r>
-              <a:rPr sz="2400" b="1" i="0">
-                <a:solidFill>
-                  <a:srgbClr val="1A1A1A"/>
-                </a:solidFill>
-                <a:latin typeface="Century Schoolbook"/>
+              <a:rPr sz="2280" b="1" i="0">
+                <a:solidFill>
+                  <a:srgbClr val="1A1A1A"/>
+                </a:solidFill>
+                <a:latin typeface="Lexend"/>
               </a:rPr>
               <a:t>A.   </a:t>
             </a:r>
             <a:r>
-              <a:rPr sz="2400" b="0" i="0">
-                <a:solidFill>
-                  <a:srgbClr val="1A1A1A"/>
-                </a:solidFill>
-                <a:latin typeface="Century Schoolbook"/>
+              <a:rPr sz="2280" b="0" i="0">
+                <a:solidFill>
+                  <a:srgbClr val="1A1A1A"/>
+                </a:solidFill>
+                <a:latin typeface="Lexend"/>
               </a:rPr>
               <a:t>180</a:t>
             </a:r>
@@ -9759,7 +10305,7 @@
         </p:nvSpPr>
         <p:spPr>
           <a:xfrm>
-            <a:off x="6629400" y="3808807"/>
+            <a:off x="6629400" y="3802711"/>
             <a:ext cx="4572000" cy="548640"/>
           </a:xfrm>
           <a:prstGeom prst="rect">
@@ -9775,20 +10321,20 @@
           <a:p>
             <a:pPr algn="l"/>
             <a:r>
-              <a:rPr sz="2400" b="1" i="0">
-                <a:solidFill>
-                  <a:srgbClr val="1A1A1A"/>
-                </a:solidFill>
-                <a:latin typeface="Century Schoolbook"/>
+              <a:rPr sz="2280" b="1" i="0">
+                <a:solidFill>
+                  <a:srgbClr val="1A1A1A"/>
+                </a:solidFill>
+                <a:latin typeface="Lexend"/>
               </a:rPr>
               <a:t>B.   </a:t>
             </a:r>
             <a:r>
-              <a:rPr sz="2400" b="0" i="0">
-                <a:solidFill>
-                  <a:srgbClr val="1A1A1A"/>
-                </a:solidFill>
-                <a:latin typeface="Century Schoolbook"/>
+              <a:rPr sz="2280" b="0" i="0">
+                <a:solidFill>
+                  <a:srgbClr val="1A1A1A"/>
+                </a:solidFill>
+                <a:latin typeface="Lexend"/>
               </a:rPr>
               <a:t>120</a:t>
             </a:r>
@@ -9803,7 +10349,7 @@
         </p:nvSpPr>
         <p:spPr>
           <a:xfrm>
-            <a:off x="1874519" y="4494607"/>
+            <a:off x="1874519" y="4488511"/>
             <a:ext cx="4572000" cy="548640"/>
           </a:xfrm>
           <a:prstGeom prst="rect">
@@ -9819,20 +10365,20 @@
           <a:p>
             <a:pPr algn="l"/>
             <a:r>
-              <a:rPr sz="2400" b="1" i="0">
-                <a:solidFill>
-                  <a:srgbClr val="1A1A1A"/>
-                </a:solidFill>
-                <a:latin typeface="Century Schoolbook"/>
+              <a:rPr sz="2280" b="1" i="0">
+                <a:solidFill>
+                  <a:srgbClr val="1A1A1A"/>
+                </a:solidFill>
+                <a:latin typeface="Lexend"/>
               </a:rPr>
               <a:t>C.   </a:t>
             </a:r>
             <a:r>
-              <a:rPr sz="2400" b="0" i="0">
-                <a:solidFill>
-                  <a:srgbClr val="1A1A1A"/>
-                </a:solidFill>
-                <a:latin typeface="Century Schoolbook"/>
+              <a:rPr sz="2280" b="0" i="0">
+                <a:solidFill>
+                  <a:srgbClr val="1A1A1A"/>
+                </a:solidFill>
+                <a:latin typeface="Lexend"/>
               </a:rPr>
               <a:t>360</a:t>
             </a:r>
@@ -9847,7 +10393,7 @@
         </p:nvSpPr>
         <p:spPr>
           <a:xfrm>
-            <a:off x="6629400" y="4494607"/>
+            <a:off x="6629400" y="4488511"/>
             <a:ext cx="4572000" cy="548640"/>
           </a:xfrm>
           <a:prstGeom prst="rect">
@@ -9863,20 +10409,20 @@
           <a:p>
             <a:pPr algn="l"/>
             <a:r>
-              <a:rPr sz="2400" b="1" i="0">
-                <a:solidFill>
-                  <a:srgbClr val="1A1A1A"/>
-                </a:solidFill>
-                <a:latin typeface="Century Schoolbook"/>
+              <a:rPr sz="2280" b="1" i="0">
+                <a:solidFill>
+                  <a:srgbClr val="1A1A1A"/>
+                </a:solidFill>
+                <a:latin typeface="Lexend"/>
               </a:rPr>
               <a:t>D.   </a:t>
             </a:r>
             <a:r>
-              <a:rPr sz="2400" b="0" i="0">
-                <a:solidFill>
-                  <a:srgbClr val="1A1A1A"/>
-                </a:solidFill>
-                <a:latin typeface="Century Schoolbook"/>
+              <a:rPr sz="2280" b="0" i="0">
+                <a:solidFill>
+                  <a:srgbClr val="1A1A1A"/>
+                </a:solidFill>
+                <a:latin typeface="Lexend"/>
               </a:rPr>
               <a:t>3,600</a:t>
             </a:r>
@@ -9891,7 +10437,7 @@
         </p:nvSpPr>
         <p:spPr>
           <a:xfrm>
-            <a:off x="777240" y="5500447"/>
+            <a:off x="777240" y="5494351"/>
             <a:ext cx="10607040" cy="457200"/>
           </a:xfrm>
           <a:prstGeom prst="rect">
@@ -9907,11 +10453,11 @@
           <a:p>
             <a:pPr algn="ctr"/>
             <a:r>
-              <a:rPr sz="2600" b="1" i="0">
-                <a:solidFill>
-                  <a:srgbClr val="1A1A1A"/>
-                </a:solidFill>
-                <a:latin typeface="Century Schoolbook"/>
+              <a:rPr sz="2470" b="1" i="0">
+                <a:solidFill>
+                  <a:srgbClr val="1A1A1A"/>
+                </a:solidFill>
+                <a:latin typeface="Lexend"/>
               </a:rPr>
               <a:t>Answer it.</a:t>
             </a:r>
@@ -9960,11 +10506,11 @@
           <a:p>
             <a:pPr algn="l"/>
             <a:r>
-              <a:rPr sz="3400" b="1" i="0">
-                <a:solidFill>
-                  <a:srgbClr val="1A1A1A"/>
-                </a:solidFill>
-                <a:latin typeface="Century Schoolbook"/>
+              <a:rPr sz="3229" b="1" i="0">
+                <a:solidFill>
+                  <a:srgbClr val="1A1A1A"/>
+                </a:solidFill>
+                <a:latin typeface="Lexend"/>
               </a:rPr>
               <a:t>Whiteboards   ·   Question 5 of 9</a:t>
             </a:r>
@@ -10100,11 +10646,11 @@
           <a:p>
             <a:pPr algn="l"/>
             <a:r>
-              <a:rPr sz="1100" b="0" i="1">
+              <a:rPr sz="1040" b="0" i="0">
                 <a:solidFill>
                   <a:srgbClr val="6B6B6B"/>
                 </a:solidFill>
-                <a:latin typeface="Century Schoolbook"/>
+                <a:latin typeface="Lexend"/>
               </a:rPr>
               <a:t>Grade 7 Accelerated · Unit 4 · Lessons 7–8 — Real-World Order of Operations</a:t>
             </a:r>
@@ -10135,11 +10681,11 @@
           <a:p>
             <a:pPr algn="r"/>
             <a:r>
-              <a:rPr sz="1100" b="0" i="0">
+              <a:rPr sz="1040" b="0" i="0">
                 <a:solidFill>
                   <a:srgbClr val="6B6B6B"/>
                 </a:solidFill>
-                <a:latin typeface="Century Schoolbook"/>
+                <a:latin typeface="Lexend"/>
               </a:rPr>
               <a:t>24</a:t>
             </a:r>
@@ -10154,8 +10700,8 @@
         </p:nvSpPr>
         <p:spPr>
           <a:xfrm>
-            <a:off x="2566266" y="2211323"/>
-            <a:ext cx="1864823" cy="457200"/>
+            <a:off x="2534474" y="2209800"/>
+            <a:ext cx="1806076" cy="457200"/>
           </a:xfrm>
           <a:prstGeom prst="rect">
             <a:avLst/>
@@ -10170,11 +10716,11 @@
           <a:p>
             <a:pPr algn="l"/>
             <a:r>
-              <a:rPr sz="2600" b="0" i="0">
-                <a:solidFill>
-                  <a:srgbClr val="1A1A1A"/>
-                </a:solidFill>
-                <a:latin typeface="Century Schoolbook"/>
+              <a:rPr sz="2470" b="0" i="0">
+                <a:solidFill>
+                  <a:srgbClr val="1A1A1A"/>
+                </a:solidFill>
+                <a:latin typeface="Lexend"/>
               </a:rPr>
               <a:t>Evaluate  </a:t>
             </a:r>
@@ -10183,7 +10729,7 @@
       </p:sp>
       <p:pic>
         <p:nvPicPr>
-          <p:cNvPr id="9" name="Picture 8" descr="9a895d34bc456d65.png"/>
+          <p:cNvPr id="9" name="Picture 8" descr="d1e305187b6b37f7.png"/>
           <p:cNvPicPr>
             <a:picLocks noChangeAspect="1"/>
           </p:cNvPicPr>
@@ -10197,8 +10743,8 @@
         </p:blipFill>
         <p:spPr>
           <a:xfrm>
-            <a:off x="4293929" y="2103120"/>
-            <a:ext cx="893064" cy="673608"/>
+            <a:off x="4203391" y="2103120"/>
+            <a:ext cx="993648" cy="670560"/>
           </a:xfrm>
           <a:prstGeom prst="rect">
             <a:avLst/>
@@ -10213,8 +10759,8 @@
         </p:nvSpPr>
         <p:spPr>
           <a:xfrm>
-            <a:off x="5186993" y="2211323"/>
-            <a:ext cx="1474477" cy="457200"/>
+            <a:off x="5197039" y="2209800"/>
+            <a:ext cx="1439295" cy="457200"/>
           </a:xfrm>
           <a:prstGeom prst="rect">
             <a:avLst/>
@@ -10229,11 +10775,11 @@
           <a:p>
             <a:pPr algn="l"/>
             <a:r>
-              <a:rPr sz="2600" b="0" i="0">
-                <a:solidFill>
-                  <a:srgbClr val="1A1A1A"/>
-                </a:solidFill>
-                <a:latin typeface="Century Schoolbook"/>
+              <a:rPr sz="2470" b="0" i="0">
+                <a:solidFill>
+                  <a:srgbClr val="1A1A1A"/>
+                </a:solidFill>
+                <a:latin typeface="Lexend"/>
               </a:rPr>
               <a:t>  when  </a:t>
             </a:r>
@@ -10242,7 +10788,7 @@
       </p:sp>
       <p:pic>
         <p:nvPicPr>
-          <p:cNvPr id="11" name="Picture 10" descr="2effa420194315b0.png"/>
+          <p:cNvPr id="11" name="Picture 10" descr="68297ebc4f2432d7.png"/>
           <p:cNvPicPr>
             <a:picLocks noChangeAspect="1"/>
           </p:cNvPicPr>
@@ -10256,8 +10802,8 @@
         </p:blipFill>
         <p:spPr>
           <a:xfrm>
-            <a:off x="6524311" y="2299715"/>
-            <a:ext cx="1082040" cy="280416"/>
+            <a:off x="6499174" y="2299715"/>
+            <a:ext cx="1149096" cy="277368"/>
           </a:xfrm>
           <a:prstGeom prst="rect">
             <a:avLst/>
@@ -10272,8 +10818,8 @@
         </p:nvSpPr>
         <p:spPr>
           <a:xfrm>
-            <a:off x="7606351" y="2211323"/>
-            <a:ext cx="1208866" cy="457200"/>
+            <a:off x="7648270" y="2209800"/>
+            <a:ext cx="1201901" cy="457200"/>
           </a:xfrm>
           <a:prstGeom prst="rect">
             <a:avLst/>
@@ -10288,11 +10834,11 @@
           <a:p>
             <a:pPr algn="l"/>
             <a:r>
-              <a:rPr sz="2600" b="0" i="0">
-                <a:solidFill>
-                  <a:srgbClr val="1A1A1A"/>
-                </a:solidFill>
-                <a:latin typeface="Century Schoolbook"/>
+              <a:rPr sz="2470" b="0" i="0">
+                <a:solidFill>
+                  <a:srgbClr val="1A1A1A"/>
+                </a:solidFill>
+                <a:latin typeface="Lexend"/>
               </a:rPr>
               <a:t>  and  </a:t>
             </a:r>
@@ -10301,7 +10847,7 @@
       </p:sp>
       <p:pic>
         <p:nvPicPr>
-          <p:cNvPr id="13" name="Picture 12" descr="d8c25bd356e9b5d6.png"/>
+          <p:cNvPr id="13" name="Picture 12" descr="f632c3e74aa9099d.png"/>
           <p:cNvPicPr>
             <a:picLocks noChangeAspect="1"/>
           </p:cNvPicPr>
@@ -10315,8 +10861,8 @@
         </p:blipFill>
         <p:spPr>
           <a:xfrm>
-            <a:off x="8678057" y="2299715"/>
-            <a:ext cx="746760" cy="280416"/>
+            <a:off x="8713011" y="2301240"/>
+            <a:ext cx="765048" cy="274320"/>
           </a:xfrm>
           <a:prstGeom prst="rect">
             <a:avLst/>
@@ -10331,8 +10877,8 @@
         </p:nvSpPr>
         <p:spPr>
           <a:xfrm>
-            <a:off x="9424817" y="2211323"/>
-            <a:ext cx="307595" cy="457200"/>
+            <a:off x="9478059" y="2209800"/>
+            <a:ext cx="286146" cy="457200"/>
           </a:xfrm>
           <a:prstGeom prst="rect">
             <a:avLst/>
@@ -10347,11 +10893,11 @@
           <a:p>
             <a:pPr algn="l"/>
             <a:r>
-              <a:rPr sz="2600" b="0" i="0">
-                <a:solidFill>
-                  <a:srgbClr val="1A1A1A"/>
-                </a:solidFill>
-                <a:latin typeface="Century Schoolbook"/>
+              <a:rPr sz="2470" b="0" i="0">
+                <a:solidFill>
+                  <a:srgbClr val="1A1A1A"/>
+                </a:solidFill>
+                <a:latin typeface="Lexend"/>
               </a:rPr>
               <a:t>.</a:t>
             </a:r>
@@ -10366,7 +10912,7 @@
         </p:nvSpPr>
         <p:spPr>
           <a:xfrm>
-            <a:off x="777240" y="3051048"/>
+            <a:off x="777240" y="3047999"/>
             <a:ext cx="10607040" cy="465151"/>
           </a:xfrm>
           <a:prstGeom prst="rect">
@@ -10382,27 +10928,75 @@
           <a:p>
             <a:pPr algn="ctr"/>
             <a:r>
-              <a:rPr sz="2600" b="0" i="0">
-                <a:solidFill>
-                  <a:srgbClr val="1A1A1A"/>
-                </a:solidFill>
-                <a:latin typeface="Century Schoolbook"/>
+              <a:rPr sz="2470" b="0" i="0">
+                <a:solidFill>
+                  <a:srgbClr val="1A1A1A"/>
+                </a:solidFill>
+                <a:latin typeface="Lexend"/>
               </a:rPr>
               <a:t>Which is the value?</a:t>
             </a:r>
           </a:p>
         </p:txBody>
       </p:sp>
-      <p:sp>
-        <p:nvSpPr>
-          <p:cNvPr id="16" name="TextBox 15"/>
-          <p:cNvSpPr txBox="1"/>
-          <p:nvPr/>
-        </p:nvSpPr>
-        <p:spPr>
-          <a:xfrm>
-            <a:off x="1874519" y="3717367"/>
-            <a:ext cx="4572000" cy="548640"/>
+      <p:pic>
+        <p:nvPicPr>
+          <p:cNvPr id="16" name="Picture 15" descr="1adf52fb30892421.png"/>
+          <p:cNvPicPr>
+            <a:picLocks noChangeAspect="1"/>
+          </p:cNvPicPr>
+          <p:nvPr/>
+        </p:nvPicPr>
+        <p:blipFill>
+          <a:blip r:embed="rId5"/>
+          <a:stretch>
+            <a:fillRect/>
+          </a:stretch>
+        </p:blipFill>
+        <p:spPr>
+          <a:xfrm>
+            <a:off x="4347971" y="3749371"/>
+            <a:ext cx="1517904" cy="304800"/>
+          </a:xfrm>
+          <a:prstGeom prst="rect">
+            <a:avLst/>
+          </a:prstGeom>
+        </p:spPr>
+      </p:pic>
+      <p:pic>
+        <p:nvPicPr>
+          <p:cNvPr id="17" name="Picture 16" descr="f5a67ba185f37fd3.png"/>
+          <p:cNvPicPr>
+            <a:picLocks noChangeAspect="1"/>
+          </p:cNvPicPr>
+          <p:nvPr/>
+        </p:nvPicPr>
+        <p:blipFill>
+          <a:blip r:embed="rId6"/>
+          <a:stretch>
+            <a:fillRect/>
+          </a:stretch>
+        </p:blipFill>
+        <p:spPr>
+          <a:xfrm>
+            <a:off x="4347971" y="4235527"/>
+            <a:ext cx="3578352" cy="606552"/>
+          </a:xfrm>
+          <a:prstGeom prst="rect">
+            <a:avLst/>
+          </a:prstGeom>
+        </p:spPr>
+      </p:pic>
+      <p:sp>
+        <p:nvSpPr>
+          <p:cNvPr id="18" name="TextBox 17"/>
+          <p:cNvSpPr txBox="1"/>
+          <p:nvPr/>
+        </p:nvSpPr>
+        <p:spPr>
+          <a:xfrm>
+            <a:off x="777240" y="4979239"/>
+            <a:ext cx="10607040" cy="548640"/>
           </a:xfrm>
           <a:prstGeom prst="rect">
             <a:avLst/>
@@ -10415,189 +11009,13 @@
           </a:bodyPr>
           <a:lstStyle/>
           <a:p>
-            <a:pPr algn="l"/>
-            <a:r>
-              <a:rPr sz="2400" b="1" i="0">
+            <a:pPr algn="ctr"/>
+            <a:r>
+              <a:rPr sz="3040" b="1" i="0">
                 <a:solidFill>
                   <a:srgbClr val="9E1B32"/>
                 </a:solidFill>
-                <a:latin typeface="Century Schoolbook"/>
-              </a:rPr>
-              <a:t>A.   </a:t>
-            </a:r>
-            <a:r>
-              <a:rPr sz="2400" b="1" i="0">
-                <a:solidFill>
-                  <a:srgbClr val="9E1B32"/>
-                </a:solidFill>
-                <a:latin typeface="Century Schoolbook"/>
-              </a:rPr>
-              <a:t>180</a:t>
-            </a:r>
-          </a:p>
-        </p:txBody>
-      </p:sp>
-      <p:sp>
-        <p:nvSpPr>
-          <p:cNvPr id="17" name="TextBox 16"/>
-          <p:cNvSpPr txBox="1"/>
-          <p:nvPr/>
-        </p:nvSpPr>
-        <p:spPr>
-          <a:xfrm>
-            <a:off x="6629400" y="3717367"/>
-            <a:ext cx="4572000" cy="548640"/>
-          </a:xfrm>
-          <a:prstGeom prst="rect">
-            <a:avLst/>
-          </a:prstGeom>
-          <a:noFill/>
-        </p:spPr>
-        <p:txBody>
-          <a:bodyPr wrap="square" lIns="45720" rIns="45720" tIns="18288" bIns="18288" anchor="t">
-            <a:spAutoFit/>
-          </a:bodyPr>
-          <a:lstStyle/>
-          <a:p>
-            <a:pPr algn="l"/>
-            <a:r>
-              <a:rPr sz="2400" b="1" i="0">
-                <a:solidFill>
-                  <a:srgbClr val="1A1A1A"/>
-                </a:solidFill>
-                <a:latin typeface="Century Schoolbook"/>
-              </a:rPr>
-              <a:t>B.   </a:t>
-            </a:r>
-            <a:r>
-              <a:rPr sz="2400" b="0" i="0">
-                <a:solidFill>
-                  <a:srgbClr val="1A1A1A"/>
-                </a:solidFill>
-                <a:latin typeface="Century Schoolbook"/>
-              </a:rPr>
-              <a:t>120</a:t>
-            </a:r>
-          </a:p>
-        </p:txBody>
-      </p:sp>
-      <p:sp>
-        <p:nvSpPr>
-          <p:cNvPr id="18" name="TextBox 17"/>
-          <p:cNvSpPr txBox="1"/>
-          <p:nvPr/>
-        </p:nvSpPr>
-        <p:spPr>
-          <a:xfrm>
-            <a:off x="1874519" y="4403167"/>
-            <a:ext cx="4572000" cy="548640"/>
-          </a:xfrm>
-          <a:prstGeom prst="rect">
-            <a:avLst/>
-          </a:prstGeom>
-          <a:noFill/>
-        </p:spPr>
-        <p:txBody>
-          <a:bodyPr wrap="square" lIns="45720" rIns="45720" tIns="18288" bIns="18288" anchor="t">
-            <a:spAutoFit/>
-          </a:bodyPr>
-          <a:lstStyle/>
-          <a:p>
-            <a:pPr algn="l"/>
-            <a:r>
-              <a:rPr sz="2400" b="1" i="0">
-                <a:solidFill>
-                  <a:srgbClr val="1A1A1A"/>
-                </a:solidFill>
-                <a:latin typeface="Century Schoolbook"/>
-              </a:rPr>
-              <a:t>C.   </a:t>
-            </a:r>
-            <a:r>
-              <a:rPr sz="2400" b="0" i="0">
-                <a:solidFill>
-                  <a:srgbClr val="1A1A1A"/>
-                </a:solidFill>
-                <a:latin typeface="Century Schoolbook"/>
-              </a:rPr>
-              <a:t>360</a:t>
-            </a:r>
-          </a:p>
-        </p:txBody>
-      </p:sp>
-      <p:sp>
-        <p:nvSpPr>
-          <p:cNvPr id="19" name="TextBox 18"/>
-          <p:cNvSpPr txBox="1"/>
-          <p:nvPr/>
-        </p:nvSpPr>
-        <p:spPr>
-          <a:xfrm>
-            <a:off x="6629400" y="4403167"/>
-            <a:ext cx="4572000" cy="548640"/>
-          </a:xfrm>
-          <a:prstGeom prst="rect">
-            <a:avLst/>
-          </a:prstGeom>
-          <a:noFill/>
-        </p:spPr>
-        <p:txBody>
-          <a:bodyPr wrap="square" lIns="45720" rIns="45720" tIns="18288" bIns="18288" anchor="t">
-            <a:spAutoFit/>
-          </a:bodyPr>
-          <a:lstStyle/>
-          <a:p>
-            <a:pPr algn="l"/>
-            <a:r>
-              <a:rPr sz="2400" b="1" i="0">
-                <a:solidFill>
-                  <a:srgbClr val="1A1A1A"/>
-                </a:solidFill>
-                <a:latin typeface="Century Schoolbook"/>
-              </a:rPr>
-              <a:t>D.   </a:t>
-            </a:r>
-            <a:r>
-              <a:rPr sz="2400" b="0" i="0">
-                <a:solidFill>
-                  <a:srgbClr val="1A1A1A"/>
-                </a:solidFill>
-                <a:latin typeface="Century Schoolbook"/>
-              </a:rPr>
-              <a:t>3,600</a:t>
-            </a:r>
-          </a:p>
-        </p:txBody>
-      </p:sp>
-      <p:sp>
-        <p:nvSpPr>
-          <p:cNvPr id="20" name="TextBox 19"/>
-          <p:cNvSpPr txBox="1"/>
-          <p:nvPr/>
-        </p:nvSpPr>
-        <p:spPr>
-          <a:xfrm>
-            <a:off x="777240" y="5409007"/>
-            <a:ext cx="10607040" cy="548640"/>
-          </a:xfrm>
-          <a:prstGeom prst="rect">
-            <a:avLst/>
-          </a:prstGeom>
-          <a:noFill/>
-        </p:spPr>
-        <p:txBody>
-          <a:bodyPr wrap="square" lIns="45720" rIns="45720" tIns="18288" bIns="18288" anchor="t">
-            <a:spAutoFit/>
-          </a:bodyPr>
-          <a:lstStyle/>
-          <a:p>
-            <a:pPr algn="ctr"/>
-            <a:r>
-              <a:rPr sz="3200" b="1" i="0">
-                <a:solidFill>
-                  <a:srgbClr val="9E1B32"/>
-                </a:solidFill>
-                <a:latin typeface="Century Schoolbook"/>
+                <a:latin typeface="Lexend"/>
               </a:rPr>
               <a:t>Answer:   A — 180</a:t>
             </a:r>
@@ -10646,11 +11064,11 @@
           <a:p>
             <a:pPr algn="l"/>
             <a:r>
-              <a:rPr sz="3400" b="1" i="0">
-                <a:solidFill>
-                  <a:srgbClr val="1A1A1A"/>
-                </a:solidFill>
-                <a:latin typeface="Century Schoolbook"/>
+              <a:rPr sz="3229" b="1" i="0">
+                <a:solidFill>
+                  <a:srgbClr val="1A1A1A"/>
+                </a:solidFill>
+                <a:latin typeface="Lexend"/>
               </a:rPr>
               <a:t>Whiteboards   ·   Question 6 of 9</a:t>
             </a:r>
@@ -10786,11 +11204,11 @@
           <a:p>
             <a:pPr algn="l"/>
             <a:r>
-              <a:rPr sz="1100" b="0" i="1">
+              <a:rPr sz="1040" b="0" i="0">
                 <a:solidFill>
                   <a:srgbClr val="6B6B6B"/>
                 </a:solidFill>
-                <a:latin typeface="Century Schoolbook"/>
+                <a:latin typeface="Lexend"/>
               </a:rPr>
               <a:t>Grade 7 Accelerated · Unit 4 · Lessons 7–8 — Real-World Order of Operations</a:t>
             </a:r>
@@ -10821,11 +11239,11 @@
           <a:p>
             <a:pPr algn="r"/>
             <a:r>
-              <a:rPr sz="1100" b="0" i="0">
+              <a:rPr sz="1040" b="0" i="0">
                 <a:solidFill>
                   <a:srgbClr val="6B6B6B"/>
                 </a:solidFill>
-                <a:latin typeface="Century Schoolbook"/>
+                <a:latin typeface="Lexend"/>
               </a:rPr>
               <a:t>25</a:t>
             </a:r>
@@ -10856,11 +11274,11 @@
           <a:p>
             <a:pPr algn="ctr"/>
             <a:r>
-              <a:rPr sz="2300" b="0" i="0">
-                <a:solidFill>
-                  <a:srgbClr val="1A1A1A"/>
-                </a:solidFill>
-                <a:latin typeface="Century Schoolbook"/>
+              <a:rPr sz="2180" b="0" i="0">
+                <a:solidFill>
+                  <a:srgbClr val="1A1A1A"/>
+                </a:solidFill>
+                <a:latin typeface="Lexend"/>
               </a:rPr>
               <a:t>A square patio of side 12 feet is sealed at 1.25 dollars a square foot.</a:t>
             </a:r>
@@ -10891,11 +11309,11 @@
           <a:p>
             <a:pPr algn="ctr"/>
             <a:r>
-              <a:rPr sz="2600" b="0" i="0">
-                <a:solidFill>
-                  <a:srgbClr val="1A1A1A"/>
-                </a:solidFill>
-                <a:latin typeface="Century Schoolbook"/>
+              <a:rPr sz="2470" b="0" i="0">
+                <a:solidFill>
+                  <a:srgbClr val="1A1A1A"/>
+                </a:solidFill>
+                <a:latin typeface="Lexend"/>
               </a:rPr>
               <a:t>Delivery of the sealer is a flat 38 dollars.</a:t>
             </a:r>
@@ -10926,11 +11344,11 @@
           <a:p>
             <a:pPr algn="ctr"/>
             <a:r>
-              <a:rPr sz="2600" b="0" i="0">
-                <a:solidFill>
-                  <a:srgbClr val="1A1A1A"/>
-                </a:solidFill>
-                <a:latin typeface="Century Schoolbook"/>
+              <a:rPr sz="2470" b="0" i="0">
+                <a:solidFill>
+                  <a:srgbClr val="1A1A1A"/>
+                </a:solidFill>
+                <a:latin typeface="Lexend"/>
               </a:rPr>
               <a:t>Which expression gives the total cost?</a:t>
             </a:r>
@@ -10961,20 +11379,20 @@
           <a:p>
             <a:pPr algn="l"/>
             <a:r>
-              <a:rPr sz="2400" b="1" i="0">
-                <a:solidFill>
-                  <a:srgbClr val="1A1A1A"/>
-                </a:solidFill>
-                <a:latin typeface="Century Schoolbook"/>
+              <a:rPr sz="2280" b="1" i="0">
+                <a:solidFill>
+                  <a:srgbClr val="1A1A1A"/>
+                </a:solidFill>
+                <a:latin typeface="Lexend"/>
               </a:rPr>
               <a:t>A.   </a:t>
             </a:r>
             <a:r>
-              <a:rPr sz="2400" b="0" i="0">
-                <a:solidFill>
-                  <a:srgbClr val="1A1A1A"/>
-                </a:solidFill>
-                <a:latin typeface="Century Schoolbook"/>
+              <a:rPr sz="2280" b="0" i="0">
+                <a:solidFill>
+                  <a:srgbClr val="1A1A1A"/>
+                </a:solidFill>
+                <a:latin typeface="Lexend"/>
               </a:rPr>
               <a:t>12(1.25) + 38</a:t>
             </a:r>
@@ -11005,38 +11423,38 @@
           <a:p>
             <a:pPr algn="l"/>
             <a:r>
-              <a:rPr sz="2400" b="1" i="0">
-                <a:solidFill>
-                  <a:srgbClr val="1A1A1A"/>
-                </a:solidFill>
-                <a:latin typeface="Century Schoolbook"/>
+              <a:rPr sz="2280" b="1" i="0">
+                <a:solidFill>
+                  <a:srgbClr val="1A1A1A"/>
+                </a:solidFill>
+                <a:latin typeface="Lexend"/>
               </a:rPr>
               <a:t>B.   </a:t>
             </a:r>
             <a:r>
-              <a:rPr sz="2400" b="0" i="0">
-                <a:solidFill>
-                  <a:srgbClr val="1A1A1A"/>
-                </a:solidFill>
-                <a:latin typeface="Century Schoolbook"/>
+              <a:rPr sz="2280" b="0" i="0">
+                <a:solidFill>
+                  <a:srgbClr val="1A1A1A"/>
+                </a:solidFill>
+                <a:latin typeface="Lexend"/>
               </a:rPr>
               <a:t>12</a:t>
             </a:r>
             <a:r>
-              <a:rPr sz="2400" b="0" i="0" baseline="30000">
-                <a:solidFill>
-                  <a:srgbClr val="1A1A1A"/>
-                </a:solidFill>
-                <a:latin typeface="Century Schoolbook"/>
+              <a:rPr sz="2280" b="0" i="0" baseline="30000">
+                <a:solidFill>
+                  <a:srgbClr val="1A1A1A"/>
+                </a:solidFill>
+                <a:latin typeface="Lexend"/>
               </a:rPr>
               <a:t>2</a:t>
             </a:r>
             <a:r>
-              <a:rPr sz="2400" b="0" i="0">
-                <a:solidFill>
-                  <a:srgbClr val="1A1A1A"/>
-                </a:solidFill>
-                <a:latin typeface="Century Schoolbook"/>
+              <a:rPr sz="2280" b="0" i="0">
+                <a:solidFill>
+                  <a:srgbClr val="1A1A1A"/>
+                </a:solidFill>
+                <a:latin typeface="Lexend"/>
               </a:rPr>
               <a:t> + 1.25 + 38</a:t>
             </a:r>
@@ -11067,38 +11485,38 @@
           <a:p>
             <a:pPr algn="l"/>
             <a:r>
-              <a:rPr sz="2400" b="1" i="0">
-                <a:solidFill>
-                  <a:srgbClr val="1A1A1A"/>
-                </a:solidFill>
-                <a:latin typeface="Century Schoolbook"/>
+              <a:rPr sz="2280" b="1" i="0">
+                <a:solidFill>
+                  <a:srgbClr val="1A1A1A"/>
+                </a:solidFill>
+                <a:latin typeface="Lexend"/>
               </a:rPr>
               <a:t>C.   </a:t>
             </a:r>
             <a:r>
-              <a:rPr sz="2400" b="0" i="0">
-                <a:solidFill>
-                  <a:srgbClr val="1A1A1A"/>
-                </a:solidFill>
-                <a:latin typeface="Century Schoolbook"/>
+              <a:rPr sz="2280" b="0" i="0">
+                <a:solidFill>
+                  <a:srgbClr val="1A1A1A"/>
+                </a:solidFill>
+                <a:latin typeface="Lexend"/>
               </a:rPr>
               <a:t>12</a:t>
             </a:r>
             <a:r>
-              <a:rPr sz="2400" b="0" i="0" baseline="30000">
-                <a:solidFill>
-                  <a:srgbClr val="1A1A1A"/>
-                </a:solidFill>
-                <a:latin typeface="Century Schoolbook"/>
+              <a:rPr sz="2280" b="0" i="0" baseline="30000">
+                <a:solidFill>
+                  <a:srgbClr val="1A1A1A"/>
+                </a:solidFill>
+                <a:latin typeface="Lexend"/>
               </a:rPr>
               <a:t>2</a:t>
             </a:r>
             <a:r>
-              <a:rPr sz="2400" b="0" i="0">
-                <a:solidFill>
-                  <a:srgbClr val="1A1A1A"/>
-                </a:solidFill>
-                <a:latin typeface="Century Schoolbook"/>
+              <a:rPr sz="2280" b="0" i="0">
+                <a:solidFill>
+                  <a:srgbClr val="1A1A1A"/>
+                </a:solidFill>
+                <a:latin typeface="Lexend"/>
               </a:rPr>
               <a:t>(1.25 + 38)</a:t>
             </a:r>
@@ -11129,38 +11547,38 @@
           <a:p>
             <a:pPr algn="l"/>
             <a:r>
-              <a:rPr sz="2400" b="1" i="0">
-                <a:solidFill>
-                  <a:srgbClr val="1A1A1A"/>
-                </a:solidFill>
-                <a:latin typeface="Century Schoolbook"/>
+              <a:rPr sz="2280" b="1" i="0">
+                <a:solidFill>
+                  <a:srgbClr val="1A1A1A"/>
+                </a:solidFill>
+                <a:latin typeface="Lexend"/>
               </a:rPr>
               <a:t>D.   </a:t>
             </a:r>
             <a:r>
-              <a:rPr sz="2400" b="0" i="0">
-                <a:solidFill>
-                  <a:srgbClr val="1A1A1A"/>
-                </a:solidFill>
-                <a:latin typeface="Century Schoolbook"/>
+              <a:rPr sz="2280" b="0" i="0">
+                <a:solidFill>
+                  <a:srgbClr val="1A1A1A"/>
+                </a:solidFill>
+                <a:latin typeface="Lexend"/>
               </a:rPr>
               <a:t>12</a:t>
             </a:r>
             <a:r>
-              <a:rPr sz="2400" b="0" i="0" baseline="30000">
-                <a:solidFill>
-                  <a:srgbClr val="1A1A1A"/>
-                </a:solidFill>
-                <a:latin typeface="Century Schoolbook"/>
+              <a:rPr sz="2280" b="0" i="0" baseline="30000">
+                <a:solidFill>
+                  <a:srgbClr val="1A1A1A"/>
+                </a:solidFill>
+                <a:latin typeface="Lexend"/>
               </a:rPr>
               <a:t>2</a:t>
             </a:r>
             <a:r>
-              <a:rPr sz="2400" b="0" i="0">
-                <a:solidFill>
-                  <a:srgbClr val="1A1A1A"/>
-                </a:solidFill>
-                <a:latin typeface="Century Schoolbook"/>
+              <a:rPr sz="2280" b="0" i="0">
+                <a:solidFill>
+                  <a:srgbClr val="1A1A1A"/>
+                </a:solidFill>
+                <a:latin typeface="Lexend"/>
               </a:rPr>
               <a:t>(1.25) + 38</a:t>
             </a:r>
@@ -11191,11 +11609,11 @@
           <a:p>
             <a:pPr algn="ctr"/>
             <a:r>
-              <a:rPr sz="2600" b="1" i="0">
-                <a:solidFill>
-                  <a:srgbClr val="1A1A1A"/>
-                </a:solidFill>
-                <a:latin typeface="Century Schoolbook"/>
+              <a:rPr sz="2470" b="1" i="0">
+                <a:solidFill>
+                  <a:srgbClr val="1A1A1A"/>
+                </a:solidFill>
+                <a:latin typeface="Lexend"/>
               </a:rPr>
               <a:t>Answer it.</a:t>
             </a:r>
@@ -11244,11 +11662,11 @@
           <a:p>
             <a:pPr algn="l"/>
             <a:r>
-              <a:rPr sz="3400" b="1" i="0">
-                <a:solidFill>
-                  <a:srgbClr val="1A1A1A"/>
-                </a:solidFill>
-                <a:latin typeface="Century Schoolbook"/>
+              <a:rPr sz="3229" b="1" i="0">
+                <a:solidFill>
+                  <a:srgbClr val="1A1A1A"/>
+                </a:solidFill>
+                <a:latin typeface="Lexend"/>
               </a:rPr>
               <a:t>Whiteboards   ·   Question 6 of 9</a:t>
             </a:r>
@@ -11384,11 +11802,11 @@
           <a:p>
             <a:pPr algn="l"/>
             <a:r>
-              <a:rPr sz="1100" b="0" i="1">
+              <a:rPr sz="1040" b="0" i="0">
                 <a:solidFill>
                   <a:srgbClr val="6B6B6B"/>
                 </a:solidFill>
-                <a:latin typeface="Century Schoolbook"/>
+                <a:latin typeface="Lexend"/>
               </a:rPr>
               <a:t>Grade 7 Accelerated · Unit 4 · Lessons 7–8 — Real-World Order of Operations</a:t>
             </a:r>
@@ -11419,11 +11837,11 @@
           <a:p>
             <a:pPr algn="r"/>
             <a:r>
-              <a:rPr sz="1100" b="0" i="0">
+              <a:rPr sz="1040" b="0" i="0">
                 <a:solidFill>
                   <a:srgbClr val="6B6B6B"/>
                 </a:solidFill>
-                <a:latin typeface="Century Schoolbook"/>
+                <a:latin typeface="Lexend"/>
               </a:rPr>
               <a:t>26</a:t>
             </a:r>
@@ -11454,11 +11872,11 @@
           <a:p>
             <a:pPr algn="ctr"/>
             <a:r>
-              <a:rPr sz="2300" b="0" i="0">
-                <a:solidFill>
-                  <a:srgbClr val="1A1A1A"/>
-                </a:solidFill>
-                <a:latin typeface="Century Schoolbook"/>
+              <a:rPr sz="2180" b="0" i="0">
+                <a:solidFill>
+                  <a:srgbClr val="1A1A1A"/>
+                </a:solidFill>
+                <a:latin typeface="Lexend"/>
               </a:rPr>
               <a:t>A square patio of side 12 feet is sealed at 1.25 dollars a square foot.</a:t>
             </a:r>
@@ -11489,11 +11907,11 @@
           <a:p>
             <a:pPr algn="ctr"/>
             <a:r>
-              <a:rPr sz="2600" b="0" i="0">
-                <a:solidFill>
-                  <a:srgbClr val="1A1A1A"/>
-                </a:solidFill>
-                <a:latin typeface="Century Schoolbook"/>
+              <a:rPr sz="2470" b="0" i="0">
+                <a:solidFill>
+                  <a:srgbClr val="1A1A1A"/>
+                </a:solidFill>
+                <a:latin typeface="Lexend"/>
               </a:rPr>
               <a:t>Delivery of the sealer is a flat 38 dollars.</a:t>
             </a:r>
@@ -11524,11 +11942,11 @@
           <a:p>
             <a:pPr algn="ctr"/>
             <a:r>
-              <a:rPr sz="2600" b="0" i="0">
-                <a:solidFill>
-                  <a:srgbClr val="1A1A1A"/>
-                </a:solidFill>
-                <a:latin typeface="Century Schoolbook"/>
+              <a:rPr sz="2470" b="0" i="0">
+                <a:solidFill>
+                  <a:srgbClr val="1A1A1A"/>
+                </a:solidFill>
+                <a:latin typeface="Lexend"/>
               </a:rPr>
               <a:t>Which expression gives the total cost?</a:t>
             </a:r>
@@ -11543,8 +11961,185 @@
         </p:nvSpPr>
         <p:spPr>
           <a:xfrm>
-            <a:off x="1874519" y="3865526"/>
-            <a:ext cx="4572000" cy="548640"/>
+            <a:off x="2107950" y="3824378"/>
+            <a:ext cx="1106384" cy="457200"/>
+          </a:xfrm>
+          <a:prstGeom prst="rect">
+            <a:avLst/>
+          </a:prstGeom>
+          <a:noFill/>
+        </p:spPr>
+        <p:txBody>
+          <a:bodyPr wrap="none" lIns="45720" rIns="45720" tIns="18288" bIns="18288" anchor="ctr">
+            <a:noAutofit/>
+          </a:bodyPr>
+          <a:lstStyle/>
+          <a:p>
+            <a:pPr algn="l"/>
+            <a:r>
+              <a:rPr sz="2330" b="0" i="0">
+                <a:solidFill>
+                  <a:srgbClr val="1A1A1A"/>
+                </a:solidFill>
+                <a:latin typeface="Lexend"/>
+              </a:rPr>
+              <a:t>Area  </a:t>
+            </a:r>
+          </a:p>
+        </p:txBody>
+      </p:sp>
+      <p:pic>
+        <p:nvPicPr>
+          <p:cNvPr id="12" name="Picture 11" descr="d6542a7823918817.png"/>
+          <p:cNvPicPr>
+            <a:picLocks noChangeAspect="1"/>
+          </p:cNvPicPr>
+          <p:nvPr/>
+        </p:nvPicPr>
+        <p:blipFill>
+          <a:blip r:embed="rId2"/>
+          <a:stretch>
+            <a:fillRect/>
+          </a:stretch>
+        </p:blipFill>
+        <p:spPr>
+          <a:xfrm>
+            <a:off x="3077174" y="3923438"/>
+            <a:ext cx="396240" cy="259080"/>
+          </a:xfrm>
+          <a:prstGeom prst="rect">
+            <a:avLst/>
+          </a:prstGeom>
+        </p:spPr>
+      </p:pic>
+      <p:sp>
+        <p:nvSpPr>
+          <p:cNvPr id="13" name="TextBox 12"/>
+          <p:cNvSpPr txBox="1"/>
+          <p:nvPr/>
+        </p:nvSpPr>
+        <p:spPr>
+          <a:xfrm>
+            <a:off x="3473414" y="3824378"/>
+            <a:ext cx="5531643" cy="457200"/>
+          </a:xfrm>
+          <a:prstGeom prst="rect">
+            <a:avLst/>
+          </a:prstGeom>
+          <a:noFill/>
+        </p:spPr>
+        <p:txBody>
+          <a:bodyPr wrap="none" lIns="45720" rIns="45720" tIns="18288" bIns="18288" anchor="ctr">
+            <a:noAutofit/>
+          </a:bodyPr>
+          <a:lstStyle/>
+          <a:p>
+            <a:pPr algn="l"/>
+            <a:r>
+              <a:rPr sz="2330" b="0" i="0">
+                <a:solidFill>
+                  <a:srgbClr val="1A1A1A"/>
+                </a:solidFill>
+                <a:latin typeface="Lexend"/>
+              </a:rPr>
+              <a:t>  square feet, at 1.25 dollars each:   </a:t>
+            </a:r>
+          </a:p>
+        </p:txBody>
+      </p:sp>
+      <p:pic>
+        <p:nvPicPr>
+          <p:cNvPr id="14" name="Picture 13" descr="6522b013c381f004.png"/>
+          <p:cNvPicPr>
+            <a:picLocks noChangeAspect="1"/>
+          </p:cNvPicPr>
+          <p:nvPr/>
+        </p:nvPicPr>
+        <p:blipFill>
+          <a:blip r:embed="rId3"/>
+          <a:stretch>
+            <a:fillRect/>
+          </a:stretch>
+        </p:blipFill>
+        <p:spPr>
+          <a:xfrm>
+            <a:off x="8867897" y="3921914"/>
+            <a:ext cx="1194816" cy="262128"/>
+          </a:xfrm>
+          <a:prstGeom prst="rect">
+            <a:avLst/>
+          </a:prstGeom>
+        </p:spPr>
+      </p:pic>
+      <p:sp>
+        <p:nvSpPr>
+          <p:cNvPr id="15" name="TextBox 14"/>
+          <p:cNvSpPr txBox="1"/>
+          <p:nvPr/>
+        </p:nvSpPr>
+        <p:spPr>
+          <a:xfrm>
+            <a:off x="2107950" y="4327298"/>
+            <a:ext cx="4846687" cy="457200"/>
+          </a:xfrm>
+          <a:prstGeom prst="rect">
+            <a:avLst/>
+          </a:prstGeom>
+          <a:noFill/>
+        </p:spPr>
+        <p:txBody>
+          <a:bodyPr wrap="none" lIns="45720" rIns="45720" tIns="18288" bIns="18288" anchor="ctr">
+            <a:noAutofit/>
+          </a:bodyPr>
+          <a:lstStyle/>
+          <a:p>
+            <a:pPr algn="l"/>
+            <a:r>
+              <a:rPr sz="2330" b="0" i="0">
+                <a:solidFill>
+                  <a:srgbClr val="1A1A1A"/>
+                </a:solidFill>
+                <a:latin typeface="Lexend"/>
+              </a:rPr>
+              <a:t>The 38 dollars is added once:   </a:t>
+            </a:r>
+          </a:p>
+        </p:txBody>
+      </p:sp>
+      <p:pic>
+        <p:nvPicPr>
+          <p:cNvPr id="16" name="Picture 15" descr="107f56fc6415d276.png"/>
+          <p:cNvPicPr>
+            <a:picLocks noChangeAspect="1"/>
+          </p:cNvPicPr>
+          <p:nvPr/>
+        </p:nvPicPr>
+        <p:blipFill>
+          <a:blip r:embed="rId4"/>
+          <a:stretch>
+            <a:fillRect/>
+          </a:stretch>
+        </p:blipFill>
+        <p:spPr>
+          <a:xfrm>
+            <a:off x="6817478" y="4424834"/>
+            <a:ext cx="2560320" cy="262128"/>
+          </a:xfrm>
+          <a:prstGeom prst="rect">
+            <a:avLst/>
+          </a:prstGeom>
+        </p:spPr>
+      </p:pic>
+      <p:sp>
+        <p:nvSpPr>
+          <p:cNvPr id="17" name="TextBox 16"/>
+          <p:cNvSpPr txBox="1"/>
+          <p:nvPr/>
+        </p:nvSpPr>
+        <p:spPr>
+          <a:xfrm>
+            <a:off x="777240" y="4898798"/>
+            <a:ext cx="10607040" cy="548640"/>
           </a:xfrm>
           <a:prstGeom prst="rect">
             <a:avLst/>
@@ -11557,261 +12152,31 @@
           </a:bodyPr>
           <a:lstStyle/>
           <a:p>
-            <a:pPr algn="l"/>
-            <a:r>
-              <a:rPr sz="2400" b="1" i="0">
-                <a:solidFill>
-                  <a:srgbClr val="1A1A1A"/>
-                </a:solidFill>
-                <a:latin typeface="Century Schoolbook"/>
-              </a:rPr>
-              <a:t>A.   </a:t>
-            </a:r>
-            <a:r>
-              <a:rPr sz="2400" b="0" i="0">
-                <a:solidFill>
-                  <a:srgbClr val="1A1A1A"/>
-                </a:solidFill>
-                <a:latin typeface="Century Schoolbook"/>
-              </a:rPr>
-              <a:t>12(1.25) + 38</a:t>
-            </a:r>
-          </a:p>
-        </p:txBody>
-      </p:sp>
-      <p:sp>
-        <p:nvSpPr>
-          <p:cNvPr id="12" name="TextBox 11"/>
-          <p:cNvSpPr txBox="1"/>
-          <p:nvPr/>
-        </p:nvSpPr>
-        <p:spPr>
-          <a:xfrm>
-            <a:off x="6629400" y="3865526"/>
-            <a:ext cx="4572000" cy="548640"/>
-          </a:xfrm>
-          <a:prstGeom prst="rect">
-            <a:avLst/>
-          </a:prstGeom>
-          <a:noFill/>
-        </p:spPr>
-        <p:txBody>
-          <a:bodyPr wrap="square" lIns="45720" rIns="45720" tIns="18288" bIns="18288" anchor="t">
-            <a:spAutoFit/>
-          </a:bodyPr>
-          <a:lstStyle/>
-          <a:p>
-            <a:pPr algn="l"/>
-            <a:r>
-              <a:rPr sz="2400" b="1" i="0">
-                <a:solidFill>
-                  <a:srgbClr val="1A1A1A"/>
-                </a:solidFill>
-                <a:latin typeface="Century Schoolbook"/>
-              </a:rPr>
-              <a:t>B.   </a:t>
-            </a:r>
-            <a:r>
-              <a:rPr sz="2400" b="0" i="0">
-                <a:solidFill>
-                  <a:srgbClr val="1A1A1A"/>
-                </a:solidFill>
-                <a:latin typeface="Century Schoolbook"/>
-              </a:rPr>
-              <a:t>12</a:t>
-            </a:r>
-            <a:r>
-              <a:rPr sz="2400" b="0" i="0" baseline="30000">
-                <a:solidFill>
-                  <a:srgbClr val="1A1A1A"/>
-                </a:solidFill>
-                <a:latin typeface="Century Schoolbook"/>
+            <a:pPr algn="ctr"/>
+            <a:r>
+              <a:rPr sz="3040" b="1" i="0">
+                <a:solidFill>
+                  <a:srgbClr val="9E1B32"/>
+                </a:solidFill>
+                <a:latin typeface="Lexend"/>
+              </a:rPr>
+              <a:t>Answer:   D — 12</a:t>
+            </a:r>
+            <a:r>
+              <a:rPr sz="3040" b="1" i="0" baseline="30000">
+                <a:solidFill>
+                  <a:srgbClr val="9E1B32"/>
+                </a:solidFill>
+                <a:latin typeface="Lexend"/>
               </a:rPr>
               <a:t>2</a:t>
             </a:r>
             <a:r>
-              <a:rPr sz="2400" b="0" i="0">
-                <a:solidFill>
-                  <a:srgbClr val="1A1A1A"/>
-                </a:solidFill>
-                <a:latin typeface="Century Schoolbook"/>
-              </a:rPr>
-              <a:t> + 1.25 + 38</a:t>
-            </a:r>
-          </a:p>
-        </p:txBody>
-      </p:sp>
-      <p:sp>
-        <p:nvSpPr>
-          <p:cNvPr id="13" name="TextBox 12"/>
-          <p:cNvSpPr txBox="1"/>
-          <p:nvPr/>
-        </p:nvSpPr>
-        <p:spPr>
-          <a:xfrm>
-            <a:off x="1874519" y="4551326"/>
-            <a:ext cx="4572000" cy="548640"/>
-          </a:xfrm>
-          <a:prstGeom prst="rect">
-            <a:avLst/>
-          </a:prstGeom>
-          <a:noFill/>
-        </p:spPr>
-        <p:txBody>
-          <a:bodyPr wrap="square" lIns="45720" rIns="45720" tIns="18288" bIns="18288" anchor="t">
-            <a:spAutoFit/>
-          </a:bodyPr>
-          <a:lstStyle/>
-          <a:p>
-            <a:pPr algn="l"/>
-            <a:r>
-              <a:rPr sz="2400" b="1" i="0">
-                <a:solidFill>
-                  <a:srgbClr val="1A1A1A"/>
-                </a:solidFill>
-                <a:latin typeface="Century Schoolbook"/>
-              </a:rPr>
-              <a:t>C.   </a:t>
-            </a:r>
-            <a:r>
-              <a:rPr sz="2400" b="0" i="0">
-                <a:solidFill>
-                  <a:srgbClr val="1A1A1A"/>
-                </a:solidFill>
-                <a:latin typeface="Century Schoolbook"/>
-              </a:rPr>
-              <a:t>12</a:t>
-            </a:r>
-            <a:r>
-              <a:rPr sz="2400" b="0" i="0" baseline="30000">
-                <a:solidFill>
-                  <a:srgbClr val="1A1A1A"/>
-                </a:solidFill>
-                <a:latin typeface="Century Schoolbook"/>
-              </a:rPr>
-              <a:t>2</a:t>
-            </a:r>
-            <a:r>
-              <a:rPr sz="2400" b="0" i="0">
-                <a:solidFill>
-                  <a:srgbClr val="1A1A1A"/>
-                </a:solidFill>
-                <a:latin typeface="Century Schoolbook"/>
-              </a:rPr>
-              <a:t>(1.25 + 38)</a:t>
-            </a:r>
-          </a:p>
-        </p:txBody>
-      </p:sp>
-      <p:sp>
-        <p:nvSpPr>
-          <p:cNvPr id="14" name="TextBox 13"/>
-          <p:cNvSpPr txBox="1"/>
-          <p:nvPr/>
-        </p:nvSpPr>
-        <p:spPr>
-          <a:xfrm>
-            <a:off x="6629400" y="4551326"/>
-            <a:ext cx="4572000" cy="548640"/>
-          </a:xfrm>
-          <a:prstGeom prst="rect">
-            <a:avLst/>
-          </a:prstGeom>
-          <a:noFill/>
-        </p:spPr>
-        <p:txBody>
-          <a:bodyPr wrap="square" lIns="45720" rIns="45720" tIns="18288" bIns="18288" anchor="t">
-            <a:spAutoFit/>
-          </a:bodyPr>
-          <a:lstStyle/>
-          <a:p>
-            <a:pPr algn="l"/>
-            <a:r>
-              <a:rPr sz="2400" b="1" i="0">
+              <a:rPr sz="3040" b="1" i="0">
                 <a:solidFill>
                   <a:srgbClr val="9E1B32"/>
                 </a:solidFill>
-                <a:latin typeface="Century Schoolbook"/>
-              </a:rPr>
-              <a:t>D.   </a:t>
-            </a:r>
-            <a:r>
-              <a:rPr sz="2400" b="1" i="0">
-                <a:solidFill>
-                  <a:srgbClr val="9E1B32"/>
-                </a:solidFill>
-                <a:latin typeface="Century Schoolbook"/>
-              </a:rPr>
-              <a:t>12</a:t>
-            </a:r>
-            <a:r>
-              <a:rPr sz="2400" b="1" i="0" baseline="30000">
-                <a:solidFill>
-                  <a:srgbClr val="9E1B32"/>
-                </a:solidFill>
-                <a:latin typeface="Century Schoolbook"/>
-              </a:rPr>
-              <a:t>2</a:t>
-            </a:r>
-            <a:r>
-              <a:rPr sz="2400" b="1" i="0">
-                <a:solidFill>
-                  <a:srgbClr val="9E1B32"/>
-                </a:solidFill>
-                <a:latin typeface="Century Schoolbook"/>
-              </a:rPr>
-              <a:t>(1.25) + 38</a:t>
-            </a:r>
-          </a:p>
-        </p:txBody>
-      </p:sp>
-      <p:sp>
-        <p:nvSpPr>
-          <p:cNvPr id="15" name="TextBox 14"/>
-          <p:cNvSpPr txBox="1"/>
-          <p:nvPr/>
-        </p:nvSpPr>
-        <p:spPr>
-          <a:xfrm>
-            <a:off x="777240" y="5557166"/>
-            <a:ext cx="10607040" cy="548640"/>
-          </a:xfrm>
-          <a:prstGeom prst="rect">
-            <a:avLst/>
-          </a:prstGeom>
-          <a:noFill/>
-        </p:spPr>
-        <p:txBody>
-          <a:bodyPr wrap="square" lIns="45720" rIns="45720" tIns="18288" bIns="18288" anchor="t">
-            <a:spAutoFit/>
-          </a:bodyPr>
-          <a:lstStyle/>
-          <a:p>
-            <a:pPr algn="ctr"/>
-            <a:r>
-              <a:rPr sz="3200" b="1" i="0">
-                <a:solidFill>
-                  <a:srgbClr val="9E1B32"/>
-                </a:solidFill>
-                <a:latin typeface="Century Schoolbook"/>
-              </a:rPr>
-              <a:t>Answer:   D — 12</a:t>
-            </a:r>
-            <a:r>
-              <a:rPr sz="3200" b="1" i="0" baseline="30000">
-                <a:solidFill>
-                  <a:srgbClr val="9E1B32"/>
-                </a:solidFill>
-                <a:latin typeface="Century Schoolbook"/>
-              </a:rPr>
-              <a:t>2</a:t>
-            </a:r>
-            <a:r>
-              <a:rPr sz="3200" b="1" i="0">
-                <a:solidFill>
-                  <a:srgbClr val="9E1B32"/>
-                </a:solidFill>
-                <a:latin typeface="Century Schoolbook"/>
+                <a:latin typeface="Lexend"/>
               </a:rPr>
               <a:t>(1.25) + 38</a:t>
             </a:r>
@@ -11860,11 +12225,11 @@
           <a:p>
             <a:pPr algn="l"/>
             <a:r>
-              <a:rPr sz="3400" b="1" i="0">
-                <a:solidFill>
-                  <a:srgbClr val="1A1A1A"/>
-                </a:solidFill>
-                <a:latin typeface="Century Schoolbook"/>
+              <a:rPr sz="3229" b="1" i="0">
+                <a:solidFill>
+                  <a:srgbClr val="1A1A1A"/>
+                </a:solidFill>
+                <a:latin typeface="Lexend"/>
               </a:rPr>
               <a:t>Whiteboards   ·   Question 7 of 9</a:t>
             </a:r>
@@ -12000,11 +12365,11 @@
           <a:p>
             <a:pPr algn="l"/>
             <a:r>
-              <a:rPr sz="1100" b="0" i="1">
+              <a:rPr sz="1040" b="0" i="0">
                 <a:solidFill>
                   <a:srgbClr val="6B6B6B"/>
                 </a:solidFill>
-                <a:latin typeface="Century Schoolbook"/>
+                <a:latin typeface="Lexend"/>
               </a:rPr>
               <a:t>Grade 7 Accelerated · Unit 4 · Lessons 7–8 — Real-World Order of Operations</a:t>
             </a:r>
@@ -12035,11 +12400,11 @@
           <a:p>
             <a:pPr algn="r"/>
             <a:r>
-              <a:rPr sz="1100" b="0" i="0">
+              <a:rPr sz="1040" b="0" i="0">
                 <a:solidFill>
                   <a:srgbClr val="6B6B6B"/>
                 </a:solidFill>
-                <a:latin typeface="Century Schoolbook"/>
+                <a:latin typeface="Lexend"/>
               </a:rPr>
               <a:t>27</a:t>
             </a:r>
@@ -12054,8 +12419,8 @@
         </p:nvSpPr>
         <p:spPr>
           <a:xfrm>
-            <a:off x="1986309" y="2217420"/>
-            <a:ext cx="5538161" cy="457200"/>
+            <a:off x="1941720" y="2205228"/>
+            <a:ext cx="5549977" cy="457200"/>
           </a:xfrm>
           <a:prstGeom prst="rect">
             <a:avLst/>
@@ -12070,11 +12435,11 @@
           <a:p>
             <a:pPr algn="l"/>
             <a:r>
-              <a:rPr sz="2600" b="0" i="0">
-                <a:solidFill>
-                  <a:srgbClr val="1A1A1A"/>
-                </a:solidFill>
-                <a:latin typeface="Century Schoolbook"/>
+              <a:rPr sz="2470" b="0" i="0">
+                <a:solidFill>
+                  <a:srgbClr val="1A1A1A"/>
+                </a:solidFill>
+                <a:latin typeface="Lexend"/>
               </a:rPr>
               <a:t>A fence runs along 6 sides, each  </a:t>
             </a:r>
@@ -12083,7 +12448,7 @@
       </p:sp>
       <p:pic>
         <p:nvPicPr>
-          <p:cNvPr id="9" name="Picture 8" descr="68e9635cc791ae9a.png"/>
+          <p:cNvPr id="9" name="Picture 8" descr="750d442da50ecc56.png"/>
           <p:cNvPicPr>
             <a:picLocks noChangeAspect="1"/>
           </p:cNvPicPr>
@@ -12097,8 +12462,8 @@
         </p:blipFill>
         <p:spPr>
           <a:xfrm>
-            <a:off x="7387310" y="2194560"/>
-            <a:ext cx="1051560" cy="502920"/>
+            <a:off x="7354538" y="2194560"/>
+            <a:ext cx="1097280" cy="478536"/>
           </a:xfrm>
           <a:prstGeom prst="rect">
             <a:avLst/>
@@ -12113,8 +12478,8 @@
         </p:nvSpPr>
         <p:spPr>
           <a:xfrm>
-            <a:off x="8438870" y="2217420"/>
-            <a:ext cx="1873500" cy="457200"/>
+            <a:off x="8451818" y="2205228"/>
+            <a:ext cx="1905140" cy="457200"/>
           </a:xfrm>
           <a:prstGeom prst="rect">
             <a:avLst/>
@@ -12129,11 +12494,11 @@
           <a:p>
             <a:pPr algn="l"/>
             <a:r>
-              <a:rPr sz="2600" b="0" i="0">
-                <a:solidFill>
-                  <a:srgbClr val="1A1A1A"/>
-                </a:solidFill>
-                <a:latin typeface="Century Schoolbook"/>
+              <a:rPr sz="2470" b="0" i="0">
+                <a:solidFill>
+                  <a:srgbClr val="1A1A1A"/>
+                </a:solidFill>
+                <a:latin typeface="Lexend"/>
               </a:rPr>
               <a:t>  feet long.</a:t>
             </a:r>
@@ -12148,7 +12513,7 @@
         </p:nvSpPr>
         <p:spPr>
           <a:xfrm>
-            <a:off x="777240" y="2971800"/>
+            <a:off x="777240" y="2947416"/>
             <a:ext cx="10607040" cy="465151"/>
           </a:xfrm>
           <a:prstGeom prst="rect">
@@ -12164,11 +12529,11 @@
           <a:p>
             <a:pPr algn="ctr"/>
             <a:r>
-              <a:rPr sz="2600" b="0" i="0">
-                <a:solidFill>
-                  <a:srgbClr val="1A1A1A"/>
-                </a:solidFill>
-                <a:latin typeface="Century Schoolbook"/>
+              <a:rPr sz="2470" b="0" i="0">
+                <a:solidFill>
+                  <a:srgbClr val="1A1A1A"/>
+                </a:solidFill>
+                <a:latin typeface="Lexend"/>
               </a:rPr>
               <a:t>Find its total length, to the nearest hundredth of a foot.</a:t>
             </a:r>
@@ -12199,11 +12564,11 @@
           <a:p>
             <a:pPr algn="ctr"/>
             <a:r>
-              <a:rPr sz="2600" b="1" i="0">
-                <a:solidFill>
-                  <a:srgbClr val="1A1A1A"/>
-                </a:solidFill>
-                <a:latin typeface="Century Schoolbook"/>
+              <a:rPr sz="2470" b="1" i="0">
+                <a:solidFill>
+                  <a:srgbClr val="1A1A1A"/>
+                </a:solidFill>
+                <a:latin typeface="Lexend"/>
               </a:rPr>
               <a:t>Answer it.</a:t>
             </a:r>
@@ -12252,11 +12617,11 @@
           <a:p>
             <a:pPr algn="l"/>
             <a:r>
-              <a:rPr sz="3400" b="1" i="0">
-                <a:solidFill>
-                  <a:srgbClr val="1A1A1A"/>
-                </a:solidFill>
-                <a:latin typeface="Century Schoolbook"/>
+              <a:rPr sz="3229" b="1" i="0">
+                <a:solidFill>
+                  <a:srgbClr val="1A1A1A"/>
+                </a:solidFill>
+                <a:latin typeface="Lexend"/>
               </a:rPr>
               <a:t>Whiteboards   ·   Question 7 of 9</a:t>
             </a:r>
@@ -12392,11 +12757,11 @@
           <a:p>
             <a:pPr algn="l"/>
             <a:r>
-              <a:rPr sz="1100" b="0" i="1">
+              <a:rPr sz="1040" b="0" i="0">
                 <a:solidFill>
                   <a:srgbClr val="6B6B6B"/>
                 </a:solidFill>
-                <a:latin typeface="Century Schoolbook"/>
+                <a:latin typeface="Lexend"/>
               </a:rPr>
               <a:t>Grade 7 Accelerated · Unit 4 · Lessons 7–8 — Real-World Order of Operations</a:t>
             </a:r>
@@ -12427,11 +12792,11 @@
           <a:p>
             <a:pPr algn="r"/>
             <a:r>
-              <a:rPr sz="1100" b="0" i="0">
+              <a:rPr sz="1040" b="0" i="0">
                 <a:solidFill>
                   <a:srgbClr val="6B6B6B"/>
                 </a:solidFill>
-                <a:latin typeface="Century Schoolbook"/>
+                <a:latin typeface="Lexend"/>
               </a:rPr>
               <a:t>28</a:t>
             </a:r>
@@ -12446,8 +12811,8 @@
         </p:nvSpPr>
         <p:spPr>
           <a:xfrm>
-            <a:off x="1990881" y="2125979"/>
-            <a:ext cx="5538161" cy="457200"/>
+            <a:off x="1944768" y="2113788"/>
+            <a:ext cx="5549977" cy="457200"/>
           </a:xfrm>
           <a:prstGeom prst="rect">
             <a:avLst/>
@@ -12462,11 +12827,11 @@
           <a:p>
             <a:pPr algn="l"/>
             <a:r>
-              <a:rPr sz="2600" b="0" i="0">
-                <a:solidFill>
-                  <a:srgbClr val="1A1A1A"/>
-                </a:solidFill>
-                <a:latin typeface="Century Schoolbook"/>
+              <a:rPr sz="2470" b="0" i="0">
+                <a:solidFill>
+                  <a:srgbClr val="1A1A1A"/>
+                </a:solidFill>
+                <a:latin typeface="Lexend"/>
               </a:rPr>
               <a:t>A fence runs along 6 sides, each  </a:t>
             </a:r>
@@ -12475,7 +12840,7 @@
       </p:sp>
       <p:pic>
         <p:nvPicPr>
-          <p:cNvPr id="9" name="Picture 8" descr="12e2a7d6e43363b4.png"/>
+          <p:cNvPr id="9" name="Picture 8" descr="9fb9dd87cc4e7fee.png"/>
           <p:cNvPicPr>
             <a:picLocks noChangeAspect="1"/>
           </p:cNvPicPr>
@@ -12489,8 +12854,8 @@
         </p:blipFill>
         <p:spPr>
           <a:xfrm>
-            <a:off x="7391882" y="2103120"/>
-            <a:ext cx="1042415" cy="502920"/>
+            <a:off x="7357586" y="2103120"/>
+            <a:ext cx="1091184" cy="478536"/>
           </a:xfrm>
           <a:prstGeom prst="rect">
             <a:avLst/>
@@ -12505,8 +12870,8 @@
         </p:nvSpPr>
         <p:spPr>
           <a:xfrm>
-            <a:off x="8434298" y="2125979"/>
-            <a:ext cx="1873500" cy="457200"/>
+            <a:off x="8448770" y="2113788"/>
+            <a:ext cx="1905140" cy="457200"/>
           </a:xfrm>
           <a:prstGeom prst="rect">
             <a:avLst/>
@@ -12521,11 +12886,11 @@
           <a:p>
             <a:pPr algn="l"/>
             <a:r>
-              <a:rPr sz="2600" b="0" i="0">
-                <a:solidFill>
-                  <a:srgbClr val="1A1A1A"/>
-                </a:solidFill>
-                <a:latin typeface="Century Schoolbook"/>
+              <a:rPr sz="2470" b="0" i="0">
+                <a:solidFill>
+                  <a:srgbClr val="1A1A1A"/>
+                </a:solidFill>
+                <a:latin typeface="Lexend"/>
               </a:rPr>
               <a:t>  feet long.</a:t>
             </a:r>
@@ -12540,7 +12905,7 @@
         </p:nvSpPr>
         <p:spPr>
           <a:xfrm>
-            <a:off x="777240" y="2880359"/>
+            <a:off x="777240" y="2855975"/>
             <a:ext cx="10607040" cy="465151"/>
           </a:xfrm>
           <a:prstGeom prst="rect">
@@ -12556,20 +12921,68 @@
           <a:p>
             <a:pPr algn="ctr"/>
             <a:r>
-              <a:rPr sz="2600" b="0" i="0">
-                <a:solidFill>
-                  <a:srgbClr val="1A1A1A"/>
-                </a:solidFill>
-                <a:latin typeface="Century Schoolbook"/>
+              <a:rPr sz="2470" b="0" i="0">
+                <a:solidFill>
+                  <a:srgbClr val="1A1A1A"/>
+                </a:solidFill>
+                <a:latin typeface="Lexend"/>
               </a:rPr>
               <a:t>Find its total length, to the nearest hundredth of a foot.</a:t>
             </a:r>
           </a:p>
         </p:txBody>
       </p:sp>
-      <p:sp>
-        <p:nvSpPr>
-          <p:cNvPr id="12" name="TextBox 11"/>
+      <p:pic>
+        <p:nvPicPr>
+          <p:cNvPr id="12" name="Picture 11" descr="53d1d92fd3181f11.png"/>
+          <p:cNvPicPr>
+            <a:picLocks noChangeAspect="1"/>
+          </p:cNvPicPr>
+          <p:nvPr/>
+        </p:nvPicPr>
+        <p:blipFill>
+          <a:blip r:embed="rId3"/>
+          <a:stretch>
+            <a:fillRect/>
+          </a:stretch>
+        </p:blipFill>
+        <p:spPr>
+          <a:xfrm>
+            <a:off x="4678680" y="3504007"/>
+            <a:ext cx="2526792" cy="432816"/>
+          </a:xfrm>
+          <a:prstGeom prst="rect">
+            <a:avLst/>
+          </a:prstGeom>
+        </p:spPr>
+      </p:pic>
+      <p:pic>
+        <p:nvPicPr>
+          <p:cNvPr id="13" name="Picture 12" descr="61dd79c9e3470dae.png"/>
+          <p:cNvPicPr>
+            <a:picLocks noChangeAspect="1"/>
+          </p:cNvPicPr>
+          <p:nvPr/>
+        </p:nvPicPr>
+        <p:blipFill>
+          <a:blip r:embed="rId4"/>
+          <a:stretch>
+            <a:fillRect/>
+          </a:stretch>
+        </p:blipFill>
+        <p:spPr>
+          <a:xfrm>
+            <a:off x="4678680" y="4142563"/>
+            <a:ext cx="2913888" cy="256032"/>
+          </a:xfrm>
+          <a:prstGeom prst="rect">
+            <a:avLst/>
+          </a:prstGeom>
+        </p:spPr>
+      </p:pic>
+      <p:sp>
+        <p:nvSpPr>
+          <p:cNvPr id="14" name="TextBox 13"/>
           <p:cNvSpPr txBox="1"/>
           <p:nvPr/>
         </p:nvSpPr>
@@ -12591,11 +13004,11 @@
           <a:p>
             <a:pPr algn="ctr"/>
             <a:r>
-              <a:rPr sz="3200" b="1" i="0">
+              <a:rPr sz="3040" b="1" i="0">
                 <a:solidFill>
                   <a:srgbClr val="9E1B32"/>
                 </a:solidFill>
-                <a:latin typeface="Century Schoolbook"/>
+                <a:latin typeface="Lexend"/>
               </a:rPr>
               <a:t>Answer:   84.85 feet</a:t>
             </a:r>
@@ -12644,11 +13057,11 @@
           <a:p>
             <a:pPr algn="l"/>
             <a:r>
-              <a:rPr sz="3400" b="1" i="0">
-                <a:solidFill>
-                  <a:srgbClr val="1A1A1A"/>
-                </a:solidFill>
-                <a:latin typeface="Century Schoolbook"/>
+              <a:rPr sz="3229" b="1" i="0">
+                <a:solidFill>
+                  <a:srgbClr val="1A1A1A"/>
+                </a:solidFill>
+                <a:latin typeface="Lexend"/>
               </a:rPr>
               <a:t>Whiteboards   ·   Question 8 of 9</a:t>
             </a:r>
@@ -12784,11 +13197,11 @@
           <a:p>
             <a:pPr algn="l"/>
             <a:r>
-              <a:rPr sz="1100" b="0" i="1">
+              <a:rPr sz="1040" b="0" i="0">
                 <a:solidFill>
                   <a:srgbClr val="6B6B6B"/>
                 </a:solidFill>
-                <a:latin typeface="Century Schoolbook"/>
+                <a:latin typeface="Lexend"/>
               </a:rPr>
               <a:t>Grade 7 Accelerated · Unit 4 · Lessons 7–8 — Real-World Order of Operations</a:t>
             </a:r>
@@ -12819,11 +13232,11 @@
           <a:p>
             <a:pPr algn="r"/>
             <a:r>
-              <a:rPr sz="1100" b="0" i="0">
+              <a:rPr sz="1040" b="0" i="0">
                 <a:solidFill>
                   <a:srgbClr val="6B6B6B"/>
                 </a:solidFill>
-                <a:latin typeface="Century Schoolbook"/>
+                <a:latin typeface="Lexend"/>
               </a:rPr>
               <a:t>29</a:t>
             </a:r>
@@ -12838,8 +13251,8 @@
         </p:nvSpPr>
         <p:spPr>
           <a:xfrm>
-            <a:off x="2450603" y="2293620"/>
-            <a:ext cx="1864823" cy="457200"/>
+            <a:off x="2485509" y="2301240"/>
+            <a:ext cx="1806076" cy="457200"/>
           </a:xfrm>
           <a:prstGeom prst="rect">
             <a:avLst/>
@@ -12854,11 +13267,11 @@
           <a:p>
             <a:pPr algn="l"/>
             <a:r>
-              <a:rPr sz="2600" b="0" i="0">
-                <a:solidFill>
-                  <a:srgbClr val="1A1A1A"/>
-                </a:solidFill>
-                <a:latin typeface="Century Schoolbook"/>
+              <a:rPr sz="2470" b="0" i="0">
+                <a:solidFill>
+                  <a:srgbClr val="1A1A1A"/>
+                </a:solidFill>
+                <a:latin typeface="Lexend"/>
               </a:rPr>
               <a:t>Evaluate  </a:t>
             </a:r>
@@ -12867,7 +13280,7 @@
       </p:sp>
       <p:pic>
         <p:nvPicPr>
-          <p:cNvPr id="9" name="Picture 8" descr="63c59621754cfcaf.png"/>
+          <p:cNvPr id="9" name="Picture 8" descr="d07fc0815ebc50d7.png"/>
           <p:cNvPicPr>
             <a:picLocks noChangeAspect="1"/>
           </p:cNvPicPr>
@@ -12881,8 +13294,8 @@
         </p:blipFill>
         <p:spPr>
           <a:xfrm>
-            <a:off x="4178266" y="2194560"/>
-            <a:ext cx="993648" cy="655320"/>
+            <a:off x="4154426" y="2194560"/>
+            <a:ext cx="1033271" cy="670560"/>
           </a:xfrm>
           <a:prstGeom prst="rect">
             <a:avLst/>
@@ -12897,8 +13310,8 @@
         </p:nvSpPr>
         <p:spPr>
           <a:xfrm>
-            <a:off x="5171914" y="2293620"/>
-            <a:ext cx="1474477" cy="457200"/>
+            <a:off x="5187698" y="2301240"/>
+            <a:ext cx="1439295" cy="457200"/>
           </a:xfrm>
           <a:prstGeom prst="rect">
             <a:avLst/>
@@ -12913,11 +13326,11 @@
           <a:p>
             <a:pPr algn="l"/>
             <a:r>
-              <a:rPr sz="2600" b="0" i="0">
-                <a:solidFill>
-                  <a:srgbClr val="1A1A1A"/>
-                </a:solidFill>
-                <a:latin typeface="Century Schoolbook"/>
+              <a:rPr sz="2470" b="0" i="0">
+                <a:solidFill>
+                  <a:srgbClr val="1A1A1A"/>
+                </a:solidFill>
+                <a:latin typeface="Lexend"/>
               </a:rPr>
               <a:t>  when  </a:t>
             </a:r>
@@ -12926,7 +13339,7 @@
       </p:sp>
       <p:pic>
         <p:nvPicPr>
-          <p:cNvPr id="11" name="Picture 10" descr="0fd02e8179cc96ef.png"/>
+          <p:cNvPr id="11" name="Picture 10" descr="b10d32bef8baa228.png"/>
           <p:cNvPicPr>
             <a:picLocks noChangeAspect="1"/>
           </p:cNvPicPr>
@@ -12940,8 +13353,8 @@
         </p:blipFill>
         <p:spPr>
           <a:xfrm>
-            <a:off x="6509232" y="2386584"/>
-            <a:ext cx="774192" cy="271272"/>
+            <a:off x="6489833" y="2392680"/>
+            <a:ext cx="789432" cy="274320"/>
           </a:xfrm>
           <a:prstGeom prst="rect">
             <a:avLst/>
@@ -12956,8 +13369,8 @@
         </p:nvSpPr>
         <p:spPr>
           <a:xfrm>
-            <a:off x="7283424" y="2293620"/>
-            <a:ext cx="502163" cy="457200"/>
+            <a:off x="7279265" y="2301240"/>
+            <a:ext cx="485323" cy="457200"/>
           </a:xfrm>
           <a:prstGeom prst="rect">
             <a:avLst/>
@@ -12972,11 +13385,11 @@
           <a:p>
             <a:pPr algn="l"/>
             <a:r>
-              <a:rPr sz="2600" b="0" i="0">
-                <a:solidFill>
-                  <a:srgbClr val="1A1A1A"/>
-                </a:solidFill>
-                <a:latin typeface="Century Schoolbook"/>
+              <a:rPr sz="2470" b="0" i="0">
+                <a:solidFill>
+                  <a:srgbClr val="1A1A1A"/>
+                </a:solidFill>
+                <a:latin typeface="Lexend"/>
               </a:rPr>
               <a:t>,  </a:t>
             </a:r>
@@ -12985,7 +13398,7 @@
       </p:sp>
       <p:pic>
         <p:nvPicPr>
-          <p:cNvPr id="13" name="Picture 12" descr="90e8bcce6a738962.png"/>
+          <p:cNvPr id="13" name="Picture 12" descr="f4a366969adde496.png"/>
           <p:cNvPicPr>
             <a:picLocks noChangeAspect="1"/>
           </p:cNvPicPr>
@@ -12999,8 +13412,8 @@
         </p:blipFill>
         <p:spPr>
           <a:xfrm>
-            <a:off x="7648428" y="2380487"/>
-            <a:ext cx="783336" cy="283464"/>
+            <a:off x="7627429" y="2385060"/>
+            <a:ext cx="801624" cy="289560"/>
           </a:xfrm>
           <a:prstGeom prst="rect">
             <a:avLst/>
@@ -13015,8 +13428,8 @@
         </p:nvSpPr>
         <p:spPr>
           <a:xfrm>
-            <a:off x="8431764" y="2293620"/>
-            <a:ext cx="502163" cy="457200"/>
+            <a:off x="8429053" y="2301240"/>
+            <a:ext cx="485323" cy="457200"/>
           </a:xfrm>
           <a:prstGeom prst="rect">
             <a:avLst/>
@@ -13031,11 +13444,11 @@
           <a:p>
             <a:pPr algn="l"/>
             <a:r>
-              <a:rPr sz="2600" b="0" i="0">
-                <a:solidFill>
-                  <a:srgbClr val="1A1A1A"/>
-                </a:solidFill>
-                <a:latin typeface="Century Schoolbook"/>
+              <a:rPr sz="2470" b="0" i="0">
+                <a:solidFill>
+                  <a:srgbClr val="1A1A1A"/>
+                </a:solidFill>
+                <a:latin typeface="Lexend"/>
               </a:rPr>
               <a:t>,  </a:t>
             </a:r>
@@ -13044,7 +13457,7 @@
       </p:sp>
       <p:pic>
         <p:nvPicPr>
-          <p:cNvPr id="15" name="Picture 14" descr="07fcb1bbd55c697d.png"/>
+          <p:cNvPr id="15" name="Picture 14" descr="43fbcf2c2a45ea2c.png"/>
           <p:cNvPicPr>
             <a:picLocks noChangeAspect="1"/>
           </p:cNvPicPr>
@@ -13058,8 +13471,8 @@
         </p:blipFill>
         <p:spPr>
           <a:xfrm>
-            <a:off x="8796768" y="2380487"/>
-            <a:ext cx="743712" cy="283464"/>
+            <a:off x="8777216" y="2392680"/>
+            <a:ext cx="749808" cy="274320"/>
           </a:xfrm>
           <a:prstGeom prst="rect">
             <a:avLst/>
@@ -13074,8 +13487,8 @@
         </p:nvSpPr>
         <p:spPr>
           <a:xfrm>
-            <a:off x="9540480" y="2293620"/>
-            <a:ext cx="307595" cy="457200"/>
+            <a:off x="9527024" y="2301240"/>
+            <a:ext cx="286146" cy="457200"/>
           </a:xfrm>
           <a:prstGeom prst="rect">
             <a:avLst/>
@@ -13090,11 +13503,11 @@
           <a:p>
             <a:pPr algn="l"/>
             <a:r>
-              <a:rPr sz="2600" b="0" i="0">
-                <a:solidFill>
-                  <a:srgbClr val="1A1A1A"/>
-                </a:solidFill>
-                <a:latin typeface="Century Schoolbook"/>
+              <a:rPr sz="2470" b="0" i="0">
+                <a:solidFill>
+                  <a:srgbClr val="1A1A1A"/>
+                </a:solidFill>
+                <a:latin typeface="Lexend"/>
               </a:rPr>
               <a:t>.</a:t>
             </a:r>
@@ -13125,11 +13538,11 @@
           <a:p>
             <a:pPr algn="ctr"/>
             <a:r>
-              <a:rPr sz="2600" b="1" i="0">
-                <a:solidFill>
-                  <a:srgbClr val="1A1A1A"/>
-                </a:solidFill>
-                <a:latin typeface="Century Schoolbook"/>
+              <a:rPr sz="2470" b="1" i="0">
+                <a:solidFill>
+                  <a:srgbClr val="1A1A1A"/>
+                </a:solidFill>
+                <a:latin typeface="Lexend"/>
               </a:rPr>
               <a:t>Answer it.</a:t>
             </a:r>
@@ -13178,11 +13591,11 @@
           <a:p>
             <a:pPr algn="l"/>
             <a:r>
-              <a:rPr sz="3600" b="1" i="0">
-                <a:solidFill>
-                  <a:srgbClr val="1A1A1A"/>
-                </a:solidFill>
-                <a:latin typeface="Century Schoolbook"/>
+              <a:rPr sz="3420" b="1" i="0">
+                <a:solidFill>
+                  <a:srgbClr val="1A1A1A"/>
+                </a:solidFill>
+                <a:latin typeface="Lexend"/>
               </a:rPr>
               <a:t>Warm-Up</a:t>
             </a:r>
@@ -13318,11 +13731,11 @@
           <a:p>
             <a:pPr algn="l"/>
             <a:r>
-              <a:rPr sz="1100" b="0" i="1">
+              <a:rPr sz="1040" b="0" i="0">
                 <a:solidFill>
                   <a:srgbClr val="6B6B6B"/>
                 </a:solidFill>
-                <a:latin typeface="Century Schoolbook"/>
+                <a:latin typeface="Lexend"/>
               </a:rPr>
               <a:t>Grade 7 Accelerated · Unit 4 · Lessons 7–8 — Real-World Order of Operations</a:t>
             </a:r>
@@ -13353,11 +13766,11 @@
           <a:p>
             <a:pPr algn="r"/>
             <a:r>
-              <a:rPr sz="1100" b="0" i="0">
+              <a:rPr sz="1040" b="0" i="0">
                 <a:solidFill>
                   <a:srgbClr val="6B6B6B"/>
                 </a:solidFill>
-                <a:latin typeface="Century Schoolbook"/>
+                <a:latin typeface="Lexend"/>
               </a:rPr>
               <a:t>3</a:t>
             </a:r>
@@ -13373,7 +13786,7 @@
         <p:spPr>
           <a:xfrm>
             <a:off x="1874519" y="1440180"/>
-            <a:ext cx="720605" cy="457200"/>
+            <a:ext cx="671561" cy="457200"/>
           </a:xfrm>
           <a:prstGeom prst="rect">
             <a:avLst/>
@@ -13388,11 +13801,11 @@
           <a:p>
             <a:pPr algn="l"/>
             <a:r>
-              <a:rPr sz="2300" b="0" i="0">
-                <a:solidFill>
-                  <a:srgbClr val="1A1A1A"/>
-                </a:solidFill>
-                <a:latin typeface="Century Schoolbook"/>
+              <a:rPr sz="2180" b="0" i="0">
+                <a:solidFill>
+                  <a:srgbClr val="1A1A1A"/>
+                </a:solidFill>
+                <a:latin typeface="Lexend"/>
               </a:rPr>
               <a:t>1.   </a:t>
             </a:r>
@@ -13401,7 +13814,7 @@
       </p:sp>
       <p:pic>
         <p:nvPicPr>
-          <p:cNvPr id="9" name="Picture 8" descr="a3bfe14101224aaf.png"/>
+          <p:cNvPr id="9" name="Picture 8" descr="a7bbd4c851f1e1af.png"/>
           <p:cNvPicPr>
             <a:picLocks noChangeAspect="1"/>
           </p:cNvPicPr>
@@ -13415,8 +13828,8 @@
         </p:blipFill>
         <p:spPr>
           <a:xfrm>
-            <a:off x="2457965" y="1501140"/>
-            <a:ext cx="1554480" cy="335280"/>
+            <a:off x="2408921" y="1501140"/>
+            <a:ext cx="1484376" cy="335280"/>
           </a:xfrm>
           <a:prstGeom prst="rect">
             <a:avLst/>
@@ -13431,8 +13844,8 @@
         </p:nvSpPr>
         <p:spPr>
           <a:xfrm>
-            <a:off x="4561085" y="1440180"/>
-            <a:ext cx="388052" cy="457200"/>
+            <a:off x="4441937" y="1440180"/>
+            <a:ext cx="408839" cy="457200"/>
           </a:xfrm>
           <a:prstGeom prst="rect">
             <a:avLst/>
@@ -13447,11 +13860,11 @@
           <a:p>
             <a:pPr algn="l"/>
             <a:r>
-              <a:rPr sz="2300" b="1" i="0">
+              <a:rPr sz="2180" b="1" i="0">
                 <a:solidFill>
                   <a:srgbClr val="9E1B32"/>
                 </a:solidFill>
-                <a:latin typeface="Century Schoolbook"/>
+                <a:latin typeface="Lexend"/>
               </a:rPr>
               <a:t>0</a:t>
             </a:r>
@@ -13467,7 +13880,7 @@
         <p:spPr>
           <a:xfrm>
             <a:off x="1874519" y="2052828"/>
-            <a:ext cx="726811" cy="457200"/>
+            <a:ext cx="685699" cy="457200"/>
           </a:xfrm>
           <a:prstGeom prst="rect">
             <a:avLst/>
@@ -13482,11 +13895,11 @@
           <a:p>
             <a:pPr algn="l"/>
             <a:r>
-              <a:rPr sz="2300" b="0" i="0">
-                <a:solidFill>
-                  <a:srgbClr val="1A1A1A"/>
-                </a:solidFill>
-                <a:latin typeface="Century Schoolbook"/>
+              <a:rPr sz="2180" b="0" i="0">
+                <a:solidFill>
+                  <a:srgbClr val="1A1A1A"/>
+                </a:solidFill>
+                <a:latin typeface="Lexend"/>
               </a:rPr>
               <a:t>2.   </a:t>
             </a:r>
@@ -13495,7 +13908,7 @@
       </p:sp>
       <p:pic>
         <p:nvPicPr>
-          <p:cNvPr id="12" name="Picture 11" descr="a627cc56d1241098.png"/>
+          <p:cNvPr id="12" name="Picture 11" descr="f84234db65bcdb13.png"/>
           <p:cNvPicPr>
             <a:picLocks noChangeAspect="1"/>
           </p:cNvPicPr>
@@ -13509,8 +13922,8 @@
         </p:blipFill>
         <p:spPr>
           <a:xfrm>
-            <a:off x="2464171" y="2077212"/>
-            <a:ext cx="1588008" cy="408432"/>
+            <a:off x="2423059" y="2086356"/>
+            <a:ext cx="1578864" cy="390144"/>
           </a:xfrm>
           <a:prstGeom prst="rect">
             <a:avLst/>
@@ -13525,8 +13938,8 @@
         </p:nvSpPr>
         <p:spPr>
           <a:xfrm>
-            <a:off x="4600819" y="2052828"/>
-            <a:ext cx="829616" cy="457200"/>
+            <a:off x="4550563" y="2052828"/>
+            <a:ext cx="862396" cy="457200"/>
           </a:xfrm>
           <a:prstGeom prst="rect">
             <a:avLst/>
@@ -13541,11 +13954,11 @@
           <a:p>
             <a:pPr algn="l"/>
             <a:r>
-              <a:rPr sz="2300" b="1" i="0">
+              <a:rPr sz="2180" b="1" i="0">
                 <a:solidFill>
                   <a:srgbClr val="9E1B32"/>
                 </a:solidFill>
-                <a:latin typeface="Century Schoolbook"/>
+                <a:latin typeface="Lexend"/>
               </a:rPr>
               <a:t>25/2</a:t>
             </a:r>
@@ -13560,8 +13973,8 @@
         </p:nvSpPr>
         <p:spPr>
           <a:xfrm>
-            <a:off x="1874519" y="2738628"/>
-            <a:ext cx="3064939" cy="457200"/>
+            <a:off x="1874519" y="2729484"/>
+            <a:ext cx="2930351" cy="457200"/>
           </a:xfrm>
           <a:prstGeom prst="rect">
             <a:avLst/>
@@ -13576,11 +13989,11 @@
           <a:p>
             <a:pPr algn="l"/>
             <a:r>
-              <a:rPr sz="2300" b="0" i="0">
-                <a:solidFill>
-                  <a:srgbClr val="1A1A1A"/>
-                </a:solidFill>
-                <a:latin typeface="Century Schoolbook"/>
+              <a:rPr sz="2180" b="0" i="0">
+                <a:solidFill>
+                  <a:srgbClr val="1A1A1A"/>
+                </a:solidFill>
+                <a:latin typeface="Lexend"/>
               </a:rPr>
               <a:t>3.   Find the value:  </a:t>
             </a:r>
@@ -13589,7 +14002,7 @@
       </p:sp>
       <p:pic>
         <p:nvPicPr>
-          <p:cNvPr id="15" name="Picture 14" descr="ab0a0f8a819bef4a.png"/>
+          <p:cNvPr id="15" name="Picture 14" descr="6d6fe08af9312c1c.png"/>
           <p:cNvPicPr>
             <a:picLocks noChangeAspect="1"/>
           </p:cNvPicPr>
@@ -13603,8 +14016,8 @@
         </p:blipFill>
         <p:spPr>
           <a:xfrm>
-            <a:off x="4802299" y="2688336"/>
-            <a:ext cx="780288" cy="557784"/>
+            <a:off x="4667711" y="2688336"/>
+            <a:ext cx="768096" cy="539496"/>
           </a:xfrm>
           <a:prstGeom prst="rect">
             <a:avLst/>
@@ -13619,8 +14032,8 @@
         </p:nvSpPr>
         <p:spPr>
           <a:xfrm>
-            <a:off x="6131227" y="2665476"/>
-            <a:ext cx="651876" cy="457200"/>
+            <a:off x="5984447" y="2665476"/>
+            <a:ext cx="753890" cy="457200"/>
           </a:xfrm>
           <a:prstGeom prst="rect">
             <a:avLst/>
@@ -13635,11 +14048,11 @@
           <a:p>
             <a:pPr algn="l"/>
             <a:r>
-              <a:rPr sz="2300" b="1" i="0">
+              <a:rPr sz="2180" b="1" i="0">
                 <a:solidFill>
                   <a:srgbClr val="9E1B32"/>
                 </a:solidFill>
-                <a:latin typeface="Century Schoolbook"/>
+                <a:latin typeface="Lexend"/>
               </a:rPr>
               <a:t>4/3</a:t>
             </a:r>
@@ -13654,8 +14067,8 @@
         </p:nvSpPr>
         <p:spPr>
           <a:xfrm>
-            <a:off x="1874519" y="3424428"/>
-            <a:ext cx="2190435" cy="457200"/>
+            <a:off x="1874519" y="3406140"/>
+            <a:ext cx="2118555" cy="457200"/>
           </a:xfrm>
           <a:prstGeom prst="rect">
             <a:avLst/>
@@ -13670,11 +14083,11 @@
           <a:p>
             <a:pPr algn="l"/>
             <a:r>
-              <a:rPr sz="2300" b="0" i="0">
-                <a:solidFill>
-                  <a:srgbClr val="1A1A1A"/>
-                </a:solidFill>
-                <a:latin typeface="Century Schoolbook"/>
+              <a:rPr sz="2180" b="0" i="0">
+                <a:solidFill>
+                  <a:srgbClr val="1A1A1A"/>
+                </a:solidFill>
+                <a:latin typeface="Lexend"/>
               </a:rPr>
               <a:t>4.   Evaluate  </a:t>
             </a:r>
@@ -13683,7 +14096,7 @@
       </p:sp>
       <p:pic>
         <p:nvPicPr>
-          <p:cNvPr id="18" name="Picture 17" descr="0059e34534483f5d.png"/>
+          <p:cNvPr id="18" name="Picture 17" descr="236959ea5354d8ca.png"/>
           <p:cNvPicPr>
             <a:picLocks noChangeAspect="1"/>
           </p:cNvPicPr>
@@ -13697,8 +14110,8 @@
         </p:blipFill>
         <p:spPr>
           <a:xfrm>
-            <a:off x="3927795" y="3514344"/>
-            <a:ext cx="432816" cy="277368"/>
+            <a:off x="3855915" y="3497580"/>
+            <a:ext cx="460247" cy="274320"/>
           </a:xfrm>
           <a:prstGeom prst="rect">
             <a:avLst/>
@@ -13713,8 +14126,8 @@
         </p:nvSpPr>
         <p:spPr>
           <a:xfrm>
-            <a:off x="4360611" y="3424428"/>
-            <a:ext cx="1328762" cy="457200"/>
+            <a:off x="4316163" y="3406140"/>
+            <a:ext cx="1297468" cy="457200"/>
           </a:xfrm>
           <a:prstGeom prst="rect">
             <a:avLst/>
@@ -13729,11 +14142,11 @@
           <a:p>
             <a:pPr algn="l"/>
             <a:r>
-              <a:rPr sz="2300" b="0" i="0">
-                <a:solidFill>
-                  <a:srgbClr val="1A1A1A"/>
-                </a:solidFill>
-                <a:latin typeface="Century Schoolbook"/>
+              <a:rPr sz="2180" b="0" i="0">
+                <a:solidFill>
+                  <a:srgbClr val="1A1A1A"/>
+                </a:solidFill>
+                <a:latin typeface="Lexend"/>
               </a:rPr>
               <a:t>  when  </a:t>
             </a:r>
@@ -13742,7 +14155,7 @@
       </p:sp>
       <p:pic>
         <p:nvPicPr>
-          <p:cNvPr id="20" name="Picture 19" descr="8be73e21dbd6851d.png"/>
+          <p:cNvPr id="20" name="Picture 19" descr="78a344566654b4bb.png"/>
           <p:cNvPicPr>
             <a:picLocks noChangeAspect="1"/>
           </p:cNvPicPr>
@@ -13756,8 +14169,8 @@
         </p:blipFill>
         <p:spPr>
           <a:xfrm>
-            <a:off x="5552213" y="3538728"/>
-            <a:ext cx="621792" cy="228600"/>
+            <a:off x="5476472" y="3523488"/>
+            <a:ext cx="618744" cy="222504"/>
           </a:xfrm>
           <a:prstGeom prst="rect">
             <a:avLst/>
@@ -13772,8 +14185,8 @@
         </p:nvSpPr>
         <p:spPr>
           <a:xfrm>
-            <a:off x="6174005" y="3424428"/>
-            <a:ext cx="296395" cy="457200"/>
+            <a:off x="6095216" y="3406140"/>
+            <a:ext cx="277353" cy="457200"/>
           </a:xfrm>
           <a:prstGeom prst="rect">
             <a:avLst/>
@@ -13788,11 +14201,11 @@
           <a:p>
             <a:pPr algn="l"/>
             <a:r>
-              <a:rPr sz="2300" b="0" i="0">
-                <a:solidFill>
-                  <a:srgbClr val="1A1A1A"/>
-                </a:solidFill>
-                <a:latin typeface="Century Schoolbook"/>
+              <a:rPr sz="2180" b="0" i="0">
+                <a:solidFill>
+                  <a:srgbClr val="1A1A1A"/>
+                </a:solidFill>
+                <a:latin typeface="Lexend"/>
               </a:rPr>
               <a:t>.</a:t>
             </a:r>
@@ -13807,8 +14220,8 @@
         </p:nvSpPr>
         <p:spPr>
           <a:xfrm>
-            <a:off x="6881880" y="3424428"/>
-            <a:ext cx="565792" cy="457200"/>
+            <a:off x="6784049" y="3406140"/>
+            <a:ext cx="551515" cy="457200"/>
           </a:xfrm>
           <a:prstGeom prst="rect">
             <a:avLst/>
@@ -13823,11 +14236,11 @@
           <a:p>
             <a:pPr algn="l"/>
             <a:r>
-              <a:rPr sz="2300" b="1" i="0">
+              <a:rPr sz="2180" b="1" i="0">
                 <a:solidFill>
                   <a:srgbClr val="9E1B32"/>
                 </a:solidFill>
-                <a:latin typeface="Century Schoolbook"/>
+                <a:latin typeface="Lexend"/>
               </a:rPr>
               <a:t>18</a:t>
             </a:r>
@@ -13876,11 +14289,11 @@
           <a:p>
             <a:pPr algn="l"/>
             <a:r>
-              <a:rPr sz="3400" b="1" i="0">
-                <a:solidFill>
-                  <a:srgbClr val="1A1A1A"/>
-                </a:solidFill>
-                <a:latin typeface="Century Schoolbook"/>
+              <a:rPr sz="3229" b="1" i="0">
+                <a:solidFill>
+                  <a:srgbClr val="1A1A1A"/>
+                </a:solidFill>
+                <a:latin typeface="Lexend"/>
               </a:rPr>
               <a:t>Whiteboards   ·   Question 8 of 9</a:t>
             </a:r>
@@ -14016,11 +14429,11 @@
           <a:p>
             <a:pPr algn="l"/>
             <a:r>
-              <a:rPr sz="1100" b="0" i="1">
+              <a:rPr sz="1040" b="0" i="0">
                 <a:solidFill>
                   <a:srgbClr val="6B6B6B"/>
                 </a:solidFill>
-                <a:latin typeface="Century Schoolbook"/>
+                <a:latin typeface="Lexend"/>
               </a:rPr>
               <a:t>Grade 7 Accelerated · Unit 4 · Lessons 7–8 — Real-World Order of Operations</a:t>
             </a:r>
@@ -14051,11 +14464,11 @@
           <a:p>
             <a:pPr algn="r"/>
             <a:r>
-              <a:rPr sz="1100" b="0" i="0">
+              <a:rPr sz="1040" b="0" i="0">
                 <a:solidFill>
                   <a:srgbClr val="6B6B6B"/>
                 </a:solidFill>
-                <a:latin typeface="Century Schoolbook"/>
+                <a:latin typeface="Lexend"/>
               </a:rPr>
               <a:t>30</a:t>
             </a:r>
@@ -14070,8 +14483,8 @@
         </p:nvSpPr>
         <p:spPr>
           <a:xfrm>
-            <a:off x="2450603" y="2200655"/>
-            <a:ext cx="1864823" cy="457200"/>
+            <a:off x="2483985" y="2211323"/>
+            <a:ext cx="1806076" cy="457200"/>
           </a:xfrm>
           <a:prstGeom prst="rect">
             <a:avLst/>
@@ -14086,11 +14499,11 @@
           <a:p>
             <a:pPr algn="l"/>
             <a:r>
-              <a:rPr sz="2600" b="0" i="0">
-                <a:solidFill>
-                  <a:srgbClr val="1A1A1A"/>
-                </a:solidFill>
-                <a:latin typeface="Century Schoolbook"/>
+              <a:rPr sz="2470" b="0" i="0">
+                <a:solidFill>
+                  <a:srgbClr val="1A1A1A"/>
+                </a:solidFill>
+                <a:latin typeface="Lexend"/>
               </a:rPr>
               <a:t>Evaluate  </a:t>
             </a:r>
@@ -14099,7 +14512,7 @@
       </p:sp>
       <p:pic>
         <p:nvPicPr>
-          <p:cNvPr id="9" name="Picture 8" descr="e228efb5a3a6a777.png"/>
+          <p:cNvPr id="9" name="Picture 8" descr="e9fde38d04c0ca81.png"/>
           <p:cNvPicPr>
             <a:picLocks noChangeAspect="1"/>
           </p:cNvPicPr>
@@ -14113,8 +14526,8 @@
         </p:blipFill>
         <p:spPr>
           <a:xfrm>
-            <a:off x="4178266" y="2103120"/>
-            <a:ext cx="987552" cy="652272"/>
+            <a:off x="4152902" y="2103120"/>
+            <a:ext cx="1030224" cy="673608"/>
           </a:xfrm>
           <a:prstGeom prst="rect">
             <a:avLst/>
@@ -14129,8 +14542,8 @@
         </p:nvSpPr>
         <p:spPr>
           <a:xfrm>
-            <a:off x="5165818" y="2200655"/>
-            <a:ext cx="1474477" cy="457200"/>
+            <a:off x="5183126" y="2211323"/>
+            <a:ext cx="1439295" cy="457200"/>
           </a:xfrm>
           <a:prstGeom prst="rect">
             <a:avLst/>
@@ -14145,11 +14558,11 @@
           <a:p>
             <a:pPr algn="l"/>
             <a:r>
-              <a:rPr sz="2600" b="0" i="0">
-                <a:solidFill>
-                  <a:srgbClr val="1A1A1A"/>
-                </a:solidFill>
-                <a:latin typeface="Century Schoolbook"/>
+              <a:rPr sz="2470" b="0" i="0">
+                <a:solidFill>
+                  <a:srgbClr val="1A1A1A"/>
+                </a:solidFill>
+                <a:latin typeface="Lexend"/>
               </a:rPr>
               <a:t>  when  </a:t>
             </a:r>
@@ -14158,7 +14571,7 @@
       </p:sp>
       <p:pic>
         <p:nvPicPr>
-          <p:cNvPr id="11" name="Picture 10" descr="9ac445d070005962.png"/>
+          <p:cNvPr id="11" name="Picture 10" descr="b10d32bef8baa228.png"/>
           <p:cNvPicPr>
             <a:picLocks noChangeAspect="1"/>
           </p:cNvPicPr>
@@ -14172,8 +14585,8 @@
         </p:blipFill>
         <p:spPr>
           <a:xfrm>
-            <a:off x="6503136" y="2293620"/>
-            <a:ext cx="777240" cy="271272"/>
+            <a:off x="6485261" y="2302764"/>
+            <a:ext cx="789432" cy="274320"/>
           </a:xfrm>
           <a:prstGeom prst="rect">
             <a:avLst/>
@@ -14188,8 +14601,8 @@
         </p:nvSpPr>
         <p:spPr>
           <a:xfrm>
-            <a:off x="7280376" y="2200655"/>
-            <a:ext cx="502163" cy="457200"/>
+            <a:off x="7274693" y="2211323"/>
+            <a:ext cx="485323" cy="457200"/>
           </a:xfrm>
           <a:prstGeom prst="rect">
             <a:avLst/>
@@ -14204,11 +14617,11 @@
           <a:p>
             <a:pPr algn="l"/>
             <a:r>
-              <a:rPr sz="2600" b="0" i="0">
-                <a:solidFill>
-                  <a:srgbClr val="1A1A1A"/>
-                </a:solidFill>
-                <a:latin typeface="Century Schoolbook"/>
+              <a:rPr sz="2470" b="0" i="0">
+                <a:solidFill>
+                  <a:srgbClr val="1A1A1A"/>
+                </a:solidFill>
+                <a:latin typeface="Lexend"/>
               </a:rPr>
               <a:t>,  </a:t>
             </a:r>
@@ -14217,7 +14630,7 @@
       </p:sp>
       <p:pic>
         <p:nvPicPr>
-          <p:cNvPr id="13" name="Picture 12" descr="d05130d66ecf91cb.png"/>
+          <p:cNvPr id="13" name="Picture 12" descr="723048b2d1c4883a.png"/>
           <p:cNvPicPr>
             <a:picLocks noChangeAspect="1"/>
           </p:cNvPicPr>
@@ -14231,8 +14644,8 @@
         </p:blipFill>
         <p:spPr>
           <a:xfrm>
-            <a:off x="7645380" y="2287524"/>
-            <a:ext cx="786384" cy="283464"/>
+            <a:off x="7622857" y="2295144"/>
+            <a:ext cx="804672" cy="289560"/>
           </a:xfrm>
           <a:prstGeom prst="rect">
             <a:avLst/>
@@ -14247,8 +14660,8 @@
         </p:nvSpPr>
         <p:spPr>
           <a:xfrm>
-            <a:off x="8431764" y="2200655"/>
-            <a:ext cx="502163" cy="457200"/>
+            <a:off x="8427529" y="2211323"/>
+            <a:ext cx="485323" cy="457200"/>
           </a:xfrm>
           <a:prstGeom prst="rect">
             <a:avLst/>
@@ -14263,11 +14676,11 @@
           <a:p>
             <a:pPr algn="l"/>
             <a:r>
-              <a:rPr sz="2600" b="0" i="0">
-                <a:solidFill>
-                  <a:srgbClr val="1A1A1A"/>
-                </a:solidFill>
-                <a:latin typeface="Century Schoolbook"/>
+              <a:rPr sz="2470" b="0" i="0">
+                <a:solidFill>
+                  <a:srgbClr val="1A1A1A"/>
+                </a:solidFill>
+                <a:latin typeface="Lexend"/>
               </a:rPr>
               <a:t>,  </a:t>
             </a:r>
@@ -14276,7 +14689,7 @@
       </p:sp>
       <p:pic>
         <p:nvPicPr>
-          <p:cNvPr id="15" name="Picture 14" descr="23b44b96e089193a.png"/>
+          <p:cNvPr id="15" name="Picture 14" descr="848bbba5727756a1.png"/>
           <p:cNvPicPr>
             <a:picLocks noChangeAspect="1"/>
           </p:cNvPicPr>
@@ -14290,8 +14703,8 @@
         </p:blipFill>
         <p:spPr>
           <a:xfrm>
-            <a:off x="8796768" y="2287524"/>
-            <a:ext cx="743712" cy="283464"/>
+            <a:off x="8775692" y="2302764"/>
+            <a:ext cx="752856" cy="274320"/>
           </a:xfrm>
           <a:prstGeom prst="rect">
             <a:avLst/>
@@ -14306,8 +14719,8 @@
         </p:nvSpPr>
         <p:spPr>
           <a:xfrm>
-            <a:off x="9540480" y="2200655"/>
-            <a:ext cx="307595" cy="457200"/>
+            <a:off x="9528548" y="2211323"/>
+            <a:ext cx="286146" cy="457200"/>
           </a:xfrm>
           <a:prstGeom prst="rect">
             <a:avLst/>
@@ -14322,11 +14735,11 @@
           <a:p>
             <a:pPr algn="l"/>
             <a:r>
-              <a:rPr sz="2600" b="0" i="0">
-                <a:solidFill>
-                  <a:srgbClr val="1A1A1A"/>
-                </a:solidFill>
-                <a:latin typeface="Century Schoolbook"/>
+              <a:rPr sz="2470" b="0" i="0">
+                <a:solidFill>
+                  <a:srgbClr val="1A1A1A"/>
+                </a:solidFill>
+                <a:latin typeface="Lexend"/>
               </a:rPr>
               <a:t>.</a:t>
             </a:r>
@@ -14336,6 +14749,89 @@
       <p:sp>
         <p:nvSpPr>
           <p:cNvPr id="17" name="TextBox 16"/>
+          <p:cNvSpPr txBox="1"/>
+          <p:nvPr/>
+        </p:nvSpPr>
+        <p:spPr>
+          <a:xfrm>
+            <a:off x="4141556" y="3101340"/>
+            <a:ext cx="1141303" cy="457200"/>
+          </a:xfrm>
+          <a:prstGeom prst="rect">
+            <a:avLst/>
+          </a:prstGeom>
+          <a:noFill/>
+        </p:spPr>
+        <p:txBody>
+          <a:bodyPr wrap="none" lIns="45720" rIns="45720" tIns="18288" bIns="18288" anchor="ctr">
+            <a:noAutofit/>
+          </a:bodyPr>
+          <a:lstStyle/>
+          <a:p>
+            <a:pPr algn="l"/>
+            <a:r>
+              <a:rPr sz="2750" b="0" i="0">
+                <a:solidFill>
+                  <a:srgbClr val="1A1A1A"/>
+                </a:solidFill>
+                <a:latin typeface="Lexend"/>
+              </a:rPr>
+              <a:t>Top:  </a:t>
+            </a:r>
+          </a:p>
+        </p:txBody>
+      </p:sp>
+      <p:pic>
+        <p:nvPicPr>
+          <p:cNvPr id="18" name="Picture 17" descr="6aa77d3d03b7f4a1.png"/>
+          <p:cNvPicPr>
+            <a:picLocks noChangeAspect="1"/>
+          </p:cNvPicPr>
+          <p:nvPr/>
+        </p:nvPicPr>
+        <p:blipFill>
+          <a:blip r:embed="rId6"/>
+          <a:stretch>
+            <a:fillRect/>
+          </a:stretch>
+        </p:blipFill>
+        <p:spPr>
+          <a:xfrm>
+            <a:off x="5145699" y="3176016"/>
+            <a:ext cx="2874264" cy="307848"/>
+          </a:xfrm>
+          <a:prstGeom prst="rect">
+            <a:avLst/>
+          </a:prstGeom>
+        </p:spPr>
+      </p:pic>
+      <p:pic>
+        <p:nvPicPr>
+          <p:cNvPr id="19" name="Picture 18" descr="aafef2d9b5795f35.png"/>
+          <p:cNvPicPr>
+            <a:picLocks noChangeAspect="1"/>
+          </p:cNvPicPr>
+          <p:nvPr/>
+        </p:nvPicPr>
+        <p:blipFill>
+          <a:blip r:embed="rId7"/>
+          <a:stretch>
+            <a:fillRect/>
+          </a:stretch>
+        </p:blipFill>
+        <p:spPr>
+          <a:xfrm>
+            <a:off x="4196420" y="3742944"/>
+            <a:ext cx="1453896" cy="252984"/>
+          </a:xfrm>
+          <a:prstGeom prst="rect">
+            <a:avLst/>
+          </a:prstGeom>
+        </p:spPr>
+      </p:pic>
+      <p:sp>
+        <p:nvSpPr>
+          <p:cNvPr id="20" name="TextBox 19"/>
           <p:cNvSpPr txBox="1"/>
           <p:nvPr/>
         </p:nvSpPr>
@@ -14357,11 +14853,11 @@
           <a:p>
             <a:pPr algn="ctr"/>
             <a:r>
-              <a:rPr sz="3200" b="1" i="0">
+              <a:rPr sz="3040" b="1" i="0">
                 <a:solidFill>
                   <a:srgbClr val="9E1B32"/>
                 </a:solidFill>
-                <a:latin typeface="Century Schoolbook"/>
+                <a:latin typeface="Lexend"/>
               </a:rPr>
               <a:t>Answer:   9</a:t>
             </a:r>
@@ -14410,11 +14906,11 @@
           <a:p>
             <a:pPr algn="l"/>
             <a:r>
-              <a:rPr sz="3400" b="1" i="0">
-                <a:solidFill>
-                  <a:srgbClr val="1A1A1A"/>
-                </a:solidFill>
-                <a:latin typeface="Century Schoolbook"/>
+              <a:rPr sz="3229" b="1" i="0">
+                <a:solidFill>
+                  <a:srgbClr val="1A1A1A"/>
+                </a:solidFill>
+                <a:latin typeface="Lexend"/>
               </a:rPr>
               <a:t>Whiteboards   ·   Question 9 of 9</a:t>
             </a:r>
@@ -14550,11 +15046,11 @@
           <a:p>
             <a:pPr algn="l"/>
             <a:r>
-              <a:rPr sz="1100" b="0" i="1">
+              <a:rPr sz="1040" b="0" i="0">
                 <a:solidFill>
                   <a:srgbClr val="6B6B6B"/>
                 </a:solidFill>
-                <a:latin typeface="Century Schoolbook"/>
+                <a:latin typeface="Lexend"/>
               </a:rPr>
               <a:t>Grade 7 Accelerated · Unit 4 · Lessons 7–8 — Real-World Order of Operations</a:t>
             </a:r>
@@ -14585,11 +15081,11 @@
           <a:p>
             <a:pPr algn="r"/>
             <a:r>
-              <a:rPr sz="1100" b="0" i="0">
+              <a:rPr sz="1040" b="0" i="0">
                 <a:solidFill>
                   <a:srgbClr val="6B6B6B"/>
                 </a:solidFill>
-                <a:latin typeface="Century Schoolbook"/>
+                <a:latin typeface="Lexend"/>
               </a:rPr>
               <a:t>31</a:t>
             </a:r>
@@ -14620,11 +15116,11 @@
           <a:p>
             <a:pPr algn="ctr"/>
             <a:r>
-              <a:rPr sz="2300" b="0" i="0">
-                <a:solidFill>
-                  <a:srgbClr val="1A1A1A"/>
-                </a:solidFill>
-                <a:latin typeface="Century Schoolbook"/>
+              <a:rPr sz="2180" b="0" i="0">
+                <a:solidFill>
+                  <a:srgbClr val="1A1A1A"/>
+                </a:solidFill>
+                <a:latin typeface="Lexend"/>
               </a:rPr>
               <a:t>A plan costs 15 dollars plus 4 dollars for each of 6 gigabytes.</a:t>
             </a:r>
@@ -14655,11 +15151,11 @@
           <a:p>
             <a:pPr algn="ctr"/>
             <a:r>
-              <a:rPr sz="2300" b="0" i="0">
-                <a:solidFill>
-                  <a:srgbClr val="1A1A1A"/>
-                </a:solidFill>
-                <a:latin typeface="Century Schoolbook"/>
+              <a:rPr sz="2180" b="0" i="0">
+                <a:solidFill>
+                  <a:srgbClr val="1A1A1A"/>
+                </a:solidFill>
+                <a:latin typeface="Lexend"/>
               </a:rPr>
               <a:t>Another costs 15 dollars for each of 4 lines, plus 6 dollars of tax.</a:t>
             </a:r>
@@ -14690,11 +15186,11 @@
           <a:p>
             <a:pPr algn="ctr"/>
             <a:r>
-              <a:rPr sz="2300" b="0" i="0">
-                <a:solidFill>
-                  <a:srgbClr val="1A1A1A"/>
-                </a:solidFill>
-                <a:latin typeface="Century Schoolbook"/>
+              <a:rPr sz="2180" b="0" i="0">
+                <a:solidFill>
+                  <a:srgbClr val="1A1A1A"/>
+                </a:solidFill>
+                <a:latin typeface="Lexend"/>
               </a:rPr>
               <a:t>Find both totals, and say why the key words could not have told you.</a:t>
             </a:r>
@@ -14725,11 +15221,11 @@
           <a:p>
             <a:pPr algn="ctr"/>
             <a:r>
-              <a:rPr sz="2600" b="1" i="0">
-                <a:solidFill>
-                  <a:srgbClr val="1A1A1A"/>
-                </a:solidFill>
-                <a:latin typeface="Century Schoolbook"/>
+              <a:rPr sz="2470" b="1" i="0">
+                <a:solidFill>
+                  <a:srgbClr val="1A1A1A"/>
+                </a:solidFill>
+                <a:latin typeface="Lexend"/>
               </a:rPr>
               <a:t>Write your answer in sentences.</a:t>
             </a:r>
@@ -14778,11 +15274,11 @@
           <a:p>
             <a:pPr algn="l"/>
             <a:r>
-              <a:rPr sz="3400" b="1" i="0">
-                <a:solidFill>
-                  <a:srgbClr val="1A1A1A"/>
-                </a:solidFill>
-                <a:latin typeface="Century Schoolbook"/>
+              <a:rPr sz="3229" b="1" i="0">
+                <a:solidFill>
+                  <a:srgbClr val="1A1A1A"/>
+                </a:solidFill>
+                <a:latin typeface="Lexend"/>
               </a:rPr>
               <a:t>Whiteboards   ·   Question 9 of 9</a:t>
             </a:r>
@@ -14918,11 +15414,11 @@
           <a:p>
             <a:pPr algn="l"/>
             <a:r>
-              <a:rPr sz="1100" b="0" i="1">
+              <a:rPr sz="1040" b="0" i="0">
                 <a:solidFill>
                   <a:srgbClr val="6B6B6B"/>
                 </a:solidFill>
-                <a:latin typeface="Century Schoolbook"/>
+                <a:latin typeface="Lexend"/>
               </a:rPr>
               <a:t>Grade 7 Accelerated · Unit 4 · Lessons 7–8 — Real-World Order of Operations</a:t>
             </a:r>
@@ -14953,11 +15449,11 @@
           <a:p>
             <a:pPr algn="r"/>
             <a:r>
-              <a:rPr sz="1100" b="0" i="0">
+              <a:rPr sz="1040" b="0" i="0">
                 <a:solidFill>
                   <a:srgbClr val="6B6B6B"/>
                 </a:solidFill>
-                <a:latin typeface="Century Schoolbook"/>
+                <a:latin typeface="Lexend"/>
               </a:rPr>
               <a:t>32</a:t>
             </a:r>
@@ -14988,11 +15484,11 @@
           <a:p>
             <a:pPr algn="ctr"/>
             <a:r>
-              <a:rPr sz="2300" b="0" i="0">
-                <a:solidFill>
-                  <a:srgbClr val="1A1A1A"/>
-                </a:solidFill>
-                <a:latin typeface="Century Schoolbook"/>
+              <a:rPr sz="2180" b="0" i="0">
+                <a:solidFill>
+                  <a:srgbClr val="1A1A1A"/>
+                </a:solidFill>
+                <a:latin typeface="Lexend"/>
               </a:rPr>
               <a:t>A plan costs 15 dollars plus 4 dollars for each of 6 gigabytes.</a:t>
             </a:r>
@@ -15023,11 +15519,11 @@
           <a:p>
             <a:pPr algn="ctr"/>
             <a:r>
-              <a:rPr sz="2300" b="0" i="0">
-                <a:solidFill>
-                  <a:srgbClr val="1A1A1A"/>
-                </a:solidFill>
-                <a:latin typeface="Century Schoolbook"/>
+              <a:rPr sz="2180" b="0" i="0">
+                <a:solidFill>
+                  <a:srgbClr val="1A1A1A"/>
+                </a:solidFill>
+                <a:latin typeface="Lexend"/>
               </a:rPr>
               <a:t>Another costs 15 dollars for each of 4 lines, plus 6 dollars of tax.</a:t>
             </a:r>
@@ -15058,11 +15554,11 @@
           <a:p>
             <a:pPr algn="ctr"/>
             <a:r>
-              <a:rPr sz="2300" b="0" i="0">
-                <a:solidFill>
-                  <a:srgbClr val="1A1A1A"/>
-                </a:solidFill>
-                <a:latin typeface="Century Schoolbook"/>
+              <a:rPr sz="2180" b="0" i="0">
+                <a:solidFill>
+                  <a:srgbClr val="1A1A1A"/>
+                </a:solidFill>
+                <a:latin typeface="Lexend"/>
               </a:rPr>
               <a:t>Find both totals, and say why the key words could not have told you.</a:t>
             </a:r>
@@ -15077,7 +15573,160 @@
         </p:nvSpPr>
         <p:spPr>
           <a:xfrm>
-            <a:off x="777240" y="4663440"/>
+            <a:off x="1749011" y="3717036"/>
+            <a:ext cx="1875316" cy="457200"/>
+          </a:xfrm>
+          <a:prstGeom prst="rect">
+            <a:avLst/>
+          </a:prstGeom>
+          <a:noFill/>
+        </p:spPr>
+        <p:txBody>
+          <a:bodyPr wrap="none" lIns="45720" rIns="45720" tIns="18288" bIns="18288" anchor="ctr">
+            <a:noAutofit/>
+          </a:bodyPr>
+          <a:lstStyle/>
+          <a:p>
+            <a:pPr algn="l"/>
+            <a:r>
+              <a:rPr sz="2330" b="0" i="0">
+                <a:solidFill>
+                  <a:srgbClr val="1A1A1A"/>
+                </a:solidFill>
+                <a:latin typeface="Lexend"/>
+              </a:rPr>
+              <a:t>First plan:  </a:t>
+            </a:r>
+          </a:p>
+        </p:txBody>
+      </p:sp>
+      <p:pic>
+        <p:nvPicPr>
+          <p:cNvPr id="12" name="Picture 11" descr="9c06497c8557176c.png"/>
+          <p:cNvPicPr>
+            <a:picLocks noChangeAspect="1"/>
+          </p:cNvPicPr>
+          <p:nvPr/>
+        </p:nvPicPr>
+        <p:blipFill>
+          <a:blip r:embed="rId2"/>
+          <a:stretch>
+            <a:fillRect/>
+          </a:stretch>
+        </p:blipFill>
+        <p:spPr>
+          <a:xfrm>
+            <a:off x="3487168" y="3838956"/>
+            <a:ext cx="2983992" cy="213360"/>
+          </a:xfrm>
+          <a:prstGeom prst="rect">
+            <a:avLst/>
+          </a:prstGeom>
+        </p:spPr>
+      </p:pic>
+      <p:sp>
+        <p:nvSpPr>
+          <p:cNvPr id="13" name="TextBox 12"/>
+          <p:cNvSpPr txBox="1"/>
+          <p:nvPr/>
+        </p:nvSpPr>
+        <p:spPr>
+          <a:xfrm>
+            <a:off x="1749011" y="4219956"/>
+            <a:ext cx="2327424" cy="457200"/>
+          </a:xfrm>
+          <a:prstGeom prst="rect">
+            <a:avLst/>
+          </a:prstGeom>
+          <a:noFill/>
+        </p:spPr>
+        <p:txBody>
+          <a:bodyPr wrap="none" lIns="45720" rIns="45720" tIns="18288" bIns="18288" anchor="ctr">
+            <a:noAutofit/>
+          </a:bodyPr>
+          <a:lstStyle/>
+          <a:p>
+            <a:pPr algn="l"/>
+            <a:r>
+              <a:rPr sz="2330" b="0" i="0">
+                <a:solidFill>
+                  <a:srgbClr val="1A1A1A"/>
+                </a:solidFill>
+                <a:latin typeface="Lexend"/>
+              </a:rPr>
+              <a:t>Second plan:  </a:t>
+            </a:r>
+          </a:p>
+        </p:txBody>
+      </p:sp>
+      <p:pic>
+        <p:nvPicPr>
+          <p:cNvPr id="14" name="Picture 13" descr="328175c9b0fe1319.png"/>
+          <p:cNvPicPr>
+            <a:picLocks noChangeAspect="1"/>
+          </p:cNvPicPr>
+          <p:nvPr/>
+        </p:nvPicPr>
+        <p:blipFill>
+          <a:blip r:embed="rId3"/>
+          <a:stretch>
+            <a:fillRect/>
+          </a:stretch>
+        </p:blipFill>
+        <p:spPr>
+          <a:xfrm>
+            <a:off x="3939276" y="4341876"/>
+            <a:ext cx="2843784" cy="213360"/>
+          </a:xfrm>
+          <a:prstGeom prst="rect">
+            <a:avLst/>
+          </a:prstGeom>
+        </p:spPr>
+      </p:pic>
+      <p:sp>
+        <p:nvSpPr>
+          <p:cNvPr id="15" name="TextBox 14"/>
+          <p:cNvSpPr txBox="1"/>
+          <p:nvPr/>
+        </p:nvSpPr>
+        <p:spPr>
+          <a:xfrm>
+            <a:off x="1749011" y="4722876"/>
+            <a:ext cx="8800656" cy="457200"/>
+          </a:xfrm>
+          <a:prstGeom prst="rect">
+            <a:avLst/>
+          </a:prstGeom>
+          <a:noFill/>
+        </p:spPr>
+        <p:txBody>
+          <a:bodyPr wrap="none" lIns="45720" rIns="45720" tIns="18288" bIns="18288" anchor="ctr">
+            <a:noAutofit/>
+          </a:bodyPr>
+          <a:lstStyle/>
+          <a:p>
+            <a:pPr algn="l"/>
+            <a:r>
+              <a:rPr sz="2330" b="0" i="0">
+                <a:solidFill>
+                  <a:srgbClr val="1A1A1A"/>
+                </a:solidFill>
+                <a:latin typeface="Lexend"/>
+              </a:rPr>
+              <a:t>Both say "plus" and "for each". What repeats is different.</a:t>
+            </a:r>
+          </a:p>
+        </p:txBody>
+      </p:sp>
+      <p:sp>
+        <p:nvSpPr>
+          <p:cNvPr id="16" name="TextBox 15"/>
+          <p:cNvSpPr txBox="1"/>
+          <p:nvPr/>
+        </p:nvSpPr>
+        <p:spPr>
+          <a:xfrm>
+            <a:off x="777240" y="5294376"/>
             <a:ext cx="10607040" cy="548640"/>
           </a:xfrm>
           <a:prstGeom prst="rect">
@@ -15093,11 +15742,11 @@
           <a:p>
             <a:pPr algn="ctr"/>
             <a:r>
-              <a:rPr sz="3200" b="1" i="0">
+              <a:rPr sz="3040" b="1" i="0">
                 <a:solidFill>
                   <a:srgbClr val="9E1B32"/>
                 </a:solidFill>
-                <a:latin typeface="Century Schoolbook"/>
+                <a:latin typeface="Lexend"/>
               </a:rPr>
               <a:t>Answer:   39 dollars and 66 dollars</a:t>
             </a:r>
@@ -15146,11 +15795,11 @@
           <a:p>
             <a:pPr algn="l"/>
             <a:r>
-              <a:rPr sz="3600" b="1" i="0">
-                <a:solidFill>
-                  <a:srgbClr val="1A1A1A"/>
-                </a:solidFill>
-                <a:latin typeface="Century Schoolbook"/>
+              <a:rPr sz="3420" b="1" i="0">
+                <a:solidFill>
+                  <a:srgbClr val="1A1A1A"/>
+                </a:solidFill>
+                <a:latin typeface="Lexend"/>
               </a:rPr>
               <a:t>Independent Set</a:t>
             </a:r>
@@ -15286,11 +15935,11 @@
           <a:p>
             <a:pPr algn="l"/>
             <a:r>
-              <a:rPr sz="1100" b="0" i="1">
+              <a:rPr sz="1040" b="0" i="0">
                 <a:solidFill>
                   <a:srgbClr val="6B6B6B"/>
                 </a:solidFill>
-                <a:latin typeface="Century Schoolbook"/>
+                <a:latin typeface="Lexend"/>
               </a:rPr>
               <a:t>Grade 7 Accelerated · Unit 4 · Lessons 7–8 — Real-World Order of Operations</a:t>
             </a:r>
@@ -15321,11 +15970,11 @@
           <a:p>
             <a:pPr algn="r"/>
             <a:r>
-              <a:rPr sz="1100" b="0" i="0">
+              <a:rPr sz="1040" b="0" i="0">
                 <a:solidFill>
                   <a:srgbClr val="6B6B6B"/>
                 </a:solidFill>
-                <a:latin typeface="Century Schoolbook"/>
+                <a:latin typeface="Lexend"/>
               </a:rPr>
               <a:t>33</a:t>
             </a:r>
@@ -15356,11 +16005,11 @@
           <a:p>
             <a:pPr algn="l"/>
             <a:r>
-              <a:rPr sz="2300" b="1" i="0">
+              <a:rPr sz="2180" b="1" i="0">
                 <a:solidFill>
                   <a:srgbClr val="0B5394"/>
                 </a:solidFill>
-                <a:latin typeface="Century Schoolbook"/>
+                <a:latin typeface="Lexend"/>
               </a:rPr>
               <a:t>1.</a:t>
             </a:r>
@@ -15369,7 +16018,7 @@
       </p:sp>
       <p:pic>
         <p:nvPicPr>
-          <p:cNvPr id="9" name="Picture 8" descr="2b8d4582f14f0858.png"/>
+          <p:cNvPr id="9" name="Picture 8" descr="8e7af367fc956fba.png"/>
           <p:cNvPicPr>
             <a:picLocks noChangeAspect="1"/>
           </p:cNvPicPr>
@@ -15383,8 +16032,8 @@
         </p:blipFill>
         <p:spPr>
           <a:xfrm>
-            <a:off x="1627632" y="1583436"/>
-            <a:ext cx="432816" cy="280416"/>
+            <a:off x="1627632" y="1586484"/>
+            <a:ext cx="466344" cy="274320"/>
           </a:xfrm>
           <a:prstGeom prst="rect">
             <a:avLst/>
@@ -15399,8 +16048,8 @@
         </p:nvSpPr>
         <p:spPr>
           <a:xfrm>
-            <a:off x="2060448" y="1495044"/>
-            <a:ext cx="1328762" cy="457200"/>
+            <a:off x="2093976" y="1495044"/>
+            <a:ext cx="1297468" cy="457200"/>
           </a:xfrm>
           <a:prstGeom prst="rect">
             <a:avLst/>
@@ -15415,11 +16064,11 @@
           <a:p>
             <a:pPr algn="l"/>
             <a:r>
-              <a:rPr sz="2300" b="0" i="0">
-                <a:solidFill>
-                  <a:srgbClr val="1A1A1A"/>
-                </a:solidFill>
-                <a:latin typeface="Century Schoolbook"/>
+              <a:rPr sz="2180" b="0" i="0">
+                <a:solidFill>
+                  <a:srgbClr val="1A1A1A"/>
+                </a:solidFill>
+                <a:latin typeface="Lexend"/>
               </a:rPr>
               <a:t>  when  </a:t>
             </a:r>
@@ -15428,7 +16077,7 @@
       </p:sp>
       <p:pic>
         <p:nvPicPr>
-          <p:cNvPr id="11" name="Picture 10" descr="98bdfca2783561f2.png"/>
+          <p:cNvPr id="11" name="Picture 10" descr="368514c03b325e88.png"/>
           <p:cNvPicPr>
             <a:picLocks noChangeAspect="1"/>
           </p:cNvPicPr>
@@ -15442,8 +16091,8 @@
         </p:blipFill>
         <p:spPr>
           <a:xfrm>
-            <a:off x="3252050" y="1610867"/>
-            <a:ext cx="862584" cy="225552"/>
+            <a:off x="3254284" y="1612391"/>
+            <a:ext cx="810768" cy="222504"/>
           </a:xfrm>
           <a:prstGeom prst="rect">
             <a:avLst/>
@@ -15458,7 +16107,7 @@
         </p:nvSpPr>
         <p:spPr>
           <a:xfrm>
-            <a:off x="960120" y="2157983"/>
+            <a:off x="960120" y="2154936"/>
             <a:ext cx="548640" cy="457200"/>
           </a:xfrm>
           <a:prstGeom prst="rect">
@@ -15474,11 +16123,11 @@
           <a:p>
             <a:pPr algn="l"/>
             <a:r>
-              <a:rPr sz="2300" b="1" i="0">
+              <a:rPr sz="2180" b="1" i="0">
                 <a:solidFill>
                   <a:srgbClr val="0B5394"/>
                 </a:solidFill>
-                <a:latin typeface="Century Schoolbook"/>
+                <a:latin typeface="Lexend"/>
               </a:rPr>
               <a:t>2.</a:t>
             </a:r>
@@ -15487,7 +16136,7 @@
       </p:sp>
       <p:pic>
         <p:nvPicPr>
-          <p:cNvPr id="13" name="Picture 12" descr="3518a776f6043365.png"/>
+          <p:cNvPr id="13" name="Picture 12" descr="76e92664c8540a77.png"/>
           <p:cNvPicPr>
             <a:picLocks noChangeAspect="1"/>
           </p:cNvPicPr>
@@ -15502,7 +16151,7 @@
         <p:spPr>
           <a:xfrm>
             <a:off x="1627632" y="2112263"/>
-            <a:ext cx="719328" cy="548640"/>
+            <a:ext cx="807720" cy="542544"/>
           </a:xfrm>
           <a:prstGeom prst="rect">
             <a:avLst/>
@@ -15517,8 +16166,8 @@
         </p:nvSpPr>
         <p:spPr>
           <a:xfrm>
-            <a:off x="2346960" y="2157983"/>
-            <a:ext cx="1328762" cy="457200"/>
+            <a:off x="2435352" y="2154936"/>
+            <a:ext cx="1297468" cy="457200"/>
           </a:xfrm>
           <a:prstGeom prst="rect">
             <a:avLst/>
@@ -15533,11 +16182,11 @@
           <a:p>
             <a:pPr algn="l"/>
             <a:r>
-              <a:rPr sz="2300" b="0" i="0">
-                <a:solidFill>
-                  <a:srgbClr val="1A1A1A"/>
-                </a:solidFill>
-                <a:latin typeface="Century Schoolbook"/>
+              <a:rPr sz="2180" b="0" i="0">
+                <a:solidFill>
+                  <a:srgbClr val="1A1A1A"/>
+                </a:solidFill>
+                <a:latin typeface="Lexend"/>
               </a:rPr>
               <a:t>  when  </a:t>
             </a:r>
@@ -15546,7 +16195,7 @@
       </p:sp>
       <p:pic>
         <p:nvPicPr>
-          <p:cNvPr id="15" name="Picture 14" descr="7597cef5a07f6eb3.png"/>
+          <p:cNvPr id="15" name="Picture 14" descr="0531a46c557d60ed.png"/>
           <p:cNvPicPr>
             <a:picLocks noChangeAspect="1"/>
           </p:cNvPicPr>
@@ -15560,8 +16209,8 @@
         </p:blipFill>
         <p:spPr>
           <a:xfrm>
-            <a:off x="3538562" y="2270759"/>
-            <a:ext cx="877824" cy="231648"/>
+            <a:off x="3595660" y="2270759"/>
+            <a:ext cx="908304" cy="225552"/>
           </a:xfrm>
           <a:prstGeom prst="rect">
             <a:avLst/>
@@ -15576,8 +16225,8 @@
         </p:nvSpPr>
         <p:spPr>
           <a:xfrm>
-            <a:off x="4416386" y="2157983"/>
-            <a:ext cx="1093755" cy="457200"/>
+            <a:off x="4503964" y="2154936"/>
+            <a:ext cx="1087500" cy="457200"/>
           </a:xfrm>
           <a:prstGeom prst="rect">
             <a:avLst/>
@@ -15592,11 +16241,11 @@
           <a:p>
             <a:pPr algn="l"/>
             <a:r>
-              <a:rPr sz="2300" b="0" i="0">
-                <a:solidFill>
-                  <a:srgbClr val="1A1A1A"/>
-                </a:solidFill>
-                <a:latin typeface="Century Schoolbook"/>
+              <a:rPr sz="2180" b="0" i="0">
+                <a:solidFill>
+                  <a:srgbClr val="1A1A1A"/>
+                </a:solidFill>
+                <a:latin typeface="Lexend"/>
               </a:rPr>
               <a:t>  and  </a:t>
             </a:r>
@@ -15605,7 +16254,7 @@
       </p:sp>
       <p:pic>
         <p:nvPicPr>
-          <p:cNvPr id="17" name="Picture 16" descr="93534435d911b664.png"/>
+          <p:cNvPr id="17" name="Picture 16" descr="db6b9bf3d6868ca7.png"/>
           <p:cNvPicPr>
             <a:picLocks noChangeAspect="1"/>
           </p:cNvPicPr>
@@ -15619,8 +16268,8 @@
         </p:blipFill>
         <p:spPr>
           <a:xfrm>
-            <a:off x="5372982" y="2270759"/>
-            <a:ext cx="618744" cy="231648"/>
+            <a:off x="5454305" y="2273807"/>
+            <a:ext cx="649224" cy="219456"/>
           </a:xfrm>
           <a:prstGeom prst="rect">
             <a:avLst/>
@@ -15635,7 +16284,7 @@
         </p:nvSpPr>
         <p:spPr>
           <a:xfrm>
-            <a:off x="960120" y="2880359"/>
+            <a:off x="960120" y="2881883"/>
             <a:ext cx="548640" cy="457200"/>
           </a:xfrm>
           <a:prstGeom prst="rect">
@@ -15651,11 +16300,11 @@
           <a:p>
             <a:pPr algn="l"/>
             <a:r>
-              <a:rPr sz="2300" b="1" i="0">
+              <a:rPr sz="2180" b="1" i="0">
                 <a:solidFill>
                   <a:srgbClr val="0B5394"/>
                 </a:solidFill>
-                <a:latin typeface="Century Schoolbook"/>
+                <a:latin typeface="Lexend"/>
               </a:rPr>
               <a:t>3.</a:t>
             </a:r>
@@ -15664,7 +16313,7 @@
       </p:sp>
       <p:pic>
         <p:nvPicPr>
-          <p:cNvPr id="19" name="Picture 18" descr="d49f647ceaea2119.png"/>
+          <p:cNvPr id="19" name="Picture 18" descr="2ccaff4dbf2c8eb3.png"/>
           <p:cNvPicPr>
             <a:picLocks noChangeAspect="1"/>
           </p:cNvPicPr>
@@ -15678,8 +16327,8 @@
         </p:blipFill>
         <p:spPr>
           <a:xfrm>
-            <a:off x="1627632" y="2843783"/>
-            <a:ext cx="807720" cy="530352"/>
+            <a:off x="1627632" y="2837687"/>
+            <a:ext cx="841248" cy="545592"/>
           </a:xfrm>
           <a:prstGeom prst="rect">
             <a:avLst/>
@@ -15694,8 +16343,8 @@
         </p:nvSpPr>
         <p:spPr>
           <a:xfrm>
-            <a:off x="2435352" y="2880359"/>
-            <a:ext cx="1328762" cy="457200"/>
+            <a:off x="2468880" y="2881883"/>
+            <a:ext cx="1297468" cy="457200"/>
           </a:xfrm>
           <a:prstGeom prst="rect">
             <a:avLst/>
@@ -15710,11 +16359,11 @@
           <a:p>
             <a:pPr algn="l"/>
             <a:r>
-              <a:rPr sz="2300" b="0" i="0">
-                <a:solidFill>
-                  <a:srgbClr val="1A1A1A"/>
-                </a:solidFill>
-                <a:latin typeface="Century Schoolbook"/>
+              <a:rPr sz="2180" b="0" i="0">
+                <a:solidFill>
+                  <a:srgbClr val="1A1A1A"/>
+                </a:solidFill>
+                <a:latin typeface="Lexend"/>
               </a:rPr>
               <a:t>  when  </a:t>
             </a:r>
@@ -15723,7 +16372,7 @@
       </p:sp>
       <p:pic>
         <p:nvPicPr>
-          <p:cNvPr id="21" name="Picture 20" descr="a5e7f61095a4b877.png"/>
+          <p:cNvPr id="21" name="Picture 20" descr="bd1f822a1acce55c.png"/>
           <p:cNvPicPr>
             <a:picLocks noChangeAspect="1"/>
           </p:cNvPicPr>
@@ -15737,8 +16386,8 @@
         </p:blipFill>
         <p:spPr>
           <a:xfrm>
-            <a:off x="3626954" y="2993135"/>
-            <a:ext cx="633984" cy="231648"/>
+            <a:off x="3629188" y="2997707"/>
+            <a:ext cx="646176" cy="225552"/>
           </a:xfrm>
           <a:prstGeom prst="rect">
             <a:avLst/>
@@ -15753,8 +16402,8 @@
         </p:nvSpPr>
         <p:spPr>
           <a:xfrm>
-            <a:off x="4260938" y="2880359"/>
-            <a:ext cx="468561" cy="457200"/>
+            <a:off x="4275364" y="2881883"/>
+            <a:ext cx="453600" cy="457200"/>
           </a:xfrm>
           <a:prstGeom prst="rect">
             <a:avLst/>
@@ -15769,11 +16418,11 @@
           <a:p>
             <a:pPr algn="l"/>
             <a:r>
-              <a:rPr sz="2300" b="0" i="0">
-                <a:solidFill>
-                  <a:srgbClr val="1A1A1A"/>
-                </a:solidFill>
-                <a:latin typeface="Century Schoolbook"/>
+              <a:rPr sz="2180" b="0" i="0">
+                <a:solidFill>
+                  <a:srgbClr val="1A1A1A"/>
+                </a:solidFill>
+                <a:latin typeface="Lexend"/>
               </a:rPr>
               <a:t>,  </a:t>
             </a:r>
@@ -15782,7 +16431,7 @@
       </p:sp>
       <p:pic>
         <p:nvPicPr>
-          <p:cNvPr id="23" name="Picture 22" descr="cb41e881dfc7457b.png"/>
+          <p:cNvPr id="23" name="Picture 22" descr="ca3738318bc6ad64.png"/>
           <p:cNvPicPr>
             <a:picLocks noChangeAspect="1"/>
           </p:cNvPicPr>
@@ -15796,8 +16445,8 @@
         </p:blipFill>
         <p:spPr>
           <a:xfrm>
-            <a:off x="4592339" y="2991611"/>
-            <a:ext cx="633984" cy="234696"/>
+            <a:off x="4591805" y="2993135"/>
+            <a:ext cx="630936" cy="234696"/>
           </a:xfrm>
           <a:prstGeom prst="rect">
             <a:avLst/>
@@ -15812,8 +16461,8 @@
         </p:nvSpPr>
         <p:spPr>
           <a:xfrm>
-            <a:off x="5226323" y="2880359"/>
-            <a:ext cx="468561" cy="457200"/>
+            <a:off x="5222741" y="2881883"/>
+            <a:ext cx="453600" cy="457200"/>
           </a:xfrm>
           <a:prstGeom prst="rect">
             <a:avLst/>
@@ -15828,11 +16477,11 @@
           <a:p>
             <a:pPr algn="l"/>
             <a:r>
-              <a:rPr sz="2300" b="0" i="0">
-                <a:solidFill>
-                  <a:srgbClr val="1A1A1A"/>
-                </a:solidFill>
-                <a:latin typeface="Century Schoolbook"/>
+              <a:rPr sz="2180" b="0" i="0">
+                <a:solidFill>
+                  <a:srgbClr val="1A1A1A"/>
+                </a:solidFill>
+                <a:latin typeface="Lexend"/>
               </a:rPr>
               <a:t>,  </a:t>
             </a:r>
@@ -15841,7 +16490,7 @@
       </p:sp>
       <p:pic>
         <p:nvPicPr>
-          <p:cNvPr id="25" name="Picture 24" descr="e8d487b1e3f985f0.png"/>
+          <p:cNvPr id="25" name="Picture 24" descr="26463fb98544f316.png"/>
           <p:cNvPicPr>
             <a:picLocks noChangeAspect="1"/>
           </p:cNvPicPr>
@@ -15855,8 +16504,8 @@
         </p:blipFill>
         <p:spPr>
           <a:xfrm>
-            <a:off x="5557725" y="2991611"/>
-            <a:ext cx="603504" cy="234696"/>
+            <a:off x="5539182" y="3000755"/>
+            <a:ext cx="609600" cy="219456"/>
           </a:xfrm>
           <a:prstGeom prst="rect">
             <a:avLst/>
@@ -15871,7 +16520,7 @@
         </p:nvSpPr>
         <p:spPr>
           <a:xfrm>
-            <a:off x="960120" y="3534156"/>
+            <a:off x="960120" y="3543299"/>
             <a:ext cx="548640" cy="457200"/>
           </a:xfrm>
           <a:prstGeom prst="rect">
@@ -15887,11 +16536,11 @@
           <a:p>
             <a:pPr algn="l"/>
             <a:r>
-              <a:rPr sz="2300" b="1" i="0">
+              <a:rPr sz="2180" b="1" i="0">
                 <a:solidFill>
                   <a:srgbClr val="0B5394"/>
                 </a:solidFill>
-                <a:latin typeface="Century Schoolbook"/>
+                <a:latin typeface="Lexend"/>
               </a:rPr>
               <a:t>4.</a:t>
             </a:r>
@@ -15906,8 +16555,8 @@
         </p:nvSpPr>
         <p:spPr>
           <a:xfrm>
-            <a:off x="1554480" y="3534156"/>
-            <a:ext cx="9509819" cy="457200"/>
+            <a:off x="1554480" y="3543299"/>
+            <a:ext cx="9544010" cy="457200"/>
           </a:xfrm>
           <a:prstGeom prst="rect">
             <a:avLst/>
@@ -15922,11 +16571,11 @@
           <a:p>
             <a:pPr algn="l"/>
             <a:r>
-              <a:rPr sz="2300" b="0" i="0">
-                <a:solidFill>
-                  <a:srgbClr val="1A1A1A"/>
-                </a:solidFill>
-                <a:latin typeface="Century Schoolbook"/>
+              <a:rPr sz="2180" b="0" i="0">
+                <a:solidFill>
+                  <a:srgbClr val="1A1A1A"/>
+                </a:solidFill>
+                <a:latin typeface="Lexend"/>
               </a:rPr>
               <a:t>A square room of side 10 feet is carpeted at 2.65 dollars a square </a:t>
             </a:r>
@@ -15941,8 +16590,8 @@
         </p:nvSpPr>
         <p:spPr>
           <a:xfrm>
-            <a:off x="1554480" y="3973067"/>
-            <a:ext cx="8183023" cy="457200"/>
+            <a:off x="1554480" y="3982211"/>
+            <a:ext cx="8093070" cy="457200"/>
           </a:xfrm>
           <a:prstGeom prst="rect">
             <a:avLst/>
@@ -15957,11 +16606,11 @@
           <a:p>
             <a:pPr algn="l"/>
             <a:r>
-              <a:rPr sz="2300" b="0" i="0">
-                <a:solidFill>
-                  <a:srgbClr val="1A1A1A"/>
-                </a:solidFill>
-                <a:latin typeface="Century Schoolbook"/>
+              <a:rPr sz="2180" b="0" i="0">
+                <a:solidFill>
+                  <a:srgbClr val="1A1A1A"/>
+                </a:solidFill>
+                <a:latin typeface="Lexend"/>
               </a:rPr>
               <a:t>foot, with a flat 55 dollars for fitting. Find the total cost.</a:t>
             </a:r>
@@ -15976,7 +16625,7 @@
         </p:nvSpPr>
         <p:spPr>
           <a:xfrm>
-            <a:off x="960120" y="4567427"/>
+            <a:off x="960120" y="4576571"/>
             <a:ext cx="548640" cy="457200"/>
           </a:xfrm>
           <a:prstGeom prst="rect">
@@ -15992,11 +16641,11 @@
           <a:p>
             <a:pPr algn="l"/>
             <a:r>
-              <a:rPr sz="2300" b="1" i="0">
+              <a:rPr sz="2180" b="1" i="0">
                 <a:solidFill>
                   <a:srgbClr val="0B5394"/>
                 </a:solidFill>
-                <a:latin typeface="Century Schoolbook"/>
+                <a:latin typeface="Lexend"/>
               </a:rPr>
               <a:t>5.</a:t>
             </a:r>
@@ -16005,7 +16654,7 @@
       </p:sp>
       <p:pic>
         <p:nvPicPr>
-          <p:cNvPr id="30" name="Picture 29" descr="191a9ee55d79324d.png"/>
+          <p:cNvPr id="30" name="Picture 29" descr="51cdd467e13c212c.png"/>
           <p:cNvPicPr>
             <a:picLocks noChangeAspect="1"/>
           </p:cNvPicPr>
@@ -16019,8 +16668,8 @@
         </p:blipFill>
         <p:spPr>
           <a:xfrm>
-            <a:off x="1627632" y="4625339"/>
-            <a:ext cx="1591056" cy="341376"/>
+            <a:off x="1627632" y="4631436"/>
+            <a:ext cx="1627632" cy="347472"/>
           </a:xfrm>
           <a:prstGeom prst="rect">
             <a:avLst/>
@@ -16035,8 +16684,8 @@
         </p:nvSpPr>
         <p:spPr>
           <a:xfrm>
-            <a:off x="3218688" y="4567427"/>
-            <a:ext cx="1328762" cy="457200"/>
+            <a:off x="3255264" y="4576571"/>
+            <a:ext cx="1297468" cy="457200"/>
           </a:xfrm>
           <a:prstGeom prst="rect">
             <a:avLst/>
@@ -16051,11 +16700,11 @@
           <a:p>
             <a:pPr algn="l"/>
             <a:r>
-              <a:rPr sz="2300" b="0" i="0">
-                <a:solidFill>
-                  <a:srgbClr val="1A1A1A"/>
-                </a:solidFill>
-                <a:latin typeface="Century Schoolbook"/>
+              <a:rPr sz="2180" b="0" i="0">
+                <a:solidFill>
+                  <a:srgbClr val="1A1A1A"/>
+                </a:solidFill>
+                <a:latin typeface="Lexend"/>
               </a:rPr>
               <a:t>  when  </a:t>
             </a:r>
@@ -16064,7 +16713,7 @@
       </p:sp>
       <p:pic>
         <p:nvPicPr>
-          <p:cNvPr id="32" name="Picture 31" descr="4d3d644cd96c16e2.png"/>
+          <p:cNvPr id="32" name="Picture 31" descr="213bf21424f7f3b9.png"/>
           <p:cNvPicPr>
             <a:picLocks noChangeAspect="1"/>
           </p:cNvPicPr>
@@ -16078,8 +16727,8 @@
         </p:blipFill>
         <p:spPr>
           <a:xfrm>
-            <a:off x="4410290" y="4681727"/>
-            <a:ext cx="637032" cy="228600"/>
+            <a:off x="4415572" y="4695444"/>
+            <a:ext cx="646176" cy="219456"/>
           </a:xfrm>
           <a:prstGeom prst="rect">
             <a:avLst/>
@@ -16094,8 +16743,8 @@
         </p:nvSpPr>
         <p:spPr>
           <a:xfrm>
-            <a:off x="5047322" y="4567427"/>
-            <a:ext cx="1093755" cy="457200"/>
+            <a:off x="5061748" y="4576571"/>
+            <a:ext cx="1087500" cy="457200"/>
           </a:xfrm>
           <a:prstGeom prst="rect">
             <a:avLst/>
@@ -16110,11 +16759,11 @@
           <a:p>
             <a:pPr algn="l"/>
             <a:r>
-              <a:rPr sz="2300" b="0" i="0">
-                <a:solidFill>
-                  <a:srgbClr val="1A1A1A"/>
-                </a:solidFill>
-                <a:latin typeface="Century Schoolbook"/>
+              <a:rPr sz="2180" b="0" i="0">
+                <a:solidFill>
+                  <a:srgbClr val="1A1A1A"/>
+                </a:solidFill>
+                <a:latin typeface="Lexend"/>
               </a:rPr>
               <a:t>  and  </a:t>
             </a:r>
@@ -16123,7 +16772,7 @@
       </p:sp>
       <p:pic>
         <p:nvPicPr>
-          <p:cNvPr id="34" name="Picture 33" descr="4298e77953559286.png"/>
+          <p:cNvPr id="34" name="Picture 33" descr="393881ab0a530490.png"/>
           <p:cNvPicPr>
             <a:picLocks noChangeAspect="1"/>
           </p:cNvPicPr>
@@ -16137,8 +16786,8 @@
         </p:blipFill>
         <p:spPr>
           <a:xfrm>
-            <a:off x="6003918" y="4649724"/>
-            <a:ext cx="609600" cy="292608"/>
+            <a:off x="6012089" y="4657344"/>
+            <a:ext cx="612648" cy="295656"/>
           </a:xfrm>
           <a:prstGeom prst="rect">
             <a:avLst/>
@@ -16153,7 +16802,7 @@
         </p:nvSpPr>
         <p:spPr>
           <a:xfrm>
-            <a:off x="960120" y="5161788"/>
+            <a:off x="960120" y="5170931"/>
             <a:ext cx="548640" cy="457200"/>
           </a:xfrm>
           <a:prstGeom prst="rect">
@@ -16169,11 +16818,11 @@
           <a:p>
             <a:pPr algn="l"/>
             <a:r>
-              <a:rPr sz="2300" b="1" i="0">
+              <a:rPr sz="2180" b="1" i="0">
                 <a:solidFill>
                   <a:srgbClr val="0B5394"/>
                 </a:solidFill>
-                <a:latin typeface="Century Schoolbook"/>
+                <a:latin typeface="Lexend"/>
               </a:rPr>
               <a:t>6.</a:t>
             </a:r>
@@ -16188,8 +16837,8 @@
         </p:nvSpPr>
         <p:spPr>
           <a:xfrm>
-            <a:off x="1554480" y="5161788"/>
-            <a:ext cx="9867929" cy="457200"/>
+            <a:off x="1554480" y="5170931"/>
+            <a:ext cx="9851194" cy="457200"/>
           </a:xfrm>
           <a:prstGeom prst="rect">
             <a:avLst/>
@@ -16204,11 +16853,11 @@
           <a:p>
             <a:pPr algn="l"/>
             <a:r>
-              <a:rPr sz="2300" b="0" i="0">
-                <a:solidFill>
-                  <a:srgbClr val="1A1A1A"/>
-                </a:solidFill>
-                <a:latin typeface="Century Schoolbook"/>
+              <a:rPr sz="2180" b="0" i="0">
+                <a:solidFill>
+                  <a:srgbClr val="1A1A1A"/>
+                </a:solidFill>
+                <a:latin typeface="Lexend"/>
               </a:rPr>
               <a:t>A gym charges 25 dollars to join plus 8 dollars for each of 6 classes. </a:t>
             </a:r>
@@ -16223,8 +16872,8 @@
         </p:nvSpPr>
         <p:spPr>
           <a:xfrm>
-            <a:off x="1554480" y="5600700"/>
-            <a:ext cx="2903711" cy="457200"/>
+            <a:off x="1554480" y="5609844"/>
+            <a:ext cx="2861161" cy="457200"/>
           </a:xfrm>
           <a:prstGeom prst="rect">
             <a:avLst/>
@@ -16239,11 +16888,11 @@
           <a:p>
             <a:pPr algn="l"/>
             <a:r>
-              <a:rPr sz="2300" b="0" i="0">
-                <a:solidFill>
-                  <a:srgbClr val="1A1A1A"/>
-                </a:solidFill>
-                <a:latin typeface="Century Schoolbook"/>
+              <a:rPr sz="2180" b="0" i="0">
+                <a:solidFill>
+                  <a:srgbClr val="1A1A1A"/>
+                </a:solidFill>
+                <a:latin typeface="Lexend"/>
               </a:rPr>
               <a:t>Find the total cost.</a:t>
             </a:r>
@@ -16292,11 +16941,11 @@
           <a:p>
             <a:pPr algn="l"/>
             <a:r>
-              <a:rPr sz="3600" b="1" i="0">
-                <a:solidFill>
-                  <a:srgbClr val="1A1A1A"/>
-                </a:solidFill>
-                <a:latin typeface="Century Schoolbook"/>
+              <a:rPr sz="3420" b="1" i="0">
+                <a:solidFill>
+                  <a:srgbClr val="1A1A1A"/>
+                </a:solidFill>
+                <a:latin typeface="Lexend"/>
               </a:rPr>
               <a:t>IXL</a:t>
             </a:r>
@@ -16432,11 +17081,11 @@
           <a:p>
             <a:pPr algn="l"/>
             <a:r>
-              <a:rPr sz="1100" b="0" i="1">
+              <a:rPr sz="1040" b="0" i="0">
                 <a:solidFill>
                   <a:srgbClr val="6B6B6B"/>
                 </a:solidFill>
-                <a:latin typeface="Century Schoolbook"/>
+                <a:latin typeface="Lexend"/>
               </a:rPr>
               <a:t>Grade 7 Accelerated · Unit 4 · Lessons 7–8 — Real-World Order of Operations</a:t>
             </a:r>
@@ -16467,11 +17116,11 @@
           <a:p>
             <a:pPr algn="r"/>
             <a:r>
-              <a:rPr sz="1100" b="0" i="0">
+              <a:rPr sz="1040" b="0" i="0">
                 <a:solidFill>
                   <a:srgbClr val="6B6B6B"/>
                 </a:solidFill>
-                <a:latin typeface="Century Schoolbook"/>
+                <a:latin typeface="Lexend"/>
               </a:rPr>
               <a:t>34</a:t>
             </a:r>
@@ -16502,11 +17151,11 @@
           <a:p>
             <a:pPr algn="l"/>
             <a:r>
-              <a:rPr sz="2100" b="1" i="0">
+              <a:rPr sz="1989" b="1" i="0">
                 <a:solidFill>
                   <a:srgbClr val="0B5394"/>
                 </a:solidFill>
-                <a:latin typeface="Century Schoolbook"/>
+                <a:latin typeface="Lexend"/>
               </a:rPr>
               <a:t>1.</a:t>
             </a:r>
@@ -16537,11 +17186,11 @@
           <a:p>
             <a:pPr algn="l"/>
             <a:r>
-              <a:rPr sz="2100" b="0" i="0">
-                <a:solidFill>
-                  <a:srgbClr val="1A1A1A"/>
-                </a:solidFill>
-                <a:latin typeface="Century Schoolbook"/>
+              <a:rPr sz="1989" b="0" i="0">
+                <a:solidFill>
+                  <a:srgbClr val="1A1A1A"/>
+                </a:solidFill>
+                <a:latin typeface="Lexend"/>
               </a:rPr>
               <a:t>Open IXL and start today's skills.</a:t>
             </a:r>
@@ -16572,11 +17221,11 @@
           <a:p>
             <a:pPr algn="l"/>
             <a:r>
-              <a:rPr sz="2100" b="1" i="0">
+              <a:rPr sz="1989" b="1" i="0">
                 <a:solidFill>
                   <a:srgbClr val="0B5394"/>
                 </a:solidFill>
-                <a:latin typeface="Century Schoolbook"/>
+                <a:latin typeface="Lexend"/>
               </a:rPr>
               <a:t>2.</a:t>
             </a:r>
@@ -16607,11 +17256,11 @@
           <a:p>
             <a:pPr algn="l"/>
             <a:r>
-              <a:rPr sz="2100" b="0" i="0">
-                <a:solidFill>
-                  <a:srgbClr val="1A1A1A"/>
-                </a:solidFill>
-                <a:latin typeface="Century Schoolbook"/>
+              <a:rPr sz="1989" b="0" i="0">
+                <a:solidFill>
+                  <a:srgbClr val="1A1A1A"/>
+                </a:solidFill>
+                <a:latin typeface="Lexend"/>
               </a:rPr>
               <a:t>Work on paper where the question needs work. The answer box does not show it.</a:t>
             </a:r>
@@ -16642,11 +17291,11 @@
           <a:p>
             <a:pPr algn="l"/>
             <a:r>
-              <a:rPr sz="2100" b="1" i="0">
+              <a:rPr sz="1989" b="1" i="0">
                 <a:solidFill>
                   <a:srgbClr val="0B5394"/>
                 </a:solidFill>
-                <a:latin typeface="Century Schoolbook"/>
+                <a:latin typeface="Lexend"/>
               </a:rPr>
               <a:t>3.</a:t>
             </a:r>
@@ -16677,11 +17326,11 @@
           <a:p>
             <a:pPr algn="l"/>
             <a:r>
-              <a:rPr sz="2100" b="0" i="0">
-                <a:solidFill>
-                  <a:srgbClr val="1A1A1A"/>
-                </a:solidFill>
-                <a:latin typeface="Century Schoolbook"/>
+              <a:rPr sz="1989" b="0" i="0">
+                <a:solidFill>
+                  <a:srgbClr val="1A1A1A"/>
+                </a:solidFill>
+                <a:latin typeface="Lexend"/>
               </a:rPr>
               <a:t>Every skill listed is required, to a SmartScore of 67. Due at the start of the next class.</a:t>
             </a:r>
@@ -16712,11 +17361,11 @@
           <a:p>
             <a:pPr algn="l"/>
             <a:r>
-              <a:rPr sz="2100" b="1" i="0">
-                <a:solidFill>
-                  <a:srgbClr val="1A1A1A"/>
-                </a:solidFill>
-                <a:latin typeface="Century Schoolbook"/>
+              <a:rPr sz="1989" b="1" i="0">
+                <a:solidFill>
+                  <a:srgbClr val="1A1A1A"/>
+                </a:solidFill>
+                <a:latin typeface="Lexend"/>
               </a:rPr>
               <a:t>Today's skills — all required</a:t>
             </a:r>
@@ -16747,11 +17396,11 @@
           <a:p>
             <a:pPr algn="l"/>
             <a:r>
-              <a:rPr sz="1900" b="0" i="0">
-                <a:solidFill>
-                  <a:srgbClr val="1A1A1A"/>
-                </a:solidFill>
-                <a:latin typeface="Century Schoolbook"/>
+              <a:rPr sz="1810" b="0" i="0">
+                <a:solidFill>
+                  <a:srgbClr val="1A1A1A"/>
+                </a:solidFill>
+                <a:latin typeface="Lexend"/>
               </a:rPr>
               <a:t>Evaluate variable expressions: word problems — DPG</a:t>
             </a:r>
@@ -16800,11 +17449,11 @@
           <a:p>
             <a:pPr algn="l"/>
             <a:r>
-              <a:rPr sz="3600" b="1" i="0">
-                <a:solidFill>
-                  <a:srgbClr val="1A1A1A"/>
-                </a:solidFill>
-                <a:latin typeface="Century Schoolbook"/>
+              <a:rPr sz="3420" b="1" i="0">
+                <a:solidFill>
+                  <a:srgbClr val="1A1A1A"/>
+                </a:solidFill>
+                <a:latin typeface="Lexend"/>
               </a:rPr>
               <a:t>Notes</a:t>
             </a:r>
@@ -16940,11 +17589,11 @@
           <a:p>
             <a:pPr algn="l"/>
             <a:r>
-              <a:rPr sz="1100" b="0" i="1">
+              <a:rPr sz="1040" b="0" i="0">
                 <a:solidFill>
                   <a:srgbClr val="6B6B6B"/>
                 </a:solidFill>
-                <a:latin typeface="Century Schoolbook"/>
+                <a:latin typeface="Lexend"/>
               </a:rPr>
               <a:t>Grade 7 Accelerated · Unit 4 · Lessons 7–8 — Real-World Order of Operations</a:t>
             </a:r>
@@ -16975,11 +17624,11 @@
           <a:p>
             <a:pPr algn="r"/>
             <a:r>
-              <a:rPr sz="1100" b="0" i="0">
+              <a:rPr sz="1040" b="0" i="0">
                 <a:solidFill>
                   <a:srgbClr val="6B6B6B"/>
                 </a:solidFill>
-                <a:latin typeface="Century Schoolbook"/>
+                <a:latin typeface="Lexend"/>
               </a:rPr>
               <a:t>4</a:t>
             </a:r>
@@ -17010,11 +17659,11 @@
           <a:p>
             <a:pPr algn="l"/>
             <a:r>
-              <a:rPr sz="2500" b="1" i="0">
-                <a:solidFill>
-                  <a:srgbClr val="1A1A1A"/>
-                </a:solidFill>
-                <a:latin typeface="Century Schoolbook"/>
+              <a:rPr sz="2380" b="1" i="0">
+                <a:solidFill>
+                  <a:srgbClr val="1A1A1A"/>
+                </a:solidFill>
+                <a:latin typeface="Lexend"/>
               </a:rPr>
               <a:t>I.  Substituting: the value goes in parentheses</a:t>
             </a:r>
@@ -17058,7 +17707,7 @@
       </p:cxnSp>
       <p:pic>
         <p:nvPicPr>
-          <p:cNvPr id="10" name="Picture 9" descr="0adc02d1493e5ae4.png"/>
+          <p:cNvPr id="10" name="Picture 9" descr="4ee9fb59b86866b6.png"/>
           <p:cNvPicPr>
             <a:picLocks noChangeAspect="1"/>
           </p:cNvPicPr>
@@ -17072,8 +17721,8 @@
         </p:blipFill>
         <p:spPr>
           <a:xfrm>
-            <a:off x="2865665" y="1993392"/>
-            <a:ext cx="1557528" cy="673608"/>
+            <a:off x="2866633" y="1993392"/>
+            <a:ext cx="1600200" cy="670560"/>
           </a:xfrm>
           <a:prstGeom prst="rect">
             <a:avLst/>
@@ -17088,8 +17737,8 @@
         </p:nvSpPr>
         <p:spPr>
           <a:xfrm>
-            <a:off x="4423193" y="2101596"/>
-            <a:ext cx="1524855" cy="457200"/>
+            <a:off x="4466833" y="2100072"/>
+            <a:ext cx="1452983" cy="457200"/>
           </a:xfrm>
           <a:prstGeom prst="rect">
             <a:avLst/>
@@ -17104,11 +17753,11 @@
           <a:p>
             <a:pPr algn="l"/>
             <a:r>
-              <a:rPr sz="2600" b="0" i="0">
-                <a:solidFill>
-                  <a:srgbClr val="1A1A1A"/>
-                </a:solidFill>
-                <a:latin typeface="Century Schoolbook"/>
+              <a:rPr sz="2470" b="0" i="0">
+                <a:solidFill>
+                  <a:srgbClr val="1A1A1A"/>
+                </a:solidFill>
+                <a:latin typeface="Lexend"/>
               </a:rPr>
               <a:t>   with   </a:t>
             </a:r>
@@ -17117,7 +17766,7 @@
       </p:sp>
       <p:pic>
         <p:nvPicPr>
-          <p:cNvPr id="12" name="Picture 11" descr="c5ae5c8435316fdc.png"/>
+          <p:cNvPr id="12" name="Picture 11" descr="c40d2caa36f208bf.png"/>
           <p:cNvPicPr>
             <a:picLocks noChangeAspect="1"/>
           </p:cNvPicPr>
@@ -17131,8 +17780,8 @@
         </p:blipFill>
         <p:spPr>
           <a:xfrm>
-            <a:off x="5810888" y="2186940"/>
-            <a:ext cx="1082040" cy="286512"/>
+            <a:off x="5782656" y="2188464"/>
+            <a:ext cx="1124712" cy="280416"/>
           </a:xfrm>
           <a:prstGeom prst="rect">
             <a:avLst/>
@@ -17147,8 +17796,8 @@
         </p:nvSpPr>
         <p:spPr>
           <a:xfrm>
-            <a:off x="6892928" y="2101596"/>
-            <a:ext cx="1403434" cy="457200"/>
+            <a:off x="6907368" y="2100072"/>
+            <a:ext cx="1388139" cy="457200"/>
           </a:xfrm>
           <a:prstGeom prst="rect">
             <a:avLst/>
@@ -17163,11 +17812,11 @@
           <a:p>
             <a:pPr algn="l"/>
             <a:r>
-              <a:rPr sz="2600" b="0" i="0">
-                <a:solidFill>
-                  <a:srgbClr val="1A1A1A"/>
-                </a:solidFill>
-                <a:latin typeface="Century Schoolbook"/>
+              <a:rPr sz="2470" b="0" i="0">
+                <a:solidFill>
+                  <a:srgbClr val="1A1A1A"/>
+                </a:solidFill>
+                <a:latin typeface="Lexend"/>
               </a:rPr>
               <a:t>   and   </a:t>
             </a:r>
@@ -17176,7 +17825,7 @@
       </p:sp>
       <p:pic>
         <p:nvPicPr>
-          <p:cNvPr id="14" name="Picture 13" descr="93a35f9de365ddad.png"/>
+          <p:cNvPr id="14" name="Picture 13" descr="039a12261cb8388f.png"/>
           <p:cNvPicPr>
             <a:picLocks noChangeAspect="1"/>
           </p:cNvPicPr>
@@ -17190,8 +17839,8 @@
         </p:blipFill>
         <p:spPr>
           <a:xfrm>
-            <a:off x="8159202" y="2188464"/>
-            <a:ext cx="966216" cy="283464"/>
+            <a:off x="8158348" y="2189988"/>
+            <a:ext cx="987552" cy="277368"/>
           </a:xfrm>
           <a:prstGeom prst="rect">
             <a:avLst/>
@@ -17206,8 +17855,8 @@
         </p:nvSpPr>
         <p:spPr>
           <a:xfrm>
-            <a:off x="9125418" y="2101596"/>
-            <a:ext cx="307595" cy="457200"/>
+            <a:off x="9145900" y="2100072"/>
+            <a:ext cx="286146" cy="457200"/>
           </a:xfrm>
           <a:prstGeom prst="rect">
             <a:avLst/>
@@ -17222,11 +17871,11 @@
           <a:p>
             <a:pPr algn="l"/>
             <a:r>
-              <a:rPr sz="2600" b="0" i="0">
-                <a:solidFill>
-                  <a:srgbClr val="1A1A1A"/>
-                </a:solidFill>
-                <a:latin typeface="Century Schoolbook"/>
+              <a:rPr sz="2470" b="0" i="0">
+                <a:solidFill>
+                  <a:srgbClr val="1A1A1A"/>
+                </a:solidFill>
+                <a:latin typeface="Lexend"/>
               </a:rPr>
               <a:t>:</a:t>
             </a:r>
@@ -17235,7 +17884,7 @@
       </p:sp>
       <p:pic>
         <p:nvPicPr>
-          <p:cNvPr id="16" name="Picture 15" descr="d74aec1c3ec8a811.png"/>
+          <p:cNvPr id="16" name="Picture 15" descr="8d85e48358ee9db4.png"/>
           <p:cNvPicPr>
             <a:picLocks noChangeAspect="1"/>
           </p:cNvPicPr>
@@ -17249,8 +17898,8 @@
         </p:blipFill>
         <p:spPr>
           <a:xfrm>
-            <a:off x="2785734" y="2941320"/>
-            <a:ext cx="5285232" cy="673608"/>
+            <a:off x="2682067" y="2938272"/>
+            <a:ext cx="5516880" cy="670560"/>
           </a:xfrm>
           <a:prstGeom prst="rect">
             <a:avLst/>
@@ -17265,8 +17914,8 @@
         </p:nvSpPr>
         <p:spPr>
           <a:xfrm>
-            <a:off x="8070966" y="3049524"/>
-            <a:ext cx="1441979" cy="457200"/>
+            <a:off x="8198947" y="3044952"/>
+            <a:ext cx="1417664" cy="457200"/>
           </a:xfrm>
           <a:prstGeom prst="rect">
             <a:avLst/>
@@ -17281,11 +17930,11 @@
           <a:p>
             <a:pPr algn="l"/>
             <a:r>
-              <a:rPr sz="2600" b="0" i="0">
-                <a:solidFill>
-                  <a:srgbClr val="1A1A1A"/>
-                </a:solidFill>
-                <a:latin typeface="Century Schoolbook"/>
+              <a:rPr sz="2470" b="0" i="0">
+                <a:solidFill>
+                  <a:srgbClr val="1A1A1A"/>
+                </a:solidFill>
+                <a:latin typeface="Lexend"/>
               </a:rPr>
               <a:t>   joules</a:t>
             </a:r>
@@ -17300,8 +17949,8 @@
         </p:nvSpPr>
         <p:spPr>
           <a:xfrm>
-            <a:off x="1760315" y="3866388"/>
-            <a:ext cx="1233003" cy="457200"/>
+            <a:off x="1931531" y="3860292"/>
+            <a:ext cx="1173625" cy="457200"/>
           </a:xfrm>
           <a:prstGeom prst="rect">
             <a:avLst/>
@@ -17316,11 +17965,11 @@
           <a:p>
             <a:pPr algn="l"/>
             <a:r>
-              <a:rPr sz="2600" b="0" i="0">
-                <a:solidFill>
-                  <a:srgbClr val="1A1A1A"/>
-                </a:solidFill>
-                <a:latin typeface="Century Schoolbook"/>
+              <a:rPr sz="2470" b="0" i="0">
+                <a:solidFill>
+                  <a:srgbClr val="1A1A1A"/>
+                </a:solidFill>
+                <a:latin typeface="Lexend"/>
               </a:rPr>
               <a:t>with   </a:t>
             </a:r>
@@ -17329,7 +17978,7 @@
       </p:sp>
       <p:pic>
         <p:nvPicPr>
-          <p:cNvPr id="19" name="Picture 18" descr="470a2cb670592e03.png"/>
+          <p:cNvPr id="19" name="Picture 18" descr="baf1e744513c75c2.png"/>
           <p:cNvPicPr>
             <a:picLocks noChangeAspect="1"/>
           </p:cNvPicPr>
@@ -17343,8 +17992,8 @@
         </p:blipFill>
         <p:spPr>
           <a:xfrm>
-            <a:off x="2856159" y="3954780"/>
-            <a:ext cx="1063752" cy="280416"/>
+            <a:off x="2967997" y="3953256"/>
+            <a:ext cx="1024128" cy="271272"/>
           </a:xfrm>
           <a:prstGeom prst="rect">
             <a:avLst/>
@@ -17359,8 +18008,8 @@
         </p:nvSpPr>
         <p:spPr>
           <a:xfrm>
-            <a:off x="3919911" y="3866388"/>
-            <a:ext cx="696731" cy="457200"/>
+            <a:off x="3992125" y="3860292"/>
+            <a:ext cx="658622" cy="457200"/>
           </a:xfrm>
           <a:prstGeom prst="rect">
             <a:avLst/>
@@ -17375,11 +18024,11 @@
           <a:p>
             <a:pPr algn="l"/>
             <a:r>
-              <a:rPr sz="2600" b="0" i="0">
-                <a:solidFill>
-                  <a:srgbClr val="1A1A1A"/>
-                </a:solidFill>
-                <a:latin typeface="Century Schoolbook"/>
+              <a:rPr sz="2470" b="0" i="0">
+                <a:solidFill>
+                  <a:srgbClr val="1A1A1A"/>
+                </a:solidFill>
+                <a:latin typeface="Lexend"/>
               </a:rPr>
               <a:t>:    </a:t>
             </a:r>
@@ -17388,7 +18037,7 @@
       </p:sp>
       <p:pic>
         <p:nvPicPr>
-          <p:cNvPr id="21" name="Picture 20" descr="8b91d3b79ed4a5fa.png"/>
+          <p:cNvPr id="21" name="Picture 20" descr="37650f0ab64081b1.png"/>
           <p:cNvPicPr>
             <a:picLocks noChangeAspect="1"/>
           </p:cNvPicPr>
@@ -17402,8 +18051,8 @@
         </p:blipFill>
         <p:spPr>
           <a:xfrm>
-            <a:off x="4479482" y="3892296"/>
-            <a:ext cx="2484120" cy="405384"/>
+            <a:off x="4513587" y="3883152"/>
+            <a:ext cx="2410968" cy="411480"/>
           </a:xfrm>
           <a:prstGeom prst="rect">
             <a:avLst/>
@@ -17418,8 +18067,8 @@
         </p:nvSpPr>
         <p:spPr>
           <a:xfrm>
-            <a:off x="6963602" y="3866388"/>
-            <a:ext cx="1880073" cy="457200"/>
+            <a:off x="6924555" y="3860292"/>
+            <a:ext cx="1854584" cy="457200"/>
           </a:xfrm>
           <a:prstGeom prst="rect">
             <a:avLst/>
@@ -17434,11 +18083,11 @@
           <a:p>
             <a:pPr algn="l"/>
             <a:r>
-              <a:rPr sz="2600" b="0" i="0">
-                <a:solidFill>
-                  <a:srgbClr val="1A1A1A"/>
-                </a:solidFill>
-                <a:latin typeface="Century Schoolbook"/>
+              <a:rPr sz="2470" b="0" i="0">
+                <a:solidFill>
+                  <a:srgbClr val="1A1A1A"/>
+                </a:solidFill>
+                <a:latin typeface="Lexend"/>
               </a:rPr>
               <a:t>,    never   </a:t>
             </a:r>
@@ -17447,7 +18096,7 @@
       </p:sp>
       <p:pic>
         <p:nvPicPr>
-          <p:cNvPr id="23" name="Picture 22" descr="e047b6631084f988.png"/>
+          <p:cNvPr id="23" name="Picture 22" descr="9d75179d4c71dcbd.png"/>
           <p:cNvPicPr>
             <a:picLocks noChangeAspect="1"/>
           </p:cNvPicPr>
@@ -17461,8 +18110,8 @@
         </p:blipFill>
         <p:spPr>
           <a:xfrm>
-            <a:off x="8706516" y="3924300"/>
-            <a:ext cx="1694688" cy="341376"/>
+            <a:off x="8641980" y="3919728"/>
+            <a:ext cx="1588008" cy="338328"/>
           </a:xfrm>
           <a:prstGeom prst="rect">
             <a:avLst/>
@@ -17477,7 +18126,7 @@
         </p:nvSpPr>
         <p:spPr>
           <a:xfrm>
-            <a:off x="987552" y="4639056"/>
+            <a:off x="987552" y="4632960"/>
             <a:ext cx="10131551" cy="950976"/>
           </a:xfrm>
           <a:prstGeom prst="rect">
@@ -17493,11 +18142,11 @@
           <a:p>
             <a:pPr algn="l"/>
             <a:r>
-              <a:rPr sz="2300" b="1" i="0">
-                <a:solidFill>
-                  <a:srgbClr val="1A1A1A"/>
-                </a:solidFill>
-                <a:latin typeface="Century Schoolbook"/>
+              <a:rPr sz="2180" b="1" i="0">
+                <a:solidFill>
+                  <a:srgbClr val="1A1A1A"/>
+                </a:solidFill>
+                <a:latin typeface="Lexend"/>
               </a:rPr>
               <a:t>Substitute in parentheses, then evaluate by the structure — powers before products.</a:t>
             </a:r>
@@ -17546,11 +18195,11 @@
           <a:p>
             <a:pPr algn="l"/>
             <a:r>
-              <a:rPr sz="3600" b="1" i="0">
-                <a:solidFill>
-                  <a:srgbClr val="1A1A1A"/>
-                </a:solidFill>
-                <a:latin typeface="Century Schoolbook"/>
+              <a:rPr sz="3420" b="1" i="0">
+                <a:solidFill>
+                  <a:srgbClr val="1A1A1A"/>
+                </a:solidFill>
+                <a:latin typeface="Lexend"/>
               </a:rPr>
               <a:t>Notes</a:t>
             </a:r>
@@ -17686,11 +18335,11 @@
           <a:p>
             <a:pPr algn="l"/>
             <a:r>
-              <a:rPr sz="1100" b="0" i="1">
+              <a:rPr sz="1040" b="0" i="0">
                 <a:solidFill>
                   <a:srgbClr val="6B6B6B"/>
                 </a:solidFill>
-                <a:latin typeface="Century Schoolbook"/>
+                <a:latin typeface="Lexend"/>
               </a:rPr>
               <a:t>Grade 7 Accelerated · Unit 4 · Lessons 7–8 — Real-World Order of Operations</a:t>
             </a:r>
@@ -17721,11 +18370,11 @@
           <a:p>
             <a:pPr algn="r"/>
             <a:r>
-              <a:rPr sz="1100" b="0" i="0">
+              <a:rPr sz="1040" b="0" i="0">
                 <a:solidFill>
                   <a:srgbClr val="6B6B6B"/>
                 </a:solidFill>
-                <a:latin typeface="Century Schoolbook"/>
+                <a:latin typeface="Lexend"/>
               </a:rPr>
               <a:t>5</a:t>
             </a:r>
@@ -17756,11 +18405,11 @@
           <a:p>
             <a:pPr algn="l"/>
             <a:r>
-              <a:rPr sz="2500" b="1" i="0">
-                <a:solidFill>
-                  <a:srgbClr val="1A1A1A"/>
-                </a:solidFill>
-                <a:latin typeface="Century Schoolbook"/>
+              <a:rPr sz="2380" b="1" i="0">
+                <a:solidFill>
+                  <a:srgbClr val="1A1A1A"/>
+                </a:solidFill>
+                <a:latin typeface="Lexend"/>
               </a:rPr>
               <a:t>II.  Key words do not decide the operation</a:t>
             </a:r>
@@ -17810,8 +18459,8 @@
         </p:nvSpPr>
         <p:spPr>
           <a:xfrm>
-            <a:off x="2219924" y="1970532"/>
-            <a:ext cx="7858831" cy="457200"/>
+            <a:off x="2213983" y="1970532"/>
+            <a:ext cx="7870713" cy="457200"/>
           </a:xfrm>
           <a:prstGeom prst="rect">
             <a:avLst/>
@@ -17826,11 +18475,11 @@
           <a:p>
             <a:pPr algn="l"/>
             <a:r>
-              <a:rPr sz="2600" b="0" i="0">
-                <a:solidFill>
-                  <a:srgbClr val="1A1A1A"/>
-                </a:solidFill>
-                <a:latin typeface="Century Schoolbook"/>
+              <a:rPr sz="2470" b="0" i="0">
+                <a:solidFill>
+                  <a:srgbClr val="1A1A1A"/>
+                </a:solidFill>
+                <a:latin typeface="Lexend"/>
               </a:rPr>
               <a:t>15 dollars plus 4 dollars for each of 6 gigabytes:</a:t>
             </a:r>
@@ -17839,7 +18488,7 @@
       </p:sp>
       <p:pic>
         <p:nvPicPr>
-          <p:cNvPr id="11" name="Picture 10" descr="df4025967bb63d7c.png"/>
+          <p:cNvPr id="11" name="Picture 10" descr="bbb5fdfab9bb6518.png"/>
           <p:cNvPicPr>
             <a:picLocks noChangeAspect="1"/>
           </p:cNvPicPr>
@@ -17853,8 +18502,8 @@
         </p:blipFill>
         <p:spPr>
           <a:xfrm>
-            <a:off x="4969764" y="2709672"/>
-            <a:ext cx="2221992" cy="350520"/>
+            <a:off x="4956048" y="2708148"/>
+            <a:ext cx="2249424" cy="353568"/>
           </a:xfrm>
           <a:prstGeom prst="rect">
             <a:avLst/>
@@ -17869,8 +18518,8 @@
         </p:nvSpPr>
         <p:spPr>
           <a:xfrm>
-            <a:off x="2046180" y="3342132"/>
-            <a:ext cx="8206319" cy="457200"/>
+            <a:off x="2091939" y="3342132"/>
+            <a:ext cx="8114801" cy="457200"/>
           </a:xfrm>
           <a:prstGeom prst="rect">
             <a:avLst/>
@@ -17885,11 +18534,11 @@
           <a:p>
             <a:pPr algn="l"/>
             <a:r>
-              <a:rPr sz="2600" b="0" i="0">
-                <a:solidFill>
-                  <a:srgbClr val="1A1A1A"/>
-                </a:solidFill>
-                <a:latin typeface="Century Schoolbook"/>
+              <a:rPr sz="2470" b="0" i="0">
+                <a:solidFill>
+                  <a:srgbClr val="1A1A1A"/>
+                </a:solidFill>
+                <a:latin typeface="Lexend"/>
               </a:rPr>
               <a:t>15 dollars for each of 4 lines, plus 6 dollars of tax:</a:t>
             </a:r>
@@ -17898,7 +18547,7 @@
       </p:sp>
       <p:pic>
         <p:nvPicPr>
-          <p:cNvPr id="13" name="Picture 12" descr="d2efbf0da391d0ea.png"/>
+          <p:cNvPr id="13" name="Picture 12" descr="452f0d3dea2c60f7.png"/>
           <p:cNvPicPr>
             <a:picLocks noChangeAspect="1"/>
           </p:cNvPicPr>
@@ -17912,8 +18561,8 @@
         </p:blipFill>
         <p:spPr>
           <a:xfrm>
-            <a:off x="4966716" y="4081271"/>
-            <a:ext cx="2228088" cy="350520"/>
+            <a:off x="4949952" y="4079747"/>
+            <a:ext cx="2261616" cy="353568"/>
           </a:xfrm>
           <a:prstGeom prst="rect">
             <a:avLst/>
@@ -17944,11 +18593,11 @@
           <a:p>
             <a:pPr algn="l"/>
             <a:r>
-              <a:rPr sz="2300" b="1" i="0">
-                <a:solidFill>
-                  <a:srgbClr val="1A1A1A"/>
-                </a:solidFill>
-                <a:latin typeface="Century Schoolbook"/>
+              <a:rPr sz="2180" b="1" i="0">
+                <a:solidFill>
+                  <a:srgbClr val="1A1A1A"/>
+                </a:solidFill>
+                <a:latin typeface="Lexend"/>
               </a:rPr>
               <a:t>The same words, the same numbers, different structures. Read the situation.</a:t>
             </a:r>
@@ -17997,11 +18646,11 @@
           <a:p>
             <a:pPr algn="l"/>
             <a:r>
-              <a:rPr sz="3600" b="1" i="0">
-                <a:solidFill>
-                  <a:srgbClr val="1A1A1A"/>
-                </a:solidFill>
-                <a:latin typeface="Century Schoolbook"/>
+              <a:rPr sz="3420" b="1" i="0">
+                <a:solidFill>
+                  <a:srgbClr val="1A1A1A"/>
+                </a:solidFill>
+                <a:latin typeface="Lexend"/>
               </a:rPr>
               <a:t>Notes</a:t>
             </a:r>
@@ -18137,11 +18786,11 @@
           <a:p>
             <a:pPr algn="l"/>
             <a:r>
-              <a:rPr sz="1100" b="0" i="1">
+              <a:rPr sz="1040" b="0" i="0">
                 <a:solidFill>
                   <a:srgbClr val="6B6B6B"/>
                 </a:solidFill>
-                <a:latin typeface="Century Schoolbook"/>
+                <a:latin typeface="Lexend"/>
               </a:rPr>
               <a:t>Grade 7 Accelerated · Unit 4 · Lessons 7–8 — Real-World Order of Operations</a:t>
             </a:r>
@@ -18172,11 +18821,11 @@
           <a:p>
             <a:pPr algn="r"/>
             <a:r>
-              <a:rPr sz="1100" b="0" i="0">
+              <a:rPr sz="1040" b="0" i="0">
                 <a:solidFill>
                   <a:srgbClr val="6B6B6B"/>
                 </a:solidFill>
-                <a:latin typeface="Century Schoolbook"/>
+                <a:latin typeface="Lexend"/>
               </a:rPr>
               <a:t>6</a:t>
             </a:r>
@@ -18207,11 +18856,11 @@
           <a:p>
             <a:pPr algn="l"/>
             <a:r>
-              <a:rPr sz="2500" b="1" i="0">
-                <a:solidFill>
-                  <a:srgbClr val="1A1A1A"/>
-                </a:solidFill>
-                <a:latin typeface="Century Schoolbook"/>
+              <a:rPr sz="2380" b="1" i="0">
+                <a:solidFill>
+                  <a:srgbClr val="1A1A1A"/>
+                </a:solidFill>
+                <a:latin typeface="Lexend"/>
               </a:rPr>
               <a:t>III.  Round once, at the end — and say the unit</a:t>
             </a:r>
@@ -18255,7 +18904,7 @@
       </p:cxnSp>
       <p:pic>
         <p:nvPicPr>
-          <p:cNvPr id="10" name="Picture 9" descr="919481ee0e1540e6.png"/>
+          <p:cNvPr id="10" name="Picture 9" descr="0aa366538d8b5890.png"/>
           <p:cNvPicPr>
             <a:picLocks noChangeAspect="1"/>
           </p:cNvPicPr>
@@ -18269,8 +18918,8 @@
         </p:blipFill>
         <p:spPr>
           <a:xfrm>
-            <a:off x="3259339" y="1993392"/>
-            <a:ext cx="4690872" cy="502920"/>
+            <a:off x="3238372" y="1993392"/>
+            <a:ext cx="4690872" cy="478536"/>
           </a:xfrm>
           <a:prstGeom prst="rect">
             <a:avLst/>
@@ -18285,8 +18934,8 @@
         </p:nvSpPr>
         <p:spPr>
           <a:xfrm>
-            <a:off x="7950211" y="2016252"/>
-            <a:ext cx="1089128" cy="457200"/>
+            <a:off x="7929244" y="2004060"/>
+            <a:ext cx="1131062" cy="457200"/>
           </a:xfrm>
           <a:prstGeom prst="rect">
             <a:avLst/>
@@ -18301,11 +18950,11 @@
           <a:p>
             <a:pPr algn="l"/>
             <a:r>
-              <a:rPr sz="2600" b="0" i="0">
-                <a:solidFill>
-                  <a:srgbClr val="1A1A1A"/>
-                </a:solidFill>
-                <a:latin typeface="Century Schoolbook"/>
+              <a:rPr sz="2470" b="0" i="0">
+                <a:solidFill>
+                  <a:srgbClr val="1A1A1A"/>
+                </a:solidFill>
+                <a:latin typeface="Lexend"/>
               </a:rPr>
               <a:t>   feet</a:t>
             </a:r>
@@ -18320,8 +18969,8 @@
         </p:nvSpPr>
         <p:spPr>
           <a:xfrm>
-            <a:off x="2297423" y="2747772"/>
-            <a:ext cx="5087657" cy="457200"/>
+            <a:off x="2286879" y="2723388"/>
+            <a:ext cx="5002802" cy="457200"/>
           </a:xfrm>
           <a:prstGeom prst="rect">
             <a:avLst/>
@@ -18336,11 +18985,11 @@
           <a:p>
             <a:pPr algn="l"/>
             <a:r>
-              <a:rPr sz="2600" b="0" i="0">
-                <a:solidFill>
-                  <a:srgbClr val="1A1A1A"/>
-                </a:solidFill>
-                <a:latin typeface="Century Schoolbook"/>
+              <a:rPr sz="2470" b="0" i="0">
+                <a:solidFill>
+                  <a:srgbClr val="1A1A1A"/>
+                </a:solidFill>
+                <a:latin typeface="Lexend"/>
               </a:rPr>
               <a:t>rounding the side to 14 first:   </a:t>
             </a:r>
@@ -18349,7 +18998,7 @@
       </p:sp>
       <p:pic>
         <p:nvPicPr>
-          <p:cNvPr id="13" name="Picture 12" descr="e6ef06ed6a80f4a3.png"/>
+          <p:cNvPr id="13" name="Picture 12" descr="54bb3b3bdd6a6a1e.png"/>
           <p:cNvPicPr>
             <a:picLocks noChangeAspect="1"/>
           </p:cNvPicPr>
@@ -18363,8 +19012,8 @@
         </p:blipFill>
         <p:spPr>
           <a:xfrm>
-            <a:off x="7247920" y="2801112"/>
-            <a:ext cx="1664208" cy="350520"/>
+            <a:off x="7152521" y="2775204"/>
+            <a:ext cx="1728216" cy="353568"/>
           </a:xfrm>
           <a:prstGeom prst="rect">
             <a:avLst/>
@@ -18379,8 +19028,8 @@
         </p:nvSpPr>
         <p:spPr>
           <a:xfrm>
-            <a:off x="8912128" y="2747772"/>
-            <a:ext cx="1089128" cy="457200"/>
+            <a:off x="8880737" y="2723388"/>
+            <a:ext cx="1131062" cy="457200"/>
           </a:xfrm>
           <a:prstGeom prst="rect">
             <a:avLst/>
@@ -18395,11 +19044,11 @@
           <a:p>
             <a:pPr algn="l"/>
             <a:r>
-              <a:rPr sz="2600" b="0" i="0">
-                <a:solidFill>
-                  <a:srgbClr val="1A1A1A"/>
-                </a:solidFill>
-                <a:latin typeface="Century Schoolbook"/>
+              <a:rPr sz="2470" b="0" i="0">
+                <a:solidFill>
+                  <a:srgbClr val="1A1A1A"/>
+                </a:solidFill>
+                <a:latin typeface="Lexend"/>
               </a:rPr>
               <a:t>   feet</a:t>
             </a:r>
@@ -18414,7 +19063,7 @@
         </p:nvSpPr>
         <p:spPr>
           <a:xfrm>
-            <a:off x="987552" y="3520440"/>
+            <a:off x="987552" y="3496056"/>
             <a:ext cx="10131551" cy="475488"/>
           </a:xfrm>
           <a:prstGeom prst="rect">
@@ -18430,11 +19079,11 @@
           <a:p>
             <a:pPr algn="l"/>
             <a:r>
-              <a:rPr sz="2300" b="1" i="0">
-                <a:solidFill>
-                  <a:srgbClr val="1A1A1A"/>
-                </a:solidFill>
-                <a:latin typeface="Century Schoolbook"/>
+              <a:rPr sz="2180" b="1" i="0">
+                <a:solidFill>
+                  <a:srgbClr val="1A1A1A"/>
+                </a:solidFill>
+                <a:latin typeface="Lexend"/>
               </a:rPr>
               <a:t>Carry the exact value, round once at the end, and write the unit.</a:t>
             </a:r>
@@ -18483,11 +19132,11 @@
           <a:p>
             <a:pPr algn="l"/>
             <a:r>
-              <a:rPr sz="3600" b="1" i="0">
-                <a:solidFill>
-                  <a:srgbClr val="1A1A1A"/>
-                </a:solidFill>
-                <a:latin typeface="Century Schoolbook"/>
+              <a:rPr sz="3420" b="1" i="0">
+                <a:solidFill>
+                  <a:srgbClr val="1A1A1A"/>
+                </a:solidFill>
+                <a:latin typeface="Lexend"/>
               </a:rPr>
               <a:t>Example 1</a:t>
             </a:r>
@@ -18623,11 +19272,11 @@
           <a:p>
             <a:pPr algn="l"/>
             <a:r>
-              <a:rPr sz="1100" b="0" i="1">
+              <a:rPr sz="1040" b="0" i="0">
                 <a:solidFill>
                   <a:srgbClr val="6B6B6B"/>
                 </a:solidFill>
-                <a:latin typeface="Century Schoolbook"/>
+                <a:latin typeface="Lexend"/>
               </a:rPr>
               <a:t>Grade 7 Accelerated · Unit 4 · Lessons 7–8 — Real-World Order of Operations</a:t>
             </a:r>
@@ -18658,11 +19307,11 @@
           <a:p>
             <a:pPr algn="r"/>
             <a:r>
-              <a:rPr sz="1100" b="0" i="0">
+              <a:rPr sz="1040" b="0" i="0">
                 <a:solidFill>
                   <a:srgbClr val="6B6B6B"/>
                 </a:solidFill>
-                <a:latin typeface="Century Schoolbook"/>
+                <a:latin typeface="Lexend"/>
               </a:rPr>
               <a:t>7</a:t>
             </a:r>
@@ -18677,8 +19326,8 @@
         </p:nvSpPr>
         <p:spPr>
           <a:xfrm>
-            <a:off x="3721151" y="1845563"/>
-            <a:ext cx="3131460" cy="457200"/>
+            <a:off x="3726593" y="1842515"/>
+            <a:ext cx="3086415" cy="457200"/>
           </a:xfrm>
           <a:prstGeom prst="rect">
             <a:avLst/>
@@ -18693,11 +19342,11 @@
           <a:p>
             <a:pPr algn="l"/>
             <a:r>
-              <a:rPr sz="2600" b="0" i="0">
-                <a:solidFill>
-                  <a:srgbClr val="1A1A1A"/>
-                </a:solidFill>
-                <a:latin typeface="Century Schoolbook"/>
+              <a:rPr sz="2470" b="0" i="0">
+                <a:solidFill>
+                  <a:srgbClr val="1A1A1A"/>
+                </a:solidFill>
+                <a:latin typeface="Lexend"/>
               </a:rPr>
               <a:t>Kinetic energy is  </a:t>
             </a:r>
@@ -18706,7 +19355,7 @@
       </p:sp>
       <p:pic>
         <p:nvPicPr>
-          <p:cNvPr id="9" name="Picture 8" descr="69f338afbe20426e.png"/>
+          <p:cNvPr id="9" name="Picture 8" descr="5d0fc710cd450203.png"/>
           <p:cNvPicPr>
             <a:picLocks noChangeAspect="1"/>
           </p:cNvPicPr>
@@ -18720,8 +19369,8 @@
         </p:blipFill>
         <p:spPr>
           <a:xfrm>
-            <a:off x="6715452" y="1737360"/>
-            <a:ext cx="1554480" cy="673608"/>
+            <a:off x="6675849" y="1737360"/>
+            <a:ext cx="1597152" cy="667512"/>
           </a:xfrm>
           <a:prstGeom prst="rect">
             <a:avLst/>
@@ -18736,8 +19385,8 @@
         </p:nvSpPr>
         <p:spPr>
           <a:xfrm>
-            <a:off x="8269932" y="1845563"/>
-            <a:ext cx="307595" cy="457200"/>
+            <a:off x="8273001" y="1842515"/>
+            <a:ext cx="299084" cy="457200"/>
           </a:xfrm>
           <a:prstGeom prst="rect">
             <a:avLst/>
@@ -18752,11 +19401,11 @@
           <a:p>
             <a:pPr algn="l"/>
             <a:r>
-              <a:rPr sz="2600" b="0" i="0">
-                <a:solidFill>
-                  <a:srgbClr val="1A1A1A"/>
-                </a:solidFill>
-                <a:latin typeface="Century Schoolbook"/>
+              <a:rPr sz="2470" b="0" i="0">
+                <a:solidFill>
+                  <a:srgbClr val="1A1A1A"/>
+                </a:solidFill>
+                <a:latin typeface="Lexend"/>
               </a:rPr>
               <a:t>,</a:t>
             </a:r>
@@ -18771,8 +19420,8 @@
         </p:nvSpPr>
         <p:spPr>
           <a:xfrm>
-            <a:off x="1268839" y="2708148"/>
-            <a:ext cx="1674725" cy="457200"/>
+            <a:off x="1238310" y="2702052"/>
+            <a:ext cx="1694274" cy="457200"/>
           </a:xfrm>
           <a:prstGeom prst="rect">
             <a:avLst/>
@@ -18787,11 +19436,11 @@
           <a:p>
             <a:pPr algn="l"/>
             <a:r>
-              <a:rPr sz="2600" b="0" i="0">
-                <a:solidFill>
-                  <a:srgbClr val="1A1A1A"/>
-                </a:solidFill>
-                <a:latin typeface="Century Schoolbook"/>
+              <a:rPr sz="2470" b="0" i="0">
+                <a:solidFill>
+                  <a:srgbClr val="1A1A1A"/>
+                </a:solidFill>
+                <a:latin typeface="Lexend"/>
               </a:rPr>
               <a:t>for mass </a:t>
             </a:r>
@@ -18800,7 +19449,7 @@
       </p:sp>
       <p:pic>
         <p:nvPicPr>
-          <p:cNvPr id="12" name="Picture 11" descr="24e87f5600a7b684.png"/>
+          <p:cNvPr id="12" name="Picture 11" descr="cdb2d0303764b98e.png"/>
           <p:cNvPicPr>
             <a:picLocks noChangeAspect="1"/>
           </p:cNvPicPr>
@@ -18814,8 +19463,8 @@
         </p:blipFill>
         <p:spPr>
           <a:xfrm>
-            <a:off x="2806404" y="2845308"/>
-            <a:ext cx="283464" cy="182880"/>
+            <a:off x="2795424" y="2827020"/>
+            <a:ext cx="307848" cy="207264"/>
           </a:xfrm>
           <a:prstGeom prst="rect">
             <a:avLst/>
@@ -18830,8 +19479,8 @@
         </p:nvSpPr>
         <p:spPr>
           <a:xfrm>
-            <a:off x="3089868" y="2708148"/>
-            <a:ext cx="4165510" cy="457200"/>
+            <a:off x="3103272" y="2702052"/>
+            <a:ext cx="4139201" cy="457200"/>
           </a:xfrm>
           <a:prstGeom prst="rect">
             <a:avLst/>
@@ -18846,11 +19495,11 @@
           <a:p>
             <a:pPr algn="l"/>
             <a:r>
-              <a:rPr sz="2600" b="0" i="0">
-                <a:solidFill>
-                  <a:srgbClr val="1A1A1A"/>
-                </a:solidFill>
-                <a:latin typeface="Century Schoolbook"/>
+              <a:rPr sz="2470" b="0" i="0">
+                <a:solidFill>
+                  <a:srgbClr val="1A1A1A"/>
+                </a:solidFill>
+                <a:latin typeface="Lexend"/>
               </a:rPr>
               <a:t> in kilograms and speed </a:t>
             </a:r>
@@ -18859,7 +19508,7 @@
       </p:sp>
       <p:pic>
         <p:nvPicPr>
-          <p:cNvPr id="14" name="Picture 13" descr="fcb4fcf2c8052fbb.png"/>
+          <p:cNvPr id="14" name="Picture 13" descr="ed57ccb980491c84.png"/>
           <p:cNvPicPr>
             <a:picLocks noChangeAspect="1"/>
           </p:cNvPicPr>
@@ -18873,8 +19522,8 @@
         </p:blipFill>
         <p:spPr>
           <a:xfrm>
-            <a:off x="7118219" y="2842260"/>
-            <a:ext cx="167640" cy="188976"/>
+            <a:off x="7105314" y="2828544"/>
+            <a:ext cx="207264" cy="204216"/>
           </a:xfrm>
           <a:prstGeom prst="rect">
             <a:avLst/>
@@ -18889,8 +19538,8 @@
         </p:nvSpPr>
         <p:spPr>
           <a:xfrm>
-            <a:off x="7285859" y="2708148"/>
-            <a:ext cx="3743981" cy="457200"/>
+            <a:off x="7312578" y="2702052"/>
+            <a:ext cx="3747791" cy="457200"/>
           </a:xfrm>
           <a:prstGeom prst="rect">
             <a:avLst/>
@@ -18905,11 +19554,11 @@
           <a:p>
             <a:pPr algn="l"/>
             <a:r>
-              <a:rPr sz="2600" b="0" i="0">
-                <a:solidFill>
-                  <a:srgbClr val="1A1A1A"/>
-                </a:solidFill>
-                <a:latin typeface="Century Schoolbook"/>
+              <a:rPr sz="2470" b="0" i="0">
+                <a:solidFill>
+                  <a:srgbClr val="1A1A1A"/>
+                </a:solidFill>
+                <a:latin typeface="Lexend"/>
               </a:rPr>
               <a:t> in meters per second.</a:t>
             </a:r>
@@ -18924,8 +19573,8 @@
         </p:nvSpPr>
         <p:spPr>
           <a:xfrm>
-            <a:off x="1659688" y="3439668"/>
-            <a:ext cx="1066148" cy="457200"/>
+            <a:off x="1719904" y="3433572"/>
+            <a:ext cx="1004672" cy="457200"/>
           </a:xfrm>
           <a:prstGeom prst="rect">
             <a:avLst/>
@@ -18940,11 +19589,11 @@
           <a:p>
             <a:pPr algn="l"/>
             <a:r>
-              <a:rPr sz="2600" b="0" i="0">
-                <a:solidFill>
-                  <a:srgbClr val="1A1A1A"/>
-                </a:solidFill>
-                <a:latin typeface="Century Schoolbook"/>
+              <a:rPr sz="2470" b="0" i="0">
+                <a:solidFill>
+                  <a:srgbClr val="1A1A1A"/>
+                </a:solidFill>
+                <a:latin typeface="Lexend"/>
               </a:rPr>
               <a:t>Find </a:t>
             </a:r>
@@ -18953,7 +19602,7 @@
       </p:sp>
       <p:pic>
         <p:nvPicPr>
-          <p:cNvPr id="17" name="Picture 16" descr="c3de325f2afb27e7.png"/>
+          <p:cNvPr id="17" name="Picture 16" descr="e17610a9e5f46895.png"/>
           <p:cNvPicPr>
             <a:picLocks noChangeAspect="1"/>
           </p:cNvPicPr>
@@ -18967,8 +19616,8 @@
         </p:blipFill>
         <p:spPr>
           <a:xfrm>
-            <a:off x="2588676" y="3534156"/>
-            <a:ext cx="295656" cy="268224"/>
+            <a:off x="2587417" y="3526536"/>
+            <a:ext cx="234696" cy="271272"/>
           </a:xfrm>
           <a:prstGeom prst="rect">
             <a:avLst/>
@@ -18983,8 +19632,8 @@
         </p:nvSpPr>
         <p:spPr>
           <a:xfrm>
-            <a:off x="2884332" y="3439668"/>
-            <a:ext cx="7754658" cy="457200"/>
+            <a:off x="2822113" y="3433572"/>
+            <a:ext cx="7756662" cy="457200"/>
           </a:xfrm>
           <a:prstGeom prst="rect">
             <a:avLst/>
@@ -18999,11 +19648,11 @@
           <a:p>
             <a:pPr algn="l"/>
             <a:r>
-              <a:rPr sz="2600" b="0" i="0">
-                <a:solidFill>
-                  <a:srgbClr val="1A1A1A"/>
-                </a:solidFill>
-                <a:latin typeface="Century Schoolbook"/>
+              <a:rPr sz="2470" b="0" i="0">
+                <a:solidFill>
+                  <a:srgbClr val="1A1A1A"/>
+                </a:solidFill>
+                <a:latin typeface="Lexend"/>
               </a:rPr>
               <a:t> for a car of mass 1,200 kg travelling at 15 m/s.</a:t>
             </a:r>
@@ -19018,7 +19667,7 @@
         </p:nvSpPr>
         <p:spPr>
           <a:xfrm>
-            <a:off x="777240" y="4376928"/>
+            <a:off x="777240" y="4370832"/>
             <a:ext cx="10607040" cy="429370"/>
           </a:xfrm>
           <a:prstGeom prst="rect">
@@ -19034,11 +19683,11 @@
           <a:p>
             <a:pPr algn="ctr"/>
             <a:r>
-              <a:rPr sz="2400" b="1" i="0">
-                <a:solidFill>
-                  <a:srgbClr val="1A1A1A"/>
-                </a:solidFill>
-                <a:latin typeface="Century Schoolbook"/>
+              <a:rPr sz="2280" b="1" i="0">
+                <a:solidFill>
+                  <a:srgbClr val="1A1A1A"/>
+                </a:solidFill>
+                <a:latin typeface="Lexend"/>
               </a:rPr>
               <a:t>Give the answer with its unit.</a:t>
             </a:r>
@@ -19087,11 +19736,11 @@
           <a:p>
             <a:pPr algn="l"/>
             <a:r>
-              <a:rPr sz="3600" b="1" i="0">
-                <a:solidFill>
-                  <a:srgbClr val="1A1A1A"/>
-                </a:solidFill>
-                <a:latin typeface="Century Schoolbook"/>
+              <a:rPr sz="3420" b="1" i="0">
+                <a:solidFill>
+                  <a:srgbClr val="1A1A1A"/>
+                </a:solidFill>
+                <a:latin typeface="Lexend"/>
               </a:rPr>
               <a:t>Example 1</a:t>
             </a:r>
@@ -19227,11 +19876,11 @@
           <a:p>
             <a:pPr algn="l"/>
             <a:r>
-              <a:rPr sz="1100" b="0" i="1">
+              <a:rPr sz="1040" b="0" i="0">
                 <a:solidFill>
                   <a:srgbClr val="6B6B6B"/>
                 </a:solidFill>
-                <a:latin typeface="Century Schoolbook"/>
+                <a:latin typeface="Lexend"/>
               </a:rPr>
               <a:t>Grade 7 Accelerated · Unit 4 · Lessons 7–8 — Real-World Order of Operations</a:t>
             </a:r>
@@ -19262,11 +19911,11 @@
           <a:p>
             <a:pPr algn="r"/>
             <a:r>
-              <a:rPr sz="1100" b="0" i="0">
+              <a:rPr sz="1040" b="0" i="0">
                 <a:solidFill>
                   <a:srgbClr val="6B6B6B"/>
                 </a:solidFill>
-                <a:latin typeface="Century Schoolbook"/>
+                <a:latin typeface="Lexend"/>
               </a:rPr>
               <a:t>8</a:t>
             </a:r>
@@ -19275,7 +19924,7 @@
       </p:sp>
       <p:pic>
         <p:nvPicPr>
-          <p:cNvPr id="8" name="Picture 7" descr="d75f9c90e035e1e1.png"/>
+          <p:cNvPr id="8" name="Picture 7" descr="593a1a205fd7f588.png"/>
           <p:cNvPicPr>
             <a:picLocks noChangeAspect="1"/>
           </p:cNvPicPr>
@@ -19290,7 +19939,7 @@
         <p:spPr>
           <a:xfrm>
             <a:off x="1828800" y="1920240"/>
-            <a:ext cx="2926080" cy="673608"/>
+            <a:ext cx="2965704" cy="670560"/>
           </a:xfrm>
           <a:prstGeom prst="rect">
             <a:avLst/>
@@ -19299,7 +19948,7 @@
       </p:pic>
       <p:pic>
         <p:nvPicPr>
-          <p:cNvPr id="9" name="Picture 8" descr="97f8b90e9d71c570.png"/>
+          <p:cNvPr id="9" name="Picture 8" descr="6c72b1ad8ee77d53.png"/>
           <p:cNvPicPr>
             <a:picLocks noChangeAspect="1"/>
           </p:cNvPicPr>
@@ -19313,8 +19962,8 @@
         </p:blipFill>
         <p:spPr>
           <a:xfrm>
-            <a:off x="1828800" y="2868168"/>
-            <a:ext cx="2618232" cy="673608"/>
+            <a:off x="1828800" y="2865120"/>
+            <a:ext cx="2700528" cy="670560"/>
           </a:xfrm>
           <a:prstGeom prst="rect">
             <a:avLst/>
@@ -19323,7 +19972,7 @@
       </p:pic>
       <p:pic>
         <p:nvPicPr>
-          <p:cNvPr id="10" name="Picture 9" descr="a0f52d5d0e25fc41.png"/>
+          <p:cNvPr id="10" name="Picture 9" descr="7be42c48f704a751.png"/>
           <p:cNvPicPr>
             <a:picLocks noChangeAspect="1"/>
           </p:cNvPicPr>
@@ -19337,8 +19986,8 @@
         </p:blipFill>
         <p:spPr>
           <a:xfrm>
-            <a:off x="1828800" y="3816096"/>
-            <a:ext cx="3517392" cy="350520"/>
+            <a:off x="1828800" y="3810000"/>
+            <a:ext cx="3648456" cy="353568"/>
           </a:xfrm>
           <a:prstGeom prst="rect">
             <a:avLst/>
@@ -19353,7 +20002,7 @@
         </p:nvSpPr>
         <p:spPr>
           <a:xfrm>
-            <a:off x="777240" y="4623816"/>
+            <a:off x="777240" y="4620768"/>
             <a:ext cx="10607040" cy="548640"/>
           </a:xfrm>
           <a:prstGeom prst="rect">
@@ -19369,11 +20018,11 @@
           <a:p>
             <a:pPr algn="ctr"/>
             <a:r>
-              <a:rPr sz="3200" b="1" i="0">
+              <a:rPr sz="3040" b="1" i="0">
                 <a:solidFill>
                   <a:srgbClr val="9E1B32"/>
                 </a:solidFill>
-                <a:latin typeface="Century Schoolbook"/>
+                <a:latin typeface="Lexend"/>
               </a:rPr>
               <a:t>Answer:   135,000 joules</a:t>
             </a:r>
@@ -19422,11 +20071,11 @@
           <a:p>
             <a:pPr algn="l"/>
             <a:r>
-              <a:rPr sz="3600" b="1" i="0">
-                <a:solidFill>
-                  <a:srgbClr val="1A1A1A"/>
-                </a:solidFill>
-                <a:latin typeface="Century Schoolbook"/>
+              <a:rPr sz="3420" b="1" i="0">
+                <a:solidFill>
+                  <a:srgbClr val="1A1A1A"/>
+                </a:solidFill>
+                <a:latin typeface="Lexend"/>
               </a:rPr>
               <a:t>Your Turn</a:t>
             </a:r>
@@ -19562,11 +20211,11 @@
           <a:p>
             <a:pPr algn="l"/>
             <a:r>
-              <a:rPr sz="1100" b="0" i="1">
+              <a:rPr sz="1040" b="0" i="0">
                 <a:solidFill>
                   <a:srgbClr val="6B6B6B"/>
                 </a:solidFill>
-                <a:latin typeface="Century Schoolbook"/>
+                <a:latin typeface="Lexend"/>
               </a:rPr>
               <a:t>Grade 7 Accelerated · Unit 4 · Lessons 7–8 — Real-World Order of Operations</a:t>
             </a:r>
@@ -19597,11 +20246,11 @@
           <a:p>
             <a:pPr algn="r"/>
             <a:r>
-              <a:rPr sz="1100" b="0" i="0">
+              <a:rPr sz="1040" b="0" i="0">
                 <a:solidFill>
                   <a:srgbClr val="6B6B6B"/>
                 </a:solidFill>
-                <a:latin typeface="Century Schoolbook"/>
+                <a:latin typeface="Lexend"/>
               </a:rPr>
               <a:t>9</a:t>
             </a:r>
@@ -19616,8 +20265,8 @@
         </p:nvSpPr>
         <p:spPr>
           <a:xfrm>
-            <a:off x="1538372" y="2391156"/>
-            <a:ext cx="1066148" cy="457200"/>
+            <a:off x="1479479" y="1790700"/>
+            <a:ext cx="1004672" cy="457200"/>
           </a:xfrm>
           <a:prstGeom prst="rect">
             <a:avLst/>
@@ -19632,11 +20281,11 @@
           <a:p>
             <a:pPr algn="l"/>
             <a:r>
-              <a:rPr sz="2600" b="0" i="0">
-                <a:solidFill>
-                  <a:srgbClr val="1A1A1A"/>
-                </a:solidFill>
-                <a:latin typeface="Century Schoolbook"/>
+              <a:rPr sz="2470" b="0" i="0">
+                <a:solidFill>
+                  <a:srgbClr val="1A1A1A"/>
+                </a:solidFill>
+                <a:latin typeface="Lexend"/>
               </a:rPr>
               <a:t>Find </a:t>
             </a:r>
@@ -19645,7 +20294,7 @@
       </p:sp>
       <p:pic>
         <p:nvPicPr>
-          <p:cNvPr id="9" name="Picture 8" descr="87c9946de92fdd9d.png"/>
+          <p:cNvPr id="9" name="Picture 8" descr="a14dbba8fe39de29.png"/>
           <p:cNvPicPr>
             <a:picLocks noChangeAspect="1"/>
           </p:cNvPicPr>
@@ -19659,8 +20308,8 @@
         </p:blipFill>
         <p:spPr>
           <a:xfrm>
-            <a:off x="2467360" y="2194560"/>
-            <a:ext cx="1941576" cy="850392"/>
+            <a:off x="2346991" y="1600200"/>
+            <a:ext cx="2002536" cy="838200"/>
           </a:xfrm>
           <a:prstGeom prst="rect">
             <a:avLst/>
@@ -19675,8 +20324,8 @@
         </p:nvSpPr>
         <p:spPr>
           <a:xfrm>
-            <a:off x="4408936" y="2391156"/>
-            <a:ext cx="942097" cy="457200"/>
+            <a:off x="4349527" y="1790700"/>
+            <a:ext cx="952168" cy="457200"/>
           </a:xfrm>
           <a:prstGeom prst="rect">
             <a:avLst/>
@@ -19691,11 +20340,11 @@
           <a:p>
             <a:pPr algn="l"/>
             <a:r>
-              <a:rPr sz="2600" b="0" i="0">
-                <a:solidFill>
-                  <a:srgbClr val="1A1A1A"/>
-                </a:solidFill>
-                <a:latin typeface="Century Schoolbook"/>
+              <a:rPr sz="2470" b="0" i="0">
+                <a:solidFill>
+                  <a:srgbClr val="1A1A1A"/>
+                </a:solidFill>
+                <a:latin typeface="Lexend"/>
               </a:rPr>
               <a:t> for  </a:t>
             </a:r>
@@ -19704,7 +20353,7 @@
       </p:sp>
       <p:pic>
         <p:nvPicPr>
-          <p:cNvPr id="11" name="Picture 10" descr="2af650365bdc2ce9.png"/>
+          <p:cNvPr id="11" name="Picture 10" descr="99d0f397928935d0.png"/>
           <p:cNvPicPr>
             <a:picLocks noChangeAspect="1"/>
           </p:cNvPicPr>
@@ -19718,8 +20367,8 @@
         </p:blipFill>
         <p:spPr>
           <a:xfrm>
-            <a:off x="5213874" y="2439924"/>
-            <a:ext cx="1606296" cy="359664"/>
+            <a:off x="5164535" y="1845564"/>
+            <a:ext cx="1685544" cy="347472"/>
           </a:xfrm>
           <a:prstGeom prst="rect">
             <a:avLst/>
@@ -19734,8 +20383,8 @@
         </p:nvSpPr>
         <p:spPr>
           <a:xfrm>
-            <a:off x="6820170" y="2391156"/>
-            <a:ext cx="1800668" cy="457200"/>
+            <a:off x="6850079" y="1790700"/>
+            <a:ext cx="1786194" cy="457200"/>
           </a:xfrm>
           <a:prstGeom prst="rect">
             <a:avLst/>
@@ -19750,11 +20399,11 @@
           <a:p>
             <a:pPr algn="l"/>
             <a:r>
-              <a:rPr sz="2600" b="0" i="0">
-                <a:solidFill>
-                  <a:srgbClr val="1A1A1A"/>
-                </a:solidFill>
-                <a:latin typeface="Century Schoolbook"/>
+              <a:rPr sz="2470" b="0" i="0">
+                <a:solidFill>
+                  <a:srgbClr val="1A1A1A"/>
+                </a:solidFill>
+                <a:latin typeface="Lexend"/>
               </a:rPr>
               <a:t>  kg  and  </a:t>
             </a:r>
@@ -19763,7 +20412,7 @@
       </p:sp>
       <p:pic>
         <p:nvPicPr>
-          <p:cNvPr id="13" name="Picture 12" descr="363ced5d02a26947.png"/>
+          <p:cNvPr id="13" name="Picture 12" descr="5038fc82b26adb58.png"/>
           <p:cNvPicPr>
             <a:picLocks noChangeAspect="1"/>
           </p:cNvPicPr>
@@ -19777,8 +20426,8 @@
         </p:blipFill>
         <p:spPr>
           <a:xfrm>
-            <a:off x="8483678" y="2441448"/>
-            <a:ext cx="1203960" cy="356616"/>
+            <a:off x="8499114" y="1847088"/>
+            <a:ext cx="1207008" cy="344424"/>
           </a:xfrm>
           <a:prstGeom prst="rect">
             <a:avLst/>
@@ -19793,8 +20442,8 @@
         </p:nvSpPr>
         <p:spPr>
           <a:xfrm>
-            <a:off x="9687638" y="2391156"/>
-            <a:ext cx="1072668" cy="457200"/>
+            <a:off x="9706122" y="1790700"/>
+            <a:ext cx="1113078" cy="457200"/>
           </a:xfrm>
           <a:prstGeom prst="rect">
             <a:avLst/>
@@ -19809,11 +20458,11 @@
           <a:p>
             <a:pPr algn="l"/>
             <a:r>
-              <a:rPr sz="2600" b="0" i="0">
-                <a:solidFill>
-                  <a:srgbClr val="1A1A1A"/>
-                </a:solidFill>
-                <a:latin typeface="Century Schoolbook"/>
+              <a:rPr sz="2470" b="0" i="0">
+                <a:solidFill>
+                  <a:srgbClr val="1A1A1A"/>
+                </a:solidFill>
+                <a:latin typeface="Lexend"/>
               </a:rPr>
               <a:t>  m/s.</a:t>
             </a:r>

--- a/a7/build/out/u4/A7 4.07 Real-World Order of Operations - Slides.pptx
+++ b/a7/build/out/u4/A7 4.07 Real-World Order of Operations - Slides.pptx
@@ -7830,7 +7830,7 @@
         <p:spPr>
           <a:xfrm>
             <a:off x="777240" y="2194560"/>
-            <a:ext cx="10607040" cy="465151"/>
+            <a:ext cx="10607040" cy="411480"/>
           </a:xfrm>
           <a:prstGeom prst="rect">
             <a:avLst/>
@@ -7845,13 +7845,13 @@
           <a:p>
             <a:pPr algn="ctr"/>
             <a:r>
-              <a:rPr sz="2470" b="0" i="0">
-                <a:solidFill>
-                  <a:srgbClr val="1A1A1A"/>
-                </a:solidFill>
-                <a:latin typeface="Lexend"/>
-              </a:rPr>
-              <a:t>A plan costs 15 dollars plus 4 dollars for each gigabyte.</a:t>
+              <a:rPr sz="2180" b="0" i="0">
+                <a:solidFill>
+                  <a:srgbClr val="1A1A1A"/>
+                </a:solidFill>
+                <a:latin typeface="Lexend"/>
+              </a:rPr>
+              <a:t>Renting a kayak costs 17 dollars plus 9 dollars for each hour.</a:t>
             </a:r>
           </a:p>
         </p:txBody>
@@ -7864,7 +7864,7 @@
         </p:nvSpPr>
         <p:spPr>
           <a:xfrm>
-            <a:off x="777240" y="2769439"/>
+            <a:off x="777240" y="2715768"/>
             <a:ext cx="10607040" cy="465151"/>
           </a:xfrm>
           <a:prstGeom prst="rect">
@@ -7886,7 +7886,7 @@
                 </a:solidFill>
                 <a:latin typeface="Lexend"/>
               </a:rPr>
-              <a:t>Find the cost of 6 gigabytes.</a:t>
+              <a:t>Find the cost of 3 hours.</a:t>
             </a:r>
           </a:p>
         </p:txBody>
@@ -8721,7 +8721,7 @@
         <p:spPr>
           <a:xfrm>
             <a:off x="777240" y="2103120"/>
-            <a:ext cx="10607040" cy="465151"/>
+            <a:ext cx="10607040" cy="411480"/>
           </a:xfrm>
           <a:prstGeom prst="rect">
             <a:avLst/>
@@ -8736,13 +8736,13 @@
           <a:p>
             <a:pPr algn="ctr"/>
             <a:r>
-              <a:rPr sz="2470" b="0" i="0">
-                <a:solidFill>
-                  <a:srgbClr val="1A1A1A"/>
-                </a:solidFill>
-                <a:latin typeface="Lexend"/>
-              </a:rPr>
-              <a:t>A plan costs 15 dollars plus 4 dollars for each gigabyte.</a:t>
+              <a:rPr sz="2180" b="0" i="0">
+                <a:solidFill>
+                  <a:srgbClr val="1A1A1A"/>
+                </a:solidFill>
+                <a:latin typeface="Lexend"/>
+              </a:rPr>
+              <a:t>Renting a kayak costs 17 dollars plus 9 dollars for each hour.</a:t>
             </a:r>
           </a:p>
         </p:txBody>
@@ -8755,7 +8755,7 @@
         </p:nvSpPr>
         <p:spPr>
           <a:xfrm>
-            <a:off x="777240" y="2677999"/>
+            <a:off x="777240" y="2624328"/>
             <a:ext cx="10607040" cy="465151"/>
           </a:xfrm>
           <a:prstGeom prst="rect">
@@ -8777,14 +8777,14 @@
                 </a:solidFill>
                 <a:latin typeface="Lexend"/>
               </a:rPr>
-              <a:t>Find the cost of 6 gigabytes.</a:t>
+              <a:t>Find the cost of 3 hours.</a:t>
             </a:r>
           </a:p>
         </p:txBody>
       </p:sp>
       <p:pic>
         <p:nvPicPr>
-          <p:cNvPr id="10" name="Picture 9" descr="d6367224d1a034a2.png"/>
+          <p:cNvPr id="10" name="Picture 9" descr="4878fd7dba5b8def.png"/>
           <p:cNvPicPr>
             <a:picLocks noChangeAspect="1"/>
           </p:cNvPicPr>
@@ -8798,8 +8798,8 @@
         </p:blipFill>
         <p:spPr>
           <a:xfrm>
-            <a:off x="5244083" y="3405278"/>
-            <a:ext cx="1423416" cy="252984"/>
+            <a:off x="5234939" y="3351607"/>
+            <a:ext cx="1365504" cy="252984"/>
           </a:xfrm>
           <a:prstGeom prst="rect">
             <a:avLst/>
@@ -8808,7 +8808,7 @@
       </p:pic>
       <p:pic>
         <p:nvPicPr>
-          <p:cNvPr id="11" name="Picture 10" descr="83ec447ebad373fb.png"/>
+          <p:cNvPr id="11" name="Picture 10" descr="fcf2b27a5b2a715a.png"/>
           <p:cNvPicPr>
             <a:picLocks noChangeAspect="1"/>
           </p:cNvPicPr>
@@ -8822,8 +8822,8 @@
         </p:blipFill>
         <p:spPr>
           <a:xfrm>
-            <a:off x="5244083" y="3944774"/>
-            <a:ext cx="1783080" cy="252984"/>
+            <a:off x="5234939" y="3891103"/>
+            <a:ext cx="1801368" cy="252984"/>
           </a:xfrm>
           <a:prstGeom prst="rect">
             <a:avLst/>
@@ -8860,7 +8860,7 @@
                 </a:solidFill>
                 <a:latin typeface="Lexend"/>
               </a:rPr>
-              <a:t>Answer:   39 dollars</a:t>
+              <a:t>Answer:   44 dollars</a:t>
             </a:r>
           </a:p>
         </p:txBody>
@@ -12419,8 +12419,8 @@
         </p:nvSpPr>
         <p:spPr>
           <a:xfrm>
-            <a:off x="1941720" y="2205228"/>
-            <a:ext cx="5549977" cy="457200"/>
+            <a:off x="1780239" y="2205228"/>
+            <a:ext cx="5906468" cy="457200"/>
           </a:xfrm>
           <a:prstGeom prst="rect">
             <a:avLst/>
@@ -12441,14 +12441,14 @@
                 </a:solidFill>
                 <a:latin typeface="Lexend"/>
               </a:rPr>
-              <a:t>A fence runs along 6 sides, each  </a:t>
+              <a:t>A square garden has 4 sides, each  </a:t>
             </a:r>
           </a:p>
         </p:txBody>
       </p:sp>
       <p:pic>
         <p:nvPicPr>
-          <p:cNvPr id="9" name="Picture 8" descr="750d442da50ecc56.png"/>
+          <p:cNvPr id="9" name="Picture 8" descr="798a5139adaa76f0.png"/>
           <p:cNvPicPr>
             <a:picLocks noChangeAspect="1"/>
           </p:cNvPicPr>
@@ -12462,8 +12462,8 @@
         </p:blipFill>
         <p:spPr>
           <a:xfrm>
-            <a:off x="7354538" y="2194560"/>
-            <a:ext cx="1097280" cy="478536"/>
+            <a:off x="7549547" y="2194560"/>
+            <a:ext cx="1063752" cy="478536"/>
           </a:xfrm>
           <a:prstGeom prst="rect">
             <a:avLst/>
@@ -12478,7 +12478,7 @@
         </p:nvSpPr>
         <p:spPr>
           <a:xfrm>
-            <a:off x="8451818" y="2205228"/>
+            <a:off x="8613299" y="2205228"/>
             <a:ext cx="1905140" cy="457200"/>
           </a:xfrm>
           <a:prstGeom prst="rect">
@@ -12535,7 +12535,7 @@
                 </a:solidFill>
                 <a:latin typeface="Lexend"/>
               </a:rPr>
-              <a:t>Find its total length, to the nearest hundredth of a foot.</a:t>
+              <a:t>Find its perimeter, to the nearest hundredth of a foot.</a:t>
             </a:r>
           </a:p>
         </p:txBody>
@@ -12811,8 +12811,8 @@
         </p:nvSpPr>
         <p:spPr>
           <a:xfrm>
-            <a:off x="1944768" y="2113788"/>
-            <a:ext cx="5549977" cy="457200"/>
+            <a:off x="1783287" y="2113788"/>
+            <a:ext cx="5906468" cy="457200"/>
           </a:xfrm>
           <a:prstGeom prst="rect">
             <a:avLst/>
@@ -12833,14 +12833,14 @@
                 </a:solidFill>
                 <a:latin typeface="Lexend"/>
               </a:rPr>
-              <a:t>A fence runs along 6 sides, each  </a:t>
+              <a:t>A square garden has 4 sides, each  </a:t>
             </a:r>
           </a:p>
         </p:txBody>
       </p:sp>
       <p:pic>
         <p:nvPicPr>
-          <p:cNvPr id="9" name="Picture 8" descr="9fb9dd87cc4e7fee.png"/>
+          <p:cNvPr id="9" name="Picture 8" descr="d8ed0de82c731b92.png"/>
           <p:cNvPicPr>
             <a:picLocks noChangeAspect="1"/>
           </p:cNvPicPr>
@@ -12854,8 +12854,8 @@
         </p:blipFill>
         <p:spPr>
           <a:xfrm>
-            <a:off x="7357586" y="2103120"/>
-            <a:ext cx="1091184" cy="478536"/>
+            <a:off x="7552595" y="2103120"/>
+            <a:ext cx="1057656" cy="478536"/>
           </a:xfrm>
           <a:prstGeom prst="rect">
             <a:avLst/>
@@ -12870,7 +12870,7 @@
         </p:nvSpPr>
         <p:spPr>
           <a:xfrm>
-            <a:off x="8448770" y="2113788"/>
+            <a:off x="8610251" y="2113788"/>
             <a:ext cx="1905140" cy="457200"/>
           </a:xfrm>
           <a:prstGeom prst="rect">
@@ -12927,14 +12927,14 @@
                 </a:solidFill>
                 <a:latin typeface="Lexend"/>
               </a:rPr>
-              <a:t>Find its total length, to the nearest hundredth of a foot.</a:t>
+              <a:t>Find its perimeter, to the nearest hundredth of a foot.</a:t>
             </a:r>
           </a:p>
         </p:txBody>
       </p:sp>
       <p:pic>
         <p:nvPicPr>
-          <p:cNvPr id="12" name="Picture 11" descr="53d1d92fd3181f11.png"/>
+          <p:cNvPr id="12" name="Picture 11" descr="aa26d55f7ae64963.png"/>
           <p:cNvPicPr>
             <a:picLocks noChangeAspect="1"/>
           </p:cNvPicPr>
@@ -12948,8 +12948,8 @@
         </p:blipFill>
         <p:spPr>
           <a:xfrm>
-            <a:off x="4678680" y="3504007"/>
-            <a:ext cx="2526792" cy="432816"/>
+            <a:off x="4652771" y="3504007"/>
+            <a:ext cx="2532888" cy="432816"/>
           </a:xfrm>
           <a:prstGeom prst="rect">
             <a:avLst/>
@@ -12958,7 +12958,7 @@
       </p:pic>
       <p:pic>
         <p:nvPicPr>
-          <p:cNvPr id="13" name="Picture 12" descr="61dd79c9e3470dae.png"/>
+          <p:cNvPr id="13" name="Picture 12" descr="351ed85fae5af76d.png"/>
           <p:cNvPicPr>
             <a:picLocks noChangeAspect="1"/>
           </p:cNvPicPr>
@@ -12972,8 +12972,8 @@
         </p:blipFill>
         <p:spPr>
           <a:xfrm>
-            <a:off x="4678680" y="4142563"/>
-            <a:ext cx="2913888" cy="256032"/>
+            <a:off x="4652771" y="4144087"/>
+            <a:ext cx="2968752" cy="252984"/>
           </a:xfrm>
           <a:prstGeom prst="rect">
             <a:avLst/>
@@ -13010,7 +13010,7 @@
                 </a:solidFill>
                 <a:latin typeface="Lexend"/>
               </a:rPr>
-              <a:t>Answer:   84.85 feet</a:t>
+              <a:t>Answer:   48.99 feet</a:t>
             </a:r>
           </a:p>
         </p:txBody>
@@ -15122,7 +15122,7 @@
                 </a:solidFill>
                 <a:latin typeface="Lexend"/>
               </a:rPr>
-              <a:t>A plan costs 15 dollars plus 4 dollars for each of 6 gigabytes.</a:t>
+              <a:t>One pizza order costs 13 dollars plus 2 dollars for each of 5 toppings.</a:t>
             </a:r>
           </a:p>
         </p:txBody>
@@ -15157,7 +15157,7 @@
                 </a:solidFill>
                 <a:latin typeface="Lexend"/>
               </a:rPr>
-              <a:t>Another costs 15 dollars for each of 4 lines, plus 6 dollars of tax.</a:t>
+              <a:t>Another costs 13 dollars for each of 2 pizzas, plus 5 dollars for delivery.</a:t>
             </a:r>
           </a:p>
         </p:txBody>
@@ -15490,7 +15490,7 @@
                 </a:solidFill>
                 <a:latin typeface="Lexend"/>
               </a:rPr>
-              <a:t>A plan costs 15 dollars plus 4 dollars for each of 6 gigabytes.</a:t>
+              <a:t>One pizza order costs 13 dollars plus 2 dollars for each of 5 toppings.</a:t>
             </a:r>
           </a:p>
         </p:txBody>
@@ -15525,7 +15525,7 @@
                 </a:solidFill>
                 <a:latin typeface="Lexend"/>
               </a:rPr>
-              <a:t>Another costs 15 dollars for each of 4 lines, plus 6 dollars of tax.</a:t>
+              <a:t>Another costs 13 dollars for each of 2 pizzas, plus 5 dollars for delivery.</a:t>
             </a:r>
           </a:p>
         </p:txBody>
@@ -15574,7 +15574,7 @@
         <p:spPr>
           <a:xfrm>
             <a:off x="1749011" y="3717036"/>
-            <a:ext cx="1875316" cy="457200"/>
+            <a:ext cx="2037925" cy="457200"/>
           </a:xfrm>
           <a:prstGeom prst="rect">
             <a:avLst/>
@@ -15595,14 +15595,14 @@
                 </a:solidFill>
                 <a:latin typeface="Lexend"/>
               </a:rPr>
-              <a:t>First plan:  </a:t>
+              <a:t>First order:  </a:t>
             </a:r>
           </a:p>
         </p:txBody>
       </p:sp>
       <p:pic>
         <p:nvPicPr>
-          <p:cNvPr id="12" name="Picture 11" descr="9c06497c8557176c.png"/>
+          <p:cNvPr id="12" name="Picture 11" descr="6c563dd1214e96d0.png"/>
           <p:cNvPicPr>
             <a:picLocks noChangeAspect="1"/>
           </p:cNvPicPr>
@@ -15616,8 +15616,8 @@
         </p:blipFill>
         <p:spPr>
           <a:xfrm>
-            <a:off x="3487168" y="3838956"/>
-            <a:ext cx="2983992" cy="213360"/>
+            <a:off x="3649777" y="3838956"/>
+            <a:ext cx="2923032" cy="213360"/>
           </a:xfrm>
           <a:prstGeom prst="rect">
             <a:avLst/>
@@ -15633,7 +15633,7 @@
         <p:spPr>
           <a:xfrm>
             <a:off x="1749011" y="4219956"/>
-            <a:ext cx="2327424" cy="457200"/>
+            <a:ext cx="2490033" cy="457200"/>
           </a:xfrm>
           <a:prstGeom prst="rect">
             <a:avLst/>
@@ -15654,14 +15654,14 @@
                 </a:solidFill>
                 <a:latin typeface="Lexend"/>
               </a:rPr>
-              <a:t>Second plan:  </a:t>
+              <a:t>Second order:  </a:t>
             </a:r>
           </a:p>
         </p:txBody>
       </p:sp>
       <p:pic>
         <p:nvPicPr>
-          <p:cNvPr id="14" name="Picture 13" descr="328175c9b0fe1319.png"/>
+          <p:cNvPr id="14" name="Picture 13" descr="cbdd9db0c6bdb06d.png"/>
           <p:cNvPicPr>
             <a:picLocks noChangeAspect="1"/>
           </p:cNvPicPr>
@@ -15675,8 +15675,8 @@
         </p:blipFill>
         <p:spPr>
           <a:xfrm>
-            <a:off x="3939276" y="4341876"/>
-            <a:ext cx="2843784" cy="213360"/>
+            <a:off x="4101885" y="4341876"/>
+            <a:ext cx="2764536" cy="213360"/>
           </a:xfrm>
           <a:prstGeom prst="rect">
             <a:avLst/>
@@ -15748,7 +15748,7 @@
                 </a:solidFill>
                 <a:latin typeface="Lexend"/>
               </a:rPr>
-              <a:t>Answer:   39 dollars and 66 dollars</a:t>
+              <a:t>Answer:   23 dollars and 31 dollars</a:t>
             </a:r>
           </a:p>
         </p:txBody>

--- a/a7/build/out/u4/A7 4.07 Real-World Order of Operations - Slides.pptx
+++ b/a7/build/out/u4/A7 4.07 Real-World Order of Operations - Slides.pptx
@@ -3673,8 +3673,8 @@
         </p:nvSpPr>
         <p:spPr>
           <a:xfrm>
-            <a:off x="1479479" y="1790700"/>
-            <a:ext cx="1004672" cy="457200"/>
+            <a:off x="2489174" y="1642776"/>
+            <a:ext cx="943575" cy="457200"/>
           </a:xfrm>
           <a:prstGeom prst="rect">
             <a:avLst/>
@@ -3689,7 +3689,7 @@
           <a:p>
             <a:pPr algn="l"/>
             <a:r>
-              <a:rPr sz="2470" b="0" i="0">
+              <a:rPr sz="2280" b="0" i="0">
                 <a:solidFill>
                   <a:srgbClr val="1A1A1A"/>
                 </a:solidFill>
@@ -3702,7 +3702,7 @@
       </p:sp>
       <p:pic>
         <p:nvPicPr>
-          <p:cNvPr id="9" name="Picture 8" descr="a14dbba8fe39de29.png"/>
+          <p:cNvPr id="9" name="Picture 8" descr="5d0fc710cd450203.png"/>
           <p:cNvPicPr>
             <a:picLocks noChangeAspect="1"/>
           </p:cNvPicPr>
@@ -3716,8 +3716,8 @@
         </p:blipFill>
         <p:spPr>
           <a:xfrm>
-            <a:off x="2346991" y="1600200"/>
-            <a:ext cx="2002536" cy="838200"/>
+            <a:off x="3295590" y="1600200"/>
+            <a:ext cx="1297686" cy="542353"/>
           </a:xfrm>
           <a:prstGeom prst="rect">
             <a:avLst/>
@@ -3732,8 +3732,8 @@
         </p:nvSpPr>
         <p:spPr>
           <a:xfrm>
-            <a:off x="4349527" y="1790700"/>
-            <a:ext cx="952168" cy="457200"/>
+            <a:off x="4593276" y="1642776"/>
+            <a:ext cx="895067" cy="457200"/>
           </a:xfrm>
           <a:prstGeom prst="rect">
             <a:avLst/>
@@ -3748,7 +3748,7 @@
           <a:p>
             <a:pPr algn="l"/>
             <a:r>
-              <a:rPr sz="2470" b="0" i="0">
+              <a:rPr sz="2280" b="0" i="0">
                 <a:solidFill>
                   <a:srgbClr val="1A1A1A"/>
                 </a:solidFill>
@@ -3761,7 +3761,7 @@
       </p:sp>
       <p:pic>
         <p:nvPicPr>
-          <p:cNvPr id="11" name="Picture 10" descr="99d0f397928935d0.png"/>
+          <p:cNvPr id="11" name="Picture 10" descr="ffb5ee49e4e6dbd3.png"/>
           <p:cNvPicPr>
             <a:picLocks noChangeAspect="1"/>
           </p:cNvPicPr>
@@ -3775,8 +3775,8 @@
         </p:blipFill>
         <p:spPr>
           <a:xfrm>
-            <a:off x="5164535" y="1845564"/>
-            <a:ext cx="1685544" cy="347472"/>
+            <a:off x="5351183" y="1765268"/>
+            <a:ext cx="1099566" cy="225361"/>
           </a:xfrm>
           <a:prstGeom prst="rect">
             <a:avLst/>
@@ -3791,8 +3791,8 @@
         </p:nvSpPr>
         <p:spPr>
           <a:xfrm>
-            <a:off x="6850079" y="1790700"/>
-            <a:ext cx="1786194" cy="457200"/>
+            <a:off x="6450749" y="1642776"/>
+            <a:ext cx="1664749" cy="457200"/>
           </a:xfrm>
           <a:prstGeom prst="rect">
             <a:avLst/>
@@ -3807,7 +3807,7 @@
           <a:p>
             <a:pPr algn="l"/>
             <a:r>
-              <a:rPr sz="2470" b="0" i="0">
+              <a:rPr sz="2280" b="0" i="0">
                 <a:solidFill>
                   <a:srgbClr val="1A1A1A"/>
                 </a:solidFill>
@@ -3820,7 +3820,7 @@
       </p:sp>
       <p:pic>
         <p:nvPicPr>
-          <p:cNvPr id="13" name="Picture 12" descr="5038fc82b26adb58.png"/>
+          <p:cNvPr id="13" name="Picture 12" descr="fcf34a7dd0413e55.png"/>
           <p:cNvPicPr>
             <a:picLocks noChangeAspect="1"/>
           </p:cNvPicPr>
@@ -3834,8 +3834,8 @@
         </p:blipFill>
         <p:spPr>
           <a:xfrm>
-            <a:off x="8499114" y="1847088"/>
-            <a:ext cx="1207008" cy="344424"/>
+            <a:off x="7978339" y="1762791"/>
+            <a:ext cx="787527" cy="222885"/>
           </a:xfrm>
           <a:prstGeom prst="rect">
             <a:avLst/>
@@ -3850,8 +3850,8 @@
         </p:nvSpPr>
         <p:spPr>
           <a:xfrm>
-            <a:off x="9706122" y="1790700"/>
-            <a:ext cx="1113078" cy="457200"/>
+            <a:off x="8765866" y="1642776"/>
+            <a:ext cx="1043638" cy="457200"/>
           </a:xfrm>
           <a:prstGeom prst="rect">
             <a:avLst/>
@@ -3866,7 +3866,7 @@
           <a:p>
             <a:pPr algn="l"/>
             <a:r>
-              <a:rPr sz="2470" b="0" i="0">
+              <a:rPr sz="2280" b="0" i="0">
                 <a:solidFill>
                   <a:srgbClr val="1A1A1A"/>
                 </a:solidFill>
@@ -4113,8 +4113,8 @@
         </p:nvSpPr>
         <p:spPr>
           <a:xfrm>
-            <a:off x="1477955" y="1790700"/>
-            <a:ext cx="1004672" cy="457200"/>
+            <a:off x="2487936" y="1644015"/>
+            <a:ext cx="943575" cy="457200"/>
           </a:xfrm>
           <a:prstGeom prst="rect">
             <a:avLst/>
@@ -4129,7 +4129,7 @@
           <a:p>
             <a:pPr algn="l"/>
             <a:r>
-              <a:rPr sz="2470" b="0" i="0">
+              <a:rPr sz="2280" b="0" i="0">
                 <a:solidFill>
                   <a:srgbClr val="1A1A1A"/>
                 </a:solidFill>
@@ -4142,7 +4142,7 @@
       </p:sp>
       <p:pic>
         <p:nvPicPr>
-          <p:cNvPr id="9" name="Picture 8" descr="b636794ba0bbf4a9.png"/>
+          <p:cNvPr id="9" name="Picture 8" descr="4ee9fb59b86866b6.png"/>
           <p:cNvPicPr>
             <a:picLocks noChangeAspect="1"/>
           </p:cNvPicPr>
@@ -4156,8 +4156,8 @@
         </p:blipFill>
         <p:spPr>
           <a:xfrm>
-            <a:off x="2345467" y="1600200"/>
-            <a:ext cx="1999487" cy="838200"/>
+            <a:off x="3294352" y="1600200"/>
+            <a:ext cx="1300162" cy="544830"/>
           </a:xfrm>
           <a:prstGeom prst="rect">
             <a:avLst/>
@@ -4172,8 +4172,8 @@
         </p:nvSpPr>
         <p:spPr>
           <a:xfrm>
-            <a:off x="4344955" y="1790700"/>
-            <a:ext cx="952168" cy="457200"/>
+            <a:off x="4594514" y="1644015"/>
+            <a:ext cx="895067" cy="457200"/>
           </a:xfrm>
           <a:prstGeom prst="rect">
             <a:avLst/>
@@ -4188,7 +4188,7 @@
           <a:p>
             <a:pPr algn="l"/>
             <a:r>
-              <a:rPr sz="2470" b="0" i="0">
+              <a:rPr sz="2280" b="0" i="0">
                 <a:solidFill>
                   <a:srgbClr val="1A1A1A"/>
                 </a:solidFill>
@@ -4201,7 +4201,7 @@
       </p:sp>
       <p:pic>
         <p:nvPicPr>
-          <p:cNvPr id="11" name="Picture 10" descr="28ac43e86d9ee64a.png"/>
+          <p:cNvPr id="11" name="Picture 10" descr="68a8df29f71021bf.png"/>
           <p:cNvPicPr>
             <a:picLocks noChangeAspect="1"/>
           </p:cNvPicPr>
@@ -4215,8 +4215,8 @@
         </p:blipFill>
         <p:spPr>
           <a:xfrm>
-            <a:off x="5159963" y="1845564"/>
-            <a:ext cx="1688592" cy="347472"/>
+            <a:off x="5352422" y="1766506"/>
+            <a:ext cx="1099566" cy="225361"/>
           </a:xfrm>
           <a:prstGeom prst="rect">
             <a:avLst/>
@@ -4231,8 +4231,8 @@
         </p:nvSpPr>
         <p:spPr>
           <a:xfrm>
-            <a:off x="6848555" y="1790700"/>
-            <a:ext cx="1786194" cy="457200"/>
+            <a:off x="6451988" y="1644015"/>
+            <a:ext cx="1664749" cy="457200"/>
           </a:xfrm>
           <a:prstGeom prst="rect">
             <a:avLst/>
@@ -4247,7 +4247,7 @@
           <a:p>
             <a:pPr algn="l"/>
             <a:r>
-              <a:rPr sz="2470" b="0" i="0">
+              <a:rPr sz="2280" b="0" i="0">
                 <a:solidFill>
                   <a:srgbClr val="1A1A1A"/>
                 </a:solidFill>
@@ -4260,7 +4260,7 @@
       </p:sp>
       <p:pic>
         <p:nvPicPr>
-          <p:cNvPr id="13" name="Picture 12" descr="e1facf4e099fdd16.png"/>
+          <p:cNvPr id="13" name="Picture 12" descr="9a2812485007914a.png"/>
           <p:cNvPicPr>
             <a:picLocks noChangeAspect="1"/>
           </p:cNvPicPr>
@@ -4274,8 +4274,8 @@
         </p:blipFill>
         <p:spPr>
           <a:xfrm>
-            <a:off x="8497590" y="1847088"/>
-            <a:ext cx="1210056" cy="344424"/>
+            <a:off x="7979577" y="1764030"/>
+            <a:ext cx="787527" cy="222885"/>
           </a:xfrm>
           <a:prstGeom prst="rect">
             <a:avLst/>
@@ -4290,8 +4290,8 @@
         </p:nvSpPr>
         <p:spPr>
           <a:xfrm>
-            <a:off x="9707646" y="1790700"/>
-            <a:ext cx="1113078" cy="457200"/>
+            <a:off x="8767104" y="1644015"/>
+            <a:ext cx="1043638" cy="457200"/>
           </a:xfrm>
           <a:prstGeom prst="rect">
             <a:avLst/>
@@ -4306,7 +4306,7 @@
           <a:p>
             <a:pPr algn="l"/>
             <a:r>
-              <a:rPr sz="2470" b="0" i="0">
+              <a:rPr sz="2280" b="0" i="0">
                 <a:solidFill>
                   <a:srgbClr val="1A1A1A"/>
                 </a:solidFill>
@@ -4333,7 +4333,7 @@
         </p:blipFill>
         <p:spPr>
           <a:xfrm>
-            <a:off x="3218688" y="2886456"/>
+            <a:off x="3218688" y="2534602"/>
             <a:ext cx="2112264" cy="301752"/>
           </a:xfrm>
           <a:prstGeom prst="rect">
@@ -4357,7 +4357,7 @@
         </p:blipFill>
         <p:spPr>
           <a:xfrm>
-            <a:off x="3218688" y="3371088"/>
+            <a:off x="3218688" y="3031997"/>
             <a:ext cx="5836920" cy="606552"/>
           </a:xfrm>
           <a:prstGeom prst="rect">
@@ -5742,7 +5742,7 @@
         </p:nvSpPr>
         <p:spPr>
           <a:xfrm>
-            <a:off x="4244369" y="3267787"/>
+            <a:off x="4245131" y="3267787"/>
             <a:ext cx="1177822" cy="457200"/>
           </a:xfrm>
           <a:prstGeom prst="rect">
@@ -5771,7 +5771,7 @@
       </p:sp>
       <p:pic>
         <p:nvPicPr>
-          <p:cNvPr id="12" name="Picture 11" descr="80d9c9c061edf5c5.png"/>
+          <p:cNvPr id="12" name="Picture 11" descr="030c2bd87e10b792.png"/>
           <p:cNvPicPr>
             <a:picLocks noChangeAspect="1"/>
           </p:cNvPicPr>
@@ -5785,8 +5785,8 @@
         </p:blipFill>
         <p:spPr>
           <a:xfrm>
-            <a:off x="5285031" y="3365323"/>
-            <a:ext cx="868680" cy="262128"/>
+            <a:off x="5285793" y="3356369"/>
+            <a:ext cx="865774" cy="261366"/>
           </a:xfrm>
           <a:prstGeom prst="rect">
             <a:avLst/>
@@ -5801,7 +5801,7 @@
         </p:nvSpPr>
         <p:spPr>
           <a:xfrm>
-            <a:off x="4244369" y="3770707"/>
+            <a:off x="4245131" y="3770707"/>
             <a:ext cx="983890" cy="457200"/>
           </a:xfrm>
           <a:prstGeom prst="rect">
@@ -5830,7 +5830,7 @@
       </p:sp>
       <p:pic>
         <p:nvPicPr>
-          <p:cNvPr id="14" name="Picture 13" descr="bdbfbcd24be2c881.png"/>
+          <p:cNvPr id="14" name="Picture 13" descr="24cf65e451cd1082.png"/>
           <p:cNvPicPr>
             <a:picLocks noChangeAspect="1"/>
           </p:cNvPicPr>
@@ -5844,8 +5844,8 @@
         </p:blipFill>
         <p:spPr>
           <a:xfrm>
-            <a:off x="5091099" y="3892627"/>
-            <a:ext cx="1886712" cy="213360"/>
+            <a:off x="5091861" y="3905962"/>
+            <a:ext cx="1887902" cy="214693"/>
           </a:xfrm>
           <a:prstGeom prst="rect">
             <a:avLst/>
@@ -5860,7 +5860,7 @@
         </p:nvSpPr>
         <p:spPr>
           <a:xfrm>
-            <a:off x="4244369" y="4273627"/>
+            <a:off x="4245131" y="4273627"/>
             <a:ext cx="1194757" cy="457200"/>
           </a:xfrm>
           <a:prstGeom prst="rect">
@@ -5889,7 +5889,7 @@
       </p:sp>
       <p:pic>
         <p:nvPicPr>
-          <p:cNvPr id="16" name="Picture 15" descr="a731fe54239e13b8.png"/>
+          <p:cNvPr id="16" name="Picture 15" descr="2dabb82215e595d0.png"/>
           <p:cNvPicPr>
             <a:picLocks noChangeAspect="1"/>
           </p:cNvPicPr>
@@ -5903,8 +5903,8 @@
         </p:blipFill>
         <p:spPr>
           <a:xfrm>
-            <a:off x="5301966" y="4395547"/>
-            <a:ext cx="2618232" cy="213360"/>
+            <a:off x="5302728" y="4408882"/>
+            <a:ext cx="2615993" cy="214693"/>
           </a:xfrm>
           <a:prstGeom prst="rect">
             <a:avLst/>
@@ -6182,8 +6182,8 @@
         </p:nvSpPr>
         <p:spPr>
           <a:xfrm>
-            <a:off x="3737404" y="2171700"/>
-            <a:ext cx="1806076" cy="457200"/>
+            <a:off x="3995958" y="2171700"/>
+            <a:ext cx="1683183" cy="457200"/>
           </a:xfrm>
           <a:prstGeom prst="rect">
             <a:avLst/>
@@ -6198,7 +6198,7 @@
           <a:p>
             <a:pPr algn="l"/>
             <a:r>
-              <a:rPr sz="2470" b="0" i="0">
+              <a:rPr sz="2280" b="0" i="0">
                 <a:solidFill>
                   <a:srgbClr val="1A1A1A"/>
                 </a:solidFill>
@@ -6225,8 +6225,8 @@
         </p:blipFill>
         <p:spPr>
           <a:xfrm>
-            <a:off x="5406321" y="2229612"/>
-            <a:ext cx="569976" cy="341376"/>
+            <a:off x="5541981" y="2242185"/>
+            <a:ext cx="463105" cy="277368"/>
           </a:xfrm>
           <a:prstGeom prst="rect">
             <a:avLst/>
@@ -6241,8 +6241,8 @@
         </p:nvSpPr>
         <p:spPr>
           <a:xfrm>
-            <a:off x="5976297" y="2171700"/>
-            <a:ext cx="1439295" cy="457200"/>
+            <a:off x="6005087" y="2171700"/>
+            <a:ext cx="1344677" cy="457200"/>
           </a:xfrm>
           <a:prstGeom prst="rect">
             <a:avLst/>
@@ -6257,7 +6257,7 @@
           <a:p>
             <a:pPr algn="l"/>
             <a:r>
-              <a:rPr sz="2470" b="0" i="0">
+              <a:rPr sz="2280" b="0" i="0">
                 <a:solidFill>
                   <a:srgbClr val="1A1A1A"/>
                 </a:solidFill>
@@ -6284,8 +6284,8 @@
         </p:blipFill>
         <p:spPr>
           <a:xfrm>
-            <a:off x="7278433" y="2263140"/>
-            <a:ext cx="996696" cy="274320"/>
+            <a:off x="7212604" y="2291715"/>
+            <a:ext cx="809815" cy="222885"/>
           </a:xfrm>
           <a:prstGeom prst="rect">
             <a:avLst/>
@@ -6300,8 +6300,8 @@
         </p:nvSpPr>
         <p:spPr>
           <a:xfrm>
-            <a:off x="8275129" y="2171700"/>
-            <a:ext cx="286146" cy="457200"/>
+            <a:off x="8022420" y="2171700"/>
+            <a:ext cx="280301" cy="457200"/>
           </a:xfrm>
           <a:prstGeom prst="rect">
             <a:avLst/>
@@ -6316,7 +6316,7 @@
           <a:p>
             <a:pPr algn="l"/>
             <a:r>
-              <a:rPr sz="2470" b="0" i="0">
+              <a:rPr sz="2280" b="0" i="0">
                 <a:solidFill>
                   <a:srgbClr val="1A1A1A"/>
                 </a:solidFill>
@@ -6598,8 +6598,8 @@
         </p:nvSpPr>
         <p:spPr>
           <a:xfrm>
-            <a:off x="3735880" y="2080260"/>
-            <a:ext cx="1806076" cy="457200"/>
+            <a:off x="3994720" y="2080260"/>
+            <a:ext cx="1683183" cy="457200"/>
           </a:xfrm>
           <a:prstGeom prst="rect">
             <a:avLst/>
@@ -6614,7 +6614,7 @@
           <a:p>
             <a:pPr algn="l"/>
             <a:r>
-              <a:rPr sz="2470" b="0" i="0">
+              <a:rPr sz="2280" b="0" i="0">
                 <a:solidFill>
                   <a:srgbClr val="1A1A1A"/>
                 </a:solidFill>
@@ -6641,8 +6641,8 @@
         </p:blipFill>
         <p:spPr>
           <a:xfrm>
-            <a:off x="5404797" y="2138171"/>
-            <a:ext cx="573024" cy="341376"/>
+            <a:off x="5540743" y="2150745"/>
+            <a:ext cx="465582" cy="277368"/>
           </a:xfrm>
           <a:prstGeom prst="rect">
             <a:avLst/>
@@ -6657,8 +6657,8 @@
         </p:nvSpPr>
         <p:spPr>
           <a:xfrm>
-            <a:off x="5977821" y="2080260"/>
-            <a:ext cx="1439295" cy="457200"/>
+            <a:off x="6006325" y="2080260"/>
+            <a:ext cx="1344677" cy="457200"/>
           </a:xfrm>
           <a:prstGeom prst="rect">
             <a:avLst/>
@@ -6673,7 +6673,7 @@
           <a:p>
             <a:pPr algn="l"/>
             <a:r>
-              <a:rPr sz="2470" b="0" i="0">
+              <a:rPr sz="2280" b="0" i="0">
                 <a:solidFill>
                   <a:srgbClr val="1A1A1A"/>
                 </a:solidFill>
@@ -6700,8 +6700,8 @@
         </p:blipFill>
         <p:spPr>
           <a:xfrm>
-            <a:off x="7279957" y="2171700"/>
-            <a:ext cx="996696" cy="274320"/>
+            <a:off x="7213843" y="2200275"/>
+            <a:ext cx="809815" cy="222885"/>
           </a:xfrm>
           <a:prstGeom prst="rect">
             <a:avLst/>
@@ -6716,8 +6716,8 @@
         </p:nvSpPr>
         <p:spPr>
           <a:xfrm>
-            <a:off x="8276653" y="2080260"/>
-            <a:ext cx="286146" cy="457200"/>
+            <a:off x="8023658" y="2080260"/>
+            <a:ext cx="280301" cy="457200"/>
           </a:xfrm>
           <a:prstGeom prst="rect">
             <a:avLst/>
@@ -6732,7 +6732,7 @@
           <a:p>
             <a:pPr algn="l"/>
             <a:r>
-              <a:rPr sz="2470" b="0" i="0">
+              <a:rPr sz="2280" b="0" i="0">
                 <a:solidFill>
                   <a:srgbClr val="1A1A1A"/>
                 </a:solidFill>
@@ -6759,7 +6759,7 @@
         </p:blipFill>
         <p:spPr>
           <a:xfrm>
-            <a:off x="5364479" y="2910840"/>
+            <a:off x="5364479" y="2928461"/>
             <a:ext cx="1539240" cy="313944"/>
           </a:xfrm>
           <a:prstGeom prst="rect">
@@ -6783,7 +6783,7 @@
         </p:blipFill>
         <p:spPr>
           <a:xfrm>
-            <a:off x="5364479" y="3413759"/>
+            <a:off x="5364479" y="3431381"/>
             <a:ext cx="1115568" cy="313944"/>
           </a:xfrm>
           <a:prstGeom prst="rect">
@@ -6807,7 +6807,7 @@
         </p:blipFill>
         <p:spPr>
           <a:xfrm>
-            <a:off x="5364479" y="3966971"/>
+            <a:off x="5364479" y="3980021"/>
             <a:ext cx="1161288" cy="213360"/>
           </a:xfrm>
           <a:prstGeom prst="rect">
@@ -7156,7 +7156,7 @@
         </p:nvSpPr>
         <p:spPr>
           <a:xfrm>
-            <a:off x="1234440" y="3424759"/>
+            <a:off x="1234440" y="3424664"/>
             <a:ext cx="2865157" cy="457200"/>
           </a:xfrm>
           <a:prstGeom prst="rect">
@@ -7185,7 +7185,7 @@
       </p:sp>
       <p:pic>
         <p:nvPicPr>
-          <p:cNvPr id="11" name="Picture 10" descr="0bcb023825e8ebc6.png"/>
+          <p:cNvPr id="11" name="Picture 10" descr="5d0fc710cd450203.png"/>
           <p:cNvPicPr>
             <a:picLocks noChangeAspect="1"/>
           </p:cNvPicPr>
@@ -7200,7 +7200,7 @@
         <p:spPr>
           <a:xfrm>
             <a:off x="3962437" y="3382087"/>
-            <a:ext cx="1298448" cy="542544"/>
+            <a:ext cx="1297686" cy="542353"/>
           </a:xfrm>
           <a:prstGeom prst="rect">
             <a:avLst/>
@@ -7215,7 +7215,7 @@
         </p:nvSpPr>
         <p:spPr>
           <a:xfrm>
-            <a:off x="5260885" y="3424759"/>
+            <a:off x="5260123" y="3424664"/>
             <a:ext cx="2200084" cy="457200"/>
           </a:xfrm>
           <a:prstGeom prst="rect">
@@ -7244,7 +7244,7 @@
       </p:sp>
       <p:pic>
         <p:nvPicPr>
-          <p:cNvPr id="13" name="Picture 12" descr="f4653c4bb82321a9.png"/>
+          <p:cNvPr id="13" name="Picture 12" descr="cdb2d0303764b98e.png"/>
           <p:cNvPicPr>
             <a:picLocks noChangeAspect="1"/>
           </p:cNvPicPr>
@@ -7258,8 +7258,8 @@
         </p:blipFill>
         <p:spPr>
           <a:xfrm>
-            <a:off x="7323810" y="3569539"/>
-            <a:ext cx="246888" cy="167640"/>
+            <a:off x="7323048" y="3599162"/>
+            <a:ext cx="250126" cy="168401"/>
           </a:xfrm>
           <a:prstGeom prst="rect">
             <a:avLst/>
@@ -7274,7 +7274,7 @@
         </p:nvSpPr>
         <p:spPr>
           <a:xfrm>
-            <a:off x="7570698" y="3424759"/>
+            <a:off x="7573175" y="3424664"/>
             <a:ext cx="2386623" cy="457200"/>
           </a:xfrm>
           <a:prstGeom prst="rect">
@@ -7303,7 +7303,7 @@
       </p:sp>
       <p:pic>
         <p:nvPicPr>
-          <p:cNvPr id="15" name="Picture 14" descr="f5a2a14a06f9d731.png"/>
+          <p:cNvPr id="15" name="Picture 14" descr="ed57ccb980491c84.png"/>
           <p:cNvPicPr>
             <a:picLocks noChangeAspect="1"/>
           </p:cNvPicPr>
@@ -7317,8 +7317,8 @@
         </p:blipFill>
         <p:spPr>
           <a:xfrm>
-            <a:off x="9820161" y="3571063"/>
-            <a:ext cx="167640" cy="164592"/>
+            <a:off x="9822638" y="3601638"/>
+            <a:ext cx="168401" cy="165925"/>
           </a:xfrm>
           <a:prstGeom prst="rect">
             <a:avLst/>
@@ -7333,7 +7333,7 @@
         </p:nvSpPr>
         <p:spPr>
           <a:xfrm>
-            <a:off x="9987801" y="3424759"/>
+            <a:off x="9991040" y="3424664"/>
             <a:ext cx="280301" cy="457200"/>
           </a:xfrm>
           <a:prstGeom prst="rect">
@@ -7368,7 +7368,7 @@
         </p:nvSpPr>
         <p:spPr>
           <a:xfrm>
-            <a:off x="1234440" y="4125799"/>
+            <a:off x="1234440" y="4125608"/>
             <a:ext cx="10058400" cy="429370"/>
           </a:xfrm>
           <a:prstGeom prst="rect">
@@ -7403,7 +7403,7 @@
         </p:nvSpPr>
         <p:spPr>
           <a:xfrm>
-            <a:off x="777240" y="4847777"/>
+            <a:off x="777240" y="4847587"/>
             <a:ext cx="10607040" cy="457200"/>
           </a:xfrm>
           <a:prstGeom prst="rect">
@@ -7736,7 +7736,7 @@
         </p:nvSpPr>
         <p:spPr>
           <a:xfrm>
-            <a:off x="1234440" y="3424759"/>
+            <a:off x="1234440" y="3425902"/>
             <a:ext cx="2865157" cy="457200"/>
           </a:xfrm>
           <a:prstGeom prst="rect">
@@ -7765,7 +7765,7 @@
       </p:sp>
       <p:pic>
         <p:nvPicPr>
-          <p:cNvPr id="11" name="Picture 10" descr="94474fdbb34e34e1.png"/>
+          <p:cNvPr id="11" name="Picture 10" descr="4ee9fb59b86866b6.png"/>
           <p:cNvPicPr>
             <a:picLocks noChangeAspect="1"/>
           </p:cNvPicPr>
@@ -7780,7 +7780,7 @@
         <p:spPr>
           <a:xfrm>
             <a:off x="3962437" y="3382087"/>
-            <a:ext cx="1304544" cy="542544"/>
+            <a:ext cx="1300162" cy="544830"/>
           </a:xfrm>
           <a:prstGeom prst="rect">
             <a:avLst/>
@@ -7795,7 +7795,7 @@
         </p:nvSpPr>
         <p:spPr>
           <a:xfrm>
-            <a:off x="5266981" y="3424759"/>
+            <a:off x="5262600" y="3425902"/>
             <a:ext cx="2200084" cy="457200"/>
           </a:xfrm>
           <a:prstGeom prst="rect">
@@ -7824,7 +7824,7 @@
       </p:sp>
       <p:pic>
         <p:nvPicPr>
-          <p:cNvPr id="13" name="Picture 12" descr="f4653c4bb82321a9.png"/>
+          <p:cNvPr id="13" name="Picture 12" descr="cdb2d0303764b98e.png"/>
           <p:cNvPicPr>
             <a:picLocks noChangeAspect="1"/>
           </p:cNvPicPr>
@@ -7838,8 +7838,8 @@
         </p:blipFill>
         <p:spPr>
           <a:xfrm>
-            <a:off x="7329906" y="3569539"/>
-            <a:ext cx="246888" cy="167640"/>
+            <a:off x="7325525" y="3600400"/>
+            <a:ext cx="250126" cy="168401"/>
           </a:xfrm>
           <a:prstGeom prst="rect">
             <a:avLst/>
@@ -7854,7 +7854,7 @@
         </p:nvSpPr>
         <p:spPr>
           <a:xfrm>
-            <a:off x="7576794" y="3424759"/>
+            <a:off x="7575651" y="3425902"/>
             <a:ext cx="2386623" cy="457200"/>
           </a:xfrm>
           <a:prstGeom prst="rect">
@@ -7883,7 +7883,7 @@
       </p:sp>
       <p:pic>
         <p:nvPicPr>
-          <p:cNvPr id="15" name="Picture 14" descr="f5a2a14a06f9d731.png"/>
+          <p:cNvPr id="15" name="Picture 14" descr="ed57ccb980491c84.png"/>
           <p:cNvPicPr>
             <a:picLocks noChangeAspect="1"/>
           </p:cNvPicPr>
@@ -7897,8 +7897,8 @@
         </p:blipFill>
         <p:spPr>
           <a:xfrm>
-            <a:off x="9826257" y="3571063"/>
-            <a:ext cx="167640" cy="164592"/>
+            <a:off x="9825114" y="3602876"/>
+            <a:ext cx="168401" cy="165925"/>
           </a:xfrm>
           <a:prstGeom prst="rect">
             <a:avLst/>
@@ -7913,7 +7913,7 @@
         </p:nvSpPr>
         <p:spPr>
           <a:xfrm>
-            <a:off x="9993897" y="3424759"/>
+            <a:off x="9993516" y="3425902"/>
             <a:ext cx="280301" cy="457200"/>
           </a:xfrm>
           <a:prstGeom prst="rect">
@@ -7948,7 +7948,7 @@
         </p:nvSpPr>
         <p:spPr>
           <a:xfrm>
-            <a:off x="1234440" y="4125799"/>
+            <a:off x="1234440" y="4128085"/>
             <a:ext cx="10058400" cy="429370"/>
           </a:xfrm>
           <a:prstGeom prst="rect">
@@ -7991,7 +7991,7 @@
         </p:blipFill>
         <p:spPr>
           <a:xfrm>
-            <a:off x="3750563" y="4783769"/>
+            <a:off x="3750563" y="4786055"/>
             <a:ext cx="4770120" cy="606552"/>
           </a:xfrm>
           <a:prstGeom prst="rect">
@@ -8007,7 +8007,7 @@
         </p:nvSpPr>
         <p:spPr>
           <a:xfrm>
-            <a:off x="777240" y="5527481"/>
+            <a:off x="777240" y="5529767"/>
             <a:ext cx="10607040" cy="548640"/>
           </a:xfrm>
           <a:prstGeom prst="rect">
@@ -8313,7 +8313,7 @@
         </p:blipFill>
         <p:spPr>
           <a:xfrm>
-            <a:off x="2408921" y="1501140"/>
+            <a:off x="2408921" y="1503997"/>
             <a:ext cx="1484376" cy="335280"/>
           </a:xfrm>
           <a:prstGeom prst="rect">
@@ -8372,7 +8372,7 @@
         </p:blipFill>
         <p:spPr>
           <a:xfrm>
-            <a:off x="2423059" y="2086356"/>
+            <a:off x="2423059" y="2083117"/>
             <a:ext cx="1578864" cy="390144"/>
           </a:xfrm>
           <a:prstGeom prst="rect">
@@ -8388,7 +8388,7 @@
         </p:nvSpPr>
         <p:spPr>
           <a:xfrm>
-            <a:off x="1874519" y="2729484"/>
+            <a:off x="1874519" y="2718427"/>
             <a:ext cx="2930351" cy="457200"/>
           </a:xfrm>
           <a:prstGeom prst="rect">
@@ -8417,7 +8417,7 @@
       </p:sp>
       <p:pic>
         <p:nvPicPr>
-          <p:cNvPr id="13" name="Picture 12" descr="6d6fe08af9312c1c.png"/>
+          <p:cNvPr id="13" name="Picture 12" descr="55999f3eae65eb74.png"/>
           <p:cNvPicPr>
             <a:picLocks noChangeAspect="1"/>
           </p:cNvPicPr>
@@ -8432,7 +8432,7 @@
         <p:spPr>
           <a:xfrm>
             <a:off x="4667711" y="2688336"/>
-            <a:ext cx="768096" cy="539496"/>
+            <a:ext cx="735726" cy="517382"/>
           </a:xfrm>
           <a:prstGeom prst="rect">
             <a:avLst/>
@@ -8447,7 +8447,7 @@
         </p:nvSpPr>
         <p:spPr>
           <a:xfrm>
-            <a:off x="1874519" y="3406140"/>
+            <a:off x="1874519" y="3384026"/>
             <a:ext cx="2118555" cy="457200"/>
           </a:xfrm>
           <a:prstGeom prst="rect">
@@ -8476,7 +8476,7 @@
       </p:sp>
       <p:pic>
         <p:nvPicPr>
-          <p:cNvPr id="15" name="Picture 14" descr="236959ea5354d8ca.png"/>
+          <p:cNvPr id="15" name="Picture 14" descr="9999ab29d2b7274c.png"/>
           <p:cNvPicPr>
             <a:picLocks noChangeAspect="1"/>
           </p:cNvPicPr>
@@ -8490,8 +8490,8 @@
         </p:blipFill>
         <p:spPr>
           <a:xfrm>
-            <a:off x="3855915" y="3497580"/>
-            <a:ext cx="460247" cy="274320"/>
+            <a:off x="3855915" y="3458725"/>
+            <a:ext cx="441436" cy="263437"/>
           </a:xfrm>
           <a:prstGeom prst="rect">
             <a:avLst/>
@@ -8506,7 +8506,7 @@
         </p:nvSpPr>
         <p:spPr>
           <a:xfrm>
-            <a:off x="4316163" y="3406140"/>
+            <a:off x="4297351" y="3384026"/>
             <a:ext cx="1297468" cy="457200"/>
           </a:xfrm>
           <a:prstGeom prst="rect">
@@ -8535,7 +8535,7 @@
       </p:sp>
       <p:pic>
         <p:nvPicPr>
-          <p:cNvPr id="17" name="Picture 16" descr="78a344566654b4bb.png"/>
+          <p:cNvPr id="17" name="Picture 16" descr="48277941d45974da.png"/>
           <p:cNvPicPr>
             <a:picLocks noChangeAspect="1"/>
           </p:cNvPicPr>
@@ -8549,8 +8549,8 @@
         </p:blipFill>
         <p:spPr>
           <a:xfrm>
-            <a:off x="5476472" y="3523488"/>
-            <a:ext cx="618744" cy="222504"/>
+            <a:off x="5457660" y="3513312"/>
+            <a:ext cx="595701" cy="213598"/>
           </a:xfrm>
           <a:prstGeom prst="rect">
             <a:avLst/>
@@ -8565,7 +8565,7 @@
         </p:nvSpPr>
         <p:spPr>
           <a:xfrm>
-            <a:off x="6095216" y="3406140"/>
+            <a:off x="6053361" y="3384026"/>
             <a:ext cx="277353" cy="457200"/>
           </a:xfrm>
           <a:prstGeom prst="rect">
@@ -9239,7 +9239,7 @@
         </p:blipFill>
         <p:spPr>
           <a:xfrm>
-            <a:off x="5234939" y="3351607"/>
+            <a:off x="5234939" y="3369323"/>
             <a:ext cx="1365504" cy="252984"/>
           </a:xfrm>
           <a:prstGeom prst="rect">
@@ -9263,7 +9263,7 @@
         </p:blipFill>
         <p:spPr>
           <a:xfrm>
-            <a:off x="5234939" y="3891103"/>
+            <a:off x="5234939" y="3902723"/>
             <a:ext cx="1801368" cy="252984"/>
           </a:xfrm>
           <a:prstGeom prst="rect">
@@ -10015,7 +10015,7 @@
         </p:nvSpPr>
         <p:spPr>
           <a:xfrm>
-            <a:off x="4599461" y="3824378"/>
+            <a:off x="4601009" y="3824378"/>
             <a:ext cx="1177822" cy="457200"/>
           </a:xfrm>
           <a:prstGeom prst="rect">
@@ -10044,7 +10044,7 @@
       </p:sp>
       <p:pic>
         <p:nvPicPr>
-          <p:cNvPr id="12" name="Picture 11" descr="db60fa38d81bcb29.png"/>
+          <p:cNvPr id="12" name="Picture 11" descr="c7c93517f0e2c371.png"/>
           <p:cNvPicPr>
             <a:picLocks noChangeAspect="1"/>
           </p:cNvPicPr>
@@ -10058,8 +10058,8 @@
         </p:blipFill>
         <p:spPr>
           <a:xfrm>
-            <a:off x="5640123" y="3923438"/>
-            <a:ext cx="896112" cy="259080"/>
+            <a:off x="5641671" y="3912961"/>
+            <a:ext cx="893778" cy="259032"/>
           </a:xfrm>
           <a:prstGeom prst="rect">
             <a:avLst/>
@@ -10074,7 +10074,7 @@
         </p:nvSpPr>
         <p:spPr>
           <a:xfrm>
-            <a:off x="4599461" y="4327298"/>
+            <a:off x="4601009" y="4327298"/>
             <a:ext cx="983890" cy="457200"/>
           </a:xfrm>
           <a:prstGeom prst="rect">
@@ -10103,7 +10103,7 @@
       </p:sp>
       <p:pic>
         <p:nvPicPr>
-          <p:cNvPr id="14" name="Picture 13" descr="dad7cd7587acd822.png"/>
+          <p:cNvPr id="14" name="Picture 13" descr="d34fe4cc863321ff.png"/>
           <p:cNvPicPr>
             <a:picLocks noChangeAspect="1"/>
           </p:cNvPicPr>
@@ -10117,8 +10117,8 @@
         </p:blipFill>
         <p:spPr>
           <a:xfrm>
-            <a:off x="5446191" y="4449218"/>
-            <a:ext cx="1935480" cy="213360"/>
+            <a:off x="5447739" y="4462553"/>
+            <a:ext cx="1934575" cy="214693"/>
           </a:xfrm>
           <a:prstGeom prst="rect">
             <a:avLst/>
@@ -10133,7 +10133,7 @@
         </p:nvSpPr>
         <p:spPr>
           <a:xfrm>
-            <a:off x="4599461" y="4830218"/>
+            <a:off x="4601009" y="4830218"/>
             <a:ext cx="1194757" cy="457200"/>
           </a:xfrm>
           <a:prstGeom prst="rect">
@@ -10162,7 +10162,7 @@
       </p:sp>
       <p:pic>
         <p:nvPicPr>
-          <p:cNvPr id="16" name="Picture 15" descr="2554c3d382c475f1.png"/>
+          <p:cNvPr id="16" name="Picture 15" descr="ac2fcdbdf825fb45.png"/>
           <p:cNvPicPr>
             <a:picLocks noChangeAspect="1"/>
           </p:cNvPicPr>
@@ -10176,8 +10176,8 @@
         </p:blipFill>
         <p:spPr>
           <a:xfrm>
-            <a:off x="5657058" y="4952138"/>
-            <a:ext cx="1905000" cy="213360"/>
+            <a:off x="5658606" y="4965473"/>
+            <a:ext cx="1904238" cy="214693"/>
           </a:xfrm>
           <a:prstGeom prst="rect">
             <a:avLst/>
@@ -10455,8 +10455,8 @@
         </p:nvSpPr>
         <p:spPr>
           <a:xfrm>
-            <a:off x="2535998" y="2299715"/>
-            <a:ext cx="1806076" cy="457200"/>
+            <a:off x="2958187" y="2237136"/>
+            <a:ext cx="1683183" cy="457200"/>
           </a:xfrm>
           <a:prstGeom prst="rect">
             <a:avLst/>
@@ -10471,7 +10471,7 @@
           <a:p>
             <a:pPr algn="l"/>
             <a:r>
-              <a:rPr sz="2470" b="0" i="0">
+              <a:rPr sz="2280" b="0" i="0">
                 <a:solidFill>
                   <a:srgbClr val="1A1A1A"/>
                 </a:solidFill>
@@ -10498,8 +10498,8 @@
         </p:blipFill>
         <p:spPr>
           <a:xfrm>
-            <a:off x="4204915" y="2194560"/>
-            <a:ext cx="990599" cy="667512"/>
+            <a:off x="4504211" y="2194560"/>
+            <a:ext cx="804862" cy="542353"/>
           </a:xfrm>
           <a:prstGeom prst="rect">
             <a:avLst/>
@@ -10514,8 +10514,8 @@
         </p:nvSpPr>
         <p:spPr>
           <a:xfrm>
-            <a:off x="5195515" y="2299715"/>
-            <a:ext cx="1439295" cy="457200"/>
+            <a:off x="5309073" y="2237136"/>
+            <a:ext cx="1344677" cy="457200"/>
           </a:xfrm>
           <a:prstGeom prst="rect">
             <a:avLst/>
@@ -10530,7 +10530,7 @@
           <a:p>
             <a:pPr algn="l"/>
             <a:r>
-              <a:rPr sz="2470" b="0" i="0">
+              <a:rPr sz="2280" b="0" i="0">
                 <a:solidFill>
                   <a:srgbClr val="1A1A1A"/>
                 </a:solidFill>
@@ -10557,8 +10557,8 @@
         </p:blipFill>
         <p:spPr>
           <a:xfrm>
-            <a:off x="6497650" y="2389632"/>
-            <a:ext cx="1149096" cy="277368"/>
+            <a:off x="6516591" y="2359628"/>
+            <a:ext cx="933640" cy="225361"/>
           </a:xfrm>
           <a:prstGeom prst="rect">
             <a:avLst/>
@@ -10573,8 +10573,8 @@
         </p:nvSpPr>
         <p:spPr>
           <a:xfrm>
-            <a:off x="7646746" y="2299715"/>
-            <a:ext cx="1201901" cy="457200"/>
+            <a:off x="7450231" y="2237136"/>
+            <a:ext cx="1125517" cy="457200"/>
           </a:xfrm>
           <a:prstGeom prst="rect">
             <a:avLst/>
@@ -10589,7 +10589,7 @@
           <a:p>
             <a:pPr algn="l"/>
             <a:r>
-              <a:rPr sz="2470" b="0" i="0">
+              <a:rPr sz="2280" b="0" i="0">
                 <a:solidFill>
                   <a:srgbClr val="1A1A1A"/>
                 </a:solidFill>
@@ -10616,8 +10616,8 @@
         </p:blipFill>
         <p:spPr>
           <a:xfrm>
-            <a:off x="8711487" y="2391156"/>
-            <a:ext cx="765048" cy="274320"/>
+            <a:off x="8438589" y="2362104"/>
+            <a:ext cx="621601" cy="222885"/>
           </a:xfrm>
           <a:prstGeom prst="rect">
             <a:avLst/>
@@ -10632,8 +10632,8 @@
         </p:nvSpPr>
         <p:spPr>
           <a:xfrm>
-            <a:off x="9476535" y="2299715"/>
-            <a:ext cx="286146" cy="457200"/>
+            <a:off x="9060190" y="2237136"/>
+            <a:ext cx="280301" cy="457200"/>
           </a:xfrm>
           <a:prstGeom prst="rect">
             <a:avLst/>
@@ -10648,7 +10648,7 @@
           <a:p>
             <a:pPr algn="l"/>
             <a:r>
-              <a:rPr sz="2470" b="0" i="0">
+              <a:rPr sz="2280" b="0" i="0">
                 <a:solidFill>
                   <a:srgbClr val="1A1A1A"/>
                 </a:solidFill>
@@ -10667,7 +10667,7 @@
         </p:nvSpPr>
         <p:spPr>
           <a:xfrm>
-            <a:off x="777240" y="3136391"/>
+            <a:off x="777240" y="3011233"/>
             <a:ext cx="10607040" cy="465151"/>
           </a:xfrm>
           <a:prstGeom prst="rect">
@@ -10702,7 +10702,7 @@
         </p:nvSpPr>
         <p:spPr>
           <a:xfrm>
-            <a:off x="1874519" y="3802711"/>
+            <a:off x="1874519" y="3677552"/>
             <a:ext cx="4572000" cy="548640"/>
           </a:xfrm>
           <a:prstGeom prst="rect">
@@ -10746,7 +10746,7 @@
         </p:nvSpPr>
         <p:spPr>
           <a:xfrm>
-            <a:off x="6629400" y="3802711"/>
+            <a:off x="6629400" y="3677552"/>
             <a:ext cx="4572000" cy="548640"/>
           </a:xfrm>
           <a:prstGeom prst="rect">
@@ -10790,7 +10790,7 @@
         </p:nvSpPr>
         <p:spPr>
           <a:xfrm>
-            <a:off x="1874519" y="4488511"/>
+            <a:off x="1874519" y="4363352"/>
             <a:ext cx="4572000" cy="548640"/>
           </a:xfrm>
           <a:prstGeom prst="rect">
@@ -10834,7 +10834,7 @@
         </p:nvSpPr>
         <p:spPr>
           <a:xfrm>
-            <a:off x="6629400" y="4488511"/>
+            <a:off x="6629400" y="4363352"/>
             <a:ext cx="4572000" cy="548640"/>
           </a:xfrm>
           <a:prstGeom prst="rect">
@@ -10878,7 +10878,7 @@
         </p:nvSpPr>
         <p:spPr>
           <a:xfrm>
-            <a:off x="777240" y="5494351"/>
+            <a:off x="777240" y="5369192"/>
             <a:ext cx="10607040" cy="457200"/>
           </a:xfrm>
           <a:prstGeom prst="rect">
@@ -11141,8 +11141,8 @@
         </p:nvSpPr>
         <p:spPr>
           <a:xfrm>
-            <a:off x="2534474" y="2209800"/>
-            <a:ext cx="1806076" cy="457200"/>
+            <a:off x="2956949" y="2146935"/>
+            <a:ext cx="1683183" cy="457200"/>
           </a:xfrm>
           <a:prstGeom prst="rect">
             <a:avLst/>
@@ -11157,7 +11157,7 @@
           <a:p>
             <a:pPr algn="l"/>
             <a:r>
-              <a:rPr sz="2470" b="0" i="0">
+              <a:rPr sz="2280" b="0" i="0">
                 <a:solidFill>
                   <a:srgbClr val="1A1A1A"/>
                 </a:solidFill>
@@ -11184,8 +11184,8 @@
         </p:blipFill>
         <p:spPr>
           <a:xfrm>
-            <a:off x="4203391" y="2103120"/>
-            <a:ext cx="993648" cy="670560"/>
+            <a:off x="4502973" y="2103120"/>
+            <a:ext cx="807339" cy="544830"/>
           </a:xfrm>
           <a:prstGeom prst="rect">
             <a:avLst/>
@@ -11200,8 +11200,8 @@
         </p:nvSpPr>
         <p:spPr>
           <a:xfrm>
-            <a:off x="5197039" y="2209800"/>
-            <a:ext cx="1439295" cy="457200"/>
+            <a:off x="5310312" y="2146935"/>
+            <a:ext cx="1344677" cy="457200"/>
           </a:xfrm>
           <a:prstGeom prst="rect">
             <a:avLst/>
@@ -11216,7 +11216,7 @@
           <a:p>
             <a:pPr algn="l"/>
             <a:r>
-              <a:rPr sz="2470" b="0" i="0">
+              <a:rPr sz="2280" b="0" i="0">
                 <a:solidFill>
                   <a:srgbClr val="1A1A1A"/>
                 </a:solidFill>
@@ -11243,8 +11243,8 @@
         </p:blipFill>
         <p:spPr>
           <a:xfrm>
-            <a:off x="6499174" y="2299715"/>
-            <a:ext cx="1149096" cy="277368"/>
+            <a:off x="6517829" y="2269426"/>
+            <a:ext cx="933640" cy="225361"/>
           </a:xfrm>
           <a:prstGeom prst="rect">
             <a:avLst/>
@@ -11259,8 +11259,8 @@
         </p:nvSpPr>
         <p:spPr>
           <a:xfrm>
-            <a:off x="7648270" y="2209800"/>
-            <a:ext cx="1201901" cy="457200"/>
+            <a:off x="7451470" y="2146935"/>
+            <a:ext cx="1125517" cy="457200"/>
           </a:xfrm>
           <a:prstGeom prst="rect">
             <a:avLst/>
@@ -11275,7 +11275,7 @@
           <a:p>
             <a:pPr algn="l"/>
             <a:r>
-              <a:rPr sz="2470" b="0" i="0">
+              <a:rPr sz="2280" b="0" i="0">
                 <a:solidFill>
                   <a:srgbClr val="1A1A1A"/>
                 </a:solidFill>
@@ -11302,8 +11302,8 @@
         </p:blipFill>
         <p:spPr>
           <a:xfrm>
-            <a:off x="8713011" y="2301240"/>
-            <a:ext cx="765048" cy="274320"/>
+            <a:off x="8439827" y="2271903"/>
+            <a:ext cx="621601" cy="222885"/>
           </a:xfrm>
           <a:prstGeom prst="rect">
             <a:avLst/>
@@ -11318,8 +11318,8 @@
         </p:nvSpPr>
         <p:spPr>
           <a:xfrm>
-            <a:off x="9478059" y="2209800"/>
-            <a:ext cx="286146" cy="457200"/>
+            <a:off x="9061429" y="2146935"/>
+            <a:ext cx="280301" cy="457200"/>
           </a:xfrm>
           <a:prstGeom prst="rect">
             <a:avLst/>
@@ -11334,7 +11334,7 @@
           <a:p>
             <a:pPr algn="l"/>
             <a:r>
-              <a:rPr sz="2470" b="0" i="0">
+              <a:rPr sz="2280" b="0" i="0">
                 <a:solidFill>
                   <a:srgbClr val="1A1A1A"/>
                 </a:solidFill>
@@ -11353,7 +11353,7 @@
         </p:nvSpPr>
         <p:spPr>
           <a:xfrm>
-            <a:off x="777240" y="3047999"/>
+            <a:off x="777240" y="2922269"/>
             <a:ext cx="10607040" cy="465151"/>
           </a:xfrm>
           <a:prstGeom prst="rect">
@@ -11396,7 +11396,7 @@
         </p:blipFill>
         <p:spPr>
           <a:xfrm>
-            <a:off x="4347971" y="3749371"/>
+            <a:off x="4347971" y="3615449"/>
             <a:ext cx="1517904" cy="304800"/>
           </a:xfrm>
           <a:prstGeom prst="rect">
@@ -11420,7 +11420,7 @@
         </p:blipFill>
         <p:spPr>
           <a:xfrm>
-            <a:off x="4347971" y="4235527"/>
+            <a:off x="4347971" y="4109797"/>
             <a:ext cx="3578352" cy="606552"/>
           </a:xfrm>
           <a:prstGeom prst="rect">
@@ -11436,7 +11436,7 @@
         </p:nvSpPr>
         <p:spPr>
           <a:xfrm>
-            <a:off x="777240" y="4979239"/>
+            <a:off x="777240" y="4853509"/>
             <a:ext cx="10607040" cy="548640"/>
           </a:xfrm>
           <a:prstGeom prst="rect">
@@ -12402,7 +12402,7 @@
         </p:nvSpPr>
         <p:spPr>
           <a:xfrm>
-            <a:off x="2107950" y="3824378"/>
+            <a:off x="2108974" y="3824378"/>
             <a:ext cx="1106384" cy="457200"/>
           </a:xfrm>
           <a:prstGeom prst="rect">
@@ -12431,7 +12431,7 @@
       </p:sp>
       <p:pic>
         <p:nvPicPr>
-          <p:cNvPr id="12" name="Picture 11" descr="d6542a7823918817.png"/>
+          <p:cNvPr id="12" name="Picture 11" descr="8267fb8fcdfcb9a9.png"/>
           <p:cNvPicPr>
             <a:picLocks noChangeAspect="1"/>
           </p:cNvPicPr>
@@ -12445,8 +12445,8 @@
         </p:blipFill>
         <p:spPr>
           <a:xfrm>
-            <a:off x="3077174" y="3923438"/>
-            <a:ext cx="396240" cy="259080"/>
+            <a:off x="3078198" y="3910627"/>
+            <a:ext cx="392049" cy="259032"/>
           </a:xfrm>
           <a:prstGeom prst="rect">
             <a:avLst/>
@@ -12461,7 +12461,7 @@
         </p:nvSpPr>
         <p:spPr>
           <a:xfrm>
-            <a:off x="3473414" y="3824378"/>
+            <a:off x="3470247" y="3824378"/>
             <a:ext cx="5531643" cy="457200"/>
           </a:xfrm>
           <a:prstGeom prst="rect">
@@ -12490,7 +12490,7 @@
       </p:sp>
       <p:pic>
         <p:nvPicPr>
-          <p:cNvPr id="14" name="Picture 13" descr="6522b013c381f004.png"/>
+          <p:cNvPr id="14" name="Picture 13" descr="7b1b2eac3aeeeb76.png"/>
           <p:cNvPicPr>
             <a:picLocks noChangeAspect="1"/>
           </p:cNvPicPr>
@@ -12504,8 +12504,8 @@
         </p:blipFill>
         <p:spPr>
           <a:xfrm>
-            <a:off x="8867897" y="3921914"/>
-            <a:ext cx="1194816" cy="262128"/>
+            <a:off x="8864730" y="3912961"/>
+            <a:ext cx="1187815" cy="261366"/>
           </a:xfrm>
           <a:prstGeom prst="rect">
             <a:avLst/>
@@ -12520,7 +12520,7 @@
         </p:nvSpPr>
         <p:spPr>
           <a:xfrm>
-            <a:off x="2107950" y="4327298"/>
+            <a:off x="2108974" y="4327298"/>
             <a:ext cx="4846687" cy="457200"/>
           </a:xfrm>
           <a:prstGeom prst="rect">
@@ -12549,7 +12549,7 @@
       </p:sp>
       <p:pic>
         <p:nvPicPr>
-          <p:cNvPr id="16" name="Picture 15" descr="107f56fc6415d276.png"/>
+          <p:cNvPr id="16" name="Picture 15" descr="ce65cf9872ebd846.png"/>
           <p:cNvPicPr>
             <a:picLocks noChangeAspect="1"/>
           </p:cNvPicPr>
@@ -12563,8 +12563,8 @@
         </p:blipFill>
         <p:spPr>
           <a:xfrm>
-            <a:off x="6817478" y="4424834"/>
-            <a:ext cx="2560320" cy="262128"/>
+            <a:off x="6818502" y="4415881"/>
+            <a:ext cx="2557653" cy="261366"/>
           </a:xfrm>
           <a:prstGeom prst="rect">
             <a:avLst/>
@@ -12860,8 +12860,8 @@
         </p:nvSpPr>
         <p:spPr>
           <a:xfrm>
-            <a:off x="1780239" y="2205228"/>
-            <a:ext cx="5906468" cy="457200"/>
+            <a:off x="2164344" y="2171700"/>
+            <a:ext cx="5468148" cy="457200"/>
           </a:xfrm>
           <a:prstGeom prst="rect">
             <a:avLst/>
@@ -12876,7 +12876,7 @@
           <a:p>
             <a:pPr algn="l"/>
             <a:r>
-              <a:rPr sz="2470" b="0" i="0">
+              <a:rPr sz="2280" b="0" i="0">
                 <a:solidFill>
                   <a:srgbClr val="1A1A1A"/>
                 </a:solidFill>
@@ -12903,8 +12903,8 @@
         </p:blipFill>
         <p:spPr>
           <a:xfrm>
-            <a:off x="7549547" y="2194560"/>
-            <a:ext cx="1063752" cy="478536"/>
+            <a:off x="7495332" y="2207514"/>
+            <a:ext cx="864298" cy="388810"/>
           </a:xfrm>
           <a:prstGeom prst="rect">
             <a:avLst/>
@@ -12919,8 +12919,8 @@
         </p:nvSpPr>
         <p:spPr>
           <a:xfrm>
-            <a:off x="8613299" y="2205228"/>
-            <a:ext cx="1905140" cy="457200"/>
+            <a:off x="8359631" y="2171700"/>
+            <a:ext cx="1774704" cy="457200"/>
           </a:xfrm>
           <a:prstGeom prst="rect">
             <a:avLst/>
@@ -12935,7 +12935,7 @@
           <a:p>
             <a:pPr algn="l"/>
             <a:r>
-              <a:rPr sz="2470" b="0" i="0">
+              <a:rPr sz="2280" b="0" i="0">
                 <a:solidFill>
                   <a:srgbClr val="1A1A1A"/>
                 </a:solidFill>
@@ -12954,7 +12954,7 @@
         </p:nvSpPr>
         <p:spPr>
           <a:xfrm>
-            <a:off x="777240" y="2947416"/>
+            <a:off x="777240" y="2880360"/>
             <a:ext cx="10607040" cy="465151"/>
           </a:xfrm>
           <a:prstGeom prst="rect">
@@ -13252,8 +13252,8 @@
         </p:nvSpPr>
         <p:spPr>
           <a:xfrm>
-            <a:off x="1783287" y="2113788"/>
-            <a:ext cx="5906468" cy="457200"/>
+            <a:off x="2166820" y="2080260"/>
+            <a:ext cx="5468148" cy="457200"/>
           </a:xfrm>
           <a:prstGeom prst="rect">
             <a:avLst/>
@@ -13268,7 +13268,7 @@
           <a:p>
             <a:pPr algn="l"/>
             <a:r>
-              <a:rPr sz="2470" b="0" i="0">
+              <a:rPr sz="2280" b="0" i="0">
                 <a:solidFill>
                   <a:srgbClr val="1A1A1A"/>
                 </a:solidFill>
@@ -13295,8 +13295,8 @@
         </p:blipFill>
         <p:spPr>
           <a:xfrm>
-            <a:off x="7552595" y="2103120"/>
-            <a:ext cx="1057656" cy="478536"/>
+            <a:off x="7497809" y="2116074"/>
+            <a:ext cx="859345" cy="388810"/>
           </a:xfrm>
           <a:prstGeom prst="rect">
             <a:avLst/>
@@ -13311,8 +13311,8 @@
         </p:nvSpPr>
         <p:spPr>
           <a:xfrm>
-            <a:off x="8610251" y="2113788"/>
-            <a:ext cx="1905140" cy="457200"/>
+            <a:off x="8357154" y="2080260"/>
+            <a:ext cx="1774704" cy="457200"/>
           </a:xfrm>
           <a:prstGeom prst="rect">
             <a:avLst/>
@@ -13327,7 +13327,7 @@
           <a:p>
             <a:pPr algn="l"/>
             <a:r>
-              <a:rPr sz="2470" b="0" i="0">
+              <a:rPr sz="2280" b="0" i="0">
                 <a:solidFill>
                   <a:srgbClr val="1A1A1A"/>
                 </a:solidFill>
@@ -13346,7 +13346,7 @@
         </p:nvSpPr>
         <p:spPr>
           <a:xfrm>
-            <a:off x="777240" y="2855975"/>
+            <a:off x="777240" y="2788920"/>
             <a:ext cx="10607040" cy="465151"/>
           </a:xfrm>
           <a:prstGeom prst="rect">
@@ -13389,7 +13389,7 @@
         </p:blipFill>
         <p:spPr>
           <a:xfrm>
-            <a:off x="4652771" y="3504007"/>
+            <a:off x="4652771" y="3436951"/>
             <a:ext cx="2532888" cy="432816"/>
           </a:xfrm>
           <a:prstGeom prst="rect">
@@ -13413,7 +13413,7 @@
         </p:blipFill>
         <p:spPr>
           <a:xfrm>
-            <a:off x="4652771" y="4144087"/>
+            <a:off x="4652771" y="4094747"/>
             <a:ext cx="2968752" cy="252984"/>
           </a:xfrm>
           <a:prstGeom prst="rect">
@@ -13735,7 +13735,7 @@
         </p:blipFill>
         <p:spPr>
           <a:xfrm>
-            <a:off x="2408921" y="1501140"/>
+            <a:off x="2408921" y="1503997"/>
             <a:ext cx="1484376" cy="335280"/>
           </a:xfrm>
           <a:prstGeom prst="rect">
@@ -13829,7 +13829,7 @@
         </p:blipFill>
         <p:spPr>
           <a:xfrm>
-            <a:off x="2423059" y="2086356"/>
+            <a:off x="2423059" y="2083117"/>
             <a:ext cx="1578864" cy="390144"/>
           </a:xfrm>
           <a:prstGeom prst="rect">
@@ -13880,7 +13880,7 @@
         </p:nvSpPr>
         <p:spPr>
           <a:xfrm>
-            <a:off x="1874519" y="2729484"/>
+            <a:off x="1874519" y="2718427"/>
             <a:ext cx="2930351" cy="457200"/>
           </a:xfrm>
           <a:prstGeom prst="rect">
@@ -13909,7 +13909,7 @@
       </p:sp>
       <p:pic>
         <p:nvPicPr>
-          <p:cNvPr id="15" name="Picture 14" descr="6d6fe08af9312c1c.png"/>
+          <p:cNvPr id="15" name="Picture 14" descr="55999f3eae65eb74.png"/>
           <p:cNvPicPr>
             <a:picLocks noChangeAspect="1"/>
           </p:cNvPicPr>
@@ -13924,7 +13924,7 @@
         <p:spPr>
           <a:xfrm>
             <a:off x="4667711" y="2688336"/>
-            <a:ext cx="768096" cy="539496"/>
+            <a:ext cx="735726" cy="517382"/>
           </a:xfrm>
           <a:prstGeom prst="rect">
             <a:avLst/>
@@ -13939,7 +13939,7 @@
         </p:nvSpPr>
         <p:spPr>
           <a:xfrm>
-            <a:off x="5984447" y="2665476"/>
+            <a:off x="5952078" y="2665476"/>
             <a:ext cx="753890" cy="457200"/>
           </a:xfrm>
           <a:prstGeom prst="rect">
@@ -13974,7 +13974,7 @@
         </p:nvSpPr>
         <p:spPr>
           <a:xfrm>
-            <a:off x="1874519" y="3406140"/>
+            <a:off x="1874519" y="3384026"/>
             <a:ext cx="2118555" cy="457200"/>
           </a:xfrm>
           <a:prstGeom prst="rect">
@@ -14003,7 +14003,7 @@
       </p:sp>
       <p:pic>
         <p:nvPicPr>
-          <p:cNvPr id="18" name="Picture 17" descr="236959ea5354d8ca.png"/>
+          <p:cNvPr id="18" name="Picture 17" descr="9999ab29d2b7274c.png"/>
           <p:cNvPicPr>
             <a:picLocks noChangeAspect="1"/>
           </p:cNvPicPr>
@@ -14017,8 +14017,8 @@
         </p:blipFill>
         <p:spPr>
           <a:xfrm>
-            <a:off x="3855915" y="3497580"/>
-            <a:ext cx="460247" cy="274320"/>
+            <a:off x="3855915" y="3458725"/>
+            <a:ext cx="441436" cy="263437"/>
           </a:xfrm>
           <a:prstGeom prst="rect">
             <a:avLst/>
@@ -14033,7 +14033,7 @@
         </p:nvSpPr>
         <p:spPr>
           <a:xfrm>
-            <a:off x="4316163" y="3406140"/>
+            <a:off x="4297351" y="3384026"/>
             <a:ext cx="1297468" cy="457200"/>
           </a:xfrm>
           <a:prstGeom prst="rect">
@@ -14062,7 +14062,7 @@
       </p:sp>
       <p:pic>
         <p:nvPicPr>
-          <p:cNvPr id="20" name="Picture 19" descr="78a344566654b4bb.png"/>
+          <p:cNvPr id="20" name="Picture 19" descr="48277941d45974da.png"/>
           <p:cNvPicPr>
             <a:picLocks noChangeAspect="1"/>
           </p:cNvPicPr>
@@ -14076,8 +14076,8 @@
         </p:blipFill>
         <p:spPr>
           <a:xfrm>
-            <a:off x="5476472" y="3523488"/>
-            <a:ext cx="618744" cy="222504"/>
+            <a:off x="5457660" y="3513312"/>
+            <a:ext cx="595701" cy="213598"/>
           </a:xfrm>
           <a:prstGeom prst="rect">
             <a:avLst/>
@@ -14092,7 +14092,7 @@
         </p:nvSpPr>
         <p:spPr>
           <a:xfrm>
-            <a:off x="6095216" y="3406140"/>
+            <a:off x="6053361" y="3384026"/>
             <a:ext cx="277353" cy="457200"/>
           </a:xfrm>
           <a:prstGeom prst="rect">
@@ -14127,7 +14127,7 @@
         </p:nvSpPr>
         <p:spPr>
           <a:xfrm>
-            <a:off x="6784049" y="3406140"/>
+            <a:off x="6742195" y="3384026"/>
             <a:ext cx="551515" cy="457200"/>
           </a:xfrm>
           <a:prstGeom prst="rect">
@@ -14390,8 +14390,8 @@
         </p:nvSpPr>
         <p:spPr>
           <a:xfrm>
-            <a:off x="2485509" y="2301240"/>
-            <a:ext cx="1806076" cy="457200"/>
+            <a:off x="2934744" y="2238375"/>
+            <a:ext cx="1683183" cy="457200"/>
           </a:xfrm>
           <a:prstGeom prst="rect">
             <a:avLst/>
@@ -14406,7 +14406,7 @@
           <a:p>
             <a:pPr algn="l"/>
             <a:r>
-              <a:rPr sz="2470" b="0" i="0">
+              <a:rPr sz="2280" b="0" i="0">
                 <a:solidFill>
                   <a:srgbClr val="1A1A1A"/>
                 </a:solidFill>
@@ -14433,8 +14433,8 @@
         </p:blipFill>
         <p:spPr>
           <a:xfrm>
-            <a:off x="4154426" y="2194560"/>
-            <a:ext cx="1033271" cy="670560"/>
+            <a:off x="4480767" y="2194560"/>
+            <a:ext cx="839533" cy="544830"/>
           </a:xfrm>
           <a:prstGeom prst="rect">
             <a:avLst/>
@@ -14449,8 +14449,8 @@
         </p:nvSpPr>
         <p:spPr>
           <a:xfrm>
-            <a:off x="5187698" y="2301240"/>
-            <a:ext cx="1439295" cy="457200"/>
+            <a:off x="5320301" y="2238375"/>
+            <a:ext cx="1344677" cy="457200"/>
           </a:xfrm>
           <a:prstGeom prst="rect">
             <a:avLst/>
@@ -14465,7 +14465,7 @@
           <a:p>
             <a:pPr algn="l"/>
             <a:r>
-              <a:rPr sz="2470" b="0" i="0">
+              <a:rPr sz="2280" b="0" i="0">
                 <a:solidFill>
                   <a:srgbClr val="1A1A1A"/>
                 </a:solidFill>
@@ -14492,8 +14492,8 @@
         </p:blipFill>
         <p:spPr>
           <a:xfrm>
-            <a:off x="6489833" y="2392680"/>
-            <a:ext cx="789432" cy="274320"/>
+            <a:off x="6527818" y="2363343"/>
+            <a:ext cx="641413" cy="222885"/>
           </a:xfrm>
           <a:prstGeom prst="rect">
             <a:avLst/>
@@ -14508,8 +14508,8 @@
         </p:nvSpPr>
         <p:spPr>
           <a:xfrm>
-            <a:off x="7279265" y="2301240"/>
-            <a:ext cx="485323" cy="457200"/>
+            <a:off x="7169232" y="2238375"/>
+            <a:ext cx="464091" cy="457200"/>
           </a:xfrm>
           <a:prstGeom prst="rect">
             <a:avLst/>
@@ -14524,7 +14524,7 @@
           <a:p>
             <a:pPr algn="l"/>
             <a:r>
-              <a:rPr sz="2470" b="0" i="0">
+              <a:rPr sz="2280" b="0" i="0">
                 <a:solidFill>
                   <a:srgbClr val="1A1A1A"/>
                 </a:solidFill>
@@ -14551,8 +14551,8 @@
         </p:blipFill>
         <p:spPr>
           <a:xfrm>
-            <a:off x="7627429" y="2385060"/>
-            <a:ext cx="801624" cy="289560"/>
+            <a:off x="7496164" y="2350960"/>
+            <a:ext cx="651319" cy="235267"/>
           </a:xfrm>
           <a:prstGeom prst="rect">
             <a:avLst/>
@@ -14567,8 +14567,8 @@
         </p:nvSpPr>
         <p:spPr>
           <a:xfrm>
-            <a:off x="8429053" y="2301240"/>
-            <a:ext cx="485323" cy="457200"/>
+            <a:off x="8147483" y="2238375"/>
+            <a:ext cx="464091" cy="457200"/>
           </a:xfrm>
           <a:prstGeom prst="rect">
             <a:avLst/>
@@ -14583,7 +14583,7 @@
           <a:p>
             <a:pPr algn="l"/>
             <a:r>
-              <a:rPr sz="2470" b="0" i="0">
+              <a:rPr sz="2280" b="0" i="0">
                 <a:solidFill>
                   <a:srgbClr val="1A1A1A"/>
                 </a:solidFill>
@@ -14610,8 +14610,8 @@
         </p:blipFill>
         <p:spPr>
           <a:xfrm>
-            <a:off x="8777216" y="2392680"/>
-            <a:ext cx="749808" cy="274320"/>
+            <a:off x="8474415" y="2363343"/>
+            <a:ext cx="609219" cy="222885"/>
           </a:xfrm>
           <a:prstGeom prst="rect">
             <a:avLst/>
@@ -14626,8 +14626,8 @@
         </p:nvSpPr>
         <p:spPr>
           <a:xfrm>
-            <a:off x="9527024" y="2301240"/>
-            <a:ext cx="286146" cy="457200"/>
+            <a:off x="9083634" y="2238375"/>
+            <a:ext cx="280301" cy="457200"/>
           </a:xfrm>
           <a:prstGeom prst="rect">
             <a:avLst/>
@@ -14642,7 +14642,7 @@
           <a:p>
             <a:pPr algn="l"/>
             <a:r>
-              <a:rPr sz="2470" b="0" i="0">
+              <a:rPr sz="2280" b="0" i="0">
                 <a:solidFill>
                   <a:srgbClr val="1A1A1A"/>
                 </a:solidFill>
@@ -14924,8 +14924,8 @@
         </p:nvSpPr>
         <p:spPr>
           <a:xfrm>
-            <a:off x="2483985" y="2211323"/>
-            <a:ext cx="1806076" cy="457200"/>
+            <a:off x="2933506" y="2148173"/>
+            <a:ext cx="1683183" cy="457200"/>
           </a:xfrm>
           <a:prstGeom prst="rect">
             <a:avLst/>
@@ -14940,7 +14940,7 @@
           <a:p>
             <a:pPr algn="l"/>
             <a:r>
-              <a:rPr sz="2470" b="0" i="0">
+              <a:rPr sz="2280" b="0" i="0">
                 <a:solidFill>
                   <a:srgbClr val="1A1A1A"/>
                 </a:solidFill>
@@ -14967,8 +14967,8 @@
         </p:blipFill>
         <p:spPr>
           <a:xfrm>
-            <a:off x="4152902" y="2103120"/>
-            <a:ext cx="1030224" cy="673608"/>
+            <a:off x="4479529" y="2103120"/>
+            <a:ext cx="837057" cy="547306"/>
           </a:xfrm>
           <a:prstGeom prst="rect">
             <a:avLst/>
@@ -14983,8 +14983,8 @@
         </p:nvSpPr>
         <p:spPr>
           <a:xfrm>
-            <a:off x="5183126" y="2211323"/>
-            <a:ext cx="1439295" cy="457200"/>
+            <a:off x="5316586" y="2148173"/>
+            <a:ext cx="1344677" cy="457200"/>
           </a:xfrm>
           <a:prstGeom prst="rect">
             <a:avLst/>
@@ -14999,7 +14999,7 @@
           <a:p>
             <a:pPr algn="l"/>
             <a:r>
-              <a:rPr sz="2470" b="0" i="0">
+              <a:rPr sz="2280" b="0" i="0">
                 <a:solidFill>
                   <a:srgbClr val="1A1A1A"/>
                 </a:solidFill>
@@ -15026,8 +15026,8 @@
         </p:blipFill>
         <p:spPr>
           <a:xfrm>
-            <a:off x="6485261" y="2302764"/>
-            <a:ext cx="789432" cy="274320"/>
+            <a:off x="6524104" y="2273141"/>
+            <a:ext cx="641413" cy="222885"/>
           </a:xfrm>
           <a:prstGeom prst="rect">
             <a:avLst/>
@@ -15042,8 +15042,8 @@
         </p:nvSpPr>
         <p:spPr>
           <a:xfrm>
-            <a:off x="7274693" y="2211323"/>
-            <a:ext cx="485323" cy="457200"/>
+            <a:off x="7165517" y="2148173"/>
+            <a:ext cx="464091" cy="457200"/>
           </a:xfrm>
           <a:prstGeom prst="rect">
             <a:avLst/>
@@ -15058,7 +15058,7 @@
           <a:p>
             <a:pPr algn="l"/>
             <a:r>
-              <a:rPr sz="2470" b="0" i="0">
+              <a:rPr sz="2280" b="0" i="0">
                 <a:solidFill>
                   <a:srgbClr val="1A1A1A"/>
                 </a:solidFill>
@@ -15085,8 +15085,8 @@
         </p:blipFill>
         <p:spPr>
           <a:xfrm>
-            <a:off x="7622857" y="2295144"/>
-            <a:ext cx="804672" cy="289560"/>
+            <a:off x="7492449" y="2260758"/>
+            <a:ext cx="653796" cy="235267"/>
           </a:xfrm>
           <a:prstGeom prst="rect">
             <a:avLst/>
@@ -15101,8 +15101,8 @@
         </p:nvSpPr>
         <p:spPr>
           <a:xfrm>
-            <a:off x="8427529" y="2211323"/>
-            <a:ext cx="485323" cy="457200"/>
+            <a:off x="8146245" y="2148173"/>
+            <a:ext cx="464091" cy="457200"/>
           </a:xfrm>
           <a:prstGeom prst="rect">
             <a:avLst/>
@@ -15117,7 +15117,7 @@
           <a:p>
             <a:pPr algn="l"/>
             <a:r>
-              <a:rPr sz="2470" b="0" i="0">
+              <a:rPr sz="2280" b="0" i="0">
                 <a:solidFill>
                   <a:srgbClr val="1A1A1A"/>
                 </a:solidFill>
@@ -15144,8 +15144,8 @@
         </p:blipFill>
         <p:spPr>
           <a:xfrm>
-            <a:off x="8775692" y="2302764"/>
-            <a:ext cx="752856" cy="274320"/>
+            <a:off x="8473177" y="2273141"/>
+            <a:ext cx="611695" cy="222885"/>
           </a:xfrm>
           <a:prstGeom prst="rect">
             <a:avLst/>
@@ -15160,8 +15160,8 @@
         </p:nvSpPr>
         <p:spPr>
           <a:xfrm>
-            <a:off x="9528548" y="2211323"/>
-            <a:ext cx="286146" cy="457200"/>
+            <a:off x="9084872" y="2148173"/>
+            <a:ext cx="280301" cy="457200"/>
           </a:xfrm>
           <a:prstGeom prst="rect">
             <a:avLst/>
@@ -15176,7 +15176,7 @@
           <a:p>
             <a:pPr algn="l"/>
             <a:r>
-              <a:rPr sz="2470" b="0" i="0">
+              <a:rPr sz="2280" b="0" i="0">
                 <a:solidFill>
                   <a:srgbClr val="1A1A1A"/>
                 </a:solidFill>
@@ -15195,7 +15195,7 @@
         </p:nvSpPr>
         <p:spPr>
           <a:xfrm>
-            <a:off x="4141556" y="3101340"/>
+            <a:off x="4142318" y="2975038"/>
             <a:ext cx="1141303" cy="457200"/>
           </a:xfrm>
           <a:prstGeom prst="rect">
@@ -15224,7 +15224,7 @@
       </p:sp>
       <p:pic>
         <p:nvPicPr>
-          <p:cNvPr id="18" name="Picture 17" descr="6aa77d3d03b7f4a1.png"/>
+          <p:cNvPr id="18" name="Picture 17" descr="e81a928ba8ce6dfe.png"/>
           <p:cNvPicPr>
             <a:picLocks noChangeAspect="1"/>
           </p:cNvPicPr>
@@ -15238,8 +15238,8 @@
         </p:blipFill>
         <p:spPr>
           <a:xfrm>
-            <a:off x="5145699" y="3176016"/>
-            <a:ext cx="2874264" cy="307848"/>
+            <a:off x="5146461" y="3035141"/>
+            <a:ext cx="2872740" cy="309372"/>
           </a:xfrm>
           <a:prstGeom prst="rect">
             <a:avLst/>
@@ -15262,7 +15262,7 @@
         </p:blipFill>
         <p:spPr>
           <a:xfrm>
-            <a:off x="4196420" y="3742944"/>
+            <a:off x="4197182" y="3631310"/>
             <a:ext cx="1453896" cy="252984"/>
           </a:xfrm>
           <a:prstGeom prst="rect">
@@ -16043,7 +16043,7 @@
       </p:sp>
       <p:pic>
         <p:nvPicPr>
-          <p:cNvPr id="12" name="Picture 11" descr="6c563dd1214e96d0.png"/>
+          <p:cNvPr id="12" name="Picture 11" descr="db2cb275f08ab7da.png"/>
           <p:cNvPicPr>
             <a:picLocks noChangeAspect="1"/>
           </p:cNvPicPr>
@@ -16057,8 +16057,8 @@
         </p:blipFill>
         <p:spPr>
           <a:xfrm>
-            <a:off x="3649777" y="3838956"/>
-            <a:ext cx="2923032" cy="213360"/>
+            <a:off x="3649777" y="3854624"/>
+            <a:ext cx="2919364" cy="212359"/>
           </a:xfrm>
           <a:prstGeom prst="rect">
             <a:avLst/>
@@ -16102,7 +16102,7 @@
       </p:sp>
       <p:pic>
         <p:nvPicPr>
-          <p:cNvPr id="14" name="Picture 13" descr="cbdd9db0c6bdb06d.png"/>
+          <p:cNvPr id="14" name="Picture 13" descr="ecde91c60d696d5e.png"/>
           <p:cNvPicPr>
             <a:picLocks noChangeAspect="1"/>
           </p:cNvPicPr>
@@ -16116,8 +16116,8 @@
         </p:blipFill>
         <p:spPr>
           <a:xfrm>
-            <a:off x="4101885" y="4341876"/>
-            <a:ext cx="2764536" cy="213360"/>
+            <a:off x="4101885" y="4355211"/>
+            <a:ext cx="2760678" cy="214693"/>
           </a:xfrm>
           <a:prstGeom prst="rect">
             <a:avLst/>
@@ -17773,7 +17773,7 @@
                 </a:solidFill>
                 <a:latin typeface="Lexend"/>
               </a:rPr>
-              <a:t>Every skill listed is required, to a SmartScore of 67. Due at the start of the next class.</a:t>
+              <a:t>Every skill listed is required, to a SmartScore of 67. Due by the unit test.</a:t>
             </a:r>
           </a:p>
         </p:txBody>
@@ -18119,7 +18119,7 @@
         </p:nvSpPr>
         <p:spPr>
           <a:xfrm>
-            <a:off x="1143000" y="1997566"/>
+            <a:off x="1143000" y="1912389"/>
             <a:ext cx="4870067" cy="457200"/>
           </a:xfrm>
           <a:prstGeom prst="rect">
@@ -18163,7 +18163,7 @@
         <p:spPr>
           <a:xfrm>
             <a:off x="5875907" y="1892410"/>
-            <a:ext cx="1597152" cy="667512"/>
+            <a:ext cx="1189545" cy="497157"/>
           </a:xfrm>
           <a:prstGeom prst="rect">
             <a:avLst/>
@@ -18178,7 +18178,7 @@
         </p:nvSpPr>
         <p:spPr>
           <a:xfrm>
-            <a:off x="7473059" y="1997566"/>
+            <a:off x="7065453" y="1912389"/>
             <a:ext cx="285446" cy="457200"/>
           </a:xfrm>
           <a:prstGeom prst="rect">
@@ -18213,7 +18213,7 @@
         </p:nvSpPr>
         <p:spPr>
           <a:xfrm>
-            <a:off x="1143000" y="2610214"/>
+            <a:off x="1143000" y="2439859"/>
             <a:ext cx="8790564" cy="457200"/>
           </a:xfrm>
           <a:prstGeom prst="rect">
@@ -18248,7 +18248,7 @@
         </p:nvSpPr>
         <p:spPr>
           <a:xfrm>
-            <a:off x="777240" y="3245722"/>
+            <a:off x="777240" y="3075367"/>
             <a:ext cx="10607040" cy="429370"/>
           </a:xfrm>
           <a:prstGeom prst="rect">
@@ -18283,7 +18283,7 @@
         </p:nvSpPr>
         <p:spPr>
           <a:xfrm>
-            <a:off x="1143000" y="3675092"/>
+            <a:off x="1143000" y="3504738"/>
             <a:ext cx="10241280" cy="787179"/>
           </a:xfrm>
           <a:prstGeom prst="rect">
@@ -18318,7 +18318,7 @@
         </p:nvSpPr>
         <p:spPr>
           <a:xfrm>
-            <a:off x="777240" y="4700016"/>
+            <a:off x="777240" y="4529661"/>
             <a:ext cx="10607040" cy="429370"/>
           </a:xfrm>
           <a:prstGeom prst="rect">
@@ -18353,7 +18353,7 @@
         </p:nvSpPr>
         <p:spPr>
           <a:xfrm>
-            <a:off x="1143000" y="5129386"/>
+            <a:off x="1143000" y="4959031"/>
             <a:ext cx="10241280" cy="787179"/>
           </a:xfrm>
           <a:prstGeom prst="rect">
@@ -18694,8 +18694,8 @@
         </p:blipFill>
         <p:spPr>
           <a:xfrm>
-            <a:off x="2866633" y="1993392"/>
-            <a:ext cx="1600200" cy="670560"/>
+            <a:off x="3088994" y="1993392"/>
+            <a:ext cx="1408509" cy="590232"/>
           </a:xfrm>
           <a:prstGeom prst="rect">
             <a:avLst/>
@@ -18710,7 +18710,7 @@
         </p:nvSpPr>
         <p:spPr>
           <a:xfrm>
-            <a:off x="4466833" y="2100072"/>
+            <a:off x="4497503" y="2059908"/>
             <a:ext cx="1452983" cy="457200"/>
           </a:xfrm>
           <a:prstGeom prst="rect">
@@ -18753,8 +18753,8 @@
         </p:blipFill>
         <p:spPr>
           <a:xfrm>
-            <a:off x="5782656" y="2188464"/>
-            <a:ext cx="1124712" cy="280416"/>
+            <a:off x="5813327" y="2170874"/>
+            <a:ext cx="989980" cy="246824"/>
           </a:xfrm>
           <a:prstGeom prst="rect">
             <a:avLst/>
@@ -18769,7 +18769,7 @@
         </p:nvSpPr>
         <p:spPr>
           <a:xfrm>
-            <a:off x="6907368" y="2100072"/>
+            <a:off x="6803308" y="2059908"/>
             <a:ext cx="1388139" cy="457200"/>
           </a:xfrm>
           <a:prstGeom prst="rect">
@@ -18812,8 +18812,8 @@
         </p:blipFill>
         <p:spPr>
           <a:xfrm>
-            <a:off x="8158348" y="2189988"/>
-            <a:ext cx="987552" cy="277368"/>
+            <a:off x="8054287" y="2173557"/>
+            <a:ext cx="869251" cy="244141"/>
           </a:xfrm>
           <a:prstGeom prst="rect">
             <a:avLst/>
@@ -18828,7 +18828,7 @@
         </p:nvSpPr>
         <p:spPr>
           <a:xfrm>
-            <a:off x="9145900" y="2100072"/>
+            <a:off x="8923539" y="2059908"/>
             <a:ext cx="286146" cy="457200"/>
           </a:xfrm>
           <a:prstGeom prst="rect">
@@ -18871,8 +18871,8 @@
         </p:blipFill>
         <p:spPr>
           <a:xfrm>
-            <a:off x="2682067" y="2938272"/>
-            <a:ext cx="5516880" cy="670560"/>
+            <a:off x="3012506" y="2857944"/>
+            <a:ext cx="4856003" cy="590232"/>
           </a:xfrm>
           <a:prstGeom prst="rect">
             <a:avLst/>
@@ -18887,7 +18887,7 @@
         </p:nvSpPr>
         <p:spPr>
           <a:xfrm>
-            <a:off x="8198947" y="3044952"/>
+            <a:off x="7868509" y="2924460"/>
             <a:ext cx="1417664" cy="457200"/>
           </a:xfrm>
           <a:prstGeom prst="rect">
@@ -18922,7 +18922,7 @@
         </p:nvSpPr>
         <p:spPr>
           <a:xfrm>
-            <a:off x="1931531" y="3860292"/>
+            <a:off x="2232394" y="3699636"/>
             <a:ext cx="1173625" cy="457200"/>
           </a:xfrm>
           <a:prstGeom prst="rect">
@@ -18965,8 +18965,8 @@
         </p:blipFill>
         <p:spPr>
           <a:xfrm>
-            <a:off x="2967997" y="3953256"/>
-            <a:ext cx="1024128" cy="271272"/>
+            <a:off x="3268860" y="3813286"/>
+            <a:ext cx="901446" cy="238775"/>
           </a:xfrm>
           <a:prstGeom prst="rect">
             <a:avLst/>
@@ -18981,7 +18981,7 @@
         </p:nvSpPr>
         <p:spPr>
           <a:xfrm>
-            <a:off x="3992125" y="3860292"/>
+            <a:off x="4170306" y="3699636"/>
             <a:ext cx="658622" cy="457200"/>
           </a:xfrm>
           <a:prstGeom prst="rect">
@@ -19024,8 +19024,8 @@
         </p:blipFill>
         <p:spPr>
           <a:xfrm>
-            <a:off x="4513587" y="3883152"/>
-            <a:ext cx="2410968" cy="411480"/>
+            <a:off x="4691768" y="3754262"/>
+            <a:ext cx="2122154" cy="362188"/>
           </a:xfrm>
           <a:prstGeom prst="rect">
             <a:avLst/>
@@ -19040,7 +19040,7 @@
         </p:nvSpPr>
         <p:spPr>
           <a:xfrm>
-            <a:off x="6924555" y="3860292"/>
+            <a:off x="6813923" y="3699636"/>
             <a:ext cx="1854584" cy="457200"/>
           </a:xfrm>
           <a:prstGeom prst="rect">
@@ -19083,8 +19083,8 @@
         </p:blipFill>
         <p:spPr>
           <a:xfrm>
-            <a:off x="8641980" y="3919728"/>
-            <a:ext cx="1588008" cy="338328"/>
+            <a:off x="8531347" y="3754262"/>
+            <a:ext cx="1397777" cy="297799"/>
           </a:xfrm>
           <a:prstGeom prst="rect">
             <a:avLst/>
@@ -19099,7 +19099,7 @@
         </p:nvSpPr>
         <p:spPr>
           <a:xfrm>
-            <a:off x="987552" y="4632960"/>
+            <a:off x="987552" y="4472305"/>
             <a:ext cx="10131551" cy="950976"/>
           </a:xfrm>
           <a:prstGeom prst="rect">
@@ -19475,7 +19475,7 @@
         </p:blipFill>
         <p:spPr>
           <a:xfrm>
-            <a:off x="4956048" y="2708148"/>
+            <a:off x="4956048" y="2728341"/>
             <a:ext cx="2249424" cy="353568"/>
           </a:xfrm>
           <a:prstGeom prst="rect">
@@ -19534,7 +19534,7 @@
         </p:blipFill>
         <p:spPr>
           <a:xfrm>
-            <a:off x="4949952" y="4079747"/>
+            <a:off x="4949952" y="4099940"/>
             <a:ext cx="2261616" cy="353568"/>
           </a:xfrm>
           <a:prstGeom prst="rect">
@@ -19891,8 +19891,8 @@
         </p:blipFill>
         <p:spPr>
           <a:xfrm>
-            <a:off x="3238372" y="1993392"/>
-            <a:ext cx="4690872" cy="478536"/>
+            <a:off x="3519336" y="2194560"/>
+            <a:ext cx="4128944" cy="421211"/>
           </a:xfrm>
           <a:prstGeom prst="rect">
             <a:avLst/>
@@ -19907,7 +19907,7 @@
         </p:nvSpPr>
         <p:spPr>
           <a:xfrm>
-            <a:off x="7929244" y="2004060"/>
+            <a:off x="7648280" y="2176565"/>
             <a:ext cx="1131062" cy="457200"/>
           </a:xfrm>
           <a:prstGeom prst="rect">
@@ -19942,7 +19942,7 @@
         </p:nvSpPr>
         <p:spPr>
           <a:xfrm>
-            <a:off x="2286879" y="2723388"/>
+            <a:off x="2390392" y="2976959"/>
             <a:ext cx="5002802" cy="457200"/>
           </a:xfrm>
           <a:prstGeom prst="rect">
@@ -19985,8 +19985,8 @@
         </p:blipFill>
         <p:spPr>
           <a:xfrm>
-            <a:off x="7152521" y="2775204"/>
-            <a:ext cx="1728216" cy="353568"/>
+            <a:off x="7256034" y="3082559"/>
+            <a:ext cx="1521190" cy="311213"/>
           </a:xfrm>
           <a:prstGeom prst="rect">
             <a:avLst/>
@@ -20001,7 +20001,7 @@
         </p:nvSpPr>
         <p:spPr>
           <a:xfrm>
-            <a:off x="8880737" y="2723388"/>
+            <a:off x="8777224" y="2976959"/>
             <a:ext cx="1131062" cy="457200"/>
           </a:xfrm>
           <a:prstGeom prst="rect">
@@ -20036,7 +20036,7 @@
         </p:nvSpPr>
         <p:spPr>
           <a:xfrm>
-            <a:off x="987552" y="3496056"/>
+            <a:off x="987552" y="3950795"/>
             <a:ext cx="10131551" cy="475488"/>
           </a:xfrm>
           <a:prstGeom prst="rect">
@@ -20299,8 +20299,8 @@
         </p:nvSpPr>
         <p:spPr>
           <a:xfrm>
-            <a:off x="3726593" y="1842515"/>
-            <a:ext cx="3086415" cy="457200"/>
+            <a:off x="3990377" y="1779936"/>
+            <a:ext cx="2865157" cy="457200"/>
           </a:xfrm>
           <a:prstGeom prst="rect">
             <a:avLst/>
@@ -20315,7 +20315,7 @@
           <a:p>
             <a:pPr algn="l"/>
             <a:r>
-              <a:rPr sz="2470" b="0" i="0">
+              <a:rPr sz="2280" b="0" i="0">
                 <a:solidFill>
                   <a:srgbClr val="1A1A1A"/>
                 </a:solidFill>
@@ -20342,8 +20342,8 @@
         </p:blipFill>
         <p:spPr>
           <a:xfrm>
-            <a:off x="6675849" y="1737360"/>
-            <a:ext cx="1597152" cy="667512"/>
+            <a:off x="6718375" y="1737360"/>
+            <a:ext cx="1297686" cy="542353"/>
           </a:xfrm>
           <a:prstGeom prst="rect">
             <a:avLst/>
@@ -20358,8 +20358,8 @@
         </p:nvSpPr>
         <p:spPr>
           <a:xfrm>
-            <a:off x="8273001" y="1842515"/>
-            <a:ext cx="299084" cy="457200"/>
+            <a:off x="8016061" y="1779936"/>
+            <a:ext cx="292240" cy="457200"/>
           </a:xfrm>
           <a:prstGeom prst="rect">
             <a:avLst/>
@@ -20374,7 +20374,7 @@
           <a:p>
             <a:pPr algn="l"/>
             <a:r>
-              <a:rPr sz="2470" b="0" i="0">
+              <a:rPr sz="2280" b="0" i="0">
                 <a:solidFill>
                   <a:srgbClr val="1A1A1A"/>
                 </a:solidFill>
@@ -20393,8 +20393,8 @@
         </p:nvSpPr>
         <p:spPr>
           <a:xfrm>
-            <a:off x="1238310" y="2702052"/>
-            <a:ext cx="1694274" cy="457200"/>
+            <a:off x="1630828" y="2531173"/>
+            <a:ext cx="1580173" cy="457200"/>
           </a:xfrm>
           <a:prstGeom prst="rect">
             <a:avLst/>
@@ -20409,7 +20409,7 @@
           <a:p>
             <a:pPr algn="l"/>
             <a:r>
-              <a:rPr sz="2470" b="0" i="0">
+              <a:rPr sz="2280" b="0" i="0">
                 <a:solidFill>
                   <a:srgbClr val="1A1A1A"/>
                 </a:solidFill>
@@ -20436,8 +20436,8 @@
         </p:blipFill>
         <p:spPr>
           <a:xfrm>
-            <a:off x="2795424" y="2827020"/>
-            <a:ext cx="307848" cy="207264"/>
+            <a:off x="3073841" y="2705671"/>
+            <a:ext cx="250126" cy="168401"/>
           </a:xfrm>
           <a:prstGeom prst="rect">
             <a:avLst/>
@@ -20452,8 +20452,8 @@
         </p:nvSpPr>
         <p:spPr>
           <a:xfrm>
-            <a:off x="3103272" y="2702052"/>
-            <a:ext cx="4139201" cy="457200"/>
+            <a:off x="3323967" y="2531173"/>
+            <a:ext cx="3836964" cy="457200"/>
           </a:xfrm>
           <a:prstGeom prst="rect">
             <a:avLst/>
@@ -20468,7 +20468,7 @@
           <a:p>
             <a:pPr algn="l"/>
             <a:r>
-              <a:rPr sz="2470" b="0" i="0">
+              <a:rPr sz="2280" b="0" i="0">
                 <a:solidFill>
                   <a:srgbClr val="1A1A1A"/>
                 </a:solidFill>
@@ -20495,8 +20495,8 @@
         </p:blipFill>
         <p:spPr>
           <a:xfrm>
-            <a:off x="7105314" y="2828544"/>
-            <a:ext cx="207264" cy="204216"/>
+            <a:off x="7023771" y="2708148"/>
+            <a:ext cx="168401" cy="165925"/>
           </a:xfrm>
           <a:prstGeom prst="rect">
             <a:avLst/>
@@ -20511,8 +20511,8 @@
         </p:nvSpPr>
         <p:spPr>
           <a:xfrm>
-            <a:off x="7312578" y="2702052"/>
-            <a:ext cx="3747791" cy="457200"/>
+            <a:off x="7192173" y="2531173"/>
+            <a:ext cx="3475677" cy="457200"/>
           </a:xfrm>
           <a:prstGeom prst="rect">
             <a:avLst/>
@@ -20527,7 +20527,7 @@
           <a:p>
             <a:pPr algn="l"/>
             <a:r>
-              <a:rPr sz="2470" b="0" i="0">
+              <a:rPr sz="2280" b="0" i="0">
                 <a:solidFill>
                   <a:srgbClr val="1A1A1A"/>
                 </a:solidFill>
@@ -20546,8 +20546,8 @@
         </p:nvSpPr>
         <p:spPr>
           <a:xfrm>
-            <a:off x="1719904" y="3433572"/>
-            <a:ext cx="1004672" cy="457200"/>
+            <a:off x="2062803" y="3216973"/>
+            <a:ext cx="943575" cy="457200"/>
           </a:xfrm>
           <a:prstGeom prst="rect">
             <a:avLst/>
@@ -20562,7 +20562,7 @@
           <a:p>
             <a:pPr algn="l"/>
             <a:r>
-              <a:rPr sz="2470" b="0" i="0">
+              <a:rPr sz="2280" b="0" i="0">
                 <a:solidFill>
                   <a:srgbClr val="1A1A1A"/>
                 </a:solidFill>
@@ -20589,8 +20589,8 @@
         </p:blipFill>
         <p:spPr>
           <a:xfrm>
-            <a:off x="2587417" y="3526536"/>
-            <a:ext cx="234696" cy="271272"/>
+            <a:off x="2869219" y="3339465"/>
+            <a:ext cx="190690" cy="220408"/>
           </a:xfrm>
           <a:prstGeom prst="rect">
             <a:avLst/>
@@ -20605,8 +20605,8 @@
         </p:nvSpPr>
         <p:spPr>
           <a:xfrm>
-            <a:off x="2822113" y="3433572"/>
-            <a:ext cx="7756662" cy="457200"/>
+            <a:off x="3059909" y="3216973"/>
+            <a:ext cx="7175966" cy="457200"/>
           </a:xfrm>
           <a:prstGeom prst="rect">
             <a:avLst/>
@@ -20621,7 +20621,7 @@
           <a:p>
             <a:pPr algn="l"/>
             <a:r>
-              <a:rPr sz="2470" b="0" i="0">
+              <a:rPr sz="2280" b="0" i="0">
                 <a:solidFill>
                   <a:srgbClr val="1A1A1A"/>
                 </a:solidFill>
@@ -20640,7 +20640,7 @@
         </p:nvSpPr>
         <p:spPr>
           <a:xfrm>
-            <a:off x="777240" y="4370832"/>
+            <a:off x="777240" y="4108513"/>
             <a:ext cx="10607040" cy="429370"/>
           </a:xfrm>
           <a:prstGeom prst="rect">
